--- a/IntelliSource_Presentation.pptx
+++ b/IntelliSource_Presentation.pptx
@@ -3157,7 +3157,7 @@
             <a:avLst/>
           </a:prstGeom>
           <a:solidFill>
-            <a:srgbClr val="FF7200"/>
+            <a:srgbClr val="0091DA"/>
           </a:solidFill>
           <a:ln>
             <a:noFill/>
@@ -3193,8 +3193,8 @@
         </p:nvSpPr>
         <p:spPr>
           <a:xfrm>
-            <a:off x="8595360" y="0"/>
-            <a:ext cx="3593592" cy="6858000"/>
+            <a:off x="8686800" y="0"/>
+            <a:ext cx="3502152" cy="6858000"/>
           </a:xfrm>
           <a:prstGeom prst="rect">
             <a:avLst/>
@@ -3244,8 +3244,8 @@
         </p:blipFill>
         <p:spPr>
           <a:xfrm>
-            <a:off x="8686800" y="91440"/>
-            <a:ext cx="3410712" cy="6675120"/>
+            <a:off x="8778240" y="91440"/>
+            <a:ext cx="3319272" cy="6675120"/>
           </a:xfrm>
           <a:prstGeom prst="rect">
             <a:avLst/>
@@ -3260,7 +3260,7 @@
         </p:nvSpPr>
         <p:spPr>
           <a:xfrm>
-            <a:off x="274320" y="457200"/>
+            <a:off x="274320" y="548640"/>
             <a:ext cx="4572000" cy="777240"/>
           </a:xfrm>
           <a:prstGeom prst="rect">
@@ -3295,7 +3295,7 @@
         </p:nvSpPr>
         <p:spPr>
           <a:xfrm>
-            <a:off x="274320" y="1234440"/>
+            <a:off x="274320" y="1298448"/>
             <a:ext cx="5486400" cy="320040"/>
           </a:xfrm>
           <a:prstGeom prst="rect">
@@ -3330,14 +3330,14 @@
         </p:nvSpPr>
         <p:spPr>
           <a:xfrm>
-            <a:off x="274320" y="1719072"/>
+            <a:off x="274320" y="1783080"/>
             <a:ext cx="5120640" cy="36576"/>
           </a:xfrm>
           <a:prstGeom prst="rect">
             <a:avLst/>
           </a:prstGeom>
           <a:solidFill>
-            <a:srgbClr val="FF7200"/>
+            <a:srgbClr val="8F7326"/>
           </a:solidFill>
           <a:ln>
             <a:noFill/>
@@ -3373,8 +3373,8 @@
         </p:nvSpPr>
         <p:spPr>
           <a:xfrm>
-            <a:off x="274320" y="1874519"/>
-            <a:ext cx="8229600" cy="1097280"/>
+            <a:off x="274320" y="1920240"/>
+            <a:ext cx="8229600" cy="1051560"/>
           </a:xfrm>
           <a:prstGeom prst="rect">
             <a:avLst/>
@@ -3424,13 +3424,13 @@
           <a:p>
             <a:pPr algn="l"/>
             <a:r>
-              <a:rPr sz="1900" b="0" i="0">
+              <a:rPr sz="2000" b="0" i="0">
                 <a:solidFill>
                   <a:srgbClr val="0091DA"/>
                 </a:solidFill>
                 <a:latin typeface="Calibri"/>
               </a:rPr>
-              <a:t>SAP Procurement Intelligence Platform</a:t>
+              <a:t>Procurement Intelligence Platform</a:t>
             </a:r>
           </a:p>
         </p:txBody>
@@ -3508,7 +3508,7 @@
                 </a:solidFill>
                 <a:latin typeface="Calibri"/>
               </a:rPr>
-              <a:t>₹3,936 Cr  ·  Total Spend Visibility</a:t>
+              <a:t>   Five role-specific dashboards</a:t>
             </a:r>
           </a:p>
         </p:txBody>
@@ -3543,7 +3543,7 @@
                 </a:solidFill>
                 <a:latin typeface="Calibri"/>
               </a:rPr>
-              <a:t>187         ·  SOD Conflicts Detected</a:t>
+              <a:t>   Live data from your procurement system</a:t>
             </a:r>
           </a:p>
         </p:txBody>
@@ -3556,7 +3556,7 @@
         </p:nvSpPr>
         <p:spPr>
           <a:xfrm>
-            <a:off x="274320" y="4590287"/>
+            <a:off x="274320" y="4590288"/>
             <a:ext cx="8046720" cy="347472"/>
           </a:xfrm>
           <a:prstGeom prst="rect">
@@ -3578,7 +3578,7 @@
                 </a:solidFill>
                 <a:latin typeface="Calibri"/>
               </a:rPr>
-              <a:t>5            ·  Role-Specific Dashboards</a:t>
+              <a:t>   Detects risks invisible to standard reporting</a:t>
             </a:r>
           </a:p>
         </p:txBody>
@@ -3591,7 +3591,7 @@
         </p:nvSpPr>
         <p:spPr>
           <a:xfrm>
-            <a:off x="274320" y="5010911"/>
+            <a:off x="274320" y="5010912"/>
             <a:ext cx="8046720" cy="347472"/>
           </a:xfrm>
           <a:prstGeom prst="rect">
@@ -3613,7 +3613,7 @@
                 </a:solidFill>
                 <a:latin typeface="Calibri"/>
               </a:rPr>
-              <a:t>44.5 days ·  End-to-End P2P Cycle</a:t>
+              <a:t>   End-to-end procure-to-pay visibility</a:t>
             </a:r>
           </a:p>
         </p:txBody>
@@ -3626,8 +3626,8 @@
         </p:nvSpPr>
         <p:spPr>
           <a:xfrm>
-            <a:off x="0" y="6355080"/>
-            <a:ext cx="12188952" cy="502920"/>
+            <a:off x="0" y="6400800"/>
+            <a:ext cx="12188952" cy="457200"/>
           </a:xfrm>
           <a:prstGeom prst="rect">
             <a:avLst/>
@@ -3669,7 +3669,7 @@
         </p:nvSpPr>
         <p:spPr>
           <a:xfrm>
-            <a:off x="274320" y="6419088"/>
+            <a:off x="274320" y="6455664"/>
             <a:ext cx="8229600" cy="347472"/>
           </a:xfrm>
           <a:prstGeom prst="rect">
@@ -3691,42 +3691,7 @@
                 </a:solidFill>
                 <a:latin typeface="Calibri"/>
               </a:rPr>
-              <a:t>Application Demo  |  Q2 FY2024  |  All Companies</a:t>
-            </a:r>
-          </a:p>
-        </p:txBody>
-      </p:sp>
-      <p:sp>
-        <p:nvSpPr>
-          <p:cNvPr id="18" name="TextBox 17"/>
-          <p:cNvSpPr txBox="1"/>
-          <p:nvPr/>
-        </p:nvSpPr>
-        <p:spPr>
-          <a:xfrm>
-            <a:off x="10058400" y="6419088"/>
-            <a:ext cx="2011680" cy="347472"/>
-          </a:xfrm>
-          <a:prstGeom prst="rect">
-            <a:avLst/>
-          </a:prstGeom>
-          <a:noFill/>
-        </p:spPr>
-        <p:txBody>
-          <a:bodyPr wrap="square">
-            <a:spAutoFit/>
-          </a:bodyPr>
-          <a:lstStyle/>
-          <a:p>
-            <a:pPr algn="r"/>
-            <a:r>
-              <a:rPr sz="1000" b="1" i="0">
-                <a:solidFill>
-                  <a:srgbClr val="8F7326"/>
-                </a:solidFill>
-                <a:latin typeface="Calibri"/>
-              </a:rPr>
-              <a:t>CONFIDENTIAL</a:t>
+              <a:t>Application Demo  |  Q2 FY2024</a:t>
             </a:r>
           </a:p>
         </p:txBody>
@@ -3749,9 +3714,130 @@
         <p:nvPr/>
       </p:nvGrpSpPr>
       <p:grpSpPr/>
+      <p:sp>
+        <p:nvSpPr>
+          <p:cNvPr id="2" name="Rectangle 1"/>
+          <p:cNvSpPr/>
+          <p:nvPr/>
+        </p:nvSpPr>
+        <p:spPr>
+          <a:xfrm>
+            <a:off x="0" y="0"/>
+            <a:ext cx="12188952" cy="438912"/>
+          </a:xfrm>
+          <a:prstGeom prst="rect">
+            <a:avLst/>
+          </a:prstGeom>
+          <a:solidFill>
+            <a:srgbClr val="00338D"/>
+          </a:solidFill>
+          <a:ln>
+            <a:noFill/>
+          </a:ln>
+        </p:spPr>
+        <p:style>
+          <a:lnRef idx="1">
+            <a:schemeClr val="accent1"/>
+          </a:lnRef>
+          <a:fillRef idx="3">
+            <a:schemeClr val="accent1"/>
+          </a:fillRef>
+          <a:effectRef idx="2">
+            <a:schemeClr val="accent1"/>
+          </a:effectRef>
+          <a:fontRef idx="minor">
+            <a:schemeClr val="lt1"/>
+          </a:fontRef>
+        </p:style>
+        <p:txBody>
+          <a:bodyPr rtlCol="0" anchor="ctr"/>
+          <a:lstStyle/>
+          <a:p>
+            <a:pPr algn="ctr"/>
+          </a:p>
+        </p:txBody>
+      </p:sp>
+      <p:sp>
+        <p:nvSpPr>
+          <p:cNvPr id="3" name="Rectangle 2"/>
+          <p:cNvSpPr/>
+          <p:nvPr/>
+        </p:nvSpPr>
+        <p:spPr>
+          <a:xfrm>
+            <a:off x="0" y="0"/>
+            <a:ext cx="64008" cy="438912"/>
+          </a:xfrm>
+          <a:prstGeom prst="rect">
+            <a:avLst/>
+          </a:prstGeom>
+          <a:solidFill>
+            <a:srgbClr val="0091DA"/>
+          </a:solidFill>
+          <a:ln>
+            <a:noFill/>
+          </a:ln>
+        </p:spPr>
+        <p:style>
+          <a:lnRef idx="1">
+            <a:schemeClr val="accent1"/>
+          </a:lnRef>
+          <a:fillRef idx="3">
+            <a:schemeClr val="accent1"/>
+          </a:fillRef>
+          <a:effectRef idx="2">
+            <a:schemeClr val="accent1"/>
+          </a:effectRef>
+          <a:fontRef idx="minor">
+            <a:schemeClr val="lt1"/>
+          </a:fontRef>
+        </p:style>
+        <p:txBody>
+          <a:bodyPr rtlCol="0" anchor="ctr"/>
+          <a:lstStyle/>
+          <a:p>
+            <a:pPr algn="ctr"/>
+          </a:p>
+        </p:txBody>
+      </p:sp>
+      <p:sp>
+        <p:nvSpPr>
+          <p:cNvPr id="4" name="TextBox 3"/>
+          <p:cNvSpPr txBox="1"/>
+          <p:nvPr/>
+        </p:nvSpPr>
+        <p:spPr>
+          <a:xfrm>
+            <a:off x="137160" y="64008"/>
+            <a:ext cx="2926080" cy="384048"/>
+          </a:xfrm>
+          <a:prstGeom prst="rect">
+            <a:avLst/>
+          </a:prstGeom>
+          <a:noFill/>
+        </p:spPr>
+        <p:txBody>
+          <a:bodyPr wrap="square">
+            <a:spAutoFit/>
+          </a:bodyPr>
+          <a:lstStyle/>
+          <a:p>
+            <a:pPr algn="l"/>
+            <a:r>
+              <a:rPr sz="1100" b="1" i="0">
+                <a:solidFill>
+                  <a:srgbClr val="0091DA"/>
+                </a:solidFill>
+                <a:latin typeface="Calibri"/>
+              </a:rPr>
+              <a:t>KPMG  IntelliSource</a:t>
+            </a:r>
+          </a:p>
+        </p:txBody>
+      </p:sp>
       <p:pic>
         <p:nvPicPr>
-          <p:cNvPr id="2" name="Picture 1" descr="Screenshot 2026-07-08 at 2.26.10 PM.png"/>
+          <p:cNvPr id="5" name="Picture 4" descr="Screenshot 2026-07-08 at 2.26.10 PM.png"/>
           <p:cNvPicPr>
             <a:picLocks noChangeAspect="1"/>
           </p:cNvPicPr>
@@ -3765,8 +3851,8 @@
         </p:blipFill>
         <p:spPr>
           <a:xfrm>
-            <a:off x="0" y="0"/>
-            <a:ext cx="12188952" cy="6858000"/>
+            <a:off x="0" y="438912"/>
+            <a:ext cx="9144000" cy="6419088"/>
           </a:xfrm>
           <a:prstGeom prst="rect">
             <a:avLst/>
@@ -3775,20 +3861,20 @@
       </p:pic>
       <p:sp>
         <p:nvSpPr>
-          <p:cNvPr id="3" name="Rectangle 2"/>
+          <p:cNvPr id="6" name="Rectangle 5"/>
           <p:cNvSpPr/>
           <p:nvPr/>
         </p:nvSpPr>
         <p:spPr>
           <a:xfrm>
-            <a:off x="0" y="0"/>
-            <a:ext cx="12188952" cy="457200"/>
-          </a:xfrm>
-          <a:prstGeom prst="rect">
-            <a:avLst/>
-          </a:prstGeom>
-          <a:solidFill>
-            <a:srgbClr val="00338D"/>
+            <a:off x="9144000" y="438912"/>
+            <a:ext cx="3044952" cy="6419088"/>
+          </a:xfrm>
+          <a:prstGeom prst="rect">
+            <a:avLst/>
+          </a:prstGeom>
+          <a:solidFill>
+            <a:srgbClr val="051835"/>
           </a:solidFill>
           <a:ln>
             <a:noFill/>
@@ -3818,20 +3904,20 @@
       </p:sp>
       <p:sp>
         <p:nvSpPr>
-          <p:cNvPr id="4" name="Rectangle 3"/>
+          <p:cNvPr id="7" name="Rectangle 6"/>
           <p:cNvSpPr/>
           <p:nvPr/>
         </p:nvSpPr>
         <p:spPr>
           <a:xfrm>
-            <a:off x="0" y="0"/>
-            <a:ext cx="64008" cy="457200"/>
-          </a:xfrm>
-          <a:prstGeom prst="rect">
-            <a:avLst/>
-          </a:prstGeom>
-          <a:solidFill>
-            <a:srgbClr val="FF7200"/>
+            <a:off x="9144000" y="438912"/>
+            <a:ext cx="45720" cy="6419088"/>
+          </a:xfrm>
+          <a:prstGeom prst="rect">
+            <a:avLst/>
+          </a:prstGeom>
+          <a:solidFill>
+            <a:srgbClr val="0091DA"/>
           </a:solidFill>
           <a:ln>
             <a:noFill/>
@@ -3861,14 +3947,14 @@
       </p:sp>
       <p:sp>
         <p:nvSpPr>
-          <p:cNvPr id="5" name="TextBox 4"/>
+          <p:cNvPr id="8" name="TextBox 7"/>
           <p:cNvSpPr txBox="1"/>
           <p:nvPr/>
         </p:nvSpPr>
         <p:spPr>
           <a:xfrm>
-            <a:off x="137160" y="54864"/>
-            <a:ext cx="2560320" cy="347472"/>
+            <a:off x="9326880" y="640080"/>
+            <a:ext cx="2816352" cy="594360"/>
           </a:xfrm>
           <a:prstGeom prst="rect">
             <a:avLst/>
@@ -3883,103 +3969,34 @@
           <a:p>
             <a:pPr algn="l"/>
             <a:r>
-              <a:rPr sz="1100" b="1" i="0">
-                <a:solidFill>
-                  <a:srgbClr val="0091DA"/>
-                </a:solidFill>
-                <a:latin typeface="Calibri"/>
-              </a:rPr>
-              <a:t>KPMG  IntelliSource</a:t>
-            </a:r>
-          </a:p>
-        </p:txBody>
-      </p:sp>
-      <p:sp>
-        <p:nvSpPr>
-          <p:cNvPr id="6" name="TextBox 5"/>
-          <p:cNvSpPr txBox="1"/>
-          <p:nvPr/>
-        </p:nvSpPr>
-        <p:spPr>
-          <a:xfrm>
-            <a:off x="2834640" y="54864"/>
-            <a:ext cx="6858000" cy="347472"/>
-          </a:xfrm>
-          <a:prstGeom prst="rect">
-            <a:avLst/>
-          </a:prstGeom>
-          <a:noFill/>
-        </p:spPr>
-        <p:txBody>
-          <a:bodyPr wrap="square">
-            <a:spAutoFit/>
-          </a:bodyPr>
-          <a:lstStyle/>
-          <a:p>
-            <a:pPr algn="ctr"/>
-            <a:r>
-              <a:rPr sz="1400" b="1" i="0">
+              <a:rPr sz="1500" b="1" i="0">
                 <a:solidFill>
                   <a:srgbClr val="FFFFFF"/>
                 </a:solidFill>
                 <a:latin typeface="Calibri"/>
               </a:rPr>
-              <a:t>P2P Lifecycle Tracker</a:t>
-            </a:r>
-          </a:p>
-        </p:txBody>
-      </p:sp>
-      <p:sp>
-        <p:nvSpPr>
-          <p:cNvPr id="7" name="TextBox 6"/>
-          <p:cNvSpPr txBox="1"/>
-          <p:nvPr/>
-        </p:nvSpPr>
-        <p:spPr>
-          <a:xfrm>
-            <a:off x="9875520" y="54864"/>
-            <a:ext cx="2194560" cy="347472"/>
-          </a:xfrm>
-          <a:prstGeom prst="rect">
-            <a:avLst/>
-          </a:prstGeom>
-          <a:noFill/>
-        </p:spPr>
-        <p:txBody>
-          <a:bodyPr wrap="square">
-            <a:spAutoFit/>
-          </a:bodyPr>
-          <a:lstStyle/>
-          <a:p>
-            <a:pPr algn="r"/>
-            <a:r>
-              <a:rPr sz="900" b="0" i="0">
-                <a:solidFill>
-                  <a:srgbClr val="88AADD"/>
-                </a:solidFill>
-                <a:latin typeface="Calibri"/>
-              </a:rPr>
-              <a:t>End-to-End Procure-to-Pay</a:t>
-            </a:r>
-          </a:p>
-        </p:txBody>
-      </p:sp>
-      <p:sp>
-        <p:nvSpPr>
-          <p:cNvPr id="8" name="Rectangle 7"/>
+              <a:t>P2P Lifecycle
+Tracker</a:t>
+            </a:r>
+          </a:p>
+        </p:txBody>
+      </p:sp>
+      <p:sp>
+        <p:nvSpPr>
+          <p:cNvPr id="9" name="Rectangle 8"/>
           <p:cNvSpPr/>
           <p:nvPr/>
         </p:nvSpPr>
         <p:spPr>
           <a:xfrm>
-            <a:off x="0" y="6565392"/>
-            <a:ext cx="12188952" cy="292608"/>
-          </a:xfrm>
-          <a:prstGeom prst="rect">
-            <a:avLst/>
-          </a:prstGeom>
-          <a:solidFill>
-            <a:srgbClr val="00338D"/>
+            <a:off x="9345168" y="1472184"/>
+            <a:ext cx="54864" cy="54864"/>
+          </a:xfrm>
+          <a:prstGeom prst="rect">
+            <a:avLst/>
+          </a:prstGeom>
+          <a:solidFill>
+            <a:srgbClr val="0091DA"/>
           </a:solidFill>
           <a:ln>
             <a:noFill/>
@@ -4009,14 +4026,14 @@
       </p:sp>
       <p:sp>
         <p:nvSpPr>
-          <p:cNvPr id="9" name="TextBox 8"/>
+          <p:cNvPr id="10" name="TextBox 9"/>
           <p:cNvSpPr txBox="1"/>
           <p:nvPr/>
         </p:nvSpPr>
         <p:spPr>
           <a:xfrm>
-            <a:off x="182880" y="6592824"/>
-            <a:ext cx="11823192" cy="219456"/>
+            <a:off x="9491472" y="1399032"/>
+            <a:ext cx="2587752" cy="685800"/>
           </a:xfrm>
           <a:prstGeom prst="rect">
             <a:avLst/>
@@ -4029,38 +4046,38 @@
           </a:bodyPr>
           <a:lstStyle/>
           <a:p>
-            <a:pPr algn="r"/>
-            <a:r>
-              <a:rPr sz="750" b="0" i="0">
+            <a:pPr algn="l"/>
+            <a:r>
+              <a:rPr sz="1000" b="0" i="0">
                 <a:solidFill>
-                  <a:srgbClr val="88AADD"/>
+                  <a:srgbClr val="BBD4FF"/>
                 </a:solidFill>
                 <a:latin typeface="Calibri"/>
               </a:rPr>
-              <a:t>CONFIDENTIAL  |  KPMG India  |  Q2 FY2024</a:t>
-            </a:r>
-          </a:p>
-        </p:txBody>
-      </p:sp>
-      <p:sp>
-        <p:nvSpPr>
-          <p:cNvPr id="10" name="Rectangle 9"/>
+              <a:t>Visualises every stage from purchase request to final payment</a:t>
+            </a:r>
+          </a:p>
+        </p:txBody>
+      </p:sp>
+      <p:sp>
+        <p:nvSpPr>
+          <p:cNvPr id="11" name="Rectangle 10"/>
           <p:cNvSpPr/>
           <p:nvPr/>
         </p:nvSpPr>
         <p:spPr>
           <a:xfrm>
-            <a:off x="749808" y="1005840"/>
-            <a:ext cx="11411712" cy="722376"/>
-          </a:xfrm>
-          <a:prstGeom prst="rect">
-            <a:avLst/>
-          </a:prstGeom>
-          <a:noFill/>
-          <a:ln w="31750">
-            <a:solidFill>
-              <a:srgbClr val="FF7200"/>
-            </a:solidFill>
+            <a:off x="9345168" y="2276856"/>
+            <a:ext cx="54864" cy="54864"/>
+          </a:xfrm>
+          <a:prstGeom prst="rect">
+            <a:avLst/>
+          </a:prstGeom>
+          <a:solidFill>
+            <a:srgbClr val="0091DA"/>
+          </a:solidFill>
+          <a:ln>
+            <a:noFill/>
           </a:ln>
         </p:spPr>
         <p:style>
@@ -4087,20 +4104,55 @@
       </p:sp>
       <p:sp>
         <p:nvSpPr>
-          <p:cNvPr id="11" name="Rectangle 10"/>
+          <p:cNvPr id="12" name="TextBox 11"/>
+          <p:cNvSpPr txBox="1"/>
+          <p:nvPr/>
+        </p:nvSpPr>
+        <p:spPr>
+          <a:xfrm>
+            <a:off x="9491472" y="2203704"/>
+            <a:ext cx="2587752" cy="685800"/>
+          </a:xfrm>
+          <a:prstGeom prst="rect">
+            <a:avLst/>
+          </a:prstGeom>
+          <a:noFill/>
+        </p:spPr>
+        <p:txBody>
+          <a:bodyPr wrap="square">
+            <a:spAutoFit/>
+          </a:bodyPr>
+          <a:lstStyle/>
+          <a:p>
+            <a:pPr algn="l"/>
+            <a:r>
+              <a:rPr sz="1000" b="0" i="0">
+                <a:solidFill>
+                  <a:srgbClr val="BBD4FF"/>
+                </a:solidFill>
+                <a:latin typeface="Calibri"/>
+              </a:rPr>
+              <a:t>Colour-coded health: on target, slow, or bottlenecked</a:t>
+            </a:r>
+          </a:p>
+        </p:txBody>
+      </p:sp>
+      <p:sp>
+        <p:nvSpPr>
+          <p:cNvPr id="13" name="Rectangle 12"/>
           <p:cNvSpPr/>
           <p:nvPr/>
         </p:nvSpPr>
         <p:spPr>
           <a:xfrm>
-            <a:off x="749808" y="722376"/>
-            <a:ext cx="6131051" cy="246888"/>
-          </a:xfrm>
-          <a:prstGeom prst="rect">
-            <a:avLst/>
-          </a:prstGeom>
-          <a:solidFill>
-            <a:srgbClr val="FF7200"/>
+            <a:off x="9345168" y="3081528"/>
+            <a:ext cx="54864" cy="54864"/>
+          </a:xfrm>
+          <a:prstGeom prst="rect">
+            <a:avLst/>
+          </a:prstGeom>
+          <a:solidFill>
+            <a:srgbClr val="0091DA"/>
           </a:solidFill>
           <a:ln>
             <a:noFill/>
@@ -4130,14 +4182,14 @@
       </p:sp>
       <p:sp>
         <p:nvSpPr>
-          <p:cNvPr id="12" name="TextBox 11"/>
+          <p:cNvPr id="14" name="TextBox 13"/>
           <p:cNvSpPr txBox="1"/>
           <p:nvPr/>
         </p:nvSpPr>
         <p:spPr>
           <a:xfrm>
-            <a:off x="749808" y="740664"/>
-            <a:ext cx="6131051" cy="246888"/>
+            <a:off x="9491472" y="3008376"/>
+            <a:ext cx="2587752" cy="685800"/>
           </a:xfrm>
           <a:prstGeom prst="rect">
             <a:avLst/>
@@ -4152,36 +4204,36 @@
           <a:p>
             <a:pPr algn="l"/>
             <a:r>
-              <a:rPr sz="850" b="1" i="0">
+              <a:rPr sz="1000" b="0" i="0">
                 <a:solidFill>
-                  <a:srgbClr val="FFFFFF"/>
+                  <a:srgbClr val="BBD4FF"/>
                 </a:solidFill>
                 <a:latin typeface="Calibri"/>
               </a:rPr>
-              <a:t>  PR 132 → PO Approved 158 → GRN 117 → Invoice 106 → Payment 82</a:t>
-            </a:r>
-          </a:p>
-        </p:txBody>
-      </p:sp>
-      <p:sp>
-        <p:nvSpPr>
-          <p:cNvPr id="13" name="Rectangle 12"/>
+              <a:t>Shows how many transactions complete each stage</a:t>
+            </a:r>
+          </a:p>
+        </p:txBody>
+      </p:sp>
+      <p:sp>
+        <p:nvSpPr>
+          <p:cNvPr id="15" name="Rectangle 14"/>
           <p:cNvSpPr/>
           <p:nvPr/>
         </p:nvSpPr>
         <p:spPr>
           <a:xfrm>
-            <a:off x="7306056" y="1005840"/>
-            <a:ext cx="1627632" cy="722376"/>
-          </a:xfrm>
-          <a:prstGeom prst="rect">
-            <a:avLst/>
-          </a:prstGeom>
-          <a:noFill/>
-          <a:ln w="31750">
-            <a:solidFill>
-              <a:srgbClr val="FF7200"/>
-            </a:solidFill>
+            <a:off x="9345168" y="3886200"/>
+            <a:ext cx="54864" cy="54864"/>
+          </a:xfrm>
+          <a:prstGeom prst="rect">
+            <a:avLst/>
+          </a:prstGeom>
+          <a:solidFill>
+            <a:srgbClr val="0091DA"/>
+          </a:solidFill>
+          <a:ln>
+            <a:noFill/>
           </a:ln>
         </p:spPr>
         <p:style>
@@ -4208,20 +4260,55 @@
       </p:sp>
       <p:sp>
         <p:nvSpPr>
-          <p:cNvPr id="14" name="Rectangle 13"/>
+          <p:cNvPr id="16" name="TextBox 15"/>
+          <p:cNvSpPr txBox="1"/>
+          <p:nvPr/>
+        </p:nvSpPr>
+        <p:spPr>
+          <a:xfrm>
+            <a:off x="9491472" y="3813048"/>
+            <a:ext cx="2587752" cy="685800"/>
+          </a:xfrm>
+          <a:prstGeom prst="rect">
+            <a:avLst/>
+          </a:prstGeom>
+          <a:noFill/>
+        </p:spPr>
+        <p:txBody>
+          <a:bodyPr wrap="square">
+            <a:spAutoFit/>
+          </a:bodyPr>
+          <a:lstStyle/>
+          <a:p>
+            <a:pPr algn="l"/>
+            <a:r>
+              <a:rPr sz="1000" b="0" i="0">
+                <a:solidFill>
+                  <a:srgbClr val="BBD4FF"/>
+                </a:solidFill>
+                <a:latin typeface="Calibri"/>
+              </a:rPr>
+              <a:t>Identifies where documents are delayed in the pipeline</a:t>
+            </a:r>
+          </a:p>
+        </p:txBody>
+      </p:sp>
+      <p:sp>
+        <p:nvSpPr>
+          <p:cNvPr id="17" name="Rectangle 16"/>
           <p:cNvSpPr/>
           <p:nvPr/>
         </p:nvSpPr>
         <p:spPr>
           <a:xfrm>
-            <a:off x="7306056" y="1764792"/>
-            <a:ext cx="3058668" cy="246888"/>
-          </a:xfrm>
-          <a:prstGeom prst="rect">
-            <a:avLst/>
-          </a:prstGeom>
-          <a:solidFill>
-            <a:srgbClr val="FF7200"/>
+            <a:off x="9345168" y="4690872"/>
+            <a:ext cx="54864" cy="54864"/>
+          </a:xfrm>
+          <a:prstGeom prst="rect">
+            <a:avLst/>
+          </a:prstGeom>
+          <a:solidFill>
+            <a:srgbClr val="0091DA"/>
           </a:solidFill>
           <a:ln>
             <a:noFill/>
@@ -4251,14 +4338,14 @@
       </p:sp>
       <p:sp>
         <p:nvSpPr>
-          <p:cNvPr id="15" name="TextBox 14"/>
+          <p:cNvPr id="18" name="TextBox 17"/>
           <p:cNvSpPr txBox="1"/>
           <p:nvPr/>
         </p:nvSpPr>
         <p:spPr>
           <a:xfrm>
-            <a:off x="7306056" y="1783080"/>
-            <a:ext cx="3058668" cy="246888"/>
+            <a:off x="9491472" y="4617720"/>
+            <a:ext cx="2587752" cy="685800"/>
           </a:xfrm>
           <a:prstGeom prst="rect">
             <a:avLst/>
@@ -4273,134 +4360,13 @@
           <a:p>
             <a:pPr algn="l"/>
             <a:r>
-              <a:rPr sz="850" b="1" i="0">
+              <a:rPr sz="1000" b="0" i="0">
                 <a:solidFill>
-                  <a:srgbClr val="FFFFFF"/>
+                  <a:srgbClr val="BBD4FF"/>
                 </a:solidFill>
                 <a:latin typeface="Calibri"/>
               </a:rPr>
-              <a:t>  GRN Bottleneck  33.9d  PO→GRN</a:t>
-            </a:r>
-          </a:p>
-        </p:txBody>
-      </p:sp>
-      <p:sp>
-        <p:nvSpPr>
-          <p:cNvPr id="16" name="Rectangle 15"/>
-          <p:cNvSpPr/>
-          <p:nvPr/>
-        </p:nvSpPr>
-        <p:spPr>
-          <a:xfrm>
-            <a:off x="749808" y="1892807"/>
-            <a:ext cx="11411712" cy="402336"/>
-          </a:xfrm>
-          <a:prstGeom prst="rect">
-            <a:avLst/>
-          </a:prstGeom>
-          <a:noFill/>
-          <a:ln w="31750">
-            <a:solidFill>
-              <a:srgbClr val="FF7200"/>
-            </a:solidFill>
-          </a:ln>
-        </p:spPr>
-        <p:style>
-          <a:lnRef idx="1">
-            <a:schemeClr val="accent1"/>
-          </a:lnRef>
-          <a:fillRef idx="3">
-            <a:schemeClr val="accent1"/>
-          </a:fillRef>
-          <a:effectRef idx="2">
-            <a:schemeClr val="accent1"/>
-          </a:effectRef>
-          <a:fontRef idx="minor">
-            <a:schemeClr val="lt1"/>
-          </a:fontRef>
-        </p:style>
-        <p:txBody>
-          <a:bodyPr rtlCol="0" anchor="ctr"/>
-          <a:lstStyle/>
-          <a:p>
-            <a:pPr algn="ctr"/>
-          </a:p>
-        </p:txBody>
-      </p:sp>
-      <p:sp>
-        <p:nvSpPr>
-          <p:cNvPr id="17" name="Rectangle 16"/>
-          <p:cNvSpPr/>
-          <p:nvPr/>
-        </p:nvSpPr>
-        <p:spPr>
-          <a:xfrm>
-            <a:off x="749808" y="2331719"/>
-            <a:ext cx="5074920" cy="246888"/>
-          </a:xfrm>
-          <a:prstGeom prst="rect">
-            <a:avLst/>
-          </a:prstGeom>
-          <a:solidFill>
-            <a:srgbClr val="FF7200"/>
-          </a:solidFill>
-          <a:ln>
-            <a:noFill/>
-          </a:ln>
-        </p:spPr>
-        <p:style>
-          <a:lnRef idx="1">
-            <a:schemeClr val="accent1"/>
-          </a:lnRef>
-          <a:fillRef idx="3">
-            <a:schemeClr val="accent1"/>
-          </a:fillRef>
-          <a:effectRef idx="2">
-            <a:schemeClr val="accent1"/>
-          </a:effectRef>
-          <a:fontRef idx="minor">
-            <a:schemeClr val="lt1"/>
-          </a:fontRef>
-        </p:style>
-        <p:txBody>
-          <a:bodyPr rtlCol="0" anchor="ctr"/>
-          <a:lstStyle/>
-          <a:p>
-            <a:pPr algn="ctr"/>
-          </a:p>
-        </p:txBody>
-      </p:sp>
-      <p:sp>
-        <p:nvSpPr>
-          <p:cNvPr id="18" name="TextBox 17"/>
-          <p:cNvSpPr txBox="1"/>
-          <p:nvPr/>
-        </p:nvSpPr>
-        <p:spPr>
-          <a:xfrm>
-            <a:off x="749808" y="2350007"/>
-            <a:ext cx="5074920" cy="246888"/>
-          </a:xfrm>
-          <a:prstGeom prst="rect">
-            <a:avLst/>
-          </a:prstGeom>
-          <a:noFill/>
-        </p:spPr>
-        <p:txBody>
-          <a:bodyPr wrap="square">
-            <a:spAutoFit/>
-          </a:bodyPr>
-          <a:lstStyle/>
-          <a:p>
-            <a:pPr algn="l"/>
-            <a:r>
-              <a:rPr sz="850" b="1" i="0">
-                <a:solidFill>
-                  <a:srgbClr val="FFFFFF"/>
-                </a:solidFill>
-                <a:latin typeface="Calibri"/>
-              </a:rPr>
-              <a:t>  Summary: 163 cases · 44.5d cycle · 31 Maverick POs</a:t>
+              <a:t>Tracks maverick orders and returns at each stage</a:t>
             </a:r>
           </a:p>
         </p:txBody>
@@ -4423,9 +4389,130 @@
         <p:nvPr/>
       </p:nvGrpSpPr>
       <p:grpSpPr/>
+      <p:sp>
+        <p:nvSpPr>
+          <p:cNvPr id="2" name="Rectangle 1"/>
+          <p:cNvSpPr/>
+          <p:nvPr/>
+        </p:nvSpPr>
+        <p:spPr>
+          <a:xfrm>
+            <a:off x="0" y="0"/>
+            <a:ext cx="12188952" cy="438912"/>
+          </a:xfrm>
+          <a:prstGeom prst="rect">
+            <a:avLst/>
+          </a:prstGeom>
+          <a:solidFill>
+            <a:srgbClr val="00338D"/>
+          </a:solidFill>
+          <a:ln>
+            <a:noFill/>
+          </a:ln>
+        </p:spPr>
+        <p:style>
+          <a:lnRef idx="1">
+            <a:schemeClr val="accent1"/>
+          </a:lnRef>
+          <a:fillRef idx="3">
+            <a:schemeClr val="accent1"/>
+          </a:fillRef>
+          <a:effectRef idx="2">
+            <a:schemeClr val="accent1"/>
+          </a:effectRef>
+          <a:fontRef idx="minor">
+            <a:schemeClr val="lt1"/>
+          </a:fontRef>
+        </p:style>
+        <p:txBody>
+          <a:bodyPr rtlCol="0" anchor="ctr"/>
+          <a:lstStyle/>
+          <a:p>
+            <a:pPr algn="ctr"/>
+          </a:p>
+        </p:txBody>
+      </p:sp>
+      <p:sp>
+        <p:nvSpPr>
+          <p:cNvPr id="3" name="Rectangle 2"/>
+          <p:cNvSpPr/>
+          <p:nvPr/>
+        </p:nvSpPr>
+        <p:spPr>
+          <a:xfrm>
+            <a:off x="0" y="0"/>
+            <a:ext cx="64008" cy="438912"/>
+          </a:xfrm>
+          <a:prstGeom prst="rect">
+            <a:avLst/>
+          </a:prstGeom>
+          <a:solidFill>
+            <a:srgbClr val="0091DA"/>
+          </a:solidFill>
+          <a:ln>
+            <a:noFill/>
+          </a:ln>
+        </p:spPr>
+        <p:style>
+          <a:lnRef idx="1">
+            <a:schemeClr val="accent1"/>
+          </a:lnRef>
+          <a:fillRef idx="3">
+            <a:schemeClr val="accent1"/>
+          </a:fillRef>
+          <a:effectRef idx="2">
+            <a:schemeClr val="accent1"/>
+          </a:effectRef>
+          <a:fontRef idx="minor">
+            <a:schemeClr val="lt1"/>
+          </a:fontRef>
+        </p:style>
+        <p:txBody>
+          <a:bodyPr rtlCol="0" anchor="ctr"/>
+          <a:lstStyle/>
+          <a:p>
+            <a:pPr algn="ctr"/>
+          </a:p>
+        </p:txBody>
+      </p:sp>
+      <p:sp>
+        <p:nvSpPr>
+          <p:cNvPr id="4" name="TextBox 3"/>
+          <p:cNvSpPr txBox="1"/>
+          <p:nvPr/>
+        </p:nvSpPr>
+        <p:spPr>
+          <a:xfrm>
+            <a:off x="137160" y="64008"/>
+            <a:ext cx="2926080" cy="384048"/>
+          </a:xfrm>
+          <a:prstGeom prst="rect">
+            <a:avLst/>
+          </a:prstGeom>
+          <a:noFill/>
+        </p:spPr>
+        <p:txBody>
+          <a:bodyPr wrap="square">
+            <a:spAutoFit/>
+          </a:bodyPr>
+          <a:lstStyle/>
+          <a:p>
+            <a:pPr algn="l"/>
+            <a:r>
+              <a:rPr sz="1100" b="1" i="0">
+                <a:solidFill>
+                  <a:srgbClr val="0091DA"/>
+                </a:solidFill>
+                <a:latin typeface="Calibri"/>
+              </a:rPr>
+              <a:t>KPMG  IntelliSource</a:t>
+            </a:r>
+          </a:p>
+        </p:txBody>
+      </p:sp>
       <p:pic>
         <p:nvPicPr>
-          <p:cNvPr id="2" name="Picture 1" descr="Screenshot 2026-07-08 at 2.26.49 PM.png"/>
+          <p:cNvPr id="5" name="Picture 4" descr="Screenshot 2026-07-08 at 2.26.49 PM.png"/>
           <p:cNvPicPr>
             <a:picLocks noChangeAspect="1"/>
           </p:cNvPicPr>
@@ -4439,8 +4526,8 @@
         </p:blipFill>
         <p:spPr>
           <a:xfrm>
-            <a:off x="0" y="0"/>
-            <a:ext cx="12188952" cy="6858000"/>
+            <a:off x="0" y="438912"/>
+            <a:ext cx="9144000" cy="6419088"/>
           </a:xfrm>
           <a:prstGeom prst="rect">
             <a:avLst/>
@@ -4449,20 +4536,20 @@
       </p:pic>
       <p:sp>
         <p:nvSpPr>
-          <p:cNvPr id="3" name="Rectangle 2"/>
+          <p:cNvPr id="6" name="Rectangle 5"/>
           <p:cNvSpPr/>
           <p:nvPr/>
         </p:nvSpPr>
         <p:spPr>
           <a:xfrm>
-            <a:off x="0" y="0"/>
-            <a:ext cx="12188952" cy="457200"/>
-          </a:xfrm>
-          <a:prstGeom prst="rect">
-            <a:avLst/>
-          </a:prstGeom>
-          <a:solidFill>
-            <a:srgbClr val="00338D"/>
+            <a:off x="9144000" y="438912"/>
+            <a:ext cx="3044952" cy="6419088"/>
+          </a:xfrm>
+          <a:prstGeom prst="rect">
+            <a:avLst/>
+          </a:prstGeom>
+          <a:solidFill>
+            <a:srgbClr val="051835"/>
           </a:solidFill>
           <a:ln>
             <a:noFill/>
@@ -4492,20 +4579,20 @@
       </p:sp>
       <p:sp>
         <p:nvSpPr>
-          <p:cNvPr id="4" name="Rectangle 3"/>
+          <p:cNvPr id="7" name="Rectangle 6"/>
           <p:cNvSpPr/>
           <p:nvPr/>
         </p:nvSpPr>
         <p:spPr>
           <a:xfrm>
-            <a:off x="0" y="0"/>
-            <a:ext cx="64008" cy="457200"/>
-          </a:xfrm>
-          <a:prstGeom prst="rect">
-            <a:avLst/>
-          </a:prstGeom>
-          <a:solidFill>
-            <a:srgbClr val="FF7200"/>
+            <a:off x="9144000" y="438912"/>
+            <a:ext cx="45720" cy="6419088"/>
+          </a:xfrm>
+          <a:prstGeom prst="rect">
+            <a:avLst/>
+          </a:prstGeom>
+          <a:solidFill>
+            <a:srgbClr val="0091DA"/>
           </a:solidFill>
           <a:ln>
             <a:noFill/>
@@ -4535,14 +4622,14 @@
       </p:sp>
       <p:sp>
         <p:nvSpPr>
-          <p:cNvPr id="5" name="TextBox 4"/>
+          <p:cNvPr id="8" name="TextBox 7"/>
           <p:cNvSpPr txBox="1"/>
           <p:nvPr/>
         </p:nvSpPr>
         <p:spPr>
           <a:xfrm>
-            <a:off x="137160" y="54864"/>
-            <a:ext cx="2560320" cy="347472"/>
+            <a:off x="9326880" y="640080"/>
+            <a:ext cx="2816352" cy="594360"/>
           </a:xfrm>
           <a:prstGeom prst="rect">
             <a:avLst/>
@@ -4557,42 +4644,7 @@
           <a:p>
             <a:pPr algn="l"/>
             <a:r>
-              <a:rPr sz="1100" b="1" i="0">
-                <a:solidFill>
-                  <a:srgbClr val="0091DA"/>
-                </a:solidFill>
-                <a:latin typeface="Calibri"/>
-              </a:rPr>
-              <a:t>KPMG  IntelliSource</a:t>
-            </a:r>
-          </a:p>
-        </p:txBody>
-      </p:sp>
-      <p:sp>
-        <p:nvSpPr>
-          <p:cNvPr id="6" name="TextBox 5"/>
-          <p:cNvSpPr txBox="1"/>
-          <p:nvPr/>
-        </p:nvSpPr>
-        <p:spPr>
-          <a:xfrm>
-            <a:off x="2834640" y="54864"/>
-            <a:ext cx="6858000" cy="347472"/>
-          </a:xfrm>
-          <a:prstGeom prst="rect">
-            <a:avLst/>
-          </a:prstGeom>
-          <a:noFill/>
-        </p:spPr>
-        <p:txBody>
-          <a:bodyPr wrap="square">
-            <a:spAutoFit/>
-          </a:bodyPr>
-          <a:lstStyle/>
-          <a:p>
-            <a:pPr algn="ctr"/>
-            <a:r>
-              <a:rPr sz="1400" b="1" i="0">
+              <a:rPr sz="1500" b="1" i="0">
                 <a:solidFill>
                   <a:srgbClr val="FFFFFF"/>
                 </a:solidFill>
@@ -4605,55 +4657,20 @@
       </p:sp>
       <p:sp>
         <p:nvSpPr>
-          <p:cNvPr id="7" name="TextBox 6"/>
-          <p:cNvSpPr txBox="1"/>
-          <p:nvPr/>
-        </p:nvSpPr>
-        <p:spPr>
-          <a:xfrm>
-            <a:off x="9875520" y="54864"/>
-            <a:ext cx="2194560" cy="347472"/>
-          </a:xfrm>
-          <a:prstGeom prst="rect">
-            <a:avLst/>
-          </a:prstGeom>
-          <a:noFill/>
-        </p:spPr>
-        <p:txBody>
-          <a:bodyPr wrap="square">
-            <a:spAutoFit/>
-          </a:bodyPr>
-          <a:lstStyle/>
-          <a:p>
-            <a:pPr algn="r"/>
-            <a:r>
-              <a:rPr sz="900" b="0" i="0">
-                <a:solidFill>
-                  <a:srgbClr val="88AADD"/>
-                </a:solidFill>
-                <a:latin typeface="Calibri"/>
-              </a:rPr>
-              <a:t>SAP CSV/Excel → IntelliSource → All Dashboards Live</a:t>
-            </a:r>
-          </a:p>
-        </p:txBody>
-      </p:sp>
-      <p:sp>
-        <p:nvSpPr>
-          <p:cNvPr id="8" name="Rectangle 7"/>
+          <p:cNvPr id="9" name="Rectangle 8"/>
           <p:cNvSpPr/>
           <p:nvPr/>
         </p:nvSpPr>
         <p:spPr>
           <a:xfrm>
-            <a:off x="0" y="6565392"/>
-            <a:ext cx="12188952" cy="292608"/>
-          </a:xfrm>
-          <a:prstGeom prst="rect">
-            <a:avLst/>
-          </a:prstGeom>
-          <a:solidFill>
-            <a:srgbClr val="00338D"/>
+            <a:off x="9345168" y="1472184"/>
+            <a:ext cx="54864" cy="54864"/>
+          </a:xfrm>
+          <a:prstGeom prst="rect">
+            <a:avLst/>
+          </a:prstGeom>
+          <a:solidFill>
+            <a:srgbClr val="0091DA"/>
           </a:solidFill>
           <a:ln>
             <a:noFill/>
@@ -4683,14 +4700,14 @@
       </p:sp>
       <p:sp>
         <p:nvSpPr>
-          <p:cNvPr id="9" name="TextBox 8"/>
+          <p:cNvPr id="10" name="TextBox 9"/>
           <p:cNvSpPr txBox="1"/>
           <p:nvPr/>
         </p:nvSpPr>
         <p:spPr>
           <a:xfrm>
-            <a:off x="182880" y="6592824"/>
-            <a:ext cx="11823192" cy="219456"/>
+            <a:off x="9491472" y="1399032"/>
+            <a:ext cx="2587752" cy="685800"/>
           </a:xfrm>
           <a:prstGeom prst="rect">
             <a:avLst/>
@@ -4703,38 +4720,38 @@
           </a:bodyPr>
           <a:lstStyle/>
           <a:p>
-            <a:pPr algn="r"/>
-            <a:r>
-              <a:rPr sz="750" b="0" i="0">
+            <a:pPr algn="l"/>
+            <a:r>
+              <a:rPr sz="1000" b="0" i="0">
                 <a:solidFill>
-                  <a:srgbClr val="88AADD"/>
+                  <a:srgbClr val="BBD4FF"/>
                 </a:solidFill>
                 <a:latin typeface="Calibri"/>
               </a:rPr>
-              <a:t>CONFIDENTIAL  |  KPMG India  |  Q2 FY2024</a:t>
-            </a:r>
-          </a:p>
-        </p:txBody>
-      </p:sp>
-      <p:sp>
-        <p:nvSpPr>
-          <p:cNvPr id="10" name="Rectangle 9"/>
+              <a:t>Upload exported data files to refresh all dashboards at once</a:t>
+            </a:r>
+          </a:p>
+        </p:txBody>
+      </p:sp>
+      <p:sp>
+        <p:nvSpPr>
+          <p:cNvPr id="11" name="Rectangle 10"/>
           <p:cNvSpPr/>
           <p:nvPr/>
         </p:nvSpPr>
         <p:spPr>
           <a:xfrm>
-            <a:off x="960120" y="996696"/>
-            <a:ext cx="3364992" cy="768096"/>
-          </a:xfrm>
-          <a:prstGeom prst="rect">
-            <a:avLst/>
-          </a:prstGeom>
-          <a:noFill/>
-          <a:ln w="31750">
-            <a:solidFill>
-              <a:srgbClr val="FF7200"/>
-            </a:solidFill>
+            <a:off x="9345168" y="2276856"/>
+            <a:ext cx="54864" cy="54864"/>
+          </a:xfrm>
+          <a:prstGeom prst="rect">
+            <a:avLst/>
+          </a:prstGeom>
+          <a:solidFill>
+            <a:srgbClr val="0091DA"/>
+          </a:solidFill>
+          <a:ln>
+            <a:noFill/>
           </a:ln>
         </p:spPr>
         <p:style>
@@ -4761,20 +4778,55 @@
       </p:sp>
       <p:sp>
         <p:nvSpPr>
-          <p:cNvPr id="11" name="Rectangle 10"/>
+          <p:cNvPr id="12" name="TextBox 11"/>
+          <p:cNvSpPr txBox="1"/>
+          <p:nvPr/>
+        </p:nvSpPr>
+        <p:spPr>
+          <a:xfrm>
+            <a:off x="9491472" y="2203704"/>
+            <a:ext cx="2587752" cy="685800"/>
+          </a:xfrm>
+          <a:prstGeom prst="rect">
+            <a:avLst/>
+          </a:prstGeom>
+          <a:noFill/>
+        </p:spPr>
+        <p:txBody>
+          <a:bodyPr wrap="square">
+            <a:spAutoFit/>
+          </a:bodyPr>
+          <a:lstStyle/>
+          <a:p>
+            <a:pPr algn="l"/>
+            <a:r>
+              <a:rPr sz="1000" b="0" i="0">
+                <a:solidFill>
+                  <a:srgbClr val="BBD4FF"/>
+                </a:solidFill>
+                <a:latin typeface="Calibri"/>
+              </a:rPr>
+              <a:t>System auto-detects the dataset type from column headers</a:t>
+            </a:r>
+          </a:p>
+        </p:txBody>
+      </p:sp>
+      <p:sp>
+        <p:nvSpPr>
+          <p:cNvPr id="13" name="Rectangle 12"/>
           <p:cNvSpPr/>
           <p:nvPr/>
         </p:nvSpPr>
         <p:spPr>
           <a:xfrm>
-            <a:off x="960120" y="713232"/>
-            <a:ext cx="4978907" cy="246888"/>
-          </a:xfrm>
-          <a:prstGeom prst="rect">
-            <a:avLst/>
-          </a:prstGeom>
-          <a:solidFill>
-            <a:srgbClr val="FF7200"/>
+            <a:off x="9345168" y="3081528"/>
+            <a:ext cx="54864" cy="54864"/>
+          </a:xfrm>
+          <a:prstGeom prst="rect">
+            <a:avLst/>
+          </a:prstGeom>
+          <a:solidFill>
+            <a:srgbClr val="0091DA"/>
           </a:solidFill>
           <a:ln>
             <a:noFill/>
@@ -4804,14 +4856,14 @@
       </p:sp>
       <p:sp>
         <p:nvSpPr>
-          <p:cNvPr id="12" name="TextBox 11"/>
+          <p:cNvPr id="14" name="TextBox 13"/>
           <p:cNvSpPr txBox="1"/>
           <p:nvPr/>
         </p:nvSpPr>
         <p:spPr>
           <a:xfrm>
-            <a:off x="960120" y="731520"/>
-            <a:ext cx="4978907" cy="246888"/>
+            <a:off x="9491472" y="3008376"/>
+            <a:ext cx="2587752" cy="685800"/>
           </a:xfrm>
           <a:prstGeom prst="rect">
             <a:avLst/>
@@ -4826,36 +4878,36 @@
           <a:p>
             <a:pPr algn="l"/>
             <a:r>
-              <a:rPr sz="850" b="1" i="0">
+              <a:rPr sz="1000" b="0" i="0">
                 <a:solidFill>
-                  <a:srgbClr val="FFFFFF"/>
+                  <a:srgbClr val="BBD4FF"/>
                 </a:solidFill>
                 <a:latin typeface="Calibri"/>
               </a:rPr>
-              <a:t>  Drop CSV from SAP  ·  Auto-detected  ·  Max 50 MB</a:t>
-            </a:r>
-          </a:p>
-        </p:txBody>
-      </p:sp>
-      <p:sp>
-        <p:nvSpPr>
-          <p:cNvPr id="13" name="Rectangle 12"/>
+              <a:t>All metrics across every dashboard update within seconds</a:t>
+            </a:r>
+          </a:p>
+        </p:txBody>
+      </p:sp>
+      <p:sp>
+        <p:nvSpPr>
+          <p:cNvPr id="15" name="Rectangle 14"/>
           <p:cNvSpPr/>
           <p:nvPr/>
         </p:nvSpPr>
         <p:spPr>
           <a:xfrm>
-            <a:off x="4398264" y="777240"/>
-            <a:ext cx="7699248" cy="5623560"/>
-          </a:xfrm>
-          <a:prstGeom prst="rect">
-            <a:avLst/>
-          </a:prstGeom>
-          <a:noFill/>
-          <a:ln w="31750">
-            <a:solidFill>
-              <a:srgbClr val="FF7200"/>
-            </a:solidFill>
+            <a:off x="9345168" y="3886200"/>
+            <a:ext cx="54864" cy="54864"/>
+          </a:xfrm>
+          <a:prstGeom prst="rect">
+            <a:avLst/>
+          </a:prstGeom>
+          <a:solidFill>
+            <a:srgbClr val="0091DA"/>
+          </a:solidFill>
+          <a:ln>
+            <a:noFill/>
           </a:ln>
         </p:spPr>
         <p:style>
@@ -4882,57 +4934,14 @@
       </p:sp>
       <p:sp>
         <p:nvSpPr>
-          <p:cNvPr id="14" name="Rectangle 13"/>
-          <p:cNvSpPr/>
-          <p:nvPr/>
-        </p:nvSpPr>
-        <p:spPr>
-          <a:xfrm>
-            <a:off x="4398264" y="6437376"/>
-            <a:ext cx="6131051" cy="246888"/>
-          </a:xfrm>
-          <a:prstGeom prst="rect">
-            <a:avLst/>
-          </a:prstGeom>
-          <a:solidFill>
-            <a:srgbClr val="FF7200"/>
-          </a:solidFill>
-          <a:ln>
-            <a:noFill/>
-          </a:ln>
-        </p:spPr>
-        <p:style>
-          <a:lnRef idx="1">
-            <a:schemeClr val="accent1"/>
-          </a:lnRef>
-          <a:fillRef idx="3">
-            <a:schemeClr val="accent1"/>
-          </a:fillRef>
-          <a:effectRef idx="2">
-            <a:schemeClr val="accent1"/>
-          </a:effectRef>
-          <a:fontRef idx="minor">
-            <a:schemeClr val="lt1"/>
-          </a:fontRef>
-        </p:style>
-        <p:txBody>
-          <a:bodyPr rtlCol="0" anchor="ctr"/>
-          <a:lstStyle/>
-          <a:p>
-            <a:pPr algn="ctr"/>
-          </a:p>
-        </p:txBody>
-      </p:sp>
-      <p:sp>
-        <p:nvSpPr>
-          <p:cNvPr id="15" name="TextBox 14"/>
+          <p:cNvPr id="16" name="TextBox 15"/>
           <p:cNvSpPr txBox="1"/>
           <p:nvPr/>
         </p:nvSpPr>
         <p:spPr>
           <a:xfrm>
-            <a:off x="4398264" y="6455664"/>
-            <a:ext cx="6131051" cy="246888"/>
+            <a:off x="9491472" y="3813048"/>
+            <a:ext cx="2587752" cy="685800"/>
           </a:xfrm>
           <a:prstGeom prst="rect">
             <a:avLst/>
@@ -4947,13 +4956,13 @@
           <a:p>
             <a:pPr algn="l"/>
             <a:r>
-              <a:rPr sz="850" b="1" i="0">
+              <a:rPr sz="1000" b="0" i="0">
                 <a:solidFill>
-                  <a:srgbClr val="FFFFFF"/>
+                  <a:srgbClr val="BBD4FF"/>
                 </a:solidFill>
                 <a:latin typeface="Calibri"/>
               </a:rPr>
-              <a:t>  6 Dataset Types: PR · PO · Delivery · GRN · Invoice · Payment</a:t>
+              <a:t>Supports multiple file formats including Excel and CSV</a:t>
             </a:r>
           </a:p>
         </p:txBody>
@@ -5034,7 +5043,7 @@
             <a:avLst/>
           </a:prstGeom>
           <a:solidFill>
-            <a:srgbClr val="FF7200"/>
+            <a:srgbClr val="0091DA"/>
           </a:solidFill>
           <a:ln>
             <a:noFill/>
@@ -5137,7 +5146,7 @@
         </p:nvSpPr>
         <p:spPr>
           <a:xfrm>
-            <a:off x="274320" y="502920"/>
+            <a:off x="274320" y="548640"/>
             <a:ext cx="4572000" cy="777240"/>
           </a:xfrm>
           <a:prstGeom prst="rect">
@@ -5172,7 +5181,7 @@
         </p:nvSpPr>
         <p:spPr>
           <a:xfrm>
-            <a:off x="274320" y="1261872"/>
+            <a:off x="274320" y="1298448"/>
             <a:ext cx="5486400" cy="320040"/>
           </a:xfrm>
           <a:prstGeom prst="rect">
@@ -5207,14 +5216,14 @@
         </p:nvSpPr>
         <p:spPr>
           <a:xfrm>
-            <a:off x="274320" y="1719072"/>
+            <a:off x="274320" y="1783080"/>
             <a:ext cx="5120640" cy="36576"/>
           </a:xfrm>
           <a:prstGeom prst="rect">
             <a:avLst/>
           </a:prstGeom>
           <a:solidFill>
-            <a:srgbClr val="FF7200"/>
+            <a:srgbClr val="8F7326"/>
           </a:solidFill>
           <a:ln>
             <a:noFill/>
@@ -5250,7 +5259,7 @@
         </p:nvSpPr>
         <p:spPr>
           <a:xfrm>
-            <a:off x="274320" y="1874519"/>
+            <a:off x="274320" y="1920240"/>
             <a:ext cx="8229600" cy="1005840"/>
           </a:xfrm>
           <a:prstGeom prst="rect">
@@ -5285,7 +5294,7 @@
         </p:nvSpPr>
         <p:spPr>
           <a:xfrm>
-            <a:off x="274320" y="2880360"/>
+            <a:off x="274320" y="2926080"/>
             <a:ext cx="8229600" cy="438912"/>
           </a:xfrm>
           <a:prstGeom prst="rect">
@@ -5301,13 +5310,13 @@
           <a:p>
             <a:pPr algn="l"/>
             <a:r>
-              <a:rPr sz="1600" b="0" i="0">
+              <a:rPr sz="1500" b="0" i="0">
                 <a:solidFill>
                   <a:srgbClr val="0091DA"/>
                 </a:solidFill>
                 <a:latin typeface="Calibri"/>
               </a:rPr>
-              <a:t>IntelliSource  —  P2P Intelligence, Powered by KPMG</a:t>
+              <a:t>IntelliSource  —  Procurement Intelligence, Powered by KPMG</a:t>
             </a:r>
           </a:p>
         </p:txBody>
@@ -5320,7 +5329,7 @@
         </p:nvSpPr>
         <p:spPr>
           <a:xfrm>
-            <a:off x="274320" y="3474720"/>
+            <a:off x="274320" y="3520440"/>
             <a:ext cx="5120640" cy="36576"/>
           </a:xfrm>
           <a:prstGeom prst="rect">
@@ -5363,14 +5372,14 @@
         </p:nvSpPr>
         <p:spPr>
           <a:xfrm>
-            <a:off x="274320" y="3657600"/>
+            <a:off x="274320" y="3703320"/>
             <a:ext cx="914400" cy="365760"/>
           </a:xfrm>
           <a:prstGeom prst="rect">
             <a:avLst/>
           </a:prstGeom>
           <a:solidFill>
-            <a:srgbClr val="FF7200"/>
+            <a:srgbClr val="005EB8"/>
           </a:solidFill>
           <a:ln>
             <a:noFill/>
@@ -5406,7 +5415,7 @@
         </p:nvSpPr>
         <p:spPr>
           <a:xfrm>
-            <a:off x="274320" y="3730752"/>
+            <a:off x="274320" y="3776472"/>
             <a:ext cx="914400" cy="256032"/>
           </a:xfrm>
           <a:prstGeom prst="rect">
@@ -5441,8 +5450,8 @@
         </p:nvSpPr>
         <p:spPr>
           <a:xfrm>
-            <a:off x="1371600" y="3730752"/>
-            <a:ext cx="7040880" cy="256032"/>
+            <a:off x="1353312" y="3776472"/>
+            <a:ext cx="7132320" cy="256032"/>
           </a:xfrm>
           <a:prstGeom prst="rect">
             <a:avLst/>
@@ -5463,7 +5472,7 @@
                 </a:solidFill>
                 <a:latin typeface="Calibri"/>
               </a:rPr>
-              <a:t>Data readiness check  —  SAP export access</a:t>
+              <a:t>Data readiness check</a:t>
             </a:r>
           </a:p>
         </p:txBody>
@@ -5476,14 +5485,14 @@
         </p:nvSpPr>
         <p:spPr>
           <a:xfrm>
-            <a:off x="274320" y="4151376"/>
+            <a:off x="274320" y="4197096"/>
             <a:ext cx="914400" cy="365760"/>
           </a:xfrm>
           <a:prstGeom prst="rect">
             <a:avLst/>
           </a:prstGeom>
           <a:solidFill>
-            <a:srgbClr val="FF7200"/>
+            <a:srgbClr val="005EB8"/>
           </a:solidFill>
           <a:ln>
             <a:noFill/>
@@ -5519,7 +5528,7 @@
         </p:nvSpPr>
         <p:spPr>
           <a:xfrm>
-            <a:off x="274320" y="4224528"/>
+            <a:off x="274320" y="4270248"/>
             <a:ext cx="914400" cy="256032"/>
           </a:xfrm>
           <a:prstGeom prst="rect">
@@ -5554,8 +5563,8 @@
         </p:nvSpPr>
         <p:spPr>
           <a:xfrm>
-            <a:off x="1371600" y="4224528"/>
-            <a:ext cx="7040880" cy="256032"/>
+            <a:off x="1353312" y="4270248"/>
+            <a:ext cx="7132320" cy="256032"/>
           </a:xfrm>
           <a:prstGeom prst="rect">
             <a:avLst/>
@@ -5576,7 +5585,7 @@
                 </a:solidFill>
                 <a:latin typeface="Calibri"/>
               </a:rPr>
-              <a:t>Pilot upload  —  single company code</a:t>
+              <a:t>Pilot upload — single business unit</a:t>
             </a:r>
           </a:p>
         </p:txBody>
@@ -5589,14 +5598,14 @@
         </p:nvSpPr>
         <p:spPr>
           <a:xfrm>
-            <a:off x="274320" y="4645152"/>
+            <a:off x="274320" y="4690872"/>
             <a:ext cx="914400" cy="365760"/>
           </a:xfrm>
           <a:prstGeom prst="rect">
             <a:avLst/>
           </a:prstGeom>
           <a:solidFill>
-            <a:srgbClr val="FF7200"/>
+            <a:srgbClr val="005EB8"/>
           </a:solidFill>
           <a:ln>
             <a:noFill/>
@@ -5632,7 +5641,7 @@
         </p:nvSpPr>
         <p:spPr>
           <a:xfrm>
-            <a:off x="274320" y="4718304"/>
+            <a:off x="274320" y="4764024"/>
             <a:ext cx="914400" cy="256032"/>
           </a:xfrm>
           <a:prstGeom prst="rect">
@@ -5667,8 +5676,8 @@
         </p:nvSpPr>
         <p:spPr>
           <a:xfrm>
-            <a:off x="1371600" y="4718304"/>
-            <a:ext cx="7040880" cy="256032"/>
+            <a:off x="1353312" y="4764024"/>
+            <a:ext cx="7132320" cy="256032"/>
           </a:xfrm>
           <a:prstGeom prst="rect">
             <a:avLst/>
@@ -5689,7 +5698,7 @@
                 </a:solidFill>
                 <a:latin typeface="Calibri"/>
               </a:rPr>
-              <a:t>Stakeholder walkthrough  —  live demo</a:t>
+              <a:t>Stakeholder walkthrough</a:t>
             </a:r>
           </a:p>
         </p:txBody>
@@ -5702,14 +5711,14 @@
         </p:nvSpPr>
         <p:spPr>
           <a:xfrm>
-            <a:off x="274320" y="5138928"/>
+            <a:off x="274320" y="5184648"/>
             <a:ext cx="914400" cy="365760"/>
           </a:xfrm>
           <a:prstGeom prst="rect">
             <a:avLst/>
           </a:prstGeom>
           <a:solidFill>
-            <a:srgbClr val="FF7200"/>
+            <a:srgbClr val="005EB8"/>
           </a:solidFill>
           <a:ln>
             <a:noFill/>
@@ -5745,7 +5754,7 @@
         </p:nvSpPr>
         <p:spPr>
           <a:xfrm>
-            <a:off x="274320" y="5212080"/>
+            <a:off x="274320" y="5257800"/>
             <a:ext cx="914400" cy="256032"/>
           </a:xfrm>
           <a:prstGeom prst="rect">
@@ -5780,8 +5789,8 @@
         </p:nvSpPr>
         <p:spPr>
           <a:xfrm>
-            <a:off x="1371600" y="5212080"/>
-            <a:ext cx="7040880" cy="256032"/>
+            <a:off x="1353312" y="5257800"/>
+            <a:ext cx="7132320" cy="256032"/>
           </a:xfrm>
           <a:prstGeom prst="rect">
             <a:avLst/>
@@ -5802,7 +5811,7 @@
                 </a:solidFill>
                 <a:latin typeface="Calibri"/>
               </a:rPr>
-              <a:t>Go / No-Go  —  full deployment</a:t>
+              <a:t>Go / No-Go — full rollout</a:t>
             </a:r>
           </a:p>
         </p:txBody>
@@ -5815,7 +5824,7 @@
         </p:nvSpPr>
         <p:spPr>
           <a:xfrm>
-            <a:off x="274320" y="5669280"/>
+            <a:off x="274320" y="5760720"/>
             <a:ext cx="5486400" cy="320040"/>
           </a:xfrm>
           <a:prstGeom prst="rect">
@@ -5850,8 +5859,8 @@
         </p:nvSpPr>
         <p:spPr>
           <a:xfrm>
-            <a:off x="0" y="6355080"/>
-            <a:ext cx="12188952" cy="502920"/>
+            <a:off x="0" y="6400800"/>
+            <a:ext cx="12188952" cy="457200"/>
           </a:xfrm>
           <a:prstGeom prst="rect">
             <a:avLst/>
@@ -5893,7 +5902,7 @@
         </p:nvSpPr>
         <p:spPr>
           <a:xfrm>
-            <a:off x="274320" y="6419088"/>
+            <a:off x="274320" y="6464808"/>
             <a:ext cx="11430000" cy="347472"/>
           </a:xfrm>
           <a:prstGeom prst="rect">
@@ -5915,7 +5924,7 @@
                 </a:solidFill>
                 <a:latin typeface="Calibri"/>
               </a:rPr>
-              <a:t>KPMG India  |  Procurement Advisory  |  CONFIDENTIAL</a:t>
+              <a:t>KPMG India  |  Procurement Advisory</a:t>
             </a:r>
           </a:p>
         </p:txBody>
@@ -5938,9 +5947,130 @@
         <p:nvPr/>
       </p:nvGrpSpPr>
       <p:grpSpPr/>
+      <p:sp>
+        <p:nvSpPr>
+          <p:cNvPr id="2" name="Rectangle 1"/>
+          <p:cNvSpPr/>
+          <p:nvPr/>
+        </p:nvSpPr>
+        <p:spPr>
+          <a:xfrm>
+            <a:off x="0" y="0"/>
+            <a:ext cx="12188952" cy="438912"/>
+          </a:xfrm>
+          <a:prstGeom prst="rect">
+            <a:avLst/>
+          </a:prstGeom>
+          <a:solidFill>
+            <a:srgbClr val="00338D"/>
+          </a:solidFill>
+          <a:ln>
+            <a:noFill/>
+          </a:ln>
+        </p:spPr>
+        <p:style>
+          <a:lnRef idx="1">
+            <a:schemeClr val="accent1"/>
+          </a:lnRef>
+          <a:fillRef idx="3">
+            <a:schemeClr val="accent1"/>
+          </a:fillRef>
+          <a:effectRef idx="2">
+            <a:schemeClr val="accent1"/>
+          </a:effectRef>
+          <a:fontRef idx="minor">
+            <a:schemeClr val="lt1"/>
+          </a:fontRef>
+        </p:style>
+        <p:txBody>
+          <a:bodyPr rtlCol="0" anchor="ctr"/>
+          <a:lstStyle/>
+          <a:p>
+            <a:pPr algn="ctr"/>
+          </a:p>
+        </p:txBody>
+      </p:sp>
+      <p:sp>
+        <p:nvSpPr>
+          <p:cNvPr id="3" name="Rectangle 2"/>
+          <p:cNvSpPr/>
+          <p:nvPr/>
+        </p:nvSpPr>
+        <p:spPr>
+          <a:xfrm>
+            <a:off x="0" y="0"/>
+            <a:ext cx="64008" cy="438912"/>
+          </a:xfrm>
+          <a:prstGeom prst="rect">
+            <a:avLst/>
+          </a:prstGeom>
+          <a:solidFill>
+            <a:srgbClr val="0091DA"/>
+          </a:solidFill>
+          <a:ln>
+            <a:noFill/>
+          </a:ln>
+        </p:spPr>
+        <p:style>
+          <a:lnRef idx="1">
+            <a:schemeClr val="accent1"/>
+          </a:lnRef>
+          <a:fillRef idx="3">
+            <a:schemeClr val="accent1"/>
+          </a:fillRef>
+          <a:effectRef idx="2">
+            <a:schemeClr val="accent1"/>
+          </a:effectRef>
+          <a:fontRef idx="minor">
+            <a:schemeClr val="lt1"/>
+          </a:fontRef>
+        </p:style>
+        <p:txBody>
+          <a:bodyPr rtlCol="0" anchor="ctr"/>
+          <a:lstStyle/>
+          <a:p>
+            <a:pPr algn="ctr"/>
+          </a:p>
+        </p:txBody>
+      </p:sp>
+      <p:sp>
+        <p:nvSpPr>
+          <p:cNvPr id="4" name="TextBox 3"/>
+          <p:cNvSpPr txBox="1"/>
+          <p:nvPr/>
+        </p:nvSpPr>
+        <p:spPr>
+          <a:xfrm>
+            <a:off x="137160" y="64008"/>
+            <a:ext cx="2926080" cy="384048"/>
+          </a:xfrm>
+          <a:prstGeom prst="rect">
+            <a:avLst/>
+          </a:prstGeom>
+          <a:noFill/>
+        </p:spPr>
+        <p:txBody>
+          <a:bodyPr wrap="square">
+            <a:spAutoFit/>
+          </a:bodyPr>
+          <a:lstStyle/>
+          <a:p>
+            <a:pPr algn="l"/>
+            <a:r>
+              <a:rPr sz="1100" b="1" i="0">
+                <a:solidFill>
+                  <a:srgbClr val="0091DA"/>
+                </a:solidFill>
+                <a:latin typeface="Calibri"/>
+              </a:rPr>
+              <a:t>KPMG  IntelliSource</a:t>
+            </a:r>
+          </a:p>
+        </p:txBody>
+      </p:sp>
       <p:pic>
         <p:nvPicPr>
-          <p:cNvPr id="2" name="Picture 1" descr="Screenshot 2026-07-08 at 2.20.51 PM.png"/>
+          <p:cNvPr id="5" name="Picture 4" descr="Screenshot 2026-07-08 at 2.20.51 PM.png"/>
           <p:cNvPicPr>
             <a:picLocks noChangeAspect="1"/>
           </p:cNvPicPr>
@@ -5954,8 +6084,8 @@
         </p:blipFill>
         <p:spPr>
           <a:xfrm>
-            <a:off x="0" y="0"/>
-            <a:ext cx="12188952" cy="6858000"/>
+            <a:off x="0" y="438912"/>
+            <a:ext cx="9144000" cy="6419088"/>
           </a:xfrm>
           <a:prstGeom prst="rect">
             <a:avLst/>
@@ -5964,20 +6094,20 @@
       </p:pic>
       <p:sp>
         <p:nvSpPr>
-          <p:cNvPr id="3" name="Rectangle 2"/>
+          <p:cNvPr id="6" name="Rectangle 5"/>
           <p:cNvSpPr/>
           <p:nvPr/>
         </p:nvSpPr>
         <p:spPr>
           <a:xfrm>
-            <a:off x="0" y="0"/>
-            <a:ext cx="12188952" cy="457200"/>
-          </a:xfrm>
-          <a:prstGeom prst="rect">
-            <a:avLst/>
-          </a:prstGeom>
-          <a:solidFill>
-            <a:srgbClr val="00338D"/>
+            <a:off x="9144000" y="438912"/>
+            <a:ext cx="3044952" cy="6419088"/>
+          </a:xfrm>
+          <a:prstGeom prst="rect">
+            <a:avLst/>
+          </a:prstGeom>
+          <a:solidFill>
+            <a:srgbClr val="051835"/>
           </a:solidFill>
           <a:ln>
             <a:noFill/>
@@ -6007,20 +6137,20 @@
       </p:sp>
       <p:sp>
         <p:nvSpPr>
-          <p:cNvPr id="4" name="Rectangle 3"/>
+          <p:cNvPr id="7" name="Rectangle 6"/>
           <p:cNvSpPr/>
           <p:nvPr/>
         </p:nvSpPr>
         <p:spPr>
           <a:xfrm>
-            <a:off x="0" y="0"/>
-            <a:ext cx="64008" cy="457200"/>
-          </a:xfrm>
-          <a:prstGeom prst="rect">
-            <a:avLst/>
-          </a:prstGeom>
-          <a:solidFill>
-            <a:srgbClr val="FF7200"/>
+            <a:off x="9144000" y="438912"/>
+            <a:ext cx="45720" cy="6419088"/>
+          </a:xfrm>
+          <a:prstGeom prst="rect">
+            <a:avLst/>
+          </a:prstGeom>
+          <a:solidFill>
+            <a:srgbClr val="0091DA"/>
           </a:solidFill>
           <a:ln>
             <a:noFill/>
@@ -6050,14 +6180,14 @@
       </p:sp>
       <p:sp>
         <p:nvSpPr>
-          <p:cNvPr id="5" name="TextBox 4"/>
+          <p:cNvPr id="8" name="TextBox 7"/>
           <p:cNvSpPr txBox="1"/>
           <p:nvPr/>
         </p:nvSpPr>
         <p:spPr>
           <a:xfrm>
-            <a:off x="137160" y="54864"/>
-            <a:ext cx="2560320" cy="347472"/>
+            <a:off x="9326880" y="640080"/>
+            <a:ext cx="2816352" cy="594360"/>
           </a:xfrm>
           <a:prstGeom prst="rect">
             <a:avLst/>
@@ -6072,103 +6202,34 @@
           <a:p>
             <a:pPr algn="l"/>
             <a:r>
-              <a:rPr sz="1100" b="1" i="0">
-                <a:solidFill>
-                  <a:srgbClr val="0091DA"/>
-                </a:solidFill>
-                <a:latin typeface="Calibri"/>
-              </a:rPr>
-              <a:t>KPMG  IntelliSource</a:t>
-            </a:r>
-          </a:p>
-        </p:txBody>
-      </p:sp>
-      <p:sp>
-        <p:nvSpPr>
-          <p:cNvPr id="6" name="TextBox 5"/>
-          <p:cNvSpPr txBox="1"/>
-          <p:nvPr/>
-        </p:nvSpPr>
-        <p:spPr>
-          <a:xfrm>
-            <a:off x="2834640" y="54864"/>
-            <a:ext cx="6858000" cy="347472"/>
-          </a:xfrm>
-          <a:prstGeom prst="rect">
-            <a:avLst/>
-          </a:prstGeom>
-          <a:noFill/>
-        </p:spPr>
-        <p:txBody>
-          <a:bodyPr wrap="square">
-            <a:spAutoFit/>
-          </a:bodyPr>
-          <a:lstStyle/>
-          <a:p>
-            <a:pPr algn="ctr"/>
-            <a:r>
-              <a:rPr sz="1400" b="1" i="0">
+              <a:rPr sz="1500" b="1" i="0">
                 <a:solidFill>
                   <a:srgbClr val="FFFFFF"/>
                 </a:solidFill>
                 <a:latin typeface="Calibri"/>
               </a:rPr>
-              <a:t>Procurement Dashboard</a:t>
-            </a:r>
-          </a:p>
-        </p:txBody>
-      </p:sp>
-      <p:sp>
-        <p:nvSpPr>
-          <p:cNvPr id="7" name="TextBox 6"/>
-          <p:cNvSpPr txBox="1"/>
-          <p:nvPr/>
-        </p:nvSpPr>
-        <p:spPr>
-          <a:xfrm>
-            <a:off x="9875520" y="54864"/>
-            <a:ext cx="2194560" cy="347472"/>
-          </a:xfrm>
-          <a:prstGeom prst="rect">
-            <a:avLst/>
-          </a:prstGeom>
-          <a:noFill/>
-        </p:spPr>
-        <p:txBody>
-          <a:bodyPr wrap="square">
-            <a:spAutoFit/>
-          </a:bodyPr>
-          <a:lstStyle/>
-          <a:p>
-            <a:pPr algn="r"/>
-            <a:r>
-              <a:rPr sz="900" b="0" i="0">
-                <a:solidFill>
-                  <a:srgbClr val="88AADD"/>
-                </a:solidFill>
-                <a:latin typeface="Calibri"/>
-              </a:rPr>
-              <a:t>Slide 1 of 2</a:t>
-            </a:r>
-          </a:p>
-        </p:txBody>
-      </p:sp>
-      <p:sp>
-        <p:nvSpPr>
-          <p:cNvPr id="8" name="Rectangle 7"/>
+              <a:t>Procurement
+Dashboard</a:t>
+            </a:r>
+          </a:p>
+        </p:txBody>
+      </p:sp>
+      <p:sp>
+        <p:nvSpPr>
+          <p:cNvPr id="9" name="Rectangle 8"/>
           <p:cNvSpPr/>
           <p:nvPr/>
         </p:nvSpPr>
         <p:spPr>
           <a:xfrm>
-            <a:off x="0" y="6565392"/>
-            <a:ext cx="12188952" cy="292608"/>
-          </a:xfrm>
-          <a:prstGeom prst="rect">
-            <a:avLst/>
-          </a:prstGeom>
-          <a:solidFill>
-            <a:srgbClr val="00338D"/>
+            <a:off x="9345168" y="1472184"/>
+            <a:ext cx="54864" cy="54864"/>
+          </a:xfrm>
+          <a:prstGeom prst="rect">
+            <a:avLst/>
+          </a:prstGeom>
+          <a:solidFill>
+            <a:srgbClr val="0091DA"/>
           </a:solidFill>
           <a:ln>
             <a:noFill/>
@@ -6198,14 +6259,14 @@
       </p:sp>
       <p:sp>
         <p:nvSpPr>
-          <p:cNvPr id="9" name="TextBox 8"/>
+          <p:cNvPr id="10" name="TextBox 9"/>
           <p:cNvSpPr txBox="1"/>
           <p:nvPr/>
         </p:nvSpPr>
         <p:spPr>
           <a:xfrm>
-            <a:off x="182880" y="6592824"/>
-            <a:ext cx="11823192" cy="219456"/>
+            <a:off x="9491472" y="1399032"/>
+            <a:ext cx="2587752" cy="685800"/>
           </a:xfrm>
           <a:prstGeom prst="rect">
             <a:avLst/>
@@ -6218,38 +6279,38 @@
           </a:bodyPr>
           <a:lstStyle/>
           <a:p>
-            <a:pPr algn="r"/>
-            <a:r>
-              <a:rPr sz="750" b="0" i="0">
+            <a:pPr algn="l"/>
+            <a:r>
+              <a:rPr sz="1000" b="0" i="0">
                 <a:solidFill>
-                  <a:srgbClr val="88AADD"/>
+                  <a:srgbClr val="BBD4FF"/>
                 </a:solidFill>
                 <a:latin typeface="Calibri"/>
               </a:rPr>
-              <a:t>CONFIDENTIAL  |  KPMG India  |  Q2 FY2024</a:t>
-            </a:r>
-          </a:p>
-        </p:txBody>
-      </p:sp>
-      <p:sp>
-        <p:nvSpPr>
-          <p:cNvPr id="10" name="Rectangle 9"/>
+              <a:t>Tracks every purchase order from creation through delivery</a:t>
+            </a:r>
+          </a:p>
+        </p:txBody>
+      </p:sp>
+      <p:sp>
+        <p:nvSpPr>
+          <p:cNvPr id="11" name="Rectangle 10"/>
           <p:cNvSpPr/>
           <p:nvPr/>
         </p:nvSpPr>
         <p:spPr>
           <a:xfrm>
-            <a:off x="749808" y="649224"/>
-            <a:ext cx="11411712" cy="630936"/>
-          </a:xfrm>
-          <a:prstGeom prst="rect">
-            <a:avLst/>
-          </a:prstGeom>
-          <a:noFill/>
-          <a:ln w="31750">
-            <a:solidFill>
-              <a:srgbClr val="FF7200"/>
-            </a:solidFill>
+            <a:off x="9345168" y="2276856"/>
+            <a:ext cx="54864" cy="54864"/>
+          </a:xfrm>
+          <a:prstGeom prst="rect">
+            <a:avLst/>
+          </a:prstGeom>
+          <a:solidFill>
+            <a:srgbClr val="0091DA"/>
+          </a:solidFill>
+          <a:ln>
+            <a:noFill/>
           </a:ln>
         </p:spPr>
         <p:style>
@@ -6276,20 +6337,55 @@
       </p:sp>
       <p:sp>
         <p:nvSpPr>
-          <p:cNvPr id="11" name="Rectangle 10"/>
+          <p:cNvPr id="12" name="TextBox 11"/>
+          <p:cNvSpPr txBox="1"/>
+          <p:nvPr/>
+        </p:nvSpPr>
+        <p:spPr>
+          <a:xfrm>
+            <a:off x="9491472" y="2203704"/>
+            <a:ext cx="2587752" cy="685800"/>
+          </a:xfrm>
+          <a:prstGeom prst="rect">
+            <a:avLst/>
+          </a:prstGeom>
+          <a:noFill/>
+        </p:spPr>
+        <p:txBody>
+          <a:bodyPr wrap="square">
+            <a:spAutoFit/>
+          </a:bodyPr>
+          <a:lstStyle/>
+          <a:p>
+            <a:pPr algn="l"/>
+            <a:r>
+              <a:rPr sz="1000" b="0" i="0">
+                <a:solidFill>
+                  <a:srgbClr val="BBD4FF"/>
+                </a:solidFill>
+                <a:latin typeface="Calibri"/>
+              </a:rPr>
+              <a:t>Flags orders raised without an approved requisition</a:t>
+            </a:r>
+          </a:p>
+        </p:txBody>
+      </p:sp>
+      <p:sp>
+        <p:nvSpPr>
+          <p:cNvPr id="13" name="Rectangle 12"/>
           <p:cNvSpPr/>
           <p:nvPr/>
         </p:nvSpPr>
         <p:spPr>
           <a:xfrm>
-            <a:off x="749808" y="1316736"/>
-            <a:ext cx="1426464" cy="246888"/>
-          </a:xfrm>
-          <a:prstGeom prst="rect">
-            <a:avLst/>
-          </a:prstGeom>
-          <a:solidFill>
-            <a:srgbClr val="FF7200"/>
+            <a:off x="9345168" y="3081528"/>
+            <a:ext cx="54864" cy="54864"/>
+          </a:xfrm>
+          <a:prstGeom prst="rect">
+            <a:avLst/>
+          </a:prstGeom>
+          <a:solidFill>
+            <a:srgbClr val="0091DA"/>
           </a:solidFill>
           <a:ln>
             <a:noFill/>
@@ -6319,14 +6415,14 @@
       </p:sp>
       <p:sp>
         <p:nvSpPr>
-          <p:cNvPr id="12" name="TextBox 11"/>
+          <p:cNvPr id="14" name="TextBox 13"/>
           <p:cNvSpPr txBox="1"/>
           <p:nvPr/>
         </p:nvSpPr>
         <p:spPr>
           <a:xfrm>
-            <a:off x="749808" y="1335024"/>
-            <a:ext cx="1426464" cy="246888"/>
+            <a:off x="9491472" y="3008376"/>
+            <a:ext cx="2587752" cy="685800"/>
           </a:xfrm>
           <a:prstGeom prst="rect">
             <a:avLst/>
@@ -6341,36 +6437,36 @@
           <a:p>
             <a:pPr algn="l"/>
             <a:r>
-              <a:rPr sz="850" b="1" i="0">
+              <a:rPr sz="1000" b="0" i="0">
                 <a:solidFill>
-                  <a:srgbClr val="FFFFFF"/>
+                  <a:srgbClr val="BBD4FF"/>
                 </a:solidFill>
                 <a:latin typeface="Calibri"/>
               </a:rPr>
-              <a:t>  KPI Overview</a:t>
-            </a:r>
-          </a:p>
-        </p:txBody>
-      </p:sp>
-      <p:sp>
-        <p:nvSpPr>
-          <p:cNvPr id="13" name="Rectangle 12"/>
+              <a:t>Highlights high-value orders needing additional approval</a:t>
+            </a:r>
+          </a:p>
+        </p:txBody>
+      </p:sp>
+      <p:sp>
+        <p:nvSpPr>
+          <p:cNvPr id="15" name="Rectangle 14"/>
           <p:cNvSpPr/>
           <p:nvPr/>
         </p:nvSpPr>
         <p:spPr>
           <a:xfrm>
-            <a:off x="6382512" y="649224"/>
-            <a:ext cx="2843784" cy="630936"/>
-          </a:xfrm>
-          <a:prstGeom prst="rect">
-            <a:avLst/>
-          </a:prstGeom>
-          <a:noFill/>
-          <a:ln w="31750">
-            <a:solidFill>
-              <a:srgbClr val="FF7200"/>
-            </a:solidFill>
+            <a:off x="9345168" y="3886200"/>
+            <a:ext cx="54864" cy="54864"/>
+          </a:xfrm>
+          <a:prstGeom prst="rect">
+            <a:avLst/>
+          </a:prstGeom>
+          <a:solidFill>
+            <a:srgbClr val="0091DA"/>
+          </a:solidFill>
+          <a:ln>
+            <a:noFill/>
           </a:ln>
         </p:spPr>
         <p:style>
@@ -6397,20 +6493,55 @@
       </p:sp>
       <p:sp>
         <p:nvSpPr>
-          <p:cNvPr id="14" name="Rectangle 13"/>
+          <p:cNvPr id="16" name="TextBox 15"/>
+          <p:cNvSpPr txBox="1"/>
+          <p:nvPr/>
+        </p:nvSpPr>
+        <p:spPr>
+          <a:xfrm>
+            <a:off x="9491472" y="3813048"/>
+            <a:ext cx="2587752" cy="685800"/>
+          </a:xfrm>
+          <a:prstGeom prst="rect">
+            <a:avLst/>
+          </a:prstGeom>
+          <a:noFill/>
+        </p:spPr>
+        <p:txBody>
+          <a:bodyPr wrap="square">
+            <a:spAutoFit/>
+          </a:bodyPr>
+          <a:lstStyle/>
+          <a:p>
+            <a:pPr algn="l"/>
+            <a:r>
+              <a:rPr sz="1000" b="0" i="0">
+                <a:solidFill>
+                  <a:srgbClr val="BBD4FF"/>
+                </a:solidFill>
+                <a:latin typeface="Calibri"/>
+              </a:rPr>
+              <a:t>Monitors average time from request to order placement</a:t>
+            </a:r>
+          </a:p>
+        </p:txBody>
+      </p:sp>
+      <p:sp>
+        <p:nvSpPr>
+          <p:cNvPr id="17" name="Rectangle 16"/>
           <p:cNvSpPr/>
           <p:nvPr/>
         </p:nvSpPr>
         <p:spPr>
           <a:xfrm>
-            <a:off x="6382512" y="1316736"/>
-            <a:ext cx="2674620" cy="246888"/>
-          </a:xfrm>
-          <a:prstGeom prst="rect">
-            <a:avLst/>
-          </a:prstGeom>
-          <a:solidFill>
-            <a:srgbClr val="FF7200"/>
+            <a:off x="9345168" y="4690872"/>
+            <a:ext cx="54864" cy="54864"/>
+          </a:xfrm>
+          <a:prstGeom prst="rect">
+            <a:avLst/>
+          </a:prstGeom>
+          <a:solidFill>
+            <a:srgbClr val="0091DA"/>
           </a:solidFill>
           <a:ln>
             <a:noFill/>
@@ -6440,14 +6571,14 @@
       </p:sp>
       <p:sp>
         <p:nvSpPr>
-          <p:cNvPr id="15" name="TextBox 14"/>
+          <p:cNvPr id="18" name="TextBox 17"/>
           <p:cNvSpPr txBox="1"/>
           <p:nvPr/>
         </p:nvSpPr>
         <p:spPr>
           <a:xfrm>
-            <a:off x="6382512" y="1335024"/>
-            <a:ext cx="2674620" cy="246888"/>
+            <a:off x="9491472" y="4617720"/>
+            <a:ext cx="2587752" cy="685800"/>
           </a:xfrm>
           <a:prstGeom prst="rect">
             <a:avLst/>
@@ -6462,134 +6593,13 @@
           <a:p>
             <a:pPr algn="l"/>
             <a:r>
-              <a:rPr sz="850" b="1" i="0">
+              <a:rPr sz="1000" b="0" i="0">
                 <a:solidFill>
-                  <a:srgbClr val="FFFFFF"/>
+                  <a:srgbClr val="BBD4FF"/>
                 </a:solidFill>
                 <a:latin typeface="Calibri"/>
               </a:rPr>
-              <a:t>  85 High-Value POs  &gt;₹1 Cr</a:t>
-            </a:r>
-          </a:p>
-        </p:txBody>
-      </p:sp>
-      <p:sp>
-        <p:nvSpPr>
-          <p:cNvPr id="16" name="Rectangle 15"/>
-          <p:cNvSpPr/>
-          <p:nvPr/>
-        </p:nvSpPr>
-        <p:spPr>
-          <a:xfrm>
-            <a:off x="749808" y="1344168"/>
-            <a:ext cx="5715000" cy="530352"/>
-          </a:xfrm>
-          <a:prstGeom prst="rect">
-            <a:avLst/>
-          </a:prstGeom>
-          <a:noFill/>
-          <a:ln w="31750">
-            <a:solidFill>
-              <a:srgbClr val="FF7200"/>
-            </a:solidFill>
-          </a:ln>
-        </p:spPr>
-        <p:style>
-          <a:lnRef idx="1">
-            <a:schemeClr val="accent1"/>
-          </a:lnRef>
-          <a:fillRef idx="3">
-            <a:schemeClr val="accent1"/>
-          </a:fillRef>
-          <a:effectRef idx="2">
-            <a:schemeClr val="accent1"/>
-          </a:effectRef>
-          <a:fontRef idx="minor">
-            <a:schemeClr val="lt1"/>
-          </a:fontRef>
-        </p:style>
-        <p:txBody>
-          <a:bodyPr rtlCol="0" anchor="ctr"/>
-          <a:lstStyle/>
-          <a:p>
-            <a:pPr algn="ctr"/>
-          </a:p>
-        </p:txBody>
-      </p:sp>
-      <p:sp>
-        <p:nvSpPr>
-          <p:cNvPr id="17" name="Rectangle 16"/>
-          <p:cNvSpPr/>
-          <p:nvPr/>
-        </p:nvSpPr>
-        <p:spPr>
-          <a:xfrm>
-            <a:off x="749808" y="1911096"/>
-            <a:ext cx="3346703" cy="246888"/>
-          </a:xfrm>
-          <a:prstGeom prst="rect">
-            <a:avLst/>
-          </a:prstGeom>
-          <a:solidFill>
-            <a:srgbClr val="FF7200"/>
-          </a:solidFill>
-          <a:ln>
-            <a:noFill/>
-          </a:ln>
-        </p:spPr>
-        <p:style>
-          <a:lnRef idx="1">
-            <a:schemeClr val="accent1"/>
-          </a:lnRef>
-          <a:fillRef idx="3">
-            <a:schemeClr val="accent1"/>
-          </a:fillRef>
-          <a:effectRef idx="2">
-            <a:schemeClr val="accent1"/>
-          </a:effectRef>
-          <a:fontRef idx="minor">
-            <a:schemeClr val="lt1"/>
-          </a:fontRef>
-        </p:style>
-        <p:txBody>
-          <a:bodyPr rtlCol="0" anchor="ctr"/>
-          <a:lstStyle/>
-          <a:p>
-            <a:pPr algn="ctr"/>
-          </a:p>
-        </p:txBody>
-      </p:sp>
-      <p:sp>
-        <p:nvSpPr>
-          <p:cNvPr id="18" name="TextBox 17"/>
-          <p:cNvSpPr txBox="1"/>
-          <p:nvPr/>
-        </p:nvSpPr>
-        <p:spPr>
-          <a:xfrm>
-            <a:off x="749808" y="1929384"/>
-            <a:ext cx="3346703" cy="246888"/>
-          </a:xfrm>
-          <a:prstGeom prst="rect">
-            <a:avLst/>
-          </a:prstGeom>
-          <a:noFill/>
-        </p:spPr>
-        <p:txBody>
-          <a:bodyPr wrap="square">
-            <a:spAutoFit/>
-          </a:bodyPr>
-          <a:lstStyle/>
-          <a:p>
-            <a:pPr algn="l"/>
-            <a:r>
-              <a:rPr sz="850" b="1" i="0">
-                <a:solidFill>
-                  <a:srgbClr val="FFFFFF"/>
-                </a:solidFill>
-                <a:latin typeface="Calibri"/>
-              </a:rPr>
-              <a:t>  Maverick Spend &amp; Deletion Alerts</a:t>
+              <a:t>Alerts on orders marked for deletion</a:t>
             </a:r>
           </a:p>
         </p:txBody>
@@ -6612,9 +6622,130 @@
         <p:nvPr/>
       </p:nvGrpSpPr>
       <p:grpSpPr/>
+      <p:sp>
+        <p:nvSpPr>
+          <p:cNvPr id="2" name="Rectangle 1"/>
+          <p:cNvSpPr/>
+          <p:nvPr/>
+        </p:nvSpPr>
+        <p:spPr>
+          <a:xfrm>
+            <a:off x="0" y="0"/>
+            <a:ext cx="12188952" cy="438912"/>
+          </a:xfrm>
+          <a:prstGeom prst="rect">
+            <a:avLst/>
+          </a:prstGeom>
+          <a:solidFill>
+            <a:srgbClr val="00338D"/>
+          </a:solidFill>
+          <a:ln>
+            <a:noFill/>
+          </a:ln>
+        </p:spPr>
+        <p:style>
+          <a:lnRef idx="1">
+            <a:schemeClr val="accent1"/>
+          </a:lnRef>
+          <a:fillRef idx="3">
+            <a:schemeClr val="accent1"/>
+          </a:fillRef>
+          <a:effectRef idx="2">
+            <a:schemeClr val="accent1"/>
+          </a:effectRef>
+          <a:fontRef idx="minor">
+            <a:schemeClr val="lt1"/>
+          </a:fontRef>
+        </p:style>
+        <p:txBody>
+          <a:bodyPr rtlCol="0" anchor="ctr"/>
+          <a:lstStyle/>
+          <a:p>
+            <a:pPr algn="ctr"/>
+          </a:p>
+        </p:txBody>
+      </p:sp>
+      <p:sp>
+        <p:nvSpPr>
+          <p:cNvPr id="3" name="Rectangle 2"/>
+          <p:cNvSpPr/>
+          <p:nvPr/>
+        </p:nvSpPr>
+        <p:spPr>
+          <a:xfrm>
+            <a:off x="0" y="0"/>
+            <a:ext cx="64008" cy="438912"/>
+          </a:xfrm>
+          <a:prstGeom prst="rect">
+            <a:avLst/>
+          </a:prstGeom>
+          <a:solidFill>
+            <a:srgbClr val="0091DA"/>
+          </a:solidFill>
+          <a:ln>
+            <a:noFill/>
+          </a:ln>
+        </p:spPr>
+        <p:style>
+          <a:lnRef idx="1">
+            <a:schemeClr val="accent1"/>
+          </a:lnRef>
+          <a:fillRef idx="3">
+            <a:schemeClr val="accent1"/>
+          </a:fillRef>
+          <a:effectRef idx="2">
+            <a:schemeClr val="accent1"/>
+          </a:effectRef>
+          <a:fontRef idx="minor">
+            <a:schemeClr val="lt1"/>
+          </a:fontRef>
+        </p:style>
+        <p:txBody>
+          <a:bodyPr rtlCol="0" anchor="ctr"/>
+          <a:lstStyle/>
+          <a:p>
+            <a:pPr algn="ctr"/>
+          </a:p>
+        </p:txBody>
+      </p:sp>
+      <p:sp>
+        <p:nvSpPr>
+          <p:cNvPr id="4" name="TextBox 3"/>
+          <p:cNvSpPr txBox="1"/>
+          <p:nvPr/>
+        </p:nvSpPr>
+        <p:spPr>
+          <a:xfrm>
+            <a:off x="137160" y="64008"/>
+            <a:ext cx="2926080" cy="384048"/>
+          </a:xfrm>
+          <a:prstGeom prst="rect">
+            <a:avLst/>
+          </a:prstGeom>
+          <a:noFill/>
+        </p:spPr>
+        <p:txBody>
+          <a:bodyPr wrap="square">
+            <a:spAutoFit/>
+          </a:bodyPr>
+          <a:lstStyle/>
+          <a:p>
+            <a:pPr algn="l"/>
+            <a:r>
+              <a:rPr sz="1100" b="1" i="0">
+                <a:solidFill>
+                  <a:srgbClr val="0091DA"/>
+                </a:solidFill>
+                <a:latin typeface="Calibri"/>
+              </a:rPr>
+              <a:t>KPMG  IntelliSource</a:t>
+            </a:r>
+          </a:p>
+        </p:txBody>
+      </p:sp>
       <p:pic>
         <p:nvPicPr>
-          <p:cNvPr id="2" name="Picture 1" descr="Screenshot 2026-07-08 at 2.21.22 PM.png"/>
+          <p:cNvPr id="5" name="Picture 4" descr="Screenshot 2026-07-08 at 2.21.22 PM.png"/>
           <p:cNvPicPr>
             <a:picLocks noChangeAspect="1"/>
           </p:cNvPicPr>
@@ -6628,8 +6759,8 @@
         </p:blipFill>
         <p:spPr>
           <a:xfrm>
-            <a:off x="0" y="0"/>
-            <a:ext cx="12188952" cy="6858000"/>
+            <a:off x="0" y="438912"/>
+            <a:ext cx="9144000" cy="6419088"/>
           </a:xfrm>
           <a:prstGeom prst="rect">
             <a:avLst/>
@@ -6638,20 +6769,20 @@
       </p:pic>
       <p:sp>
         <p:nvSpPr>
-          <p:cNvPr id="3" name="Rectangle 2"/>
+          <p:cNvPr id="6" name="Rectangle 5"/>
           <p:cNvSpPr/>
           <p:nvPr/>
         </p:nvSpPr>
         <p:spPr>
           <a:xfrm>
-            <a:off x="0" y="0"/>
-            <a:ext cx="12188952" cy="457200"/>
-          </a:xfrm>
-          <a:prstGeom prst="rect">
-            <a:avLst/>
-          </a:prstGeom>
-          <a:solidFill>
-            <a:srgbClr val="00338D"/>
+            <a:off x="9144000" y="438912"/>
+            <a:ext cx="3044952" cy="6419088"/>
+          </a:xfrm>
+          <a:prstGeom prst="rect">
+            <a:avLst/>
+          </a:prstGeom>
+          <a:solidFill>
+            <a:srgbClr val="051835"/>
           </a:solidFill>
           <a:ln>
             <a:noFill/>
@@ -6681,20 +6812,20 @@
       </p:sp>
       <p:sp>
         <p:nvSpPr>
-          <p:cNvPr id="4" name="Rectangle 3"/>
+          <p:cNvPr id="7" name="Rectangle 6"/>
           <p:cNvSpPr/>
           <p:nvPr/>
         </p:nvSpPr>
         <p:spPr>
           <a:xfrm>
-            <a:off x="0" y="0"/>
-            <a:ext cx="64008" cy="457200"/>
-          </a:xfrm>
-          <a:prstGeom prst="rect">
-            <a:avLst/>
-          </a:prstGeom>
-          <a:solidFill>
-            <a:srgbClr val="FF7200"/>
+            <a:off x="9144000" y="438912"/>
+            <a:ext cx="45720" cy="6419088"/>
+          </a:xfrm>
+          <a:prstGeom prst="rect">
+            <a:avLst/>
+          </a:prstGeom>
+          <a:solidFill>
+            <a:srgbClr val="0091DA"/>
           </a:solidFill>
           <a:ln>
             <a:noFill/>
@@ -6724,14 +6855,14 @@
       </p:sp>
       <p:sp>
         <p:nvSpPr>
-          <p:cNvPr id="5" name="TextBox 4"/>
+          <p:cNvPr id="8" name="TextBox 7"/>
           <p:cNvSpPr txBox="1"/>
           <p:nvPr/>
         </p:nvSpPr>
         <p:spPr>
           <a:xfrm>
-            <a:off x="137160" y="54864"/>
-            <a:ext cx="2560320" cy="347472"/>
+            <a:off x="9326880" y="640080"/>
+            <a:ext cx="2816352" cy="594360"/>
           </a:xfrm>
           <a:prstGeom prst="rect">
             <a:avLst/>
@@ -6746,103 +6877,34 @@
           <a:p>
             <a:pPr algn="l"/>
             <a:r>
-              <a:rPr sz="1100" b="1" i="0">
-                <a:solidFill>
-                  <a:srgbClr val="0091DA"/>
-                </a:solidFill>
-                <a:latin typeface="Calibri"/>
-              </a:rPr>
-              <a:t>KPMG  IntelliSource</a:t>
-            </a:r>
-          </a:p>
-        </p:txBody>
-      </p:sp>
-      <p:sp>
-        <p:nvSpPr>
-          <p:cNvPr id="6" name="TextBox 5"/>
-          <p:cNvSpPr txBox="1"/>
-          <p:nvPr/>
-        </p:nvSpPr>
-        <p:spPr>
-          <a:xfrm>
-            <a:off x="2834640" y="54864"/>
-            <a:ext cx="6858000" cy="347472"/>
-          </a:xfrm>
-          <a:prstGeom prst="rect">
-            <a:avLst/>
-          </a:prstGeom>
-          <a:noFill/>
-        </p:spPr>
-        <p:txBody>
-          <a:bodyPr wrap="square">
-            <a:spAutoFit/>
-          </a:bodyPr>
-          <a:lstStyle/>
-          <a:p>
-            <a:pPr algn="ctr"/>
-            <a:r>
-              <a:rPr sz="1400" b="1" i="0">
+              <a:rPr sz="1500" b="1" i="0">
                 <a:solidFill>
                   <a:srgbClr val="FFFFFF"/>
                 </a:solidFill>
                 <a:latin typeface="Calibri"/>
               </a:rPr>
-              <a:t>Financial Dashboard — KPIs</a:t>
-            </a:r>
-          </a:p>
-        </p:txBody>
-      </p:sp>
-      <p:sp>
-        <p:nvSpPr>
-          <p:cNvPr id="7" name="TextBox 6"/>
-          <p:cNvSpPr txBox="1"/>
-          <p:nvPr/>
-        </p:nvSpPr>
-        <p:spPr>
-          <a:xfrm>
-            <a:off x="9875520" y="54864"/>
-            <a:ext cx="2194560" cy="347472"/>
-          </a:xfrm>
-          <a:prstGeom prst="rect">
-            <a:avLst/>
-          </a:prstGeom>
-          <a:noFill/>
-        </p:spPr>
-        <p:txBody>
-          <a:bodyPr wrap="square">
-            <a:spAutoFit/>
-          </a:bodyPr>
-          <a:lstStyle/>
-          <a:p>
-            <a:pPr algn="r"/>
-            <a:r>
-              <a:rPr sz="900" b="0" i="0">
-                <a:solidFill>
-                  <a:srgbClr val="88AADD"/>
-                </a:solidFill>
-                <a:latin typeface="Calibri"/>
-              </a:rPr>
-              <a:t>Slide 1 of 2</a:t>
-            </a:r>
-          </a:p>
-        </p:txBody>
-      </p:sp>
-      <p:sp>
-        <p:nvSpPr>
-          <p:cNvPr id="8" name="Rectangle 7"/>
+              <a:t>Financial
+Dashboard</a:t>
+            </a:r>
+          </a:p>
+        </p:txBody>
+      </p:sp>
+      <p:sp>
+        <p:nvSpPr>
+          <p:cNvPr id="9" name="Rectangle 8"/>
           <p:cNvSpPr/>
           <p:nvPr/>
         </p:nvSpPr>
         <p:spPr>
           <a:xfrm>
-            <a:off x="0" y="6565392"/>
-            <a:ext cx="12188952" cy="292608"/>
-          </a:xfrm>
-          <a:prstGeom prst="rect">
-            <a:avLst/>
-          </a:prstGeom>
-          <a:solidFill>
-            <a:srgbClr val="00338D"/>
+            <a:off x="9345168" y="1472184"/>
+            <a:ext cx="54864" cy="54864"/>
+          </a:xfrm>
+          <a:prstGeom prst="rect">
+            <a:avLst/>
+          </a:prstGeom>
+          <a:solidFill>
+            <a:srgbClr val="0091DA"/>
           </a:solidFill>
           <a:ln>
             <a:noFill/>
@@ -6872,14 +6934,14 @@
       </p:sp>
       <p:sp>
         <p:nvSpPr>
-          <p:cNvPr id="9" name="TextBox 8"/>
+          <p:cNvPr id="10" name="TextBox 9"/>
           <p:cNvSpPr txBox="1"/>
           <p:nvPr/>
         </p:nvSpPr>
         <p:spPr>
           <a:xfrm>
-            <a:off x="182880" y="6592824"/>
-            <a:ext cx="11823192" cy="219456"/>
+            <a:off x="9491472" y="1399032"/>
+            <a:ext cx="2587752" cy="685800"/>
           </a:xfrm>
           <a:prstGeom prst="rect">
             <a:avLst/>
@@ -6892,38 +6954,38 @@
           </a:bodyPr>
           <a:lstStyle/>
           <a:p>
-            <a:pPr algn="r"/>
-            <a:r>
-              <a:rPr sz="750" b="0" i="0">
+            <a:pPr algn="l"/>
+            <a:r>
+              <a:rPr sz="1000" b="0" i="0">
                 <a:solidFill>
-                  <a:srgbClr val="88AADD"/>
+                  <a:srgbClr val="BBD4FF"/>
                 </a:solidFill>
                 <a:latin typeface="Calibri"/>
               </a:rPr>
-              <a:t>CONFIDENTIAL  |  KPMG India  |  Q2 FY2024</a:t>
-            </a:r>
-          </a:p>
-        </p:txBody>
-      </p:sp>
-      <p:sp>
-        <p:nvSpPr>
-          <p:cNvPr id="10" name="Rectangle 9"/>
+              <a:t>Monitors all outgoing vendor payments in real time</a:t>
+            </a:r>
+          </a:p>
+        </p:txBody>
+      </p:sp>
+      <p:sp>
+        <p:nvSpPr>
+          <p:cNvPr id="11" name="Rectangle 10"/>
           <p:cNvSpPr/>
           <p:nvPr/>
         </p:nvSpPr>
         <p:spPr>
           <a:xfrm>
-            <a:off x="2999232" y="649224"/>
-            <a:ext cx="2304288" cy="630936"/>
-          </a:xfrm>
-          <a:prstGeom prst="rect">
-            <a:avLst/>
-          </a:prstGeom>
-          <a:noFill/>
-          <a:ln w="31750">
-            <a:solidFill>
-              <a:srgbClr val="FF7200"/>
-            </a:solidFill>
+            <a:off x="9345168" y="2276856"/>
+            <a:ext cx="54864" cy="54864"/>
+          </a:xfrm>
+          <a:prstGeom prst="rect">
+            <a:avLst/>
+          </a:prstGeom>
+          <a:solidFill>
+            <a:srgbClr val="0091DA"/>
+          </a:solidFill>
+          <a:ln>
+            <a:noFill/>
           </a:ln>
         </p:spPr>
         <p:style>
@@ -6950,20 +7012,55 @@
       </p:sp>
       <p:sp>
         <p:nvSpPr>
-          <p:cNvPr id="11" name="Rectangle 10"/>
+          <p:cNvPr id="12" name="TextBox 11"/>
+          <p:cNvSpPr txBox="1"/>
+          <p:nvPr/>
+        </p:nvSpPr>
+        <p:spPr>
+          <a:xfrm>
+            <a:off x="9491472" y="2203704"/>
+            <a:ext cx="2587752" cy="685800"/>
+          </a:xfrm>
+          <a:prstGeom prst="rect">
+            <a:avLst/>
+          </a:prstGeom>
+          <a:noFill/>
+        </p:spPr>
+        <p:txBody>
+          <a:bodyPr wrap="square">
+            <a:spAutoFit/>
+          </a:bodyPr>
+          <a:lstStyle/>
+          <a:p>
+            <a:pPr algn="l"/>
+            <a:r>
+              <a:rPr sz="1000" b="0" i="0">
+                <a:solidFill>
+                  <a:srgbClr val="BBD4FF"/>
+                </a:solidFill>
+                <a:latin typeface="Calibri"/>
+              </a:rPr>
+              <a:t>Tracks whether invoices match goods received and the order</a:t>
+            </a:r>
+          </a:p>
+        </p:txBody>
+      </p:sp>
+      <p:sp>
+        <p:nvSpPr>
+          <p:cNvPr id="13" name="Rectangle 12"/>
           <p:cNvSpPr/>
           <p:nvPr/>
         </p:nvSpPr>
         <p:spPr>
           <a:xfrm>
-            <a:off x="2999232" y="1316736"/>
-            <a:ext cx="3730752" cy="246888"/>
-          </a:xfrm>
-          <a:prstGeom prst="rect">
-            <a:avLst/>
-          </a:prstGeom>
-          <a:solidFill>
-            <a:srgbClr val="FF7200"/>
+            <a:off x="9345168" y="3081528"/>
+            <a:ext cx="54864" cy="54864"/>
+          </a:xfrm>
+          <a:prstGeom prst="rect">
+            <a:avLst/>
+          </a:prstGeom>
+          <a:solidFill>
+            <a:srgbClr val="0091DA"/>
           </a:solidFill>
           <a:ln>
             <a:noFill/>
@@ -6993,14 +7090,14 @@
       </p:sp>
       <p:sp>
         <p:nvSpPr>
-          <p:cNvPr id="12" name="TextBox 11"/>
+          <p:cNvPr id="14" name="TextBox 13"/>
           <p:cNvSpPr txBox="1"/>
           <p:nvPr/>
         </p:nvSpPr>
         <p:spPr>
           <a:xfrm>
-            <a:off x="2999232" y="1335024"/>
-            <a:ext cx="3730752" cy="246888"/>
+            <a:off x="9491472" y="3008376"/>
+            <a:ext cx="2587752" cy="685800"/>
           </a:xfrm>
           <a:prstGeom prst="rect">
             <a:avLst/>
@@ -7015,36 +7112,36 @@
           <a:p>
             <a:pPr algn="l"/>
             <a:r>
-              <a:rPr sz="850" b="1" i="0">
+              <a:rPr sz="1000" b="0" i="0">
                 <a:solidFill>
-                  <a:srgbClr val="FFFFFF"/>
+                  <a:srgbClr val="BBD4FF"/>
                 </a:solidFill>
                 <a:latin typeface="Calibri"/>
               </a:rPr>
-              <a:t>  84%  3-Way Match  ← below 90% target</a:t>
-            </a:r>
-          </a:p>
-        </p:txBody>
-      </p:sp>
-      <p:sp>
-        <p:nvSpPr>
-          <p:cNvPr id="13" name="Rectangle 12"/>
+              <a:t>Detects potential duplicate invoices before payment clears</a:t>
+            </a:r>
+          </a:p>
+        </p:txBody>
+      </p:sp>
+      <p:sp>
+        <p:nvSpPr>
+          <p:cNvPr id="15" name="Rectangle 14"/>
           <p:cNvSpPr/>
           <p:nvPr/>
         </p:nvSpPr>
         <p:spPr>
           <a:xfrm>
-            <a:off x="5303520" y="649224"/>
-            <a:ext cx="2304288" cy="630936"/>
-          </a:xfrm>
-          <a:prstGeom prst="rect">
-            <a:avLst/>
-          </a:prstGeom>
-          <a:noFill/>
-          <a:ln w="31750">
-            <a:solidFill>
-              <a:srgbClr val="FF7200"/>
-            </a:solidFill>
+            <a:off x="9345168" y="3886200"/>
+            <a:ext cx="54864" cy="54864"/>
+          </a:xfrm>
+          <a:prstGeom prst="rect">
+            <a:avLst/>
+          </a:prstGeom>
+          <a:solidFill>
+            <a:srgbClr val="0091DA"/>
+          </a:solidFill>
+          <a:ln>
+            <a:noFill/>
           </a:ln>
         </p:spPr>
         <p:style>
@@ -7071,20 +7168,55 @@
       </p:sp>
       <p:sp>
         <p:nvSpPr>
-          <p:cNvPr id="14" name="Rectangle 13"/>
+          <p:cNvPr id="16" name="TextBox 15"/>
+          <p:cNvSpPr txBox="1"/>
+          <p:nvPr/>
+        </p:nvSpPr>
+        <p:spPr>
+          <a:xfrm>
+            <a:off x="9491472" y="3813048"/>
+            <a:ext cx="2587752" cy="685800"/>
+          </a:xfrm>
+          <a:prstGeom prst="rect">
+            <a:avLst/>
+          </a:prstGeom>
+          <a:noFill/>
+        </p:spPr>
+        <p:txBody>
+          <a:bodyPr wrap="square">
+            <a:spAutoFit/>
+          </a:bodyPr>
+          <a:lstStyle/>
+          <a:p>
+            <a:pPr algn="l"/>
+            <a:r>
+              <a:rPr sz="1000" b="0" i="0">
+                <a:solidFill>
+                  <a:srgbClr val="BBD4FF"/>
+                </a:solidFill>
+                <a:latin typeface="Calibri"/>
+              </a:rPr>
+              <a:t>Shows average time from invoice posting to payment</a:t>
+            </a:r>
+          </a:p>
+        </p:txBody>
+      </p:sp>
+      <p:sp>
+        <p:nvSpPr>
+          <p:cNvPr id="17" name="Rectangle 16"/>
           <p:cNvSpPr/>
           <p:nvPr/>
         </p:nvSpPr>
         <p:spPr>
           <a:xfrm>
-            <a:off x="5303520" y="1316736"/>
-            <a:ext cx="3154679" cy="246888"/>
-          </a:xfrm>
-          <a:prstGeom prst="rect">
-            <a:avLst/>
-          </a:prstGeom>
-          <a:solidFill>
-            <a:srgbClr val="FF7200"/>
+            <a:off x="9345168" y="4690872"/>
+            <a:ext cx="54864" cy="54864"/>
+          </a:xfrm>
+          <a:prstGeom prst="rect">
+            <a:avLst/>
+          </a:prstGeom>
+          <a:solidFill>
+            <a:srgbClr val="0091DA"/>
           </a:solidFill>
           <a:ln>
             <a:noFill/>
@@ -7114,14 +7246,14 @@
       </p:sp>
       <p:sp>
         <p:nvSpPr>
-          <p:cNvPr id="15" name="TextBox 14"/>
+          <p:cNvPr id="18" name="TextBox 17"/>
           <p:cNvSpPr txBox="1"/>
           <p:nvPr/>
         </p:nvSpPr>
         <p:spPr>
           <a:xfrm>
-            <a:off x="5303520" y="1335024"/>
-            <a:ext cx="3154679" cy="246888"/>
+            <a:off x="9491472" y="4617720"/>
+            <a:ext cx="2587752" cy="685800"/>
           </a:xfrm>
           <a:prstGeom prst="rect">
             <a:avLst/>
@@ -7136,134 +7268,13 @@
           <a:p>
             <a:pPr algn="l"/>
             <a:r>
-              <a:rPr sz="850" b="1" i="0">
+              <a:rPr sz="1000" b="0" i="0">
                 <a:solidFill>
-                  <a:srgbClr val="FFFFFF"/>
+                  <a:srgbClr val="BBD4FF"/>
                 </a:solidFill>
                 <a:latin typeface="Calibri"/>
               </a:rPr>
-              <a:t>  40.5 days  Avg Invoice Payment</a:t>
-            </a:r>
-          </a:p>
-        </p:txBody>
-      </p:sp>
-      <p:sp>
-        <p:nvSpPr>
-          <p:cNvPr id="16" name="Rectangle 15"/>
-          <p:cNvSpPr/>
-          <p:nvPr/>
-        </p:nvSpPr>
-        <p:spPr>
-          <a:xfrm>
-            <a:off x="749808" y="649224"/>
-            <a:ext cx="2249424" cy="630936"/>
-          </a:xfrm>
-          <a:prstGeom prst="rect">
-            <a:avLst/>
-          </a:prstGeom>
-          <a:noFill/>
-          <a:ln w="31750">
-            <a:solidFill>
-              <a:srgbClr val="FF7200"/>
-            </a:solidFill>
-          </a:ln>
-        </p:spPr>
-        <p:style>
-          <a:lnRef idx="1">
-            <a:schemeClr val="accent1"/>
-          </a:lnRef>
-          <a:fillRef idx="3">
-            <a:schemeClr val="accent1"/>
-          </a:fillRef>
-          <a:effectRef idx="2">
-            <a:schemeClr val="accent1"/>
-          </a:effectRef>
-          <a:fontRef idx="minor">
-            <a:schemeClr val="lt1"/>
-          </a:fontRef>
-        </p:style>
-        <p:txBody>
-          <a:bodyPr rtlCol="0" anchor="ctr"/>
-          <a:lstStyle/>
-          <a:p>
-            <a:pPr algn="ctr"/>
-          </a:p>
-        </p:txBody>
-      </p:sp>
-      <p:sp>
-        <p:nvSpPr>
-          <p:cNvPr id="17" name="Rectangle 16"/>
-          <p:cNvSpPr/>
-          <p:nvPr/>
-        </p:nvSpPr>
-        <p:spPr>
-          <a:xfrm>
-            <a:off x="749808" y="1316736"/>
-            <a:ext cx="2194560" cy="246888"/>
-          </a:xfrm>
-          <a:prstGeom prst="rect">
-            <a:avLst/>
-          </a:prstGeom>
-          <a:solidFill>
-            <a:srgbClr val="FF7200"/>
-          </a:solidFill>
-          <a:ln>
-            <a:noFill/>
-          </a:ln>
-        </p:spPr>
-        <p:style>
-          <a:lnRef idx="1">
-            <a:schemeClr val="accent1"/>
-          </a:lnRef>
-          <a:fillRef idx="3">
-            <a:schemeClr val="accent1"/>
-          </a:fillRef>
-          <a:effectRef idx="2">
-            <a:schemeClr val="accent1"/>
-          </a:effectRef>
-          <a:fontRef idx="minor">
-            <a:schemeClr val="lt1"/>
-          </a:fontRef>
-        </p:style>
-        <p:txBody>
-          <a:bodyPr rtlCol="0" anchor="ctr"/>
-          <a:lstStyle/>
-          <a:p>
-            <a:pPr algn="ctr"/>
-          </a:p>
-        </p:txBody>
-      </p:sp>
-      <p:sp>
-        <p:nvSpPr>
-          <p:cNvPr id="18" name="TextBox 17"/>
-          <p:cNvSpPr txBox="1"/>
-          <p:nvPr/>
-        </p:nvSpPr>
-        <p:spPr>
-          <a:xfrm>
-            <a:off x="749808" y="1335024"/>
-            <a:ext cx="2194560" cy="246888"/>
-          </a:xfrm>
-          <a:prstGeom prst="rect">
-            <a:avLst/>
-          </a:prstGeom>
-          <a:noFill/>
-        </p:spPr>
-        <p:txBody>
-          <a:bodyPr wrap="square">
-            <a:spAutoFit/>
-          </a:bodyPr>
-          <a:lstStyle/>
-          <a:p>
-            <a:pPr algn="l"/>
-            <a:r>
-              <a:rPr sz="850" b="1" i="0">
-                <a:solidFill>
-                  <a:srgbClr val="FFFFFF"/>
-                </a:solidFill>
-                <a:latin typeface="Calibri"/>
-              </a:rPr>
-              <a:t>  ₹958 Cr Payments YTD</a:t>
+              <a:t>Segments spend as capital or operational automatically</a:t>
             </a:r>
           </a:p>
         </p:txBody>
@@ -7286,9 +7297,130 @@
         <p:nvPr/>
       </p:nvGrpSpPr>
       <p:grpSpPr/>
+      <p:sp>
+        <p:nvSpPr>
+          <p:cNvPr id="2" name="Rectangle 1"/>
+          <p:cNvSpPr/>
+          <p:nvPr/>
+        </p:nvSpPr>
+        <p:spPr>
+          <a:xfrm>
+            <a:off x="0" y="0"/>
+            <a:ext cx="12188952" cy="438912"/>
+          </a:xfrm>
+          <a:prstGeom prst="rect">
+            <a:avLst/>
+          </a:prstGeom>
+          <a:solidFill>
+            <a:srgbClr val="00338D"/>
+          </a:solidFill>
+          <a:ln>
+            <a:noFill/>
+          </a:ln>
+        </p:spPr>
+        <p:style>
+          <a:lnRef idx="1">
+            <a:schemeClr val="accent1"/>
+          </a:lnRef>
+          <a:fillRef idx="3">
+            <a:schemeClr val="accent1"/>
+          </a:fillRef>
+          <a:effectRef idx="2">
+            <a:schemeClr val="accent1"/>
+          </a:effectRef>
+          <a:fontRef idx="minor">
+            <a:schemeClr val="lt1"/>
+          </a:fontRef>
+        </p:style>
+        <p:txBody>
+          <a:bodyPr rtlCol="0" anchor="ctr"/>
+          <a:lstStyle/>
+          <a:p>
+            <a:pPr algn="ctr"/>
+          </a:p>
+        </p:txBody>
+      </p:sp>
+      <p:sp>
+        <p:nvSpPr>
+          <p:cNvPr id="3" name="Rectangle 2"/>
+          <p:cNvSpPr/>
+          <p:nvPr/>
+        </p:nvSpPr>
+        <p:spPr>
+          <a:xfrm>
+            <a:off x="0" y="0"/>
+            <a:ext cx="64008" cy="438912"/>
+          </a:xfrm>
+          <a:prstGeom prst="rect">
+            <a:avLst/>
+          </a:prstGeom>
+          <a:solidFill>
+            <a:srgbClr val="0091DA"/>
+          </a:solidFill>
+          <a:ln>
+            <a:noFill/>
+          </a:ln>
+        </p:spPr>
+        <p:style>
+          <a:lnRef idx="1">
+            <a:schemeClr val="accent1"/>
+          </a:lnRef>
+          <a:fillRef idx="3">
+            <a:schemeClr val="accent1"/>
+          </a:fillRef>
+          <a:effectRef idx="2">
+            <a:schemeClr val="accent1"/>
+          </a:effectRef>
+          <a:fontRef idx="minor">
+            <a:schemeClr val="lt1"/>
+          </a:fontRef>
+        </p:style>
+        <p:txBody>
+          <a:bodyPr rtlCol="0" anchor="ctr"/>
+          <a:lstStyle/>
+          <a:p>
+            <a:pPr algn="ctr"/>
+          </a:p>
+        </p:txBody>
+      </p:sp>
+      <p:sp>
+        <p:nvSpPr>
+          <p:cNvPr id="4" name="TextBox 3"/>
+          <p:cNvSpPr txBox="1"/>
+          <p:nvPr/>
+        </p:nvSpPr>
+        <p:spPr>
+          <a:xfrm>
+            <a:off x="137160" y="64008"/>
+            <a:ext cx="2926080" cy="384048"/>
+          </a:xfrm>
+          <a:prstGeom prst="rect">
+            <a:avLst/>
+          </a:prstGeom>
+          <a:noFill/>
+        </p:spPr>
+        <p:txBody>
+          <a:bodyPr wrap="square">
+            <a:spAutoFit/>
+          </a:bodyPr>
+          <a:lstStyle/>
+          <a:p>
+            <a:pPr algn="l"/>
+            <a:r>
+              <a:rPr sz="1100" b="1" i="0">
+                <a:solidFill>
+                  <a:srgbClr val="0091DA"/>
+                </a:solidFill>
+                <a:latin typeface="Calibri"/>
+              </a:rPr>
+              <a:t>KPMG  IntelliSource</a:t>
+            </a:r>
+          </a:p>
+        </p:txBody>
+      </p:sp>
       <p:pic>
         <p:nvPicPr>
-          <p:cNvPr id="2" name="Picture 1" descr="Screenshot 2026-07-08 at 2.21.34 PM.png"/>
+          <p:cNvPr id="5" name="Picture 4" descr="Screenshot 2026-07-08 at 2.21.34 PM.png"/>
           <p:cNvPicPr>
             <a:picLocks noChangeAspect="1"/>
           </p:cNvPicPr>
@@ -7302,8 +7434,8 @@
         </p:blipFill>
         <p:spPr>
           <a:xfrm>
-            <a:off x="0" y="0"/>
-            <a:ext cx="12188952" cy="6858000"/>
+            <a:off x="0" y="438912"/>
+            <a:ext cx="9144000" cy="6419088"/>
           </a:xfrm>
           <a:prstGeom prst="rect">
             <a:avLst/>
@@ -7312,20 +7444,20 @@
       </p:pic>
       <p:sp>
         <p:nvSpPr>
-          <p:cNvPr id="3" name="Rectangle 2"/>
+          <p:cNvPr id="6" name="Rectangle 5"/>
           <p:cNvSpPr/>
           <p:nvPr/>
         </p:nvSpPr>
         <p:spPr>
           <a:xfrm>
-            <a:off x="0" y="0"/>
-            <a:ext cx="12188952" cy="457200"/>
-          </a:xfrm>
-          <a:prstGeom prst="rect">
-            <a:avLst/>
-          </a:prstGeom>
-          <a:solidFill>
-            <a:srgbClr val="00338D"/>
+            <a:off x="9144000" y="438912"/>
+            <a:ext cx="3044952" cy="6419088"/>
+          </a:xfrm>
+          <a:prstGeom prst="rect">
+            <a:avLst/>
+          </a:prstGeom>
+          <a:solidFill>
+            <a:srgbClr val="051835"/>
           </a:solidFill>
           <a:ln>
             <a:noFill/>
@@ -7355,20 +7487,20 @@
       </p:sp>
       <p:sp>
         <p:nvSpPr>
-          <p:cNvPr id="4" name="Rectangle 3"/>
+          <p:cNvPr id="7" name="Rectangle 6"/>
           <p:cNvSpPr/>
           <p:nvPr/>
         </p:nvSpPr>
         <p:spPr>
           <a:xfrm>
-            <a:off x="0" y="0"/>
-            <a:ext cx="64008" cy="457200"/>
-          </a:xfrm>
-          <a:prstGeom prst="rect">
-            <a:avLst/>
-          </a:prstGeom>
-          <a:solidFill>
-            <a:srgbClr val="FF7200"/>
+            <a:off x="9144000" y="438912"/>
+            <a:ext cx="45720" cy="6419088"/>
+          </a:xfrm>
+          <a:prstGeom prst="rect">
+            <a:avLst/>
+          </a:prstGeom>
+          <a:solidFill>
+            <a:srgbClr val="0091DA"/>
           </a:solidFill>
           <a:ln>
             <a:noFill/>
@@ -7398,14 +7530,14 @@
       </p:sp>
       <p:sp>
         <p:nvSpPr>
-          <p:cNvPr id="5" name="TextBox 4"/>
+          <p:cNvPr id="8" name="TextBox 7"/>
           <p:cNvSpPr txBox="1"/>
           <p:nvPr/>
         </p:nvSpPr>
         <p:spPr>
           <a:xfrm>
-            <a:off x="137160" y="54864"/>
-            <a:ext cx="2560320" cy="347472"/>
+            <a:off x="9326880" y="640080"/>
+            <a:ext cx="2816352" cy="594360"/>
           </a:xfrm>
           <a:prstGeom prst="rect">
             <a:avLst/>
@@ -7420,103 +7552,34 @@
           <a:p>
             <a:pPr algn="l"/>
             <a:r>
-              <a:rPr sz="1100" b="1" i="0">
-                <a:solidFill>
-                  <a:srgbClr val="0091DA"/>
-                </a:solidFill>
-                <a:latin typeface="Calibri"/>
-              </a:rPr>
-              <a:t>KPMG  IntelliSource</a:t>
-            </a:r>
-          </a:p>
-        </p:txBody>
-      </p:sp>
-      <p:sp>
-        <p:nvSpPr>
-          <p:cNvPr id="6" name="TextBox 5"/>
-          <p:cNvSpPr txBox="1"/>
-          <p:nvPr/>
-        </p:nvSpPr>
-        <p:spPr>
-          <a:xfrm>
-            <a:off x="2834640" y="54864"/>
-            <a:ext cx="6858000" cy="347472"/>
-          </a:xfrm>
-          <a:prstGeom prst="rect">
-            <a:avLst/>
-          </a:prstGeom>
-          <a:noFill/>
-        </p:spPr>
-        <p:txBody>
-          <a:bodyPr wrap="square">
-            <a:spAutoFit/>
-          </a:bodyPr>
-          <a:lstStyle/>
-          <a:p>
-            <a:pPr algn="ctr"/>
-            <a:r>
-              <a:rPr sz="1400" b="1" i="0">
+              <a:rPr sz="1500" b="1" i="0">
                 <a:solidFill>
                   <a:srgbClr val="FFFFFF"/>
                 </a:solidFill>
                 <a:latin typeface="Calibri"/>
               </a:rPr>
-              <a:t>Financial Dashboard — Trends</a:t>
-            </a:r>
-          </a:p>
-        </p:txBody>
-      </p:sp>
-      <p:sp>
-        <p:nvSpPr>
-          <p:cNvPr id="7" name="TextBox 6"/>
-          <p:cNvSpPr txBox="1"/>
-          <p:nvPr/>
-        </p:nvSpPr>
-        <p:spPr>
-          <a:xfrm>
-            <a:off x="9875520" y="54864"/>
-            <a:ext cx="2194560" cy="347472"/>
-          </a:xfrm>
-          <a:prstGeom prst="rect">
-            <a:avLst/>
-          </a:prstGeom>
-          <a:noFill/>
-        </p:spPr>
-        <p:txBody>
-          <a:bodyPr wrap="square">
-            <a:spAutoFit/>
-          </a:bodyPr>
-          <a:lstStyle/>
-          <a:p>
-            <a:pPr algn="r"/>
-            <a:r>
-              <a:rPr sz="900" b="0" i="0">
-                <a:solidFill>
-                  <a:srgbClr val="88AADD"/>
-                </a:solidFill>
-                <a:latin typeface="Calibri"/>
-              </a:rPr>
-              <a:t>Slide 2 of 2</a:t>
-            </a:r>
-          </a:p>
-        </p:txBody>
-      </p:sp>
-      <p:sp>
-        <p:nvSpPr>
-          <p:cNvPr id="8" name="Rectangle 7"/>
+              <a:t>Financial
+Dashboard</a:t>
+            </a:r>
+          </a:p>
+        </p:txBody>
+      </p:sp>
+      <p:sp>
+        <p:nvSpPr>
+          <p:cNvPr id="9" name="Rectangle 8"/>
           <p:cNvSpPr/>
           <p:nvPr/>
         </p:nvSpPr>
         <p:spPr>
           <a:xfrm>
-            <a:off x="0" y="6565392"/>
-            <a:ext cx="12188952" cy="292608"/>
-          </a:xfrm>
-          <a:prstGeom prst="rect">
-            <a:avLst/>
-          </a:prstGeom>
-          <a:solidFill>
-            <a:srgbClr val="00338D"/>
+            <a:off x="9326880" y="1307592"/>
+            <a:ext cx="2679192" cy="237744"/>
+          </a:xfrm>
+          <a:prstGeom prst="rect">
+            <a:avLst/>
+          </a:prstGeom>
+          <a:solidFill>
+            <a:srgbClr val="005EB8"/>
           </a:solidFill>
           <a:ln>
             <a:noFill/>
@@ -7546,14 +7609,14 @@
       </p:sp>
       <p:sp>
         <p:nvSpPr>
-          <p:cNvPr id="9" name="TextBox 8"/>
+          <p:cNvPr id="10" name="TextBox 9"/>
           <p:cNvSpPr txBox="1"/>
           <p:nvPr/>
         </p:nvSpPr>
         <p:spPr>
           <a:xfrm>
-            <a:off x="182880" y="6592824"/>
-            <a:ext cx="11823192" cy="219456"/>
+            <a:off x="9326880" y="1325880"/>
+            <a:ext cx="2679192" cy="219456"/>
           </a:xfrm>
           <a:prstGeom prst="rect">
             <a:avLst/>
@@ -7566,38 +7629,38 @@
           </a:bodyPr>
           <a:lstStyle/>
           <a:p>
-            <a:pPr algn="r"/>
-            <a:r>
-              <a:rPr sz="750" b="0" i="0">
+            <a:pPr algn="l"/>
+            <a:r>
+              <a:rPr sz="800" b="1" i="0">
                 <a:solidFill>
-                  <a:srgbClr val="88AADD"/>
+                  <a:srgbClr val="FFFFFF"/>
                 </a:solidFill>
                 <a:latin typeface="Calibri"/>
               </a:rPr>
-              <a:t>CONFIDENTIAL  |  KPMG India  |  Q2 FY2024</a:t>
-            </a:r>
-          </a:p>
-        </p:txBody>
-      </p:sp>
-      <p:sp>
-        <p:nvSpPr>
-          <p:cNvPr id="10" name="Rectangle 9"/>
+              <a:t>  continued — Payment Trends</a:t>
+            </a:r>
+          </a:p>
+        </p:txBody>
+      </p:sp>
+      <p:sp>
+        <p:nvSpPr>
+          <p:cNvPr id="11" name="Rectangle 10"/>
           <p:cNvSpPr/>
           <p:nvPr/>
         </p:nvSpPr>
         <p:spPr>
           <a:xfrm>
-            <a:off x="749808" y="1371600"/>
-            <a:ext cx="5321808" cy="3383280"/>
-          </a:xfrm>
-          <a:prstGeom prst="rect">
-            <a:avLst/>
-          </a:prstGeom>
-          <a:noFill/>
-          <a:ln w="31750">
-            <a:solidFill>
-              <a:srgbClr val="FF7200"/>
-            </a:solidFill>
+            <a:off x="9345168" y="1746504"/>
+            <a:ext cx="54864" cy="54864"/>
+          </a:xfrm>
+          <a:prstGeom prst="rect">
+            <a:avLst/>
+          </a:prstGeom>
+          <a:solidFill>
+            <a:srgbClr val="0091DA"/>
+          </a:solidFill>
+          <a:ln>
+            <a:noFill/>
           </a:ln>
         </p:spPr>
         <p:style>
@@ -7624,20 +7687,55 @@
       </p:sp>
       <p:sp>
         <p:nvSpPr>
-          <p:cNvPr id="11" name="Rectangle 10"/>
+          <p:cNvPr id="12" name="TextBox 11"/>
+          <p:cNvSpPr txBox="1"/>
+          <p:nvPr/>
+        </p:nvSpPr>
+        <p:spPr>
+          <a:xfrm>
+            <a:off x="9491472" y="1673352"/>
+            <a:ext cx="2587752" cy="685800"/>
+          </a:xfrm>
+          <a:prstGeom prst="rect">
+            <a:avLst/>
+          </a:prstGeom>
+          <a:noFill/>
+        </p:spPr>
+        <p:txBody>
+          <a:bodyPr wrap="square">
+            <a:spAutoFit/>
+          </a:bodyPr>
+          <a:lstStyle/>
+          <a:p>
+            <a:pPr algn="l"/>
+            <a:r>
+              <a:rPr sz="1000" b="0" i="0">
+                <a:solidFill>
+                  <a:srgbClr val="BBD4FF"/>
+                </a:solidFill>
+                <a:latin typeface="Calibri"/>
+              </a:rPr>
+              <a:t>Monthly payment volume trend across the fiscal period</a:t>
+            </a:r>
+          </a:p>
+        </p:txBody>
+      </p:sp>
+      <p:sp>
+        <p:nvSpPr>
+          <p:cNvPr id="13" name="Rectangle 12"/>
           <p:cNvSpPr/>
           <p:nvPr/>
         </p:nvSpPr>
         <p:spPr>
           <a:xfrm>
-            <a:off x="749808" y="1088136"/>
-            <a:ext cx="2962656" cy="246888"/>
-          </a:xfrm>
-          <a:prstGeom prst="rect">
-            <a:avLst/>
-          </a:prstGeom>
-          <a:solidFill>
-            <a:srgbClr val="FF7200"/>
+            <a:off x="9345168" y="2551176"/>
+            <a:ext cx="54864" cy="54864"/>
+          </a:xfrm>
+          <a:prstGeom prst="rect">
+            <a:avLst/>
+          </a:prstGeom>
+          <a:solidFill>
+            <a:srgbClr val="0091DA"/>
           </a:solidFill>
           <a:ln>
             <a:noFill/>
@@ -7667,14 +7765,14 @@
       </p:sp>
       <p:sp>
         <p:nvSpPr>
-          <p:cNvPr id="12" name="TextBox 11"/>
+          <p:cNvPr id="14" name="TextBox 13"/>
           <p:cNvSpPr txBox="1"/>
           <p:nvPr/>
         </p:nvSpPr>
         <p:spPr>
           <a:xfrm>
-            <a:off x="749808" y="1106424"/>
-            <a:ext cx="2962656" cy="246888"/>
+            <a:off x="9491472" y="2478024"/>
+            <a:ext cx="2587752" cy="685800"/>
           </a:xfrm>
           <a:prstGeom prst="rect">
             <a:avLst/>
@@ -7689,36 +7787,36 @@
           <a:p>
             <a:pPr algn="l"/>
             <a:r>
-              <a:rPr sz="850" b="1" i="0">
+              <a:rPr sz="1000" b="0" i="0">
                 <a:solidFill>
-                  <a:srgbClr val="FFFFFF"/>
+                  <a:srgbClr val="BBD4FF"/>
                 </a:solidFill>
                 <a:latin typeface="Calibri"/>
               </a:rPr>
-              <a:t>  Monthly Payments Trend  ₹ Cr</a:t>
-            </a:r>
-          </a:p>
-        </p:txBody>
-      </p:sp>
-      <p:sp>
-        <p:nvSpPr>
-          <p:cNvPr id="13" name="Rectangle 12"/>
+              <a:t>Breaks down payments by timing: early, on time, and late</a:t>
+            </a:r>
+          </a:p>
+        </p:txBody>
+      </p:sp>
+      <p:sp>
+        <p:nvSpPr>
+          <p:cNvPr id="15" name="Rectangle 14"/>
           <p:cNvSpPr/>
           <p:nvPr/>
         </p:nvSpPr>
         <p:spPr>
           <a:xfrm>
-            <a:off x="6135624" y="1371600"/>
-            <a:ext cx="5961888" cy="3383280"/>
-          </a:xfrm>
-          <a:prstGeom prst="rect">
-            <a:avLst/>
-          </a:prstGeom>
-          <a:noFill/>
-          <a:ln w="31750">
-            <a:solidFill>
-              <a:srgbClr val="FF7200"/>
-            </a:solidFill>
+            <a:off x="9345168" y="3355848"/>
+            <a:ext cx="54864" cy="54864"/>
+          </a:xfrm>
+          <a:prstGeom prst="rect">
+            <a:avLst/>
+          </a:prstGeom>
+          <a:solidFill>
+            <a:srgbClr val="0091DA"/>
+          </a:solidFill>
+          <a:ln>
+            <a:noFill/>
           </a:ln>
         </p:spPr>
         <p:style>
@@ -7745,57 +7843,14 @@
       </p:sp>
       <p:sp>
         <p:nvSpPr>
-          <p:cNvPr id="14" name="Rectangle 13"/>
-          <p:cNvSpPr/>
-          <p:nvPr/>
-        </p:nvSpPr>
-        <p:spPr>
-          <a:xfrm>
-            <a:off x="6135624" y="1088136"/>
-            <a:ext cx="2866644" cy="246888"/>
-          </a:xfrm>
-          <a:prstGeom prst="rect">
-            <a:avLst/>
-          </a:prstGeom>
-          <a:solidFill>
-            <a:srgbClr val="FF7200"/>
-          </a:solidFill>
-          <a:ln>
-            <a:noFill/>
-          </a:ln>
-        </p:spPr>
-        <p:style>
-          <a:lnRef idx="1">
-            <a:schemeClr val="accent1"/>
-          </a:lnRef>
-          <a:fillRef idx="3">
-            <a:schemeClr val="accent1"/>
-          </a:fillRef>
-          <a:effectRef idx="2">
-            <a:schemeClr val="accent1"/>
-          </a:effectRef>
-          <a:fontRef idx="minor">
-            <a:schemeClr val="lt1"/>
-          </a:fontRef>
-        </p:style>
-        <p:txBody>
-          <a:bodyPr rtlCol="0" anchor="ctr"/>
-          <a:lstStyle/>
-          <a:p>
-            <a:pPr algn="ctr"/>
-          </a:p>
-        </p:txBody>
-      </p:sp>
-      <p:sp>
-        <p:nvSpPr>
-          <p:cNvPr id="15" name="TextBox 14"/>
+          <p:cNvPr id="16" name="TextBox 15"/>
           <p:cNvSpPr txBox="1"/>
           <p:nvPr/>
         </p:nvSpPr>
         <p:spPr>
           <a:xfrm>
-            <a:off x="6135624" y="1106424"/>
-            <a:ext cx="2866644" cy="246888"/>
+            <a:off x="9491472" y="3282696"/>
+            <a:ext cx="2587752" cy="685800"/>
           </a:xfrm>
           <a:prstGeom prst="rect">
             <a:avLst/>
@@ -7810,13 +7865,13 @@
           <a:p>
             <a:pPr algn="l"/>
             <a:r>
-              <a:rPr sz="850" b="1" i="0">
+              <a:rPr sz="1000" b="0" i="0">
                 <a:solidFill>
-                  <a:srgbClr val="FFFFFF"/>
+                  <a:srgbClr val="BBD4FF"/>
                 </a:solidFill>
                 <a:latin typeface="Calibri"/>
               </a:rPr>
-              <a:t>  Payment Timing Distribution</a:t>
+              <a:t>Identifies periods of concentrated or irregular payment activity</a:t>
             </a:r>
           </a:p>
         </p:txBody>
@@ -7839,9 +7894,130 @@
         <p:nvPr/>
       </p:nvGrpSpPr>
       <p:grpSpPr/>
+      <p:sp>
+        <p:nvSpPr>
+          <p:cNvPr id="2" name="Rectangle 1"/>
+          <p:cNvSpPr/>
+          <p:nvPr/>
+        </p:nvSpPr>
+        <p:spPr>
+          <a:xfrm>
+            <a:off x="0" y="0"/>
+            <a:ext cx="12188952" cy="438912"/>
+          </a:xfrm>
+          <a:prstGeom prst="rect">
+            <a:avLst/>
+          </a:prstGeom>
+          <a:solidFill>
+            <a:srgbClr val="00338D"/>
+          </a:solidFill>
+          <a:ln>
+            <a:noFill/>
+          </a:ln>
+        </p:spPr>
+        <p:style>
+          <a:lnRef idx="1">
+            <a:schemeClr val="accent1"/>
+          </a:lnRef>
+          <a:fillRef idx="3">
+            <a:schemeClr val="accent1"/>
+          </a:fillRef>
+          <a:effectRef idx="2">
+            <a:schemeClr val="accent1"/>
+          </a:effectRef>
+          <a:fontRef idx="minor">
+            <a:schemeClr val="lt1"/>
+          </a:fontRef>
+        </p:style>
+        <p:txBody>
+          <a:bodyPr rtlCol="0" anchor="ctr"/>
+          <a:lstStyle/>
+          <a:p>
+            <a:pPr algn="ctr"/>
+          </a:p>
+        </p:txBody>
+      </p:sp>
+      <p:sp>
+        <p:nvSpPr>
+          <p:cNvPr id="3" name="Rectangle 2"/>
+          <p:cNvSpPr/>
+          <p:nvPr/>
+        </p:nvSpPr>
+        <p:spPr>
+          <a:xfrm>
+            <a:off x="0" y="0"/>
+            <a:ext cx="64008" cy="438912"/>
+          </a:xfrm>
+          <a:prstGeom prst="rect">
+            <a:avLst/>
+          </a:prstGeom>
+          <a:solidFill>
+            <a:srgbClr val="0091DA"/>
+          </a:solidFill>
+          <a:ln>
+            <a:noFill/>
+          </a:ln>
+        </p:spPr>
+        <p:style>
+          <a:lnRef idx="1">
+            <a:schemeClr val="accent1"/>
+          </a:lnRef>
+          <a:fillRef idx="3">
+            <a:schemeClr val="accent1"/>
+          </a:fillRef>
+          <a:effectRef idx="2">
+            <a:schemeClr val="accent1"/>
+          </a:effectRef>
+          <a:fontRef idx="minor">
+            <a:schemeClr val="lt1"/>
+          </a:fontRef>
+        </p:style>
+        <p:txBody>
+          <a:bodyPr rtlCol="0" anchor="ctr"/>
+          <a:lstStyle/>
+          <a:p>
+            <a:pPr algn="ctr"/>
+          </a:p>
+        </p:txBody>
+      </p:sp>
+      <p:sp>
+        <p:nvSpPr>
+          <p:cNvPr id="4" name="TextBox 3"/>
+          <p:cNvSpPr txBox="1"/>
+          <p:nvPr/>
+        </p:nvSpPr>
+        <p:spPr>
+          <a:xfrm>
+            <a:off x="137160" y="64008"/>
+            <a:ext cx="2926080" cy="384048"/>
+          </a:xfrm>
+          <a:prstGeom prst="rect">
+            <a:avLst/>
+          </a:prstGeom>
+          <a:noFill/>
+        </p:spPr>
+        <p:txBody>
+          <a:bodyPr wrap="square">
+            <a:spAutoFit/>
+          </a:bodyPr>
+          <a:lstStyle/>
+          <a:p>
+            <a:pPr algn="l"/>
+            <a:r>
+              <a:rPr sz="1100" b="1" i="0">
+                <a:solidFill>
+                  <a:srgbClr val="0091DA"/>
+                </a:solidFill>
+                <a:latin typeface="Calibri"/>
+              </a:rPr>
+              <a:t>KPMG  IntelliSource</a:t>
+            </a:r>
+          </a:p>
+        </p:txBody>
+      </p:sp>
       <p:pic>
         <p:nvPicPr>
-          <p:cNvPr id="2" name="Picture 1" descr="Screenshot 2026-07-08 at 2.21.57 PM.png"/>
+          <p:cNvPr id="5" name="Picture 4" descr="Screenshot 2026-07-08 at 2.21.57 PM.png"/>
           <p:cNvPicPr>
             <a:picLocks noChangeAspect="1"/>
           </p:cNvPicPr>
@@ -7855,8 +8031,8 @@
         </p:blipFill>
         <p:spPr>
           <a:xfrm>
-            <a:off x="0" y="0"/>
-            <a:ext cx="12188952" cy="6858000"/>
+            <a:off x="0" y="438912"/>
+            <a:ext cx="9144000" cy="6419088"/>
           </a:xfrm>
           <a:prstGeom prst="rect">
             <a:avLst/>
@@ -7865,20 +8041,20 @@
       </p:pic>
       <p:sp>
         <p:nvSpPr>
-          <p:cNvPr id="3" name="Rectangle 2"/>
+          <p:cNvPr id="6" name="Rectangle 5"/>
           <p:cNvSpPr/>
           <p:nvPr/>
         </p:nvSpPr>
         <p:spPr>
           <a:xfrm>
-            <a:off x="0" y="0"/>
-            <a:ext cx="12188952" cy="457200"/>
-          </a:xfrm>
-          <a:prstGeom prst="rect">
-            <a:avLst/>
-          </a:prstGeom>
-          <a:solidFill>
-            <a:srgbClr val="00338D"/>
+            <a:off x="9144000" y="438912"/>
+            <a:ext cx="3044952" cy="6419088"/>
+          </a:xfrm>
+          <a:prstGeom prst="rect">
+            <a:avLst/>
+          </a:prstGeom>
+          <a:solidFill>
+            <a:srgbClr val="051835"/>
           </a:solidFill>
           <a:ln>
             <a:noFill/>
@@ -7908,20 +8084,20 @@
       </p:sp>
       <p:sp>
         <p:nvSpPr>
-          <p:cNvPr id="4" name="Rectangle 3"/>
+          <p:cNvPr id="7" name="Rectangle 6"/>
           <p:cNvSpPr/>
           <p:nvPr/>
         </p:nvSpPr>
         <p:spPr>
           <a:xfrm>
-            <a:off x="0" y="0"/>
-            <a:ext cx="64008" cy="457200"/>
-          </a:xfrm>
-          <a:prstGeom prst="rect">
-            <a:avLst/>
-          </a:prstGeom>
-          <a:solidFill>
-            <a:srgbClr val="FF7200"/>
+            <a:off x="9144000" y="438912"/>
+            <a:ext cx="45720" cy="6419088"/>
+          </a:xfrm>
+          <a:prstGeom prst="rect">
+            <a:avLst/>
+          </a:prstGeom>
+          <a:solidFill>
+            <a:srgbClr val="0091DA"/>
           </a:solidFill>
           <a:ln>
             <a:noFill/>
@@ -7951,14 +8127,14 @@
       </p:sp>
       <p:sp>
         <p:nvSpPr>
-          <p:cNvPr id="5" name="TextBox 4"/>
+          <p:cNvPr id="8" name="TextBox 7"/>
           <p:cNvSpPr txBox="1"/>
           <p:nvPr/>
         </p:nvSpPr>
         <p:spPr>
           <a:xfrm>
-            <a:off x="137160" y="54864"/>
-            <a:ext cx="2560320" cy="347472"/>
+            <a:off x="9326880" y="640080"/>
+            <a:ext cx="2816352" cy="594360"/>
           </a:xfrm>
           <a:prstGeom prst="rect">
             <a:avLst/>
@@ -7973,103 +8149,34 @@
           <a:p>
             <a:pPr algn="l"/>
             <a:r>
-              <a:rPr sz="1100" b="1" i="0">
-                <a:solidFill>
-                  <a:srgbClr val="0091DA"/>
-                </a:solidFill>
-                <a:latin typeface="Calibri"/>
-              </a:rPr>
-              <a:t>KPMG  IntelliSource</a:t>
-            </a:r>
-          </a:p>
-        </p:txBody>
-      </p:sp>
-      <p:sp>
-        <p:nvSpPr>
-          <p:cNvPr id="6" name="TextBox 5"/>
-          <p:cNvSpPr txBox="1"/>
-          <p:nvPr/>
-        </p:nvSpPr>
-        <p:spPr>
-          <a:xfrm>
-            <a:off x="2834640" y="54864"/>
-            <a:ext cx="6858000" cy="347472"/>
-          </a:xfrm>
-          <a:prstGeom prst="rect">
-            <a:avLst/>
-          </a:prstGeom>
-          <a:noFill/>
-        </p:spPr>
-        <p:txBody>
-          <a:bodyPr wrap="square">
-            <a:spAutoFit/>
-          </a:bodyPr>
-          <a:lstStyle/>
-          <a:p>
-            <a:pPr algn="ctr"/>
-            <a:r>
-              <a:rPr sz="1400" b="1" i="0">
+              <a:rPr sz="1500" b="1" i="0">
                 <a:solidFill>
                   <a:srgbClr val="FFFFFF"/>
                 </a:solidFill>
                 <a:latin typeface="Calibri"/>
               </a:rPr>
-              <a:t>Leadership Dashboard</a:t>
-            </a:r>
-          </a:p>
-        </p:txBody>
-      </p:sp>
-      <p:sp>
-        <p:nvSpPr>
-          <p:cNvPr id="7" name="TextBox 6"/>
-          <p:cNvSpPr txBox="1"/>
-          <p:nvPr/>
-        </p:nvSpPr>
-        <p:spPr>
-          <a:xfrm>
-            <a:off x="9875520" y="54864"/>
-            <a:ext cx="2194560" cy="347472"/>
-          </a:xfrm>
-          <a:prstGeom prst="rect">
-            <a:avLst/>
-          </a:prstGeom>
-          <a:noFill/>
-        </p:spPr>
-        <p:txBody>
-          <a:bodyPr wrap="square">
-            <a:spAutoFit/>
-          </a:bodyPr>
-          <a:lstStyle/>
-          <a:p>
-            <a:pPr algn="r"/>
-            <a:r>
-              <a:rPr sz="900" b="0" i="0">
-                <a:solidFill>
-                  <a:srgbClr val="88AADD"/>
-                </a:solidFill>
-                <a:latin typeface="Calibri"/>
-              </a:rPr>
-              <a:t>Slide 1 of 2</a:t>
-            </a:r>
-          </a:p>
-        </p:txBody>
-      </p:sp>
-      <p:sp>
-        <p:nvSpPr>
-          <p:cNvPr id="8" name="Rectangle 7"/>
+              <a:t>Leadership
+Dashboard</a:t>
+            </a:r>
+          </a:p>
+        </p:txBody>
+      </p:sp>
+      <p:sp>
+        <p:nvSpPr>
+          <p:cNvPr id="9" name="Rectangle 8"/>
           <p:cNvSpPr/>
           <p:nvPr/>
         </p:nvSpPr>
         <p:spPr>
           <a:xfrm>
-            <a:off x="0" y="6565392"/>
-            <a:ext cx="12188952" cy="292608"/>
-          </a:xfrm>
-          <a:prstGeom prst="rect">
-            <a:avLst/>
-          </a:prstGeom>
-          <a:solidFill>
-            <a:srgbClr val="00338D"/>
+            <a:off x="9345168" y="1472184"/>
+            <a:ext cx="54864" cy="54864"/>
+          </a:xfrm>
+          <a:prstGeom prst="rect">
+            <a:avLst/>
+          </a:prstGeom>
+          <a:solidFill>
+            <a:srgbClr val="0091DA"/>
           </a:solidFill>
           <a:ln>
             <a:noFill/>
@@ -8099,14 +8206,14 @@
       </p:sp>
       <p:sp>
         <p:nvSpPr>
-          <p:cNvPr id="9" name="TextBox 8"/>
+          <p:cNvPr id="10" name="TextBox 9"/>
           <p:cNvSpPr txBox="1"/>
           <p:nvPr/>
         </p:nvSpPr>
         <p:spPr>
           <a:xfrm>
-            <a:off x="182880" y="6592824"/>
-            <a:ext cx="11823192" cy="219456"/>
+            <a:off x="9491472" y="1399032"/>
+            <a:ext cx="2587752" cy="685800"/>
           </a:xfrm>
           <a:prstGeom prst="rect">
             <a:avLst/>
@@ -8119,38 +8226,38 @@
           </a:bodyPr>
           <a:lstStyle/>
           <a:p>
-            <a:pPr algn="r"/>
-            <a:r>
-              <a:rPr sz="750" b="0" i="0">
+            <a:pPr algn="l"/>
+            <a:r>
+              <a:rPr sz="1000" b="0" i="0">
                 <a:solidFill>
-                  <a:srgbClr val="88AADD"/>
+                  <a:srgbClr val="BBD4FF"/>
                 </a:solidFill>
                 <a:latin typeface="Calibri"/>
               </a:rPr>
-              <a:t>CONFIDENTIAL  |  KPMG India  |  Q2 FY2024</a:t>
-            </a:r>
-          </a:p>
-        </p:txBody>
-      </p:sp>
-      <p:sp>
-        <p:nvSpPr>
-          <p:cNvPr id="10" name="Rectangle 9"/>
+              <a:t>End-to-end view of the entire procurement pipeline</a:t>
+            </a:r>
+          </a:p>
+        </p:txBody>
+      </p:sp>
+      <p:sp>
+        <p:nvSpPr>
+          <p:cNvPr id="11" name="Rectangle 10"/>
           <p:cNvSpPr/>
           <p:nvPr/>
         </p:nvSpPr>
         <p:spPr>
           <a:xfrm>
-            <a:off x="749808" y="475488"/>
-            <a:ext cx="11411712" cy="438912"/>
-          </a:xfrm>
-          <a:prstGeom prst="rect">
-            <a:avLst/>
-          </a:prstGeom>
-          <a:noFill/>
-          <a:ln w="31750">
-            <a:solidFill>
-              <a:srgbClr val="FF7200"/>
-            </a:solidFill>
+            <a:off x="9345168" y="2276856"/>
+            <a:ext cx="54864" cy="54864"/>
+          </a:xfrm>
+          <a:prstGeom prst="rect">
+            <a:avLst/>
+          </a:prstGeom>
+          <a:solidFill>
+            <a:srgbClr val="0091DA"/>
+          </a:solidFill>
+          <a:ln>
+            <a:noFill/>
           </a:ln>
         </p:spPr>
         <p:style>
@@ -8177,20 +8284,55 @@
       </p:sp>
       <p:sp>
         <p:nvSpPr>
-          <p:cNvPr id="11" name="Rectangle 10"/>
+          <p:cNvPr id="12" name="TextBox 11"/>
+          <p:cNvSpPr txBox="1"/>
+          <p:nvPr/>
+        </p:nvSpPr>
+        <p:spPr>
+          <a:xfrm>
+            <a:off x="9491472" y="2203704"/>
+            <a:ext cx="2587752" cy="685800"/>
+          </a:xfrm>
+          <a:prstGeom prst="rect">
+            <a:avLst/>
+          </a:prstGeom>
+          <a:noFill/>
+        </p:spPr>
+        <p:txBody>
+          <a:bodyPr wrap="square">
+            <a:spAutoFit/>
+          </a:bodyPr>
+          <a:lstStyle/>
+          <a:p>
+            <a:pPr algn="l"/>
+            <a:r>
+              <a:rPr sz="1000" b="0" i="0">
+                <a:solidFill>
+                  <a:srgbClr val="BBD4FF"/>
+                </a:solidFill>
+                <a:latin typeface="Calibri"/>
+              </a:rPr>
+              <a:t>Detects users who performed conflicting duties across documents</a:t>
+            </a:r>
+          </a:p>
+        </p:txBody>
+      </p:sp>
+      <p:sp>
+        <p:nvSpPr>
+          <p:cNvPr id="13" name="Rectangle 12"/>
           <p:cNvSpPr/>
           <p:nvPr/>
         </p:nvSpPr>
         <p:spPr>
           <a:xfrm>
-            <a:off x="749808" y="950976"/>
-            <a:ext cx="6227064" cy="246888"/>
-          </a:xfrm>
-          <a:prstGeom prst="rect">
-            <a:avLst/>
-          </a:prstGeom>
-          <a:solidFill>
-            <a:srgbClr val="FF7200"/>
+            <a:off x="9345168" y="3081528"/>
+            <a:ext cx="54864" cy="54864"/>
+          </a:xfrm>
+          <a:prstGeom prst="rect">
+            <a:avLst/>
+          </a:prstGeom>
+          <a:solidFill>
+            <a:srgbClr val="0091DA"/>
           </a:solidFill>
           <a:ln>
             <a:noFill/>
@@ -8220,14 +8362,14 @@
       </p:sp>
       <p:sp>
         <p:nvSpPr>
-          <p:cNvPr id="12" name="TextBox 11"/>
+          <p:cNvPr id="14" name="TextBox 13"/>
           <p:cNvSpPr txBox="1"/>
           <p:nvPr/>
         </p:nvSpPr>
         <p:spPr>
           <a:xfrm>
-            <a:off x="749808" y="969264"/>
-            <a:ext cx="6227064" cy="246888"/>
+            <a:off x="9491472" y="3008376"/>
+            <a:ext cx="2587752" cy="685800"/>
           </a:xfrm>
           <a:prstGeom prst="rect">
             <a:avLst/>
@@ -8242,36 +8384,36 @@
           <a:p>
             <a:pPr algn="l"/>
             <a:r>
-              <a:rPr sz="850" b="1" i="0">
+              <a:rPr sz="1000" b="0" i="0">
                 <a:solidFill>
-                  <a:srgbClr val="FFFFFF"/>
+                  <a:srgbClr val="BBD4FF"/>
                 </a:solidFill>
                 <a:latin typeface="Calibri"/>
               </a:rPr>
-              <a:t>  P2P Pipeline  132 PR → 163 PO → 117 GRN → 106 Inv → 82 Payment</a:t>
-            </a:r>
-          </a:p>
-        </p:txBody>
-      </p:sp>
-      <p:sp>
-        <p:nvSpPr>
-          <p:cNvPr id="13" name="Rectangle 12"/>
+              <a:t>Total committed spend across all departments and entities</a:t>
+            </a:r>
+          </a:p>
+        </p:txBody>
+      </p:sp>
+      <p:sp>
+        <p:nvSpPr>
+          <p:cNvPr id="15" name="Rectangle 14"/>
           <p:cNvSpPr/>
           <p:nvPr/>
         </p:nvSpPr>
         <p:spPr>
           <a:xfrm>
-            <a:off x="3584448" y="960120"/>
-            <a:ext cx="2852928" cy="658368"/>
-          </a:xfrm>
-          <a:prstGeom prst="rect">
-            <a:avLst/>
-          </a:prstGeom>
-          <a:noFill/>
-          <a:ln w="31750">
-            <a:solidFill>
-              <a:srgbClr val="FF7200"/>
-            </a:solidFill>
+            <a:off x="9345168" y="3886200"/>
+            <a:ext cx="54864" cy="54864"/>
+          </a:xfrm>
+          <a:prstGeom prst="rect">
+            <a:avLst/>
+          </a:prstGeom>
+          <a:solidFill>
+            <a:srgbClr val="0091DA"/>
+          </a:solidFill>
+          <a:ln>
+            <a:noFill/>
           </a:ln>
         </p:spPr>
         <p:style>
@@ -8298,20 +8440,55 @@
       </p:sp>
       <p:sp>
         <p:nvSpPr>
-          <p:cNvPr id="14" name="Rectangle 13"/>
+          <p:cNvPr id="16" name="TextBox 15"/>
+          <p:cNvSpPr txBox="1"/>
+          <p:nvPr/>
+        </p:nvSpPr>
+        <p:spPr>
+          <a:xfrm>
+            <a:off x="9491472" y="3813048"/>
+            <a:ext cx="2587752" cy="685800"/>
+          </a:xfrm>
+          <a:prstGeom prst="rect">
+            <a:avLst/>
+          </a:prstGeom>
+          <a:noFill/>
+        </p:spPr>
+        <p:txBody>
+          <a:bodyPr wrap="square">
+            <a:spAutoFit/>
+          </a:bodyPr>
+          <a:lstStyle/>
+          <a:p>
+            <a:pPr algn="l"/>
+            <a:r>
+              <a:rPr sz="1000" b="0" i="0">
+                <a:solidFill>
+                  <a:srgbClr val="BBD4FF"/>
+                </a:solidFill>
+                <a:latin typeface="Calibri"/>
+              </a:rPr>
+              <a:t>Live risk indicators for executive and board-level review</a:t>
+            </a:r>
+          </a:p>
+        </p:txBody>
+      </p:sp>
+      <p:sp>
+        <p:nvSpPr>
+          <p:cNvPr id="17" name="Rectangle 16"/>
           <p:cNvSpPr/>
           <p:nvPr/>
         </p:nvSpPr>
         <p:spPr>
           <a:xfrm>
-            <a:off x="3584448" y="676656"/>
-            <a:ext cx="4114800" cy="246888"/>
-          </a:xfrm>
-          <a:prstGeom prst="rect">
-            <a:avLst/>
-          </a:prstGeom>
-          <a:solidFill>
-            <a:srgbClr val="FF7200"/>
+            <a:off x="9345168" y="4690872"/>
+            <a:ext cx="54864" cy="54864"/>
+          </a:xfrm>
+          <a:prstGeom prst="rect">
+            <a:avLst/>
+          </a:prstGeom>
+          <a:solidFill>
+            <a:srgbClr val="0091DA"/>
           </a:solidFill>
           <a:ln>
             <a:noFill/>
@@ -8341,14 +8518,14 @@
       </p:sp>
       <p:sp>
         <p:nvSpPr>
-          <p:cNvPr id="15" name="TextBox 14"/>
+          <p:cNvPr id="18" name="TextBox 17"/>
           <p:cNvSpPr txBox="1"/>
           <p:nvPr/>
         </p:nvSpPr>
         <p:spPr>
           <a:xfrm>
-            <a:off x="3584448" y="694944"/>
-            <a:ext cx="4114800" cy="246888"/>
+            <a:off x="9491472" y="4617720"/>
+            <a:ext cx="2587752" cy="685800"/>
           </a:xfrm>
           <a:prstGeom prst="rect">
             <a:avLst/>
@@ -8363,134 +8540,13 @@
           <a:p>
             <a:pPr algn="l"/>
             <a:r>
-              <a:rPr sz="850" b="1" i="0">
+              <a:rPr sz="1000" b="0" i="0">
                 <a:solidFill>
-                  <a:srgbClr val="FFFFFF"/>
+                  <a:srgbClr val="BBD4FF"/>
                 </a:solidFill>
                 <a:latin typeface="Calibri"/>
               </a:rPr>
-              <a:t>  187 SOD Conflicts  ← click to drill down</a:t>
-            </a:r>
-          </a:p>
-        </p:txBody>
-      </p:sp>
-      <p:sp>
-        <p:nvSpPr>
-          <p:cNvPr id="16" name="Rectangle 15"/>
-          <p:cNvSpPr/>
-          <p:nvPr/>
-        </p:nvSpPr>
-        <p:spPr>
-          <a:xfrm>
-            <a:off x="8119872" y="960120"/>
-            <a:ext cx="3977639" cy="5303520"/>
-          </a:xfrm>
-          <a:prstGeom prst="rect">
-            <a:avLst/>
-          </a:prstGeom>
-          <a:noFill/>
-          <a:ln w="31750">
-            <a:solidFill>
-              <a:srgbClr val="FF7200"/>
-            </a:solidFill>
-          </a:ln>
-        </p:spPr>
-        <p:style>
-          <a:lnRef idx="1">
-            <a:schemeClr val="accent1"/>
-          </a:lnRef>
-          <a:fillRef idx="3">
-            <a:schemeClr val="accent1"/>
-          </a:fillRef>
-          <a:effectRef idx="2">
-            <a:schemeClr val="accent1"/>
-          </a:effectRef>
-          <a:fontRef idx="minor">
-            <a:schemeClr val="lt1"/>
-          </a:fontRef>
-        </p:style>
-        <p:txBody>
-          <a:bodyPr rtlCol="0" anchor="ctr"/>
-          <a:lstStyle/>
-          <a:p>
-            <a:pPr algn="ctr"/>
-          </a:p>
-        </p:txBody>
-      </p:sp>
-      <p:sp>
-        <p:nvSpPr>
-          <p:cNvPr id="17" name="Rectangle 16"/>
-          <p:cNvSpPr/>
-          <p:nvPr/>
-        </p:nvSpPr>
-        <p:spPr>
-          <a:xfrm>
-            <a:off x="8119872" y="676656"/>
-            <a:ext cx="2290572" cy="246888"/>
-          </a:xfrm>
-          <a:prstGeom prst="rect">
-            <a:avLst/>
-          </a:prstGeom>
-          <a:solidFill>
-            <a:srgbClr val="FF7200"/>
-          </a:solidFill>
-          <a:ln>
-            <a:noFill/>
-          </a:ln>
-        </p:spPr>
-        <p:style>
-          <a:lnRef idx="1">
-            <a:schemeClr val="accent1"/>
-          </a:lnRef>
-          <a:fillRef idx="3">
-            <a:schemeClr val="accent1"/>
-          </a:fillRef>
-          <a:effectRef idx="2">
-            <a:schemeClr val="accent1"/>
-          </a:effectRef>
-          <a:fontRef idx="minor">
-            <a:schemeClr val="lt1"/>
-          </a:fontRef>
-        </p:style>
-        <p:txBody>
-          <a:bodyPr rtlCol="0" anchor="ctr"/>
-          <a:lstStyle/>
-          <a:p>
-            <a:pPr algn="ctr"/>
-          </a:p>
-        </p:txBody>
-      </p:sp>
-      <p:sp>
-        <p:nvSpPr>
-          <p:cNvPr id="18" name="TextBox 17"/>
-          <p:cNvSpPr txBox="1"/>
-          <p:nvPr/>
-        </p:nvSpPr>
-        <p:spPr>
-          <a:xfrm>
-            <a:off x="8119872" y="694944"/>
-            <a:ext cx="2290572" cy="246888"/>
-          </a:xfrm>
-          <a:prstGeom prst="rect">
-            <a:avLst/>
-          </a:prstGeom>
-          <a:noFill/>
-        </p:spPr>
-        <p:txBody>
-          <a:bodyPr wrap="square">
-            <a:spAutoFit/>
-          </a:bodyPr>
-          <a:lstStyle/>
-          <a:p>
-            <a:pPr algn="l"/>
-            <a:r>
-              <a:rPr sz="850" b="1" i="0">
-                <a:solidFill>
-                  <a:srgbClr val="FFFFFF"/>
-                </a:solidFill>
-                <a:latin typeface="Calibri"/>
-              </a:rPr>
-              <a:t>  Risk Indicators Panel</a:t>
+              <a:t>Maverick spend rate visible at a glance</a:t>
             </a:r>
           </a:p>
         </p:txBody>
@@ -8513,9 +8569,130 @@
         <p:nvPr/>
       </p:nvGrpSpPr>
       <p:grpSpPr/>
+      <p:sp>
+        <p:nvSpPr>
+          <p:cNvPr id="2" name="Rectangle 1"/>
+          <p:cNvSpPr/>
+          <p:nvPr/>
+        </p:nvSpPr>
+        <p:spPr>
+          <a:xfrm>
+            <a:off x="0" y="0"/>
+            <a:ext cx="12188952" cy="438912"/>
+          </a:xfrm>
+          <a:prstGeom prst="rect">
+            <a:avLst/>
+          </a:prstGeom>
+          <a:solidFill>
+            <a:srgbClr val="00338D"/>
+          </a:solidFill>
+          <a:ln>
+            <a:noFill/>
+          </a:ln>
+        </p:spPr>
+        <p:style>
+          <a:lnRef idx="1">
+            <a:schemeClr val="accent1"/>
+          </a:lnRef>
+          <a:fillRef idx="3">
+            <a:schemeClr val="accent1"/>
+          </a:fillRef>
+          <a:effectRef idx="2">
+            <a:schemeClr val="accent1"/>
+          </a:effectRef>
+          <a:fontRef idx="minor">
+            <a:schemeClr val="lt1"/>
+          </a:fontRef>
+        </p:style>
+        <p:txBody>
+          <a:bodyPr rtlCol="0" anchor="ctr"/>
+          <a:lstStyle/>
+          <a:p>
+            <a:pPr algn="ctr"/>
+          </a:p>
+        </p:txBody>
+      </p:sp>
+      <p:sp>
+        <p:nvSpPr>
+          <p:cNvPr id="3" name="Rectangle 2"/>
+          <p:cNvSpPr/>
+          <p:nvPr/>
+        </p:nvSpPr>
+        <p:spPr>
+          <a:xfrm>
+            <a:off x="0" y="0"/>
+            <a:ext cx="64008" cy="438912"/>
+          </a:xfrm>
+          <a:prstGeom prst="rect">
+            <a:avLst/>
+          </a:prstGeom>
+          <a:solidFill>
+            <a:srgbClr val="0091DA"/>
+          </a:solidFill>
+          <a:ln>
+            <a:noFill/>
+          </a:ln>
+        </p:spPr>
+        <p:style>
+          <a:lnRef idx="1">
+            <a:schemeClr val="accent1"/>
+          </a:lnRef>
+          <a:fillRef idx="3">
+            <a:schemeClr val="accent1"/>
+          </a:fillRef>
+          <a:effectRef idx="2">
+            <a:schemeClr val="accent1"/>
+          </a:effectRef>
+          <a:fontRef idx="minor">
+            <a:schemeClr val="lt1"/>
+          </a:fontRef>
+        </p:style>
+        <p:txBody>
+          <a:bodyPr rtlCol="0" anchor="ctr"/>
+          <a:lstStyle/>
+          <a:p>
+            <a:pPr algn="ctr"/>
+          </a:p>
+        </p:txBody>
+      </p:sp>
+      <p:sp>
+        <p:nvSpPr>
+          <p:cNvPr id="4" name="TextBox 3"/>
+          <p:cNvSpPr txBox="1"/>
+          <p:nvPr/>
+        </p:nvSpPr>
+        <p:spPr>
+          <a:xfrm>
+            <a:off x="137160" y="64008"/>
+            <a:ext cx="2926080" cy="384048"/>
+          </a:xfrm>
+          <a:prstGeom prst="rect">
+            <a:avLst/>
+          </a:prstGeom>
+          <a:noFill/>
+        </p:spPr>
+        <p:txBody>
+          <a:bodyPr wrap="square">
+            <a:spAutoFit/>
+          </a:bodyPr>
+          <a:lstStyle/>
+          <a:p>
+            <a:pPr algn="l"/>
+            <a:r>
+              <a:rPr sz="1100" b="1" i="0">
+                <a:solidFill>
+                  <a:srgbClr val="0091DA"/>
+                </a:solidFill>
+                <a:latin typeface="Calibri"/>
+              </a:rPr>
+              <a:t>KPMG  IntelliSource</a:t>
+            </a:r>
+          </a:p>
+        </p:txBody>
+      </p:sp>
       <p:pic>
         <p:nvPicPr>
-          <p:cNvPr id="2" name="Picture 1" descr="Screenshot 2026-07-08 at 2.22.42 PM.png"/>
+          <p:cNvPr id="5" name="Picture 4" descr="Screenshot 2026-07-08 at 2.22.42 PM.png"/>
           <p:cNvPicPr>
             <a:picLocks noChangeAspect="1"/>
           </p:cNvPicPr>
@@ -8529,8 +8706,8 @@
         </p:blipFill>
         <p:spPr>
           <a:xfrm>
-            <a:off x="0" y="0"/>
-            <a:ext cx="12188952" cy="6858000"/>
+            <a:off x="0" y="438912"/>
+            <a:ext cx="9144000" cy="6419088"/>
           </a:xfrm>
           <a:prstGeom prst="rect">
             <a:avLst/>
@@ -8539,20 +8716,20 @@
       </p:pic>
       <p:sp>
         <p:nvSpPr>
-          <p:cNvPr id="3" name="Rectangle 2"/>
+          <p:cNvPr id="6" name="Rectangle 5"/>
           <p:cNvSpPr/>
           <p:nvPr/>
         </p:nvSpPr>
         <p:spPr>
           <a:xfrm>
-            <a:off x="0" y="0"/>
-            <a:ext cx="12188952" cy="457200"/>
-          </a:xfrm>
-          <a:prstGeom prst="rect">
-            <a:avLst/>
-          </a:prstGeom>
-          <a:solidFill>
-            <a:srgbClr val="00338D"/>
+            <a:off x="9144000" y="438912"/>
+            <a:ext cx="3044952" cy="6419088"/>
+          </a:xfrm>
+          <a:prstGeom prst="rect">
+            <a:avLst/>
+          </a:prstGeom>
+          <a:solidFill>
+            <a:srgbClr val="051835"/>
           </a:solidFill>
           <a:ln>
             <a:noFill/>
@@ -8582,20 +8759,20 @@
       </p:sp>
       <p:sp>
         <p:nvSpPr>
-          <p:cNvPr id="4" name="Rectangle 3"/>
+          <p:cNvPr id="7" name="Rectangle 6"/>
           <p:cNvSpPr/>
           <p:nvPr/>
         </p:nvSpPr>
         <p:spPr>
           <a:xfrm>
-            <a:off x="0" y="0"/>
-            <a:ext cx="64008" cy="457200"/>
-          </a:xfrm>
-          <a:prstGeom prst="rect">
-            <a:avLst/>
-          </a:prstGeom>
-          <a:solidFill>
-            <a:srgbClr val="FF7200"/>
+            <a:off x="9144000" y="438912"/>
+            <a:ext cx="45720" cy="6419088"/>
+          </a:xfrm>
+          <a:prstGeom prst="rect">
+            <a:avLst/>
+          </a:prstGeom>
+          <a:solidFill>
+            <a:srgbClr val="0091DA"/>
           </a:solidFill>
           <a:ln>
             <a:noFill/>
@@ -8625,14 +8802,14 @@
       </p:sp>
       <p:sp>
         <p:nvSpPr>
-          <p:cNvPr id="5" name="TextBox 4"/>
+          <p:cNvPr id="8" name="TextBox 7"/>
           <p:cNvSpPr txBox="1"/>
           <p:nvPr/>
         </p:nvSpPr>
         <p:spPr>
           <a:xfrm>
-            <a:off x="137160" y="54864"/>
-            <a:ext cx="2560320" cy="347472"/>
+            <a:off x="9326880" y="640080"/>
+            <a:ext cx="2816352" cy="594360"/>
           </a:xfrm>
           <a:prstGeom prst="rect">
             <a:avLst/>
@@ -8647,103 +8824,34 @@
           <a:p>
             <a:pPr algn="l"/>
             <a:r>
-              <a:rPr sz="1100" b="1" i="0">
-                <a:solidFill>
-                  <a:srgbClr val="0091DA"/>
-                </a:solidFill>
-                <a:latin typeface="Calibri"/>
-              </a:rPr>
-              <a:t>KPMG  IntelliSource</a:t>
-            </a:r>
-          </a:p>
-        </p:txBody>
-      </p:sp>
-      <p:sp>
-        <p:nvSpPr>
-          <p:cNvPr id="6" name="TextBox 5"/>
-          <p:cNvSpPr txBox="1"/>
-          <p:nvPr/>
-        </p:nvSpPr>
-        <p:spPr>
-          <a:xfrm>
-            <a:off x="2834640" y="54864"/>
-            <a:ext cx="6858000" cy="347472"/>
-          </a:xfrm>
-          <a:prstGeom prst="rect">
-            <a:avLst/>
-          </a:prstGeom>
-          <a:noFill/>
-        </p:spPr>
-        <p:txBody>
-          <a:bodyPr wrap="square">
-            <a:spAutoFit/>
-          </a:bodyPr>
-          <a:lstStyle/>
-          <a:p>
-            <a:pPr algn="ctr"/>
-            <a:r>
-              <a:rPr sz="1400" b="1" i="0">
+              <a:rPr sz="1500" b="1" i="0">
                 <a:solidFill>
                   <a:srgbClr val="FFFFFF"/>
                 </a:solidFill>
                 <a:latin typeface="Calibri"/>
               </a:rPr>
-              <a:t>Leadership — Risk Analytics</a:t>
-            </a:r>
-          </a:p>
-        </p:txBody>
-      </p:sp>
-      <p:sp>
-        <p:nvSpPr>
-          <p:cNvPr id="7" name="TextBox 6"/>
-          <p:cNvSpPr txBox="1"/>
-          <p:nvPr/>
-        </p:nvSpPr>
-        <p:spPr>
-          <a:xfrm>
-            <a:off x="9875520" y="54864"/>
-            <a:ext cx="2194560" cy="347472"/>
-          </a:xfrm>
-          <a:prstGeom prst="rect">
-            <a:avLst/>
-          </a:prstGeom>
-          <a:noFill/>
-        </p:spPr>
-        <p:txBody>
-          <a:bodyPr wrap="square">
-            <a:spAutoFit/>
-          </a:bodyPr>
-          <a:lstStyle/>
-          <a:p>
-            <a:pPr algn="r"/>
-            <a:r>
-              <a:rPr sz="900" b="0" i="0">
-                <a:solidFill>
-                  <a:srgbClr val="88AADD"/>
-                </a:solidFill>
-                <a:latin typeface="Calibri"/>
-              </a:rPr>
-              <a:t>Slide 2 of 2</a:t>
-            </a:r>
-          </a:p>
-        </p:txBody>
-      </p:sp>
-      <p:sp>
-        <p:nvSpPr>
-          <p:cNvPr id="8" name="Rectangle 7"/>
+              <a:t>Leadership
+Dashboard</a:t>
+            </a:r>
+          </a:p>
+        </p:txBody>
+      </p:sp>
+      <p:sp>
+        <p:nvSpPr>
+          <p:cNvPr id="9" name="Rectangle 8"/>
           <p:cNvSpPr/>
           <p:nvPr/>
         </p:nvSpPr>
         <p:spPr>
           <a:xfrm>
-            <a:off x="0" y="6565392"/>
-            <a:ext cx="12188952" cy="292608"/>
-          </a:xfrm>
-          <a:prstGeom prst="rect">
-            <a:avLst/>
-          </a:prstGeom>
-          <a:solidFill>
-            <a:srgbClr val="00338D"/>
+            <a:off x="9326880" y="1307592"/>
+            <a:ext cx="2679192" cy="237744"/>
+          </a:xfrm>
+          <a:prstGeom prst="rect">
+            <a:avLst/>
+          </a:prstGeom>
+          <a:solidFill>
+            <a:srgbClr val="005EB8"/>
           </a:solidFill>
           <a:ln>
             <a:noFill/>
@@ -8773,14 +8881,14 @@
       </p:sp>
       <p:sp>
         <p:nvSpPr>
-          <p:cNvPr id="9" name="TextBox 8"/>
+          <p:cNvPr id="10" name="TextBox 9"/>
           <p:cNvSpPr txBox="1"/>
           <p:nvPr/>
         </p:nvSpPr>
         <p:spPr>
           <a:xfrm>
-            <a:off x="182880" y="6592824"/>
-            <a:ext cx="11823192" cy="219456"/>
+            <a:off x="9326880" y="1325880"/>
+            <a:ext cx="2679192" cy="219456"/>
           </a:xfrm>
           <a:prstGeom prst="rect">
             <a:avLst/>
@@ -8793,38 +8901,38 @@
           </a:bodyPr>
           <a:lstStyle/>
           <a:p>
-            <a:pPr algn="r"/>
-            <a:r>
-              <a:rPr sz="750" b="0" i="0">
+            <a:pPr algn="l"/>
+            <a:r>
+              <a:rPr sz="800" b="1" i="0">
                 <a:solidFill>
-                  <a:srgbClr val="88AADD"/>
+                  <a:srgbClr val="FFFFFF"/>
                 </a:solidFill>
                 <a:latin typeface="Calibri"/>
               </a:rPr>
-              <a:t>CONFIDENTIAL  |  KPMG India  |  Q2 FY2024</a:t>
-            </a:r>
-          </a:p>
-        </p:txBody>
-      </p:sp>
-      <p:sp>
-        <p:nvSpPr>
-          <p:cNvPr id="10" name="Rectangle 9"/>
+              <a:t>  continued — Risk Analytics</a:t>
+            </a:r>
+          </a:p>
+        </p:txBody>
+      </p:sp>
+      <p:sp>
+        <p:nvSpPr>
+          <p:cNvPr id="11" name="Rectangle 10"/>
           <p:cNvSpPr/>
           <p:nvPr/>
         </p:nvSpPr>
         <p:spPr>
           <a:xfrm>
-            <a:off x="749808" y="1261872"/>
-            <a:ext cx="5285232" cy="2286000"/>
-          </a:xfrm>
-          <a:prstGeom prst="rect">
-            <a:avLst/>
-          </a:prstGeom>
-          <a:noFill/>
-          <a:ln w="31750">
-            <a:solidFill>
-              <a:srgbClr val="FF7200"/>
-            </a:solidFill>
+            <a:off x="9345168" y="1746504"/>
+            <a:ext cx="54864" cy="54864"/>
+          </a:xfrm>
+          <a:prstGeom prst="rect">
+            <a:avLst/>
+          </a:prstGeom>
+          <a:solidFill>
+            <a:srgbClr val="0091DA"/>
+          </a:solidFill>
+          <a:ln>
+            <a:noFill/>
           </a:ln>
         </p:spPr>
         <p:style>
@@ -8851,20 +8959,55 @@
       </p:sp>
       <p:sp>
         <p:nvSpPr>
-          <p:cNvPr id="11" name="Rectangle 10"/>
+          <p:cNvPr id="12" name="TextBox 11"/>
+          <p:cNvSpPr txBox="1"/>
+          <p:nvPr/>
+        </p:nvSpPr>
+        <p:spPr>
+          <a:xfrm>
+            <a:off x="9491472" y="1673352"/>
+            <a:ext cx="2587752" cy="685800"/>
+          </a:xfrm>
+          <a:prstGeom prst="rect">
+            <a:avLst/>
+          </a:prstGeom>
+          <a:noFill/>
+        </p:spPr>
+        <p:txBody>
+          <a:bodyPr wrap="square">
+            <a:spAutoFit/>
+          </a:bodyPr>
+          <a:lstStyle/>
+          <a:p>
+            <a:pPr algn="l"/>
+            <a:r>
+              <a:rPr sz="1000" b="0" i="0">
+                <a:solidFill>
+                  <a:srgbClr val="BBD4FF"/>
+                </a:solidFill>
+                <a:latin typeface="Calibri"/>
+              </a:rPr>
+              <a:t>Shows how budget splits between capital and operational spend</a:t>
+            </a:r>
+          </a:p>
+        </p:txBody>
+      </p:sp>
+      <p:sp>
+        <p:nvSpPr>
+          <p:cNvPr id="13" name="Rectangle 12"/>
           <p:cNvSpPr/>
           <p:nvPr/>
         </p:nvSpPr>
         <p:spPr>
           <a:xfrm>
-            <a:off x="749808" y="978408"/>
-            <a:ext cx="2674620" cy="246888"/>
-          </a:xfrm>
-          <a:prstGeom prst="rect">
-            <a:avLst/>
-          </a:prstGeom>
-          <a:solidFill>
-            <a:srgbClr val="FF7200"/>
+            <a:off x="9345168" y="2551176"/>
+            <a:ext cx="54864" cy="54864"/>
+          </a:xfrm>
+          <a:prstGeom prst="rect">
+            <a:avLst/>
+          </a:prstGeom>
+          <a:solidFill>
+            <a:srgbClr val="0091DA"/>
           </a:solidFill>
           <a:ln>
             <a:noFill/>
@@ -8894,14 +9037,14 @@
       </p:sp>
       <p:sp>
         <p:nvSpPr>
-          <p:cNvPr id="12" name="TextBox 11"/>
+          <p:cNvPr id="14" name="TextBox 13"/>
           <p:cNvSpPr txBox="1"/>
           <p:nvPr/>
         </p:nvSpPr>
         <p:spPr>
           <a:xfrm>
-            <a:off x="749808" y="996696"/>
-            <a:ext cx="2674620" cy="246888"/>
+            <a:off x="9491472" y="2478024"/>
+            <a:ext cx="2587752" cy="685800"/>
           </a:xfrm>
           <a:prstGeom prst="rect">
             <a:avLst/>
@@ -8916,36 +9059,36 @@
           <a:p>
             <a:pPr algn="l"/>
             <a:r>
-              <a:rPr sz="850" b="1" i="0">
+              <a:rPr sz="1000" b="0" i="0">
                 <a:solidFill>
-                  <a:srgbClr val="FFFFFF"/>
+                  <a:srgbClr val="BBD4FF"/>
                 </a:solidFill>
                 <a:latin typeface="Calibri"/>
               </a:rPr>
-              <a:t>  Monthly Spend Trend  ₹ Cr</a:t>
-            </a:r>
-          </a:p>
-        </p:txBody>
-      </p:sp>
-      <p:sp>
-        <p:nvSpPr>
-          <p:cNvPr id="13" name="Rectangle 12"/>
+              <a:t>Monthly spend trend for strategic planning and forecasting</a:t>
+            </a:r>
+          </a:p>
+        </p:txBody>
+      </p:sp>
+      <p:sp>
+        <p:nvSpPr>
+          <p:cNvPr id="15" name="Rectangle 14"/>
           <p:cNvSpPr/>
           <p:nvPr/>
         </p:nvSpPr>
         <p:spPr>
           <a:xfrm>
-            <a:off x="6099048" y="1261872"/>
-            <a:ext cx="3017520" cy="2286000"/>
-          </a:xfrm>
-          <a:prstGeom prst="rect">
-            <a:avLst/>
-          </a:prstGeom>
-          <a:noFill/>
-          <a:ln w="31750">
-            <a:solidFill>
-              <a:srgbClr val="FF7200"/>
-            </a:solidFill>
+            <a:off x="9345168" y="3355848"/>
+            <a:ext cx="54864" cy="54864"/>
+          </a:xfrm>
+          <a:prstGeom prst="rect">
+            <a:avLst/>
+          </a:prstGeom>
+          <a:solidFill>
+            <a:srgbClr val="0091DA"/>
+          </a:solidFill>
+          <a:ln>
+            <a:noFill/>
           </a:ln>
         </p:spPr>
         <p:style>
@@ -8972,57 +9115,14 @@
       </p:sp>
       <p:sp>
         <p:nvSpPr>
-          <p:cNvPr id="14" name="Rectangle 13"/>
-          <p:cNvSpPr/>
-          <p:nvPr/>
-        </p:nvSpPr>
-        <p:spPr>
-          <a:xfrm>
-            <a:off x="6099048" y="978408"/>
-            <a:ext cx="2770632" cy="246888"/>
-          </a:xfrm>
-          <a:prstGeom prst="rect">
-            <a:avLst/>
-          </a:prstGeom>
-          <a:solidFill>
-            <a:srgbClr val="FF7200"/>
-          </a:solidFill>
-          <a:ln>
-            <a:noFill/>
-          </a:ln>
-        </p:spPr>
-        <p:style>
-          <a:lnRef idx="1">
-            <a:schemeClr val="accent1"/>
-          </a:lnRef>
-          <a:fillRef idx="3">
-            <a:schemeClr val="accent1"/>
-          </a:fillRef>
-          <a:effectRef idx="2">
-            <a:schemeClr val="accent1"/>
-          </a:effectRef>
-          <a:fontRef idx="minor">
-            <a:schemeClr val="lt1"/>
-          </a:fontRef>
-        </p:style>
-        <p:txBody>
-          <a:bodyPr rtlCol="0" anchor="ctr"/>
-          <a:lstStyle/>
-          <a:p>
-            <a:pPr algn="ctr"/>
-          </a:p>
-        </p:txBody>
-      </p:sp>
-      <p:sp>
-        <p:nvSpPr>
-          <p:cNvPr id="15" name="TextBox 14"/>
+          <p:cNvPr id="16" name="TextBox 15"/>
           <p:cNvSpPr txBox="1"/>
           <p:nvPr/>
         </p:nvSpPr>
         <p:spPr>
           <a:xfrm>
-            <a:off x="6099048" y="996696"/>
-            <a:ext cx="2770632" cy="246888"/>
+            <a:off x="9491472" y="3282696"/>
+            <a:ext cx="2587752" cy="685800"/>
           </a:xfrm>
           <a:prstGeom prst="rect">
             <a:avLst/>
@@ -9037,134 +9137,13 @@
           <a:p>
             <a:pPr algn="l"/>
             <a:r>
-              <a:rPr sz="850" b="1" i="0">
+              <a:rPr sz="1000" b="0" i="0">
                 <a:solidFill>
-                  <a:srgbClr val="FFFFFF"/>
+                  <a:srgbClr val="BBD4FF"/>
                 </a:solidFill>
                 <a:latin typeface="Calibri"/>
               </a:rPr>
-              <a:t>  CAPEX 48.3%  ·  OPEX 51.7%</a:t>
-            </a:r>
-          </a:p>
-        </p:txBody>
-      </p:sp>
-      <p:sp>
-        <p:nvSpPr>
-          <p:cNvPr id="16" name="Rectangle 15"/>
-          <p:cNvSpPr/>
-          <p:nvPr/>
-        </p:nvSpPr>
-        <p:spPr>
-          <a:xfrm>
-            <a:off x="9180576" y="475488"/>
-            <a:ext cx="2999232" cy="5943600"/>
-          </a:xfrm>
-          <a:prstGeom prst="rect">
-            <a:avLst/>
-          </a:prstGeom>
-          <a:noFill/>
-          <a:ln w="31750">
-            <a:solidFill>
-              <a:srgbClr val="FF7200"/>
-            </a:solidFill>
-          </a:ln>
-        </p:spPr>
-        <p:style>
-          <a:lnRef idx="1">
-            <a:schemeClr val="accent1"/>
-          </a:lnRef>
-          <a:fillRef idx="3">
-            <a:schemeClr val="accent1"/>
-          </a:fillRef>
-          <a:effectRef idx="2">
-            <a:schemeClr val="accent1"/>
-          </a:effectRef>
-          <a:fontRef idx="minor">
-            <a:schemeClr val="lt1"/>
-          </a:fontRef>
-        </p:style>
-        <p:txBody>
-          <a:bodyPr rtlCol="0" anchor="ctr"/>
-          <a:lstStyle/>
-          <a:p>
-            <a:pPr algn="ctr"/>
-          </a:p>
-        </p:txBody>
-      </p:sp>
-      <p:sp>
-        <p:nvSpPr>
-          <p:cNvPr id="17" name="Rectangle 16"/>
-          <p:cNvSpPr/>
-          <p:nvPr/>
-        </p:nvSpPr>
-        <p:spPr>
-          <a:xfrm>
-            <a:off x="9180576" y="6455664"/>
-            <a:ext cx="2194560" cy="246888"/>
-          </a:xfrm>
-          <a:prstGeom prst="rect">
-            <a:avLst/>
-          </a:prstGeom>
-          <a:solidFill>
-            <a:srgbClr val="FF7200"/>
-          </a:solidFill>
-          <a:ln>
-            <a:noFill/>
-          </a:ln>
-        </p:spPr>
-        <p:style>
-          <a:lnRef idx="1">
-            <a:schemeClr val="accent1"/>
-          </a:lnRef>
-          <a:fillRef idx="3">
-            <a:schemeClr val="accent1"/>
-          </a:fillRef>
-          <a:effectRef idx="2">
-            <a:schemeClr val="accent1"/>
-          </a:effectRef>
-          <a:fontRef idx="minor">
-            <a:schemeClr val="lt1"/>
-          </a:fontRef>
-        </p:style>
-        <p:txBody>
-          <a:bodyPr rtlCol="0" anchor="ctr"/>
-          <a:lstStyle/>
-          <a:p>
-            <a:pPr algn="ctr"/>
-          </a:p>
-        </p:txBody>
-      </p:sp>
-      <p:sp>
-        <p:nvSpPr>
-          <p:cNvPr id="18" name="TextBox 17"/>
-          <p:cNvSpPr txBox="1"/>
-          <p:nvPr/>
-        </p:nvSpPr>
-        <p:spPr>
-          <a:xfrm>
-            <a:off x="9180576" y="6473952"/>
-            <a:ext cx="2194560" cy="246888"/>
-          </a:xfrm>
-          <a:prstGeom prst="rect">
-            <a:avLst/>
-          </a:prstGeom>
-          <a:noFill/>
-        </p:spPr>
-        <p:txBody>
-          <a:bodyPr wrap="square">
-            <a:spAutoFit/>
-          </a:bodyPr>
-          <a:lstStyle/>
-          <a:p>
-            <a:pPr algn="l"/>
-            <a:r>
-              <a:rPr sz="850" b="1" i="0">
-                <a:solidFill>
-                  <a:srgbClr val="FFFFFF"/>
-                </a:solidFill>
-                <a:latin typeface="Calibri"/>
-              </a:rPr>
-              <a:t>  Live Risk Indicators</a:t>
+              <a:t>Risk indicators updated instantly on every data upload</a:t>
             </a:r>
           </a:p>
         </p:txBody>
@@ -9187,9 +9166,130 @@
         <p:nvPr/>
       </p:nvGrpSpPr>
       <p:grpSpPr/>
+      <p:sp>
+        <p:nvSpPr>
+          <p:cNvPr id="2" name="Rectangle 1"/>
+          <p:cNvSpPr/>
+          <p:nvPr/>
+        </p:nvSpPr>
+        <p:spPr>
+          <a:xfrm>
+            <a:off x="0" y="0"/>
+            <a:ext cx="12188952" cy="438912"/>
+          </a:xfrm>
+          <a:prstGeom prst="rect">
+            <a:avLst/>
+          </a:prstGeom>
+          <a:solidFill>
+            <a:srgbClr val="00338D"/>
+          </a:solidFill>
+          <a:ln>
+            <a:noFill/>
+          </a:ln>
+        </p:spPr>
+        <p:style>
+          <a:lnRef idx="1">
+            <a:schemeClr val="accent1"/>
+          </a:lnRef>
+          <a:fillRef idx="3">
+            <a:schemeClr val="accent1"/>
+          </a:fillRef>
+          <a:effectRef idx="2">
+            <a:schemeClr val="accent1"/>
+          </a:effectRef>
+          <a:fontRef idx="minor">
+            <a:schemeClr val="lt1"/>
+          </a:fontRef>
+        </p:style>
+        <p:txBody>
+          <a:bodyPr rtlCol="0" anchor="ctr"/>
+          <a:lstStyle/>
+          <a:p>
+            <a:pPr algn="ctr"/>
+          </a:p>
+        </p:txBody>
+      </p:sp>
+      <p:sp>
+        <p:nvSpPr>
+          <p:cNvPr id="3" name="Rectangle 2"/>
+          <p:cNvSpPr/>
+          <p:nvPr/>
+        </p:nvSpPr>
+        <p:spPr>
+          <a:xfrm>
+            <a:off x="0" y="0"/>
+            <a:ext cx="64008" cy="438912"/>
+          </a:xfrm>
+          <a:prstGeom prst="rect">
+            <a:avLst/>
+          </a:prstGeom>
+          <a:solidFill>
+            <a:srgbClr val="0091DA"/>
+          </a:solidFill>
+          <a:ln>
+            <a:noFill/>
+          </a:ln>
+        </p:spPr>
+        <p:style>
+          <a:lnRef idx="1">
+            <a:schemeClr val="accent1"/>
+          </a:lnRef>
+          <a:fillRef idx="3">
+            <a:schemeClr val="accent1"/>
+          </a:fillRef>
+          <a:effectRef idx="2">
+            <a:schemeClr val="accent1"/>
+          </a:effectRef>
+          <a:fontRef idx="minor">
+            <a:schemeClr val="lt1"/>
+          </a:fontRef>
+        </p:style>
+        <p:txBody>
+          <a:bodyPr rtlCol="0" anchor="ctr"/>
+          <a:lstStyle/>
+          <a:p>
+            <a:pPr algn="ctr"/>
+          </a:p>
+        </p:txBody>
+      </p:sp>
+      <p:sp>
+        <p:nvSpPr>
+          <p:cNvPr id="4" name="TextBox 3"/>
+          <p:cNvSpPr txBox="1"/>
+          <p:nvPr/>
+        </p:nvSpPr>
+        <p:spPr>
+          <a:xfrm>
+            <a:off x="137160" y="64008"/>
+            <a:ext cx="2926080" cy="384048"/>
+          </a:xfrm>
+          <a:prstGeom prst="rect">
+            <a:avLst/>
+          </a:prstGeom>
+          <a:noFill/>
+        </p:spPr>
+        <p:txBody>
+          <a:bodyPr wrap="square">
+            <a:spAutoFit/>
+          </a:bodyPr>
+          <a:lstStyle/>
+          <a:p>
+            <a:pPr algn="l"/>
+            <a:r>
+              <a:rPr sz="1100" b="1" i="0">
+                <a:solidFill>
+                  <a:srgbClr val="0091DA"/>
+                </a:solidFill>
+                <a:latin typeface="Calibri"/>
+              </a:rPr>
+              <a:t>KPMG  IntelliSource</a:t>
+            </a:r>
+          </a:p>
+        </p:txBody>
+      </p:sp>
       <p:pic>
         <p:nvPicPr>
-          <p:cNvPr id="2" name="Picture 1" descr="Screenshot 2026-07-08 at 2.24.04 PM.png"/>
+          <p:cNvPr id="5" name="Picture 4" descr="Screenshot 2026-07-08 at 2.24.04 PM.png"/>
           <p:cNvPicPr>
             <a:picLocks noChangeAspect="1"/>
           </p:cNvPicPr>
@@ -9203,8 +9303,8 @@
         </p:blipFill>
         <p:spPr>
           <a:xfrm>
-            <a:off x="0" y="0"/>
-            <a:ext cx="12188952" cy="6858000"/>
+            <a:off x="0" y="438912"/>
+            <a:ext cx="9144000" cy="6419088"/>
           </a:xfrm>
           <a:prstGeom prst="rect">
             <a:avLst/>
@@ -9213,20 +9313,20 @@
       </p:pic>
       <p:sp>
         <p:nvSpPr>
-          <p:cNvPr id="3" name="Rectangle 2"/>
+          <p:cNvPr id="6" name="Rectangle 5"/>
           <p:cNvSpPr/>
           <p:nvPr/>
         </p:nvSpPr>
         <p:spPr>
           <a:xfrm>
-            <a:off x="0" y="0"/>
-            <a:ext cx="12188952" cy="457200"/>
-          </a:xfrm>
-          <a:prstGeom prst="rect">
-            <a:avLst/>
-          </a:prstGeom>
-          <a:solidFill>
-            <a:srgbClr val="00338D"/>
+            <a:off x="9144000" y="438912"/>
+            <a:ext cx="3044952" cy="6419088"/>
+          </a:xfrm>
+          <a:prstGeom prst="rect">
+            <a:avLst/>
+          </a:prstGeom>
+          <a:solidFill>
+            <a:srgbClr val="051835"/>
           </a:solidFill>
           <a:ln>
             <a:noFill/>
@@ -9256,20 +9356,20 @@
       </p:sp>
       <p:sp>
         <p:nvSpPr>
-          <p:cNvPr id="4" name="Rectangle 3"/>
+          <p:cNvPr id="7" name="Rectangle 6"/>
           <p:cNvSpPr/>
           <p:nvPr/>
         </p:nvSpPr>
         <p:spPr>
           <a:xfrm>
-            <a:off x="0" y="0"/>
-            <a:ext cx="64008" cy="457200"/>
-          </a:xfrm>
-          <a:prstGeom prst="rect">
-            <a:avLst/>
-          </a:prstGeom>
-          <a:solidFill>
-            <a:srgbClr val="FF7200"/>
+            <a:off x="9144000" y="438912"/>
+            <a:ext cx="45720" cy="6419088"/>
+          </a:xfrm>
+          <a:prstGeom prst="rect">
+            <a:avLst/>
+          </a:prstGeom>
+          <a:solidFill>
+            <a:srgbClr val="0091DA"/>
           </a:solidFill>
           <a:ln>
             <a:noFill/>
@@ -9299,14 +9399,14 @@
       </p:sp>
       <p:sp>
         <p:nvSpPr>
-          <p:cNvPr id="5" name="TextBox 4"/>
+          <p:cNvPr id="8" name="TextBox 7"/>
           <p:cNvSpPr txBox="1"/>
           <p:nvPr/>
         </p:nvSpPr>
         <p:spPr>
           <a:xfrm>
-            <a:off x="137160" y="54864"/>
-            <a:ext cx="2560320" cy="347472"/>
+            <a:off x="9326880" y="640080"/>
+            <a:ext cx="2816352" cy="594360"/>
           </a:xfrm>
           <a:prstGeom prst="rect">
             <a:avLst/>
@@ -9321,103 +9421,34 @@
           <a:p>
             <a:pPr algn="l"/>
             <a:r>
-              <a:rPr sz="1100" b="1" i="0">
-                <a:solidFill>
-                  <a:srgbClr val="0091DA"/>
-                </a:solidFill>
-                <a:latin typeface="Calibri"/>
-              </a:rPr>
-              <a:t>KPMG  IntelliSource</a:t>
-            </a:r>
-          </a:p>
-        </p:txBody>
-      </p:sp>
-      <p:sp>
-        <p:nvSpPr>
-          <p:cNvPr id="6" name="TextBox 5"/>
-          <p:cNvSpPr txBox="1"/>
-          <p:nvPr/>
-        </p:nvSpPr>
-        <p:spPr>
-          <a:xfrm>
-            <a:off x="2834640" y="54864"/>
-            <a:ext cx="6858000" cy="347472"/>
-          </a:xfrm>
-          <a:prstGeom prst="rect">
-            <a:avLst/>
-          </a:prstGeom>
-          <a:noFill/>
-        </p:spPr>
-        <p:txBody>
-          <a:bodyPr wrap="square">
-            <a:spAutoFit/>
-          </a:bodyPr>
-          <a:lstStyle/>
-          <a:p>
-            <a:pPr algn="ctr"/>
-            <a:r>
-              <a:rPr sz="1400" b="1" i="0">
+              <a:rPr sz="1500" b="1" i="0">
                 <a:solidFill>
                   <a:srgbClr val="FFFFFF"/>
                 </a:solidFill>
                 <a:latin typeface="Calibri"/>
               </a:rPr>
-              <a:t>Vendor Performance Dashboard</a:t>
-            </a:r>
-          </a:p>
-        </p:txBody>
-      </p:sp>
-      <p:sp>
-        <p:nvSpPr>
-          <p:cNvPr id="7" name="TextBox 6"/>
-          <p:cNvSpPr txBox="1"/>
-          <p:nvPr/>
-        </p:nvSpPr>
-        <p:spPr>
-          <a:xfrm>
-            <a:off x="9875520" y="54864"/>
-            <a:ext cx="2194560" cy="347472"/>
-          </a:xfrm>
-          <a:prstGeom prst="rect">
-            <a:avLst/>
-          </a:prstGeom>
-          <a:noFill/>
-        </p:spPr>
-        <p:txBody>
-          <a:bodyPr wrap="square">
-            <a:spAutoFit/>
-          </a:bodyPr>
-          <a:lstStyle/>
-          <a:p>
-            <a:pPr algn="r"/>
-            <a:r>
-              <a:rPr sz="900" b="0" i="0">
-                <a:solidFill>
-                  <a:srgbClr val="88AADD"/>
-                </a:solidFill>
-                <a:latin typeface="Calibri"/>
-              </a:rPr>
-              <a:t>Slide 1 of 2</a:t>
-            </a:r>
-          </a:p>
-        </p:txBody>
-      </p:sp>
-      <p:sp>
-        <p:nvSpPr>
-          <p:cNvPr id="8" name="Rectangle 7"/>
+              <a:t>Vendor
+Performance</a:t>
+            </a:r>
+          </a:p>
+        </p:txBody>
+      </p:sp>
+      <p:sp>
+        <p:nvSpPr>
+          <p:cNvPr id="9" name="Rectangle 8"/>
           <p:cNvSpPr/>
           <p:nvPr/>
         </p:nvSpPr>
         <p:spPr>
           <a:xfrm>
-            <a:off x="0" y="6565392"/>
-            <a:ext cx="12188952" cy="292608"/>
-          </a:xfrm>
-          <a:prstGeom prst="rect">
-            <a:avLst/>
-          </a:prstGeom>
-          <a:solidFill>
-            <a:srgbClr val="00338D"/>
+            <a:off x="9345168" y="1472184"/>
+            <a:ext cx="54864" cy="54864"/>
+          </a:xfrm>
+          <a:prstGeom prst="rect">
+            <a:avLst/>
+          </a:prstGeom>
+          <a:solidFill>
+            <a:srgbClr val="0091DA"/>
           </a:solidFill>
           <a:ln>
             <a:noFill/>
@@ -9447,14 +9478,14 @@
       </p:sp>
       <p:sp>
         <p:nvSpPr>
-          <p:cNvPr id="9" name="TextBox 8"/>
+          <p:cNvPr id="10" name="TextBox 9"/>
           <p:cNvSpPr txBox="1"/>
           <p:nvPr/>
         </p:nvSpPr>
         <p:spPr>
           <a:xfrm>
-            <a:off x="182880" y="6592824"/>
-            <a:ext cx="11823192" cy="219456"/>
+            <a:off x="9491472" y="1399032"/>
+            <a:ext cx="2587752" cy="685800"/>
           </a:xfrm>
           <a:prstGeom prst="rect">
             <a:avLst/>
@@ -9467,38 +9498,38 @@
           </a:bodyPr>
           <a:lstStyle/>
           <a:p>
-            <a:pPr algn="r"/>
-            <a:r>
-              <a:rPr sz="750" b="0" i="0">
+            <a:pPr algn="l"/>
+            <a:r>
+              <a:rPr sz="1000" b="0" i="0">
                 <a:solidFill>
-                  <a:srgbClr val="88AADD"/>
+                  <a:srgbClr val="BBD4FF"/>
                 </a:solidFill>
                 <a:latin typeface="Calibri"/>
               </a:rPr>
-              <a:t>CONFIDENTIAL  |  KPMG India  |  Q2 FY2024</a:t>
-            </a:r>
-          </a:p>
-        </p:txBody>
-      </p:sp>
-      <p:sp>
-        <p:nvSpPr>
-          <p:cNvPr id="10" name="Rectangle 9"/>
+              <a:t>Identifies which vendors are active, blocked, or restricted</a:t>
+            </a:r>
+          </a:p>
+        </p:txBody>
+      </p:sp>
+      <p:sp>
+        <p:nvSpPr>
+          <p:cNvPr id="11" name="Rectangle 10"/>
           <p:cNvSpPr/>
           <p:nvPr/>
         </p:nvSpPr>
         <p:spPr>
           <a:xfrm>
-            <a:off x="3566160" y="649224"/>
-            <a:ext cx="2852928" cy="630936"/>
-          </a:xfrm>
-          <a:prstGeom prst="rect">
-            <a:avLst/>
-          </a:prstGeom>
-          <a:noFill/>
-          <a:ln w="31750">
-            <a:solidFill>
-              <a:srgbClr val="FF7200"/>
-            </a:solidFill>
+            <a:off x="9345168" y="2276856"/>
+            <a:ext cx="54864" cy="54864"/>
+          </a:xfrm>
+          <a:prstGeom prst="rect">
+            <a:avLst/>
+          </a:prstGeom>
+          <a:solidFill>
+            <a:srgbClr val="0091DA"/>
+          </a:solidFill>
+          <a:ln>
+            <a:noFill/>
           </a:ln>
         </p:spPr>
         <p:style>
@@ -9525,20 +9556,55 @@
       </p:sp>
       <p:sp>
         <p:nvSpPr>
-          <p:cNvPr id="11" name="Rectangle 10"/>
+          <p:cNvPr id="12" name="TextBox 11"/>
+          <p:cNvSpPr txBox="1"/>
+          <p:nvPr/>
+        </p:nvSpPr>
+        <p:spPr>
+          <a:xfrm>
+            <a:off x="9491472" y="2203704"/>
+            <a:ext cx="2587752" cy="685800"/>
+          </a:xfrm>
+          <a:prstGeom prst="rect">
+            <a:avLst/>
+          </a:prstGeom>
+          <a:noFill/>
+        </p:spPr>
+        <p:txBody>
+          <a:bodyPr wrap="square">
+            <a:spAutoFit/>
+          </a:bodyPr>
+          <a:lstStyle/>
+          <a:p>
+            <a:pPr algn="l"/>
+            <a:r>
+              <a:rPr sz="1000" b="0" i="0">
+                <a:solidFill>
+                  <a:srgbClr val="BBD4FF"/>
+                </a:solidFill>
+                <a:latin typeface="Calibri"/>
+              </a:rPr>
+              <a:t>Tracks compliance rating across all vendor relationships</a:t>
+            </a:r>
+          </a:p>
+        </p:txBody>
+      </p:sp>
+      <p:sp>
+        <p:nvSpPr>
+          <p:cNvPr id="13" name="Rectangle 12"/>
           <p:cNvSpPr/>
           <p:nvPr/>
         </p:nvSpPr>
         <p:spPr>
           <a:xfrm>
-            <a:off x="3566160" y="1316736"/>
-            <a:ext cx="3730752" cy="246888"/>
-          </a:xfrm>
-          <a:prstGeom prst="rect">
-            <a:avLst/>
-          </a:prstGeom>
-          <a:solidFill>
-            <a:srgbClr val="FF7200"/>
+            <a:off x="9345168" y="3081528"/>
+            <a:ext cx="54864" cy="54864"/>
+          </a:xfrm>
+          <a:prstGeom prst="rect">
+            <a:avLst/>
+          </a:prstGeom>
+          <a:solidFill>
+            <a:srgbClr val="0091DA"/>
           </a:solidFill>
           <a:ln>
             <a:noFill/>
@@ -9568,14 +9634,14 @@
       </p:sp>
       <p:sp>
         <p:nvSpPr>
-          <p:cNvPr id="12" name="TextBox 11"/>
+          <p:cNvPr id="14" name="TextBox 13"/>
           <p:cNvSpPr txBox="1"/>
           <p:nvPr/>
         </p:nvSpPr>
         <p:spPr>
           <a:xfrm>
-            <a:off x="3566160" y="1335024"/>
-            <a:ext cx="3730752" cy="246888"/>
+            <a:off x="9491472" y="3008376"/>
+            <a:ext cx="2587752" cy="685800"/>
           </a:xfrm>
           <a:prstGeom prst="rect">
             <a:avLst/>
@@ -9590,36 +9656,36 @@
           <a:p>
             <a:pPr algn="l"/>
             <a:r>
-              <a:rPr sz="850" b="1" i="0">
+              <a:rPr sz="1000" b="0" i="0">
                 <a:solidFill>
-                  <a:srgbClr val="FFFFFF"/>
+                  <a:srgbClr val="BBD4FF"/>
                 </a:solidFill>
                 <a:latin typeface="Calibri"/>
               </a:rPr>
-              <a:t>  84.6% Compliance  ← below 90% target</a:t>
-            </a:r>
-          </a:p>
-        </p:txBody>
-      </p:sp>
-      <p:sp>
-        <p:nvSpPr>
-          <p:cNvPr id="13" name="Rectangle 12"/>
+              <a:t>Monitors delivery lead time and delay patterns per vendor</a:t>
+            </a:r>
+          </a:p>
+        </p:txBody>
+      </p:sp>
+      <p:sp>
+        <p:nvSpPr>
+          <p:cNvPr id="15" name="Rectangle 14"/>
           <p:cNvSpPr/>
           <p:nvPr/>
         </p:nvSpPr>
         <p:spPr>
           <a:xfrm>
-            <a:off x="749808" y="1335024"/>
-            <a:ext cx="2852928" cy="521207"/>
-          </a:xfrm>
-          <a:prstGeom prst="rect">
-            <a:avLst/>
-          </a:prstGeom>
-          <a:noFill/>
-          <a:ln w="31750">
-            <a:solidFill>
-              <a:srgbClr val="FF7200"/>
-            </a:solidFill>
+            <a:off x="9345168" y="3886200"/>
+            <a:ext cx="54864" cy="54864"/>
+          </a:xfrm>
+          <a:prstGeom prst="rect">
+            <a:avLst/>
+          </a:prstGeom>
+          <a:solidFill>
+            <a:srgbClr val="0091DA"/>
+          </a:solidFill>
+          <a:ln>
+            <a:noFill/>
           </a:ln>
         </p:spPr>
         <p:style>
@@ -9646,20 +9712,55 @@
       </p:sp>
       <p:sp>
         <p:nvSpPr>
-          <p:cNvPr id="14" name="Rectangle 13"/>
+          <p:cNvPr id="16" name="TextBox 15"/>
+          <p:cNvSpPr txBox="1"/>
+          <p:nvPr/>
+        </p:nvSpPr>
+        <p:spPr>
+          <a:xfrm>
+            <a:off x="9491472" y="3813048"/>
+            <a:ext cx="2587752" cy="685800"/>
+          </a:xfrm>
+          <a:prstGeom prst="rect">
+            <a:avLst/>
+          </a:prstGeom>
+          <a:noFill/>
+        </p:spPr>
+        <p:txBody>
+          <a:bodyPr wrap="square">
+            <a:spAutoFit/>
+          </a:bodyPr>
+          <a:lstStyle/>
+          <a:p>
+            <a:pPr algn="l"/>
+            <a:r>
+              <a:rPr sz="1000" b="0" i="0">
+                <a:solidFill>
+                  <a:srgbClr val="BBD4FF"/>
+                </a:solidFill>
+                <a:latin typeface="Calibri"/>
+              </a:rPr>
+              <a:t>Flags vendors with purchasing or payment blocks immediately</a:t>
+            </a:r>
+          </a:p>
+        </p:txBody>
+      </p:sp>
+      <p:sp>
+        <p:nvSpPr>
+          <p:cNvPr id="17" name="Rectangle 16"/>
           <p:cNvSpPr/>
           <p:nvPr/>
         </p:nvSpPr>
         <p:spPr>
           <a:xfrm>
-            <a:off x="749808" y="1051560"/>
-            <a:ext cx="3730752" cy="246888"/>
-          </a:xfrm>
-          <a:prstGeom prst="rect">
-            <a:avLst/>
-          </a:prstGeom>
-          <a:solidFill>
-            <a:srgbClr val="FF7200"/>
+            <a:off x="9345168" y="4690872"/>
+            <a:ext cx="54864" cy="54864"/>
+          </a:xfrm>
+          <a:prstGeom prst="rect">
+            <a:avLst/>
+          </a:prstGeom>
+          <a:solidFill>
+            <a:srgbClr val="0091DA"/>
           </a:solidFill>
           <a:ln>
             <a:noFill/>
@@ -9689,14 +9790,14 @@
       </p:sp>
       <p:sp>
         <p:nvSpPr>
-          <p:cNvPr id="15" name="TextBox 14"/>
+          <p:cNvPr id="18" name="TextBox 17"/>
           <p:cNvSpPr txBox="1"/>
           <p:nvPr/>
         </p:nvSpPr>
         <p:spPr>
           <a:xfrm>
-            <a:off x="749808" y="1069848"/>
-            <a:ext cx="3730752" cy="246888"/>
+            <a:off x="9491472" y="4617720"/>
+            <a:ext cx="2587752" cy="685800"/>
           </a:xfrm>
           <a:prstGeom prst="rect">
             <a:avLst/>
@@ -9711,134 +9812,13 @@
           <a:p>
             <a:pPr algn="l"/>
             <a:r>
-              <a:rPr sz="850" b="1" i="0">
+              <a:rPr sz="1000" b="0" i="0">
                 <a:solidFill>
-                  <a:srgbClr val="FFFFFF"/>
+                  <a:srgbClr val="BBD4FF"/>
                 </a:solidFill>
                 <a:latin typeface="Calibri"/>
               </a:rPr>
-              <a:t>  2 Blocked Vendors  ← review required</a:t>
-            </a:r>
-          </a:p>
-        </p:txBody>
-      </p:sp>
-      <p:sp>
-        <p:nvSpPr>
-          <p:cNvPr id="16" name="Rectangle 15"/>
-          <p:cNvSpPr/>
-          <p:nvPr/>
-        </p:nvSpPr>
-        <p:spPr>
-          <a:xfrm>
-            <a:off x="9253728" y="649224"/>
-            <a:ext cx="2852928" cy="630936"/>
-          </a:xfrm>
-          <a:prstGeom prst="rect">
-            <a:avLst/>
-          </a:prstGeom>
-          <a:noFill/>
-          <a:ln w="31750">
-            <a:solidFill>
-              <a:srgbClr val="FF7200"/>
-            </a:solidFill>
-          </a:ln>
-        </p:spPr>
-        <p:style>
-          <a:lnRef idx="1">
-            <a:schemeClr val="accent1"/>
-          </a:lnRef>
-          <a:fillRef idx="3">
-            <a:schemeClr val="accent1"/>
-          </a:fillRef>
-          <a:effectRef idx="2">
-            <a:schemeClr val="accent1"/>
-          </a:effectRef>
-          <a:fontRef idx="minor">
-            <a:schemeClr val="lt1"/>
-          </a:fontRef>
-        </p:style>
-        <p:txBody>
-          <a:bodyPr rtlCol="0" anchor="ctr"/>
-          <a:lstStyle/>
-          <a:p>
-            <a:pPr algn="ctr"/>
-          </a:p>
-        </p:txBody>
-      </p:sp>
-      <p:sp>
-        <p:nvSpPr>
-          <p:cNvPr id="17" name="Rectangle 16"/>
-          <p:cNvSpPr/>
-          <p:nvPr/>
-        </p:nvSpPr>
-        <p:spPr>
-          <a:xfrm>
-            <a:off x="9253728" y="1316736"/>
-            <a:ext cx="2482596" cy="246888"/>
-          </a:xfrm>
-          <a:prstGeom prst="rect">
-            <a:avLst/>
-          </a:prstGeom>
-          <a:solidFill>
-            <a:srgbClr val="FF7200"/>
-          </a:solidFill>
-          <a:ln>
-            <a:noFill/>
-          </a:ln>
-        </p:spPr>
-        <p:style>
-          <a:lnRef idx="1">
-            <a:schemeClr val="accent1"/>
-          </a:lnRef>
-          <a:fillRef idx="3">
-            <a:schemeClr val="accent1"/>
-          </a:fillRef>
-          <a:effectRef idx="2">
-            <a:schemeClr val="accent1"/>
-          </a:effectRef>
-          <a:fontRef idx="minor">
-            <a:schemeClr val="lt1"/>
-          </a:fontRef>
-        </p:style>
-        <p:txBody>
-          <a:bodyPr rtlCol="0" anchor="ctr"/>
-          <a:lstStyle/>
-          <a:p>
-            <a:pPr algn="ctr"/>
-          </a:p>
-        </p:txBody>
-      </p:sp>
-      <p:sp>
-        <p:nvSpPr>
-          <p:cNvPr id="18" name="TextBox 17"/>
-          <p:cNvSpPr txBox="1"/>
-          <p:nvPr/>
-        </p:nvSpPr>
-        <p:spPr>
-          <a:xfrm>
-            <a:off x="9253728" y="1335024"/>
-            <a:ext cx="2482596" cy="246888"/>
-          </a:xfrm>
-          <a:prstGeom prst="rect">
-            <a:avLst/>
-          </a:prstGeom>
-          <a:noFill/>
-        </p:spPr>
-        <p:txBody>
-          <a:bodyPr wrap="square">
-            <a:spAutoFit/>
-          </a:bodyPr>
-          <a:lstStyle/>
-          <a:p>
-            <a:pPr algn="l"/>
-            <a:r>
-              <a:rPr sz="850" b="1" i="0">
-                <a:solidFill>
-                  <a:srgbClr val="FFFFFF"/>
-                </a:solidFill>
-                <a:latin typeface="Calibri"/>
-              </a:rPr>
-              <a:t>  5.1d Avg Delivery Delay</a:t>
+              <a:t>Surfaces changes to vendor master data this period</a:t>
             </a:r>
           </a:p>
         </p:txBody>
@@ -9861,9 +9841,130 @@
         <p:nvPr/>
       </p:nvGrpSpPr>
       <p:grpSpPr/>
+      <p:sp>
+        <p:nvSpPr>
+          <p:cNvPr id="2" name="Rectangle 1"/>
+          <p:cNvSpPr/>
+          <p:nvPr/>
+        </p:nvSpPr>
+        <p:spPr>
+          <a:xfrm>
+            <a:off x="0" y="0"/>
+            <a:ext cx="12188952" cy="438912"/>
+          </a:xfrm>
+          <a:prstGeom prst="rect">
+            <a:avLst/>
+          </a:prstGeom>
+          <a:solidFill>
+            <a:srgbClr val="00338D"/>
+          </a:solidFill>
+          <a:ln>
+            <a:noFill/>
+          </a:ln>
+        </p:spPr>
+        <p:style>
+          <a:lnRef idx="1">
+            <a:schemeClr val="accent1"/>
+          </a:lnRef>
+          <a:fillRef idx="3">
+            <a:schemeClr val="accent1"/>
+          </a:fillRef>
+          <a:effectRef idx="2">
+            <a:schemeClr val="accent1"/>
+          </a:effectRef>
+          <a:fontRef idx="minor">
+            <a:schemeClr val="lt1"/>
+          </a:fontRef>
+        </p:style>
+        <p:txBody>
+          <a:bodyPr rtlCol="0" anchor="ctr"/>
+          <a:lstStyle/>
+          <a:p>
+            <a:pPr algn="ctr"/>
+          </a:p>
+        </p:txBody>
+      </p:sp>
+      <p:sp>
+        <p:nvSpPr>
+          <p:cNvPr id="3" name="Rectangle 2"/>
+          <p:cNvSpPr/>
+          <p:nvPr/>
+        </p:nvSpPr>
+        <p:spPr>
+          <a:xfrm>
+            <a:off x="0" y="0"/>
+            <a:ext cx="64008" cy="438912"/>
+          </a:xfrm>
+          <a:prstGeom prst="rect">
+            <a:avLst/>
+          </a:prstGeom>
+          <a:solidFill>
+            <a:srgbClr val="0091DA"/>
+          </a:solidFill>
+          <a:ln>
+            <a:noFill/>
+          </a:ln>
+        </p:spPr>
+        <p:style>
+          <a:lnRef idx="1">
+            <a:schemeClr val="accent1"/>
+          </a:lnRef>
+          <a:fillRef idx="3">
+            <a:schemeClr val="accent1"/>
+          </a:fillRef>
+          <a:effectRef idx="2">
+            <a:schemeClr val="accent1"/>
+          </a:effectRef>
+          <a:fontRef idx="minor">
+            <a:schemeClr val="lt1"/>
+          </a:fontRef>
+        </p:style>
+        <p:txBody>
+          <a:bodyPr rtlCol="0" anchor="ctr"/>
+          <a:lstStyle/>
+          <a:p>
+            <a:pPr algn="ctr"/>
+          </a:p>
+        </p:txBody>
+      </p:sp>
+      <p:sp>
+        <p:nvSpPr>
+          <p:cNvPr id="4" name="TextBox 3"/>
+          <p:cNvSpPr txBox="1"/>
+          <p:nvPr/>
+        </p:nvSpPr>
+        <p:spPr>
+          <a:xfrm>
+            <a:off x="137160" y="64008"/>
+            <a:ext cx="2926080" cy="384048"/>
+          </a:xfrm>
+          <a:prstGeom prst="rect">
+            <a:avLst/>
+          </a:prstGeom>
+          <a:noFill/>
+        </p:spPr>
+        <p:txBody>
+          <a:bodyPr wrap="square">
+            <a:spAutoFit/>
+          </a:bodyPr>
+          <a:lstStyle/>
+          <a:p>
+            <a:pPr algn="l"/>
+            <a:r>
+              <a:rPr sz="1100" b="1" i="0">
+                <a:solidFill>
+                  <a:srgbClr val="0091DA"/>
+                </a:solidFill>
+                <a:latin typeface="Calibri"/>
+              </a:rPr>
+              <a:t>KPMG  IntelliSource</a:t>
+            </a:r>
+          </a:p>
+        </p:txBody>
+      </p:sp>
       <p:pic>
         <p:nvPicPr>
-          <p:cNvPr id="2" name="Picture 1" descr="Screenshot 2026-07-08 at 2.24.14 PM.png"/>
+          <p:cNvPr id="5" name="Picture 4" descr="Screenshot 2026-07-08 at 2.24.14 PM.png"/>
           <p:cNvPicPr>
             <a:picLocks noChangeAspect="1"/>
           </p:cNvPicPr>
@@ -9877,8 +9978,8 @@
         </p:blipFill>
         <p:spPr>
           <a:xfrm>
-            <a:off x="0" y="0"/>
-            <a:ext cx="12188952" cy="6858000"/>
+            <a:off x="0" y="438912"/>
+            <a:ext cx="9144000" cy="6419088"/>
           </a:xfrm>
           <a:prstGeom prst="rect">
             <a:avLst/>
@@ -9887,20 +9988,20 @@
       </p:pic>
       <p:sp>
         <p:nvSpPr>
-          <p:cNvPr id="3" name="Rectangle 2"/>
+          <p:cNvPr id="6" name="Rectangle 5"/>
           <p:cNvSpPr/>
           <p:nvPr/>
         </p:nvSpPr>
         <p:spPr>
           <a:xfrm>
-            <a:off x="0" y="0"/>
-            <a:ext cx="12188952" cy="457200"/>
-          </a:xfrm>
-          <a:prstGeom prst="rect">
-            <a:avLst/>
-          </a:prstGeom>
-          <a:solidFill>
-            <a:srgbClr val="00338D"/>
+            <a:off x="9144000" y="438912"/>
+            <a:ext cx="3044952" cy="6419088"/>
+          </a:xfrm>
+          <a:prstGeom prst="rect">
+            <a:avLst/>
+          </a:prstGeom>
+          <a:solidFill>
+            <a:srgbClr val="051835"/>
           </a:solidFill>
           <a:ln>
             <a:noFill/>
@@ -9930,20 +10031,20 @@
       </p:sp>
       <p:sp>
         <p:nvSpPr>
-          <p:cNvPr id="4" name="Rectangle 3"/>
+          <p:cNvPr id="7" name="Rectangle 6"/>
           <p:cNvSpPr/>
           <p:nvPr/>
         </p:nvSpPr>
         <p:spPr>
           <a:xfrm>
-            <a:off x="0" y="0"/>
-            <a:ext cx="64008" cy="457200"/>
-          </a:xfrm>
-          <a:prstGeom prst="rect">
-            <a:avLst/>
-          </a:prstGeom>
-          <a:solidFill>
-            <a:srgbClr val="FF7200"/>
+            <a:off x="9144000" y="438912"/>
+            <a:ext cx="45720" cy="6419088"/>
+          </a:xfrm>
+          <a:prstGeom prst="rect">
+            <a:avLst/>
+          </a:prstGeom>
+          <a:solidFill>
+            <a:srgbClr val="0091DA"/>
           </a:solidFill>
           <a:ln>
             <a:noFill/>
@@ -9973,14 +10074,14 @@
       </p:sp>
       <p:sp>
         <p:nvSpPr>
-          <p:cNvPr id="5" name="TextBox 4"/>
+          <p:cNvPr id="8" name="TextBox 7"/>
           <p:cNvSpPr txBox="1"/>
           <p:nvPr/>
         </p:nvSpPr>
         <p:spPr>
           <a:xfrm>
-            <a:off x="137160" y="54864"/>
-            <a:ext cx="2560320" cy="347472"/>
+            <a:off x="9326880" y="640080"/>
+            <a:ext cx="2816352" cy="594360"/>
           </a:xfrm>
           <a:prstGeom prst="rect">
             <a:avLst/>
@@ -9995,103 +10096,34 @@
           <a:p>
             <a:pPr algn="l"/>
             <a:r>
-              <a:rPr sz="1100" b="1" i="0">
-                <a:solidFill>
-                  <a:srgbClr val="0091DA"/>
-                </a:solidFill>
-                <a:latin typeface="Calibri"/>
-              </a:rPr>
-              <a:t>KPMG  IntelliSource</a:t>
-            </a:r>
-          </a:p>
-        </p:txBody>
-      </p:sp>
-      <p:sp>
-        <p:nvSpPr>
-          <p:cNvPr id="6" name="TextBox 5"/>
-          <p:cNvSpPr txBox="1"/>
-          <p:nvPr/>
-        </p:nvSpPr>
-        <p:spPr>
-          <a:xfrm>
-            <a:off x="2834640" y="54864"/>
-            <a:ext cx="6858000" cy="347472"/>
-          </a:xfrm>
-          <a:prstGeom prst="rect">
-            <a:avLst/>
-          </a:prstGeom>
-          <a:noFill/>
-        </p:spPr>
-        <p:txBody>
-          <a:bodyPr wrap="square">
-            <a:spAutoFit/>
-          </a:bodyPr>
-          <a:lstStyle/>
-          <a:p>
-            <a:pPr algn="ctr"/>
-            <a:r>
-              <a:rPr sz="1400" b="1" i="0">
+              <a:rPr sz="1500" b="1" i="0">
                 <a:solidFill>
                   <a:srgbClr val="FFFFFF"/>
                 </a:solidFill>
                 <a:latin typeface="Calibri"/>
               </a:rPr>
-              <a:t>Vendor Performance — Charts</a:t>
-            </a:r>
-          </a:p>
-        </p:txBody>
-      </p:sp>
-      <p:sp>
-        <p:nvSpPr>
-          <p:cNvPr id="7" name="TextBox 6"/>
-          <p:cNvSpPr txBox="1"/>
-          <p:nvPr/>
-        </p:nvSpPr>
-        <p:spPr>
-          <a:xfrm>
-            <a:off x="9875520" y="54864"/>
-            <a:ext cx="2194560" cy="347472"/>
-          </a:xfrm>
-          <a:prstGeom prst="rect">
-            <a:avLst/>
-          </a:prstGeom>
-          <a:noFill/>
-        </p:spPr>
-        <p:txBody>
-          <a:bodyPr wrap="square">
-            <a:spAutoFit/>
-          </a:bodyPr>
-          <a:lstStyle/>
-          <a:p>
-            <a:pPr algn="r"/>
-            <a:r>
-              <a:rPr sz="900" b="0" i="0">
-                <a:solidFill>
-                  <a:srgbClr val="88AADD"/>
-                </a:solidFill>
-                <a:latin typeface="Calibri"/>
-              </a:rPr>
-              <a:t>Slide 2 of 2</a:t>
-            </a:r>
-          </a:p>
-        </p:txBody>
-      </p:sp>
-      <p:sp>
-        <p:nvSpPr>
-          <p:cNvPr id="8" name="Rectangle 7"/>
+              <a:t>Vendor
+Performance</a:t>
+            </a:r>
+          </a:p>
+        </p:txBody>
+      </p:sp>
+      <p:sp>
+        <p:nvSpPr>
+          <p:cNvPr id="9" name="Rectangle 8"/>
           <p:cNvSpPr/>
           <p:nvPr/>
         </p:nvSpPr>
         <p:spPr>
           <a:xfrm>
-            <a:off x="0" y="6565392"/>
-            <a:ext cx="12188952" cy="292608"/>
-          </a:xfrm>
-          <a:prstGeom prst="rect">
-            <a:avLst/>
-          </a:prstGeom>
-          <a:solidFill>
-            <a:srgbClr val="00338D"/>
+            <a:off x="9326880" y="1307592"/>
+            <a:ext cx="2679192" cy="237744"/>
+          </a:xfrm>
+          <a:prstGeom prst="rect">
+            <a:avLst/>
+          </a:prstGeom>
+          <a:solidFill>
+            <a:srgbClr val="005EB8"/>
           </a:solidFill>
           <a:ln>
             <a:noFill/>
@@ -10121,14 +10153,14 @@
       </p:sp>
       <p:sp>
         <p:nvSpPr>
-          <p:cNvPr id="9" name="TextBox 8"/>
+          <p:cNvPr id="10" name="TextBox 9"/>
           <p:cNvSpPr txBox="1"/>
           <p:nvPr/>
         </p:nvSpPr>
         <p:spPr>
           <a:xfrm>
-            <a:off x="182880" y="6592824"/>
-            <a:ext cx="11823192" cy="219456"/>
+            <a:off x="9326880" y="1325880"/>
+            <a:ext cx="2679192" cy="219456"/>
           </a:xfrm>
           <a:prstGeom prst="rect">
             <a:avLst/>
@@ -10141,38 +10173,38 @@
           </a:bodyPr>
           <a:lstStyle/>
           <a:p>
-            <a:pPr algn="r"/>
-            <a:r>
-              <a:rPr sz="750" b="0" i="0">
+            <a:pPr algn="l"/>
+            <a:r>
+              <a:rPr sz="800" b="1" i="0">
                 <a:solidFill>
-                  <a:srgbClr val="88AADD"/>
+                  <a:srgbClr val="FFFFFF"/>
                 </a:solidFill>
                 <a:latin typeface="Calibri"/>
               </a:rPr>
-              <a:t>CONFIDENTIAL  |  KPMG India  |  Q2 FY2024</a:t>
-            </a:r>
-          </a:p>
-        </p:txBody>
-      </p:sp>
-      <p:sp>
-        <p:nvSpPr>
-          <p:cNvPr id="10" name="Rectangle 9"/>
+              <a:t>  continued — Spend &amp; Segmentation</a:t>
+            </a:r>
+          </a:p>
+        </p:txBody>
+      </p:sp>
+      <p:sp>
+        <p:nvSpPr>
+          <p:cNvPr id="11" name="Rectangle 10"/>
           <p:cNvSpPr/>
           <p:nvPr/>
         </p:nvSpPr>
         <p:spPr>
           <a:xfrm>
-            <a:off x="749808" y="475488"/>
-            <a:ext cx="11411712" cy="475488"/>
-          </a:xfrm>
-          <a:prstGeom prst="rect">
-            <a:avLst/>
-          </a:prstGeom>
-          <a:noFill/>
-          <a:ln w="31750">
-            <a:solidFill>
-              <a:srgbClr val="FF7200"/>
-            </a:solidFill>
+            <a:off x="9345168" y="1746504"/>
+            <a:ext cx="54864" cy="54864"/>
+          </a:xfrm>
+          <a:prstGeom prst="rect">
+            <a:avLst/>
+          </a:prstGeom>
+          <a:solidFill>
+            <a:srgbClr val="0091DA"/>
+          </a:solidFill>
+          <a:ln>
+            <a:noFill/>
           </a:ln>
         </p:spPr>
         <p:style>
@@ -10199,20 +10231,55 @@
       </p:sp>
       <p:sp>
         <p:nvSpPr>
-          <p:cNvPr id="11" name="Rectangle 10"/>
+          <p:cNvPr id="12" name="TextBox 11"/>
+          <p:cNvSpPr txBox="1"/>
+          <p:nvPr/>
+        </p:nvSpPr>
+        <p:spPr>
+          <a:xfrm>
+            <a:off x="9491472" y="1673352"/>
+            <a:ext cx="2587752" cy="685800"/>
+          </a:xfrm>
+          <a:prstGeom prst="rect">
+            <a:avLst/>
+          </a:prstGeom>
+          <a:noFill/>
+        </p:spPr>
+        <p:txBody>
+          <a:bodyPr wrap="square">
+            <a:spAutoFit/>
+          </a:bodyPr>
+          <a:lstStyle/>
+          <a:p>
+            <a:pPr algn="l"/>
+            <a:r>
+              <a:rPr sz="1000" b="0" i="0">
+                <a:solidFill>
+                  <a:srgbClr val="BBD4FF"/>
+                </a:solidFill>
+                <a:latin typeface="Calibri"/>
+              </a:rPr>
+              <a:t>Segments vendors as domestic, international, and one-time</a:t>
+            </a:r>
+          </a:p>
+        </p:txBody>
+      </p:sp>
+      <p:sp>
+        <p:nvSpPr>
+          <p:cNvPr id="13" name="Rectangle 12"/>
           <p:cNvSpPr/>
           <p:nvPr/>
         </p:nvSpPr>
         <p:spPr>
           <a:xfrm>
-            <a:off x="749808" y="987552"/>
-            <a:ext cx="6227064" cy="246888"/>
-          </a:xfrm>
-          <a:prstGeom prst="rect">
-            <a:avLst/>
-          </a:prstGeom>
-          <a:solidFill>
-            <a:srgbClr val="FF7200"/>
+            <a:off x="9345168" y="2551176"/>
+            <a:ext cx="54864" cy="54864"/>
+          </a:xfrm>
+          <a:prstGeom prst="rect">
+            <a:avLst/>
+          </a:prstGeom>
+          <a:solidFill>
+            <a:srgbClr val="0091DA"/>
           </a:solidFill>
           <a:ln>
             <a:noFill/>
@@ -10242,14 +10309,14 @@
       </p:sp>
       <p:sp>
         <p:nvSpPr>
-          <p:cNvPr id="12" name="TextBox 11"/>
+          <p:cNvPr id="14" name="TextBox 13"/>
           <p:cNvSpPr txBox="1"/>
           <p:nvPr/>
         </p:nvSpPr>
         <p:spPr>
           <a:xfrm>
-            <a:off x="749808" y="1005840"/>
-            <a:ext cx="6227064" cy="246888"/>
+            <a:off x="9491472" y="2478024"/>
+            <a:ext cx="2587752" cy="685800"/>
           </a:xfrm>
           <a:prstGeom prst="rect">
             <a:avLst/>
@@ -10264,36 +10331,36 @@
           <a:p>
             <a:pPr algn="l"/>
             <a:r>
-              <a:rPr sz="850" b="1" i="0">
+              <a:rPr sz="1000" b="0" i="0">
                 <a:solidFill>
-                  <a:srgbClr val="FFFFFF"/>
+                  <a:srgbClr val="BBD4FF"/>
                 </a:solidFill>
                 <a:latin typeface="Calibri"/>
               </a:rPr>
-              <a:t>  Vendor Health: 11 Active · 2 Non-Active · 10 Domestic · 2 MSME</a:t>
-            </a:r>
-          </a:p>
-        </p:txBody>
-      </p:sp>
-      <p:sp>
-        <p:nvSpPr>
-          <p:cNvPr id="13" name="Rectangle 12"/>
+              <a:t>Shows which vendors account for the highest share of spend</a:t>
+            </a:r>
+          </a:p>
+        </p:txBody>
+      </p:sp>
+      <p:sp>
+        <p:nvSpPr>
+          <p:cNvPr id="15" name="Rectangle 14"/>
           <p:cNvSpPr/>
           <p:nvPr/>
         </p:nvSpPr>
         <p:spPr>
           <a:xfrm>
-            <a:off x="749808" y="2011680"/>
-            <a:ext cx="5321808" cy="3200400"/>
-          </a:xfrm>
-          <a:prstGeom prst="rect">
-            <a:avLst/>
-          </a:prstGeom>
-          <a:noFill/>
-          <a:ln w="31750">
-            <a:solidFill>
-              <a:srgbClr val="FF7200"/>
-            </a:solidFill>
+            <a:off x="9345168" y="3355848"/>
+            <a:ext cx="54864" cy="54864"/>
+          </a:xfrm>
+          <a:prstGeom prst="rect">
+            <a:avLst/>
+          </a:prstGeom>
+          <a:solidFill>
+            <a:srgbClr val="0091DA"/>
+          </a:solidFill>
+          <a:ln>
+            <a:noFill/>
           </a:ln>
         </p:spPr>
         <p:style>
@@ -10320,57 +10387,14 @@
       </p:sp>
       <p:sp>
         <p:nvSpPr>
-          <p:cNvPr id="14" name="Rectangle 13"/>
-          <p:cNvSpPr/>
-          <p:nvPr/>
-        </p:nvSpPr>
-        <p:spPr>
-          <a:xfrm>
-            <a:off x="749808" y="1728216"/>
-            <a:ext cx="3058668" cy="246888"/>
-          </a:xfrm>
-          <a:prstGeom prst="rect">
-            <a:avLst/>
-          </a:prstGeom>
-          <a:solidFill>
-            <a:srgbClr val="FF7200"/>
-          </a:solidFill>
-          <a:ln>
-            <a:noFill/>
-          </a:ln>
-        </p:spPr>
-        <p:style>
-          <a:lnRef idx="1">
-            <a:schemeClr val="accent1"/>
-          </a:lnRef>
-          <a:fillRef idx="3">
-            <a:schemeClr val="accent1"/>
-          </a:fillRef>
-          <a:effectRef idx="2">
-            <a:schemeClr val="accent1"/>
-          </a:effectRef>
-          <a:fontRef idx="minor">
-            <a:schemeClr val="lt1"/>
-          </a:fontRef>
-        </p:style>
-        <p:txBody>
-          <a:bodyPr rtlCol="0" anchor="ctr"/>
-          <a:lstStyle/>
-          <a:p>
-            <a:pPr algn="ctr"/>
-          </a:p>
-        </p:txBody>
-      </p:sp>
-      <p:sp>
-        <p:nvSpPr>
-          <p:cNvPr id="15" name="TextBox 14"/>
+          <p:cNvPr id="16" name="TextBox 15"/>
           <p:cNvSpPr txBox="1"/>
           <p:nvPr/>
         </p:nvSpPr>
         <p:spPr>
           <a:xfrm>
-            <a:off x="749808" y="1746504"/>
-            <a:ext cx="3058668" cy="246888"/>
+            <a:off x="9491472" y="3282696"/>
+            <a:ext cx="2587752" cy="685800"/>
           </a:xfrm>
           <a:prstGeom prst="rect">
             <a:avLst/>
@@ -10385,134 +10409,13 @@
           <a:p>
             <a:pPr algn="l"/>
             <a:r>
-              <a:rPr sz="850" b="1" i="0">
+              <a:rPr sz="1000" b="0" i="0">
                 <a:solidFill>
-                  <a:srgbClr val="FFFFFF"/>
+                  <a:srgbClr val="BBD4FF"/>
                 </a:solidFill>
                 <a:latin typeface="Calibri"/>
               </a:rPr>
-              <a:t>  Top-10 Vendors by Spend  ₹ Cr</a:t>
-            </a:r>
-          </a:p>
-        </p:txBody>
-      </p:sp>
-      <p:sp>
-        <p:nvSpPr>
-          <p:cNvPr id="16" name="Rectangle 15"/>
-          <p:cNvSpPr/>
-          <p:nvPr/>
-        </p:nvSpPr>
-        <p:spPr>
-          <a:xfrm>
-            <a:off x="6135624" y="2011680"/>
-            <a:ext cx="5961888" cy="3200400"/>
-          </a:xfrm>
-          <a:prstGeom prst="rect">
-            <a:avLst/>
-          </a:prstGeom>
-          <a:noFill/>
-          <a:ln w="31750">
-            <a:solidFill>
-              <a:srgbClr val="FF7200"/>
-            </a:solidFill>
-          </a:ln>
-        </p:spPr>
-        <p:style>
-          <a:lnRef idx="1">
-            <a:schemeClr val="accent1"/>
-          </a:lnRef>
-          <a:fillRef idx="3">
-            <a:schemeClr val="accent1"/>
-          </a:fillRef>
-          <a:effectRef idx="2">
-            <a:schemeClr val="accent1"/>
-          </a:effectRef>
-          <a:fontRef idx="minor">
-            <a:schemeClr val="lt1"/>
-          </a:fontRef>
-        </p:style>
-        <p:txBody>
-          <a:bodyPr rtlCol="0" anchor="ctr"/>
-          <a:lstStyle/>
-          <a:p>
-            <a:pPr algn="ctr"/>
-          </a:p>
-        </p:txBody>
-      </p:sp>
-      <p:sp>
-        <p:nvSpPr>
-          <p:cNvPr id="17" name="Rectangle 16"/>
-          <p:cNvSpPr/>
-          <p:nvPr/>
-        </p:nvSpPr>
-        <p:spPr>
-          <a:xfrm>
-            <a:off x="6135624" y="1728216"/>
-            <a:ext cx="2290572" cy="246888"/>
-          </a:xfrm>
-          <a:prstGeom prst="rect">
-            <a:avLst/>
-          </a:prstGeom>
-          <a:solidFill>
-            <a:srgbClr val="FF7200"/>
-          </a:solidFill>
-          <a:ln>
-            <a:noFill/>
-          </a:ln>
-        </p:spPr>
-        <p:style>
-          <a:lnRef idx="1">
-            <a:schemeClr val="accent1"/>
-          </a:lnRef>
-          <a:fillRef idx="3">
-            <a:schemeClr val="accent1"/>
-          </a:fillRef>
-          <a:effectRef idx="2">
-            <a:schemeClr val="accent1"/>
-          </a:effectRef>
-          <a:fontRef idx="minor">
-            <a:schemeClr val="lt1"/>
-          </a:fontRef>
-        </p:style>
-        <p:txBody>
-          <a:bodyPr rtlCol="0" anchor="ctr"/>
-          <a:lstStyle/>
-          <a:p>
-            <a:pPr algn="ctr"/>
-          </a:p>
-        </p:txBody>
-      </p:sp>
-      <p:sp>
-        <p:nvSpPr>
-          <p:cNvPr id="18" name="TextBox 17"/>
-          <p:cNvSpPr txBox="1"/>
-          <p:nvPr/>
-        </p:nvSpPr>
-        <p:spPr>
-          <a:xfrm>
-            <a:off x="6135624" y="1746504"/>
-            <a:ext cx="2290572" cy="246888"/>
-          </a:xfrm>
-          <a:prstGeom prst="rect">
-            <a:avLst/>
-          </a:prstGeom>
-          <a:noFill/>
-        </p:spPr>
-        <p:txBody>
-          <a:bodyPr wrap="square">
-            <a:spAutoFit/>
-          </a:bodyPr>
-          <a:lstStyle/>
-          <a:p>
-            <a:pPr algn="l"/>
-            <a:r>
-              <a:rPr sz="850" b="1" i="0">
-                <a:solidFill>
-                  <a:srgbClr val="FFFFFF"/>
-                </a:solidFill>
-                <a:latin typeface="Calibri"/>
-              </a:rPr>
-              <a:t>  Vendor Type Breakdown</a:t>
+              <a:t>Delivery fill rate comparison across key suppliers</a:t>
             </a:r>
           </a:p>
         </p:txBody>
@@ -10535,9 +10438,130 @@
         <p:nvPr/>
       </p:nvGrpSpPr>
       <p:grpSpPr/>
+      <p:sp>
+        <p:nvSpPr>
+          <p:cNvPr id="2" name="Rectangle 1"/>
+          <p:cNvSpPr/>
+          <p:nvPr/>
+        </p:nvSpPr>
+        <p:spPr>
+          <a:xfrm>
+            <a:off x="0" y="0"/>
+            <a:ext cx="12188952" cy="438912"/>
+          </a:xfrm>
+          <a:prstGeom prst="rect">
+            <a:avLst/>
+          </a:prstGeom>
+          <a:solidFill>
+            <a:srgbClr val="00338D"/>
+          </a:solidFill>
+          <a:ln>
+            <a:noFill/>
+          </a:ln>
+        </p:spPr>
+        <p:style>
+          <a:lnRef idx="1">
+            <a:schemeClr val="accent1"/>
+          </a:lnRef>
+          <a:fillRef idx="3">
+            <a:schemeClr val="accent1"/>
+          </a:fillRef>
+          <a:effectRef idx="2">
+            <a:schemeClr val="accent1"/>
+          </a:effectRef>
+          <a:fontRef idx="minor">
+            <a:schemeClr val="lt1"/>
+          </a:fontRef>
+        </p:style>
+        <p:txBody>
+          <a:bodyPr rtlCol="0" anchor="ctr"/>
+          <a:lstStyle/>
+          <a:p>
+            <a:pPr algn="ctr"/>
+          </a:p>
+        </p:txBody>
+      </p:sp>
+      <p:sp>
+        <p:nvSpPr>
+          <p:cNvPr id="3" name="Rectangle 2"/>
+          <p:cNvSpPr/>
+          <p:nvPr/>
+        </p:nvSpPr>
+        <p:spPr>
+          <a:xfrm>
+            <a:off x="0" y="0"/>
+            <a:ext cx="64008" cy="438912"/>
+          </a:xfrm>
+          <a:prstGeom prst="rect">
+            <a:avLst/>
+          </a:prstGeom>
+          <a:solidFill>
+            <a:srgbClr val="0091DA"/>
+          </a:solidFill>
+          <a:ln>
+            <a:noFill/>
+          </a:ln>
+        </p:spPr>
+        <p:style>
+          <a:lnRef idx="1">
+            <a:schemeClr val="accent1"/>
+          </a:lnRef>
+          <a:fillRef idx="3">
+            <a:schemeClr val="accent1"/>
+          </a:fillRef>
+          <a:effectRef idx="2">
+            <a:schemeClr val="accent1"/>
+          </a:effectRef>
+          <a:fontRef idx="minor">
+            <a:schemeClr val="lt1"/>
+          </a:fontRef>
+        </p:style>
+        <p:txBody>
+          <a:bodyPr rtlCol="0" anchor="ctr"/>
+          <a:lstStyle/>
+          <a:p>
+            <a:pPr algn="ctr"/>
+          </a:p>
+        </p:txBody>
+      </p:sp>
+      <p:sp>
+        <p:nvSpPr>
+          <p:cNvPr id="4" name="TextBox 3"/>
+          <p:cNvSpPr txBox="1"/>
+          <p:nvPr/>
+        </p:nvSpPr>
+        <p:spPr>
+          <a:xfrm>
+            <a:off x="137160" y="64008"/>
+            <a:ext cx="2926080" cy="384048"/>
+          </a:xfrm>
+          <a:prstGeom prst="rect">
+            <a:avLst/>
+          </a:prstGeom>
+          <a:noFill/>
+        </p:spPr>
+        <p:txBody>
+          <a:bodyPr wrap="square">
+            <a:spAutoFit/>
+          </a:bodyPr>
+          <a:lstStyle/>
+          <a:p>
+            <a:pPr algn="l"/>
+            <a:r>
+              <a:rPr sz="1100" b="1" i="0">
+                <a:solidFill>
+                  <a:srgbClr val="0091DA"/>
+                </a:solidFill>
+                <a:latin typeface="Calibri"/>
+              </a:rPr>
+              <a:t>KPMG  IntelliSource</a:t>
+            </a:r>
+          </a:p>
+        </p:txBody>
+      </p:sp>
       <p:pic>
         <p:nvPicPr>
-          <p:cNvPr id="2" name="Picture 1" descr="Screenshot 2026-07-08 at 2.24.43 PM.png"/>
+          <p:cNvPr id="5" name="Picture 4" descr="Screenshot 2026-07-08 at 2.24.43 PM.png"/>
           <p:cNvPicPr>
             <a:picLocks noChangeAspect="1"/>
           </p:cNvPicPr>
@@ -10551,8 +10575,8 @@
         </p:blipFill>
         <p:spPr>
           <a:xfrm>
-            <a:off x="0" y="0"/>
-            <a:ext cx="12188952" cy="6858000"/>
+            <a:off x="0" y="438912"/>
+            <a:ext cx="9144000" cy="6419088"/>
           </a:xfrm>
           <a:prstGeom prst="rect">
             <a:avLst/>
@@ -10561,20 +10585,20 @@
       </p:pic>
       <p:sp>
         <p:nvSpPr>
-          <p:cNvPr id="3" name="Rectangle 2"/>
+          <p:cNvPr id="6" name="Rectangle 5"/>
           <p:cNvSpPr/>
           <p:nvPr/>
         </p:nvSpPr>
         <p:spPr>
           <a:xfrm>
-            <a:off x="0" y="0"/>
-            <a:ext cx="12188952" cy="457200"/>
-          </a:xfrm>
-          <a:prstGeom prst="rect">
-            <a:avLst/>
-          </a:prstGeom>
-          <a:solidFill>
-            <a:srgbClr val="00338D"/>
+            <a:off x="9144000" y="438912"/>
+            <a:ext cx="3044952" cy="6419088"/>
+          </a:xfrm>
+          <a:prstGeom prst="rect">
+            <a:avLst/>
+          </a:prstGeom>
+          <a:solidFill>
+            <a:srgbClr val="051835"/>
           </a:solidFill>
           <a:ln>
             <a:noFill/>
@@ -10604,20 +10628,20 @@
       </p:sp>
       <p:sp>
         <p:nvSpPr>
-          <p:cNvPr id="4" name="Rectangle 3"/>
+          <p:cNvPr id="7" name="Rectangle 6"/>
           <p:cNvSpPr/>
           <p:nvPr/>
         </p:nvSpPr>
         <p:spPr>
           <a:xfrm>
-            <a:off x="0" y="0"/>
-            <a:ext cx="64008" cy="457200"/>
-          </a:xfrm>
-          <a:prstGeom prst="rect">
-            <a:avLst/>
-          </a:prstGeom>
-          <a:solidFill>
-            <a:srgbClr val="FF7200"/>
+            <a:off x="9144000" y="438912"/>
+            <a:ext cx="45720" cy="6419088"/>
+          </a:xfrm>
+          <a:prstGeom prst="rect">
+            <a:avLst/>
+          </a:prstGeom>
+          <a:solidFill>
+            <a:srgbClr val="0091DA"/>
           </a:solidFill>
           <a:ln>
             <a:noFill/>
@@ -10647,14 +10671,14 @@
       </p:sp>
       <p:sp>
         <p:nvSpPr>
-          <p:cNvPr id="5" name="TextBox 4"/>
+          <p:cNvPr id="8" name="TextBox 7"/>
           <p:cNvSpPr txBox="1"/>
           <p:nvPr/>
         </p:nvSpPr>
         <p:spPr>
           <a:xfrm>
-            <a:off x="137160" y="54864"/>
-            <a:ext cx="2560320" cy="347472"/>
+            <a:off x="9326880" y="640080"/>
+            <a:ext cx="2816352" cy="594360"/>
           </a:xfrm>
           <a:prstGeom prst="rect">
             <a:avLst/>
@@ -10669,103 +10693,34 @@
           <a:p>
             <a:pPr algn="l"/>
             <a:r>
-              <a:rPr sz="1100" b="1" i="0">
-                <a:solidFill>
-                  <a:srgbClr val="0091DA"/>
-                </a:solidFill>
-                <a:latin typeface="Calibri"/>
-              </a:rPr>
-              <a:t>KPMG  IntelliSource</a:t>
-            </a:r>
-          </a:p>
-        </p:txBody>
-      </p:sp>
-      <p:sp>
-        <p:nvSpPr>
-          <p:cNvPr id="6" name="TextBox 5"/>
-          <p:cNvSpPr txBox="1"/>
-          <p:nvPr/>
-        </p:nvSpPr>
-        <p:spPr>
-          <a:xfrm>
-            <a:off x="2834640" y="54864"/>
-            <a:ext cx="6858000" cy="347472"/>
-          </a:xfrm>
-          <a:prstGeom prst="rect">
-            <a:avLst/>
-          </a:prstGeom>
-          <a:noFill/>
-        </p:spPr>
-        <p:txBody>
-          <a:bodyPr wrap="square">
-            <a:spAutoFit/>
-          </a:bodyPr>
-          <a:lstStyle/>
-          <a:p>
-            <a:pPr algn="ctr"/>
-            <a:r>
-              <a:rPr sz="1400" b="1" i="0">
+              <a:rPr sz="1500" b="1" i="0">
                 <a:solidFill>
                   <a:srgbClr val="FFFFFF"/>
                 </a:solidFill>
                 <a:latin typeface="Calibri"/>
               </a:rPr>
-              <a:t>CAPEX / OPEX Dashboard</a:t>
-            </a:r>
-          </a:p>
-        </p:txBody>
-      </p:sp>
-      <p:sp>
-        <p:nvSpPr>
-          <p:cNvPr id="7" name="TextBox 6"/>
-          <p:cNvSpPr txBox="1"/>
-          <p:nvPr/>
-        </p:nvSpPr>
-        <p:spPr>
-          <a:xfrm>
-            <a:off x="9875520" y="54864"/>
-            <a:ext cx="2194560" cy="347472"/>
-          </a:xfrm>
-          <a:prstGeom prst="rect">
-            <a:avLst/>
-          </a:prstGeom>
-          <a:noFill/>
-        </p:spPr>
-        <p:txBody>
-          <a:bodyPr wrap="square">
-            <a:spAutoFit/>
-          </a:bodyPr>
-          <a:lstStyle/>
-          <a:p>
-            <a:pPr algn="r"/>
-            <a:r>
-              <a:rPr sz="900" b="0" i="0">
-                <a:solidFill>
-                  <a:srgbClr val="88AADD"/>
-                </a:solidFill>
-                <a:latin typeface="Calibri"/>
-              </a:rPr>
-              <a:t>Utilization</a:t>
-            </a:r>
-          </a:p>
-        </p:txBody>
-      </p:sp>
-      <p:sp>
-        <p:nvSpPr>
-          <p:cNvPr id="8" name="Rectangle 7"/>
+              <a:t>CAPEX / OPEX
+Dashboard</a:t>
+            </a:r>
+          </a:p>
+        </p:txBody>
+      </p:sp>
+      <p:sp>
+        <p:nvSpPr>
+          <p:cNvPr id="9" name="Rectangle 8"/>
           <p:cNvSpPr/>
           <p:nvPr/>
         </p:nvSpPr>
         <p:spPr>
           <a:xfrm>
-            <a:off x="0" y="6565392"/>
-            <a:ext cx="12188952" cy="292608"/>
-          </a:xfrm>
-          <a:prstGeom prst="rect">
-            <a:avLst/>
-          </a:prstGeom>
-          <a:solidFill>
-            <a:srgbClr val="00338D"/>
+            <a:off x="9345168" y="1472184"/>
+            <a:ext cx="54864" cy="54864"/>
+          </a:xfrm>
+          <a:prstGeom prst="rect">
+            <a:avLst/>
+          </a:prstGeom>
+          <a:solidFill>
+            <a:srgbClr val="0091DA"/>
           </a:solidFill>
           <a:ln>
             <a:noFill/>
@@ -10795,14 +10750,14 @@
       </p:sp>
       <p:sp>
         <p:nvSpPr>
-          <p:cNvPr id="9" name="TextBox 8"/>
+          <p:cNvPr id="10" name="TextBox 9"/>
           <p:cNvSpPr txBox="1"/>
           <p:nvPr/>
         </p:nvSpPr>
         <p:spPr>
           <a:xfrm>
-            <a:off x="182880" y="6592824"/>
-            <a:ext cx="11823192" cy="219456"/>
+            <a:off x="9491472" y="1399032"/>
+            <a:ext cx="2587752" cy="685800"/>
           </a:xfrm>
           <a:prstGeom prst="rect">
             <a:avLst/>
@@ -10815,38 +10770,38 @@
           </a:bodyPr>
           <a:lstStyle/>
           <a:p>
-            <a:pPr algn="r"/>
-            <a:r>
-              <a:rPr sz="750" b="0" i="0">
+            <a:pPr algn="l"/>
+            <a:r>
+              <a:rPr sz="1000" b="0" i="0">
                 <a:solidFill>
-                  <a:srgbClr val="88AADD"/>
+                  <a:srgbClr val="BBD4FF"/>
                 </a:solidFill>
                 <a:latin typeface="Calibri"/>
               </a:rPr>
-              <a:t>CONFIDENTIAL  |  KPMG India  |  Q2 FY2024</a:t>
-            </a:r>
-          </a:p>
-        </p:txBody>
-      </p:sp>
-      <p:sp>
-        <p:nvSpPr>
-          <p:cNvPr id="10" name="Rectangle 9"/>
+              <a:t>Automatically classifies each order as capital or operational</a:t>
+            </a:r>
+          </a:p>
+        </p:txBody>
+      </p:sp>
+      <p:sp>
+        <p:nvSpPr>
+          <p:cNvPr id="11" name="Rectangle 10"/>
           <p:cNvSpPr/>
           <p:nvPr/>
         </p:nvSpPr>
         <p:spPr>
           <a:xfrm>
-            <a:off x="749808" y="649224"/>
-            <a:ext cx="2843784" cy="630936"/>
-          </a:xfrm>
-          <a:prstGeom prst="rect">
-            <a:avLst/>
-          </a:prstGeom>
-          <a:noFill/>
-          <a:ln w="31750">
-            <a:solidFill>
-              <a:srgbClr val="FF7200"/>
-            </a:solidFill>
+            <a:off x="9345168" y="2276856"/>
+            <a:ext cx="54864" cy="54864"/>
+          </a:xfrm>
+          <a:prstGeom prst="rect">
+            <a:avLst/>
+          </a:prstGeom>
+          <a:solidFill>
+            <a:srgbClr val="0091DA"/>
+          </a:solidFill>
+          <a:ln>
+            <a:noFill/>
           </a:ln>
         </p:spPr>
         <p:style>
@@ -10873,20 +10828,55 @@
       </p:sp>
       <p:sp>
         <p:nvSpPr>
-          <p:cNvPr id="11" name="Rectangle 10"/>
+          <p:cNvPr id="12" name="TextBox 11"/>
+          <p:cNvSpPr txBox="1"/>
+          <p:nvPr/>
+        </p:nvSpPr>
+        <p:spPr>
+          <a:xfrm>
+            <a:off x="9491472" y="2203704"/>
+            <a:ext cx="2587752" cy="685800"/>
+          </a:xfrm>
+          <a:prstGeom prst="rect">
+            <a:avLst/>
+          </a:prstGeom>
+          <a:noFill/>
+        </p:spPr>
+        <p:txBody>
+          <a:bodyPr wrap="square">
+            <a:spAutoFit/>
+          </a:bodyPr>
+          <a:lstStyle/>
+          <a:p>
+            <a:pPr algn="l"/>
+            <a:r>
+              <a:rPr sz="1000" b="0" i="0">
+                <a:solidFill>
+                  <a:srgbClr val="BBD4FF"/>
+                </a:solidFill>
+                <a:latin typeface="Calibri"/>
+              </a:rPr>
+              <a:t>Monthly trend shows how spend shifts between categories</a:t>
+            </a:r>
+          </a:p>
+        </p:txBody>
+      </p:sp>
+      <p:sp>
+        <p:nvSpPr>
+          <p:cNvPr id="13" name="Rectangle 12"/>
           <p:cNvSpPr/>
           <p:nvPr/>
         </p:nvSpPr>
         <p:spPr>
           <a:xfrm>
-            <a:off x="749808" y="1316736"/>
-            <a:ext cx="2962656" cy="246888"/>
-          </a:xfrm>
-          <a:prstGeom prst="rect">
-            <a:avLst/>
-          </a:prstGeom>
-          <a:solidFill>
-            <a:srgbClr val="FF7200"/>
+            <a:off x="9345168" y="3081528"/>
+            <a:ext cx="54864" cy="54864"/>
+          </a:xfrm>
+          <a:prstGeom prst="rect">
+            <a:avLst/>
+          </a:prstGeom>
+          <a:solidFill>
+            <a:srgbClr val="0091DA"/>
           </a:solidFill>
           <a:ln>
             <a:noFill/>
@@ -10916,14 +10906,14 @@
       </p:sp>
       <p:sp>
         <p:nvSpPr>
-          <p:cNvPr id="12" name="TextBox 11"/>
+          <p:cNvPr id="14" name="TextBox 13"/>
           <p:cNvSpPr txBox="1"/>
           <p:nvPr/>
         </p:nvSpPr>
         <p:spPr>
           <a:xfrm>
-            <a:off x="749808" y="1335024"/>
-            <a:ext cx="2962656" cy="246888"/>
+            <a:off x="9491472" y="3008376"/>
+            <a:ext cx="2587752" cy="685800"/>
           </a:xfrm>
           <a:prstGeom prst="rect">
             <a:avLst/>
@@ -10938,36 +10928,36 @@
           <a:p>
             <a:pPr algn="l"/>
             <a:r>
-              <a:rPr sz="850" b="1" i="0">
+              <a:rPr sz="1000" b="0" i="0">
                 <a:solidFill>
-                  <a:srgbClr val="FFFFFF"/>
+                  <a:srgbClr val="BBD4FF"/>
                 </a:solidFill>
                 <a:latin typeface="Calibri"/>
               </a:rPr>
-              <a:t>  CAPEX  ₹1,899.80 Cr  (48.3%)</a:t>
-            </a:r>
-          </a:p>
-        </p:txBody>
-      </p:sp>
-      <p:sp>
-        <p:nvSpPr>
-          <p:cNvPr id="13" name="Rectangle 12"/>
+              <a:t>Tracks pending deliveries for both capital and operational orders</a:t>
+            </a:r>
+          </a:p>
+        </p:txBody>
+      </p:sp>
+      <p:sp>
+        <p:nvSpPr>
+          <p:cNvPr id="15" name="Rectangle 14"/>
           <p:cNvSpPr/>
           <p:nvPr/>
         </p:nvSpPr>
         <p:spPr>
           <a:xfrm>
-            <a:off x="3593592" y="649224"/>
-            <a:ext cx="2852928" cy="630936"/>
-          </a:xfrm>
-          <a:prstGeom prst="rect">
-            <a:avLst/>
-          </a:prstGeom>
-          <a:noFill/>
-          <a:ln w="31750">
-            <a:solidFill>
-              <a:srgbClr val="FF7200"/>
-            </a:solidFill>
+            <a:off x="9345168" y="3886200"/>
+            <a:ext cx="54864" cy="54864"/>
+          </a:xfrm>
+          <a:prstGeom prst="rect">
+            <a:avLst/>
+          </a:prstGeom>
+          <a:solidFill>
+            <a:srgbClr val="0091DA"/>
+          </a:solidFill>
+          <a:ln>
+            <a:noFill/>
           </a:ln>
         </p:spPr>
         <p:style>
@@ -10994,57 +10984,14 @@
       </p:sp>
       <p:sp>
         <p:nvSpPr>
-          <p:cNvPr id="14" name="Rectangle 13"/>
-          <p:cNvSpPr/>
-          <p:nvPr/>
-        </p:nvSpPr>
-        <p:spPr>
-          <a:xfrm>
-            <a:off x="3593592" y="1316736"/>
-            <a:ext cx="2866644" cy="246888"/>
-          </a:xfrm>
-          <a:prstGeom prst="rect">
-            <a:avLst/>
-          </a:prstGeom>
-          <a:solidFill>
-            <a:srgbClr val="FF7200"/>
-          </a:solidFill>
-          <a:ln>
-            <a:noFill/>
-          </a:ln>
-        </p:spPr>
-        <p:style>
-          <a:lnRef idx="1">
-            <a:schemeClr val="accent1"/>
-          </a:lnRef>
-          <a:fillRef idx="3">
-            <a:schemeClr val="accent1"/>
-          </a:fillRef>
-          <a:effectRef idx="2">
-            <a:schemeClr val="accent1"/>
-          </a:effectRef>
-          <a:fontRef idx="minor">
-            <a:schemeClr val="lt1"/>
-          </a:fontRef>
-        </p:style>
-        <p:txBody>
-          <a:bodyPr rtlCol="0" anchor="ctr"/>
-          <a:lstStyle/>
-          <a:p>
-            <a:pPr algn="ctr"/>
-          </a:p>
-        </p:txBody>
-      </p:sp>
-      <p:sp>
-        <p:nvSpPr>
-          <p:cNvPr id="15" name="TextBox 14"/>
+          <p:cNvPr id="16" name="TextBox 15"/>
           <p:cNvSpPr txBox="1"/>
           <p:nvPr/>
         </p:nvSpPr>
         <p:spPr>
           <a:xfrm>
-            <a:off x="3593592" y="1335024"/>
-            <a:ext cx="2866644" cy="246888"/>
+            <a:off x="9491472" y="3813048"/>
+            <a:ext cx="2587752" cy="685800"/>
           </a:xfrm>
           <a:prstGeom prst="rect">
             <a:avLst/>
@@ -11059,255 +11006,13 @@
           <a:p>
             <a:pPr algn="l"/>
             <a:r>
-              <a:rPr sz="850" b="1" i="0">
+              <a:rPr sz="1000" b="0" i="0">
                 <a:solidFill>
-                  <a:srgbClr val="FFFFFF"/>
+                  <a:srgbClr val="BBD4FF"/>
                 </a:solidFill>
                 <a:latin typeface="Calibri"/>
               </a:rPr>
-              <a:t>  OPEX  ₹2,036.54 Cr  (51.7%)</a:t>
-            </a:r>
-          </a:p>
-        </p:txBody>
-      </p:sp>
-      <p:sp>
-        <p:nvSpPr>
-          <p:cNvPr id="16" name="Rectangle 15"/>
-          <p:cNvSpPr/>
-          <p:nvPr/>
-        </p:nvSpPr>
-        <p:spPr>
-          <a:xfrm>
-            <a:off x="749808" y="1572768"/>
-            <a:ext cx="5257800" cy="2743200"/>
-          </a:xfrm>
-          <a:prstGeom prst="rect">
-            <a:avLst/>
-          </a:prstGeom>
-          <a:noFill/>
-          <a:ln w="31750">
-            <a:solidFill>
-              <a:srgbClr val="FF7200"/>
-            </a:solidFill>
-          </a:ln>
-        </p:spPr>
-        <p:style>
-          <a:lnRef idx="1">
-            <a:schemeClr val="accent1"/>
-          </a:lnRef>
-          <a:fillRef idx="3">
-            <a:schemeClr val="accent1"/>
-          </a:fillRef>
-          <a:effectRef idx="2">
-            <a:schemeClr val="accent1"/>
-          </a:effectRef>
-          <a:fontRef idx="minor">
-            <a:schemeClr val="lt1"/>
-          </a:fontRef>
-        </p:style>
-        <p:txBody>
-          <a:bodyPr rtlCol="0" anchor="ctr"/>
-          <a:lstStyle/>
-          <a:p>
-            <a:pPr algn="ctr"/>
-          </a:p>
-        </p:txBody>
-      </p:sp>
-      <p:sp>
-        <p:nvSpPr>
-          <p:cNvPr id="17" name="Rectangle 16"/>
-          <p:cNvSpPr/>
-          <p:nvPr/>
-        </p:nvSpPr>
-        <p:spPr>
-          <a:xfrm>
-            <a:off x="749808" y="1289304"/>
-            <a:ext cx="2866644" cy="246888"/>
-          </a:xfrm>
-          <a:prstGeom prst="rect">
-            <a:avLst/>
-          </a:prstGeom>
-          <a:solidFill>
-            <a:srgbClr val="FF7200"/>
-          </a:solidFill>
-          <a:ln>
-            <a:noFill/>
-          </a:ln>
-        </p:spPr>
-        <p:style>
-          <a:lnRef idx="1">
-            <a:schemeClr val="accent1"/>
-          </a:lnRef>
-          <a:fillRef idx="3">
-            <a:schemeClr val="accent1"/>
-          </a:fillRef>
-          <a:effectRef idx="2">
-            <a:schemeClr val="accent1"/>
-          </a:effectRef>
-          <a:fontRef idx="minor">
-            <a:schemeClr val="lt1"/>
-          </a:fontRef>
-        </p:style>
-        <p:txBody>
-          <a:bodyPr rtlCol="0" anchor="ctr"/>
-          <a:lstStyle/>
-          <a:p>
-            <a:pPr algn="ctr"/>
-          </a:p>
-        </p:txBody>
-      </p:sp>
-      <p:sp>
-        <p:nvSpPr>
-          <p:cNvPr id="18" name="TextBox 17"/>
-          <p:cNvSpPr txBox="1"/>
-          <p:nvPr/>
-        </p:nvSpPr>
-        <p:spPr>
-          <a:xfrm>
-            <a:off x="749808" y="1307592"/>
-            <a:ext cx="2866644" cy="246888"/>
-          </a:xfrm>
-          <a:prstGeom prst="rect">
-            <a:avLst/>
-          </a:prstGeom>
-          <a:noFill/>
-        </p:spPr>
-        <p:txBody>
-          <a:bodyPr wrap="square">
-            <a:spAutoFit/>
-          </a:bodyPr>
-          <a:lstStyle/>
-          <a:p>
-            <a:pPr algn="l"/>
-            <a:r>
-              <a:rPr sz="850" b="1" i="0">
-                <a:solidFill>
-                  <a:srgbClr val="FFFFFF"/>
-                </a:solidFill>
-                <a:latin typeface="Calibri"/>
-              </a:rPr>
-              <a:t>  Monthly CAPEX vs OPEX Trend</a:t>
-            </a:r>
-          </a:p>
-        </p:txBody>
-      </p:sp>
-      <p:sp>
-        <p:nvSpPr>
-          <p:cNvPr id="19" name="Rectangle 18"/>
-          <p:cNvSpPr/>
-          <p:nvPr/>
-        </p:nvSpPr>
-        <p:spPr>
-          <a:xfrm>
-            <a:off x="6071616" y="1572768"/>
-            <a:ext cx="6108192" cy="2743200"/>
-          </a:xfrm>
-          <a:prstGeom prst="rect">
-            <a:avLst/>
-          </a:prstGeom>
-          <a:noFill/>
-          <a:ln w="31750">
-            <a:solidFill>
-              <a:srgbClr val="FF7200"/>
-            </a:solidFill>
-          </a:ln>
-        </p:spPr>
-        <p:style>
-          <a:lnRef idx="1">
-            <a:schemeClr val="accent1"/>
-          </a:lnRef>
-          <a:fillRef idx="3">
-            <a:schemeClr val="accent1"/>
-          </a:fillRef>
-          <a:effectRef idx="2">
-            <a:schemeClr val="accent1"/>
-          </a:effectRef>
-          <a:fontRef idx="minor">
-            <a:schemeClr val="lt1"/>
-          </a:fontRef>
-        </p:style>
-        <p:txBody>
-          <a:bodyPr rtlCol="0" anchor="ctr"/>
-          <a:lstStyle/>
-          <a:p>
-            <a:pPr algn="ctr"/>
-          </a:p>
-        </p:txBody>
-      </p:sp>
-      <p:sp>
-        <p:nvSpPr>
-          <p:cNvPr id="20" name="Rectangle 19"/>
-          <p:cNvSpPr/>
-          <p:nvPr/>
-        </p:nvSpPr>
-        <p:spPr>
-          <a:xfrm>
-            <a:off x="6071616" y="1289304"/>
-            <a:ext cx="2386584" cy="246888"/>
-          </a:xfrm>
-          <a:prstGeom prst="rect">
-            <a:avLst/>
-          </a:prstGeom>
-          <a:solidFill>
-            <a:srgbClr val="FF7200"/>
-          </a:solidFill>
-          <a:ln>
-            <a:noFill/>
-          </a:ln>
-        </p:spPr>
-        <p:style>
-          <a:lnRef idx="1">
-            <a:schemeClr val="accent1"/>
-          </a:lnRef>
-          <a:fillRef idx="3">
-            <a:schemeClr val="accent1"/>
-          </a:fillRef>
-          <a:effectRef idx="2">
-            <a:schemeClr val="accent1"/>
-          </a:effectRef>
-          <a:fontRef idx="minor">
-            <a:schemeClr val="lt1"/>
-          </a:fontRef>
-        </p:style>
-        <p:txBody>
-          <a:bodyPr rtlCol="0" anchor="ctr"/>
-          <a:lstStyle/>
-          <a:p>
-            <a:pPr algn="ctr"/>
-          </a:p>
-        </p:txBody>
-      </p:sp>
-      <p:sp>
-        <p:nvSpPr>
-          <p:cNvPr id="21" name="TextBox 20"/>
-          <p:cNvSpPr txBox="1"/>
-          <p:nvPr/>
-        </p:nvSpPr>
-        <p:spPr>
-          <a:xfrm>
-            <a:off x="6071616" y="1307592"/>
-            <a:ext cx="2386584" cy="246888"/>
-          </a:xfrm>
-          <a:prstGeom prst="rect">
-            <a:avLst/>
-          </a:prstGeom>
-          <a:noFill/>
-        </p:spPr>
-        <p:txBody>
-          <a:bodyPr wrap="square">
-            <a:spAutoFit/>
-          </a:bodyPr>
-          <a:lstStyle/>
-          <a:p>
-            <a:pPr algn="l"/>
-            <a:r>
-              <a:rPr sz="850" b="1" i="0">
-                <a:solidFill>
-                  <a:srgbClr val="FFFFFF"/>
-                </a:solidFill>
-                <a:latin typeface="Calibri"/>
-              </a:rPr>
-              <a:t>  Total Split  ₹3,936 Cr</a:t>
+              <a:t>Drill down by department to see where budget is concentrated</a:t>
             </a:r>
           </a:p>
         </p:txBody>

--- a/IntelliSource_Presentation.pptx
+++ b/IntelliSource_Presentation.pptx
@@ -3260,7 +3260,7 @@
         </p:nvSpPr>
         <p:spPr>
           <a:xfrm>
-            <a:off x="274320" y="548640"/>
+            <a:off x="256032" y="502920"/>
             <a:ext cx="4572000" cy="777240"/>
           </a:xfrm>
           <a:prstGeom prst="rect">
@@ -3295,8 +3295,8 @@
         </p:nvSpPr>
         <p:spPr>
           <a:xfrm>
-            <a:off x="274320" y="1298448"/>
-            <a:ext cx="5486400" cy="320040"/>
+            <a:off x="256032" y="1280160"/>
+            <a:ext cx="5943600" cy="320040"/>
           </a:xfrm>
           <a:prstGeom prst="rect">
             <a:avLst/>
@@ -3330,8 +3330,8 @@
         </p:nvSpPr>
         <p:spPr>
           <a:xfrm>
-            <a:off x="274320" y="1783080"/>
-            <a:ext cx="5120640" cy="36576"/>
+            <a:off x="256032" y="1755648"/>
+            <a:ext cx="5029200" cy="36576"/>
           </a:xfrm>
           <a:prstGeom prst="rect">
             <a:avLst/>
@@ -3373,8 +3373,8 @@
         </p:nvSpPr>
         <p:spPr>
           <a:xfrm>
-            <a:off x="274320" y="1920240"/>
-            <a:ext cx="8229600" cy="1051560"/>
+            <a:off x="256032" y="1920240"/>
+            <a:ext cx="8321040" cy="1051560"/>
           </a:xfrm>
           <a:prstGeom prst="rect">
             <a:avLst/>
@@ -3408,8 +3408,8 @@
         </p:nvSpPr>
         <p:spPr>
           <a:xfrm>
-            <a:off x="274320" y="2971800"/>
-            <a:ext cx="8046720" cy="457200"/>
+            <a:off x="256032" y="2971800"/>
+            <a:ext cx="8046720" cy="438912"/>
           </a:xfrm>
           <a:prstGeom prst="rect">
             <a:avLst/>
@@ -3443,8 +3443,8 @@
         </p:nvSpPr>
         <p:spPr>
           <a:xfrm>
-            <a:off x="274320" y="3566160"/>
-            <a:ext cx="5120640" cy="36576"/>
+            <a:off x="256032" y="3566160"/>
+            <a:ext cx="5029200" cy="36576"/>
           </a:xfrm>
           <a:prstGeom prst="rect">
             <a:avLst/>
@@ -3486,7 +3486,7 @@
         </p:nvSpPr>
         <p:spPr>
           <a:xfrm>
-            <a:off x="274320" y="3749039"/>
+            <a:off x="256032" y="3749039"/>
             <a:ext cx="8046720" cy="347472"/>
           </a:xfrm>
           <a:prstGeom prst="rect">
@@ -3504,7 +3504,7 @@
             <a:r>
               <a:rPr sz="1300" b="0" i="0">
                 <a:solidFill>
-                  <a:srgbClr val="AAC8FF"/>
+                  <a:srgbClr val="BBD4FF"/>
                 </a:solidFill>
                 <a:latin typeface="Calibri"/>
               </a:rPr>
@@ -3521,7 +3521,7 @@
         </p:nvSpPr>
         <p:spPr>
           <a:xfrm>
-            <a:off x="274320" y="4169663"/>
+            <a:off x="256032" y="4178807"/>
             <a:ext cx="8046720" cy="347472"/>
           </a:xfrm>
           <a:prstGeom prst="rect">
@@ -3539,7 +3539,7 @@
             <a:r>
               <a:rPr sz="1300" b="0" i="0">
                 <a:solidFill>
-                  <a:srgbClr val="AAC8FF"/>
+                  <a:srgbClr val="BBD4FF"/>
                 </a:solidFill>
                 <a:latin typeface="Calibri"/>
               </a:rPr>
@@ -3556,7 +3556,7 @@
         </p:nvSpPr>
         <p:spPr>
           <a:xfrm>
-            <a:off x="274320" y="4590288"/>
+            <a:off x="256032" y="4608575"/>
             <a:ext cx="8046720" cy="347472"/>
           </a:xfrm>
           <a:prstGeom prst="rect">
@@ -3574,11 +3574,11 @@
             <a:r>
               <a:rPr sz="1300" b="0" i="0">
                 <a:solidFill>
-                  <a:srgbClr val="AAC8FF"/>
+                  <a:srgbClr val="BBD4FF"/>
                 </a:solidFill>
                 <a:latin typeface="Calibri"/>
               </a:rPr>
-              <a:t>   Detects risks invisible to standard reporting</a:t>
+              <a:t>   Risk detection invisible to standard reports</a:t>
             </a:r>
           </a:p>
         </p:txBody>
@@ -3591,7 +3591,7 @@
         </p:nvSpPr>
         <p:spPr>
           <a:xfrm>
-            <a:off x="274320" y="5010912"/>
+            <a:off x="256032" y="5038344"/>
             <a:ext cx="8046720" cy="347472"/>
           </a:xfrm>
           <a:prstGeom prst="rect">
@@ -3609,11 +3609,11 @@
             <a:r>
               <a:rPr sz="1300" b="0" i="0">
                 <a:solidFill>
-                  <a:srgbClr val="AAC8FF"/>
+                  <a:srgbClr val="BBD4FF"/>
                 </a:solidFill>
                 <a:latin typeface="Calibri"/>
               </a:rPr>
-              <a:t>   End-to-end procure-to-pay visibility</a:t>
+              <a:t>   End-to-end procure-to-pay pipeline view</a:t>
             </a:r>
           </a:p>
         </p:txBody>
@@ -3626,8 +3626,8 @@
         </p:nvSpPr>
         <p:spPr>
           <a:xfrm>
-            <a:off x="0" y="6400800"/>
-            <a:ext cx="12188952" cy="457200"/>
+            <a:off x="0" y="6419088"/>
+            <a:ext cx="12188952" cy="438912"/>
           </a:xfrm>
           <a:prstGeom prst="rect">
             <a:avLst/>
@@ -3669,8 +3669,8 @@
         </p:nvSpPr>
         <p:spPr>
           <a:xfrm>
-            <a:off x="274320" y="6455664"/>
-            <a:ext cx="8229600" cy="347472"/>
+            <a:off x="274320" y="6492240"/>
+            <a:ext cx="8229600" cy="320040"/>
           </a:xfrm>
           <a:prstGeom prst="rect">
             <a:avLst/>
@@ -3723,13 +3723,13 @@
         <p:spPr>
           <a:xfrm>
             <a:off x="0" y="0"/>
-            <a:ext cx="12188952" cy="438912"/>
-          </a:xfrm>
-          <a:prstGeom prst="rect">
-            <a:avLst/>
-          </a:prstGeom>
-          <a:solidFill>
-            <a:srgbClr val="00338D"/>
+            <a:ext cx="12188952" cy="6858000"/>
+          </a:xfrm>
+          <a:prstGeom prst="rect">
+            <a:avLst/>
+          </a:prstGeom>
+          <a:solidFill>
+            <a:srgbClr val="F4F6FA"/>
           </a:solidFill>
           <a:ln>
             <a:noFill/>
@@ -3765,14 +3765,14 @@
         </p:nvSpPr>
         <p:spPr>
           <a:xfrm>
-            <a:off x="0" y="0"/>
-            <a:ext cx="64008" cy="438912"/>
-          </a:xfrm>
-          <a:prstGeom prst="rect">
-            <a:avLst/>
-          </a:prstGeom>
-          <a:solidFill>
-            <a:srgbClr val="0091DA"/>
+            <a:off x="9144000" y="438912"/>
+            <a:ext cx="3044952" cy="6419088"/>
+          </a:xfrm>
+          <a:prstGeom prst="rect">
+            <a:avLst/>
+          </a:prstGeom>
+          <a:solidFill>
+            <a:srgbClr val="00338D"/>
           </a:solidFill>
           <a:ln>
             <a:noFill/>
@@ -3802,14 +3802,167 @@
       </p:sp>
       <p:sp>
         <p:nvSpPr>
-          <p:cNvPr id="4" name="TextBox 3"/>
+          <p:cNvPr id="4" name="Rectangle 3"/>
+          <p:cNvSpPr/>
+          <p:nvPr/>
+        </p:nvSpPr>
+        <p:spPr>
+          <a:xfrm>
+            <a:off x="9144000" y="438912"/>
+            <a:ext cx="54864" cy="6419088"/>
+          </a:xfrm>
+          <a:prstGeom prst="rect">
+            <a:avLst/>
+          </a:prstGeom>
+          <a:solidFill>
+            <a:srgbClr val="0091DA"/>
+          </a:solidFill>
+          <a:ln>
+            <a:noFill/>
+          </a:ln>
+        </p:spPr>
+        <p:style>
+          <a:lnRef idx="1">
+            <a:schemeClr val="accent1"/>
+          </a:lnRef>
+          <a:fillRef idx="3">
+            <a:schemeClr val="accent1"/>
+          </a:fillRef>
+          <a:effectRef idx="2">
+            <a:schemeClr val="accent1"/>
+          </a:effectRef>
+          <a:fontRef idx="minor">
+            <a:schemeClr val="lt1"/>
+          </a:fontRef>
+        </p:style>
+        <p:txBody>
+          <a:bodyPr rtlCol="0" anchor="ctr"/>
+          <a:lstStyle/>
+          <a:p>
+            <a:pPr algn="ctr"/>
+          </a:p>
+        </p:txBody>
+      </p:sp>
+      <p:pic>
+        <p:nvPicPr>
+          <p:cNvPr id="5" name="Picture 4" descr="Screenshot 2026-07-08 at 2.26.10 PM.png"/>
+          <p:cNvPicPr>
+            <a:picLocks noChangeAspect="1"/>
+          </p:cNvPicPr>
+          <p:nvPr/>
+        </p:nvPicPr>
+        <p:blipFill>
+          <a:blip r:embed="rId2"/>
+          <a:stretch>
+            <a:fillRect/>
+          </a:stretch>
+        </p:blipFill>
+        <p:spPr>
+          <a:xfrm>
+            <a:off x="0" y="438912"/>
+            <a:ext cx="9144000" cy="6419088"/>
+          </a:xfrm>
+          <a:prstGeom prst="rect">
+            <a:avLst/>
+          </a:prstGeom>
+        </p:spPr>
+      </p:pic>
+      <p:sp>
+        <p:nvSpPr>
+          <p:cNvPr id="6" name="Rectangle 5"/>
+          <p:cNvSpPr/>
+          <p:nvPr/>
+        </p:nvSpPr>
+        <p:spPr>
+          <a:xfrm>
+            <a:off x="0" y="0"/>
+            <a:ext cx="12188952" cy="438912"/>
+          </a:xfrm>
+          <a:prstGeom prst="rect">
+            <a:avLst/>
+          </a:prstGeom>
+          <a:solidFill>
+            <a:srgbClr val="00338D"/>
+          </a:solidFill>
+          <a:ln>
+            <a:noFill/>
+          </a:ln>
+        </p:spPr>
+        <p:style>
+          <a:lnRef idx="1">
+            <a:schemeClr val="accent1"/>
+          </a:lnRef>
+          <a:fillRef idx="3">
+            <a:schemeClr val="accent1"/>
+          </a:fillRef>
+          <a:effectRef idx="2">
+            <a:schemeClr val="accent1"/>
+          </a:effectRef>
+          <a:fontRef idx="minor">
+            <a:schemeClr val="lt1"/>
+          </a:fontRef>
+        </p:style>
+        <p:txBody>
+          <a:bodyPr rtlCol="0" anchor="ctr"/>
+          <a:lstStyle/>
+          <a:p>
+            <a:pPr algn="ctr"/>
+          </a:p>
+        </p:txBody>
+      </p:sp>
+      <p:sp>
+        <p:nvSpPr>
+          <p:cNvPr id="7" name="Rectangle 6"/>
+          <p:cNvSpPr/>
+          <p:nvPr/>
+        </p:nvSpPr>
+        <p:spPr>
+          <a:xfrm>
+            <a:off x="0" y="0"/>
+            <a:ext cx="64008" cy="438912"/>
+          </a:xfrm>
+          <a:prstGeom prst="rect">
+            <a:avLst/>
+          </a:prstGeom>
+          <a:solidFill>
+            <a:srgbClr val="0091DA"/>
+          </a:solidFill>
+          <a:ln>
+            <a:noFill/>
+          </a:ln>
+        </p:spPr>
+        <p:style>
+          <a:lnRef idx="1">
+            <a:schemeClr val="accent1"/>
+          </a:lnRef>
+          <a:fillRef idx="3">
+            <a:schemeClr val="accent1"/>
+          </a:fillRef>
+          <a:effectRef idx="2">
+            <a:schemeClr val="accent1"/>
+          </a:effectRef>
+          <a:fontRef idx="minor">
+            <a:schemeClr val="lt1"/>
+          </a:fontRef>
+        </p:style>
+        <p:txBody>
+          <a:bodyPr rtlCol="0" anchor="ctr"/>
+          <a:lstStyle/>
+          <a:p>
+            <a:pPr algn="ctr"/>
+          </a:p>
+        </p:txBody>
+      </p:sp>
+      <p:sp>
+        <p:nvSpPr>
+          <p:cNvPr id="8" name="TextBox 7"/>
           <p:cNvSpPr txBox="1"/>
           <p:nvPr/>
         </p:nvSpPr>
         <p:spPr>
           <a:xfrm>
-            <a:off x="137160" y="64008"/>
-            <a:ext cx="2926080" cy="384048"/>
+            <a:off x="146304" y="73152"/>
+            <a:ext cx="3200400" cy="365760"/>
           </a:xfrm>
           <a:prstGeom prst="rect">
             <a:avLst/>
@@ -3835,126 +3988,16 @@
           </a:p>
         </p:txBody>
       </p:sp>
-      <p:pic>
-        <p:nvPicPr>
-          <p:cNvPr id="5" name="Picture 4" descr="Screenshot 2026-07-08 at 2.26.10 PM.png"/>
-          <p:cNvPicPr>
-            <a:picLocks noChangeAspect="1"/>
-          </p:cNvPicPr>
-          <p:nvPr/>
-        </p:nvPicPr>
-        <p:blipFill>
-          <a:blip r:embed="rId2"/>
-          <a:stretch>
-            <a:fillRect/>
-          </a:stretch>
-        </p:blipFill>
-        <p:spPr>
-          <a:xfrm>
-            <a:off x="0" y="438912"/>
-            <a:ext cx="9144000" cy="6419088"/>
-          </a:xfrm>
-          <a:prstGeom prst="rect">
-            <a:avLst/>
-          </a:prstGeom>
-        </p:spPr>
-      </p:pic>
-      <p:sp>
-        <p:nvSpPr>
-          <p:cNvPr id="6" name="Rectangle 5"/>
-          <p:cNvSpPr/>
-          <p:nvPr/>
-        </p:nvSpPr>
-        <p:spPr>
-          <a:xfrm>
-            <a:off x="9144000" y="438912"/>
-            <a:ext cx="3044952" cy="6419088"/>
-          </a:xfrm>
-          <a:prstGeom prst="rect">
-            <a:avLst/>
-          </a:prstGeom>
-          <a:solidFill>
-            <a:srgbClr val="051835"/>
-          </a:solidFill>
-          <a:ln>
-            <a:noFill/>
-          </a:ln>
-        </p:spPr>
-        <p:style>
-          <a:lnRef idx="1">
-            <a:schemeClr val="accent1"/>
-          </a:lnRef>
-          <a:fillRef idx="3">
-            <a:schemeClr val="accent1"/>
-          </a:fillRef>
-          <a:effectRef idx="2">
-            <a:schemeClr val="accent1"/>
-          </a:effectRef>
-          <a:fontRef idx="minor">
-            <a:schemeClr val="lt1"/>
-          </a:fontRef>
-        </p:style>
-        <p:txBody>
-          <a:bodyPr rtlCol="0" anchor="ctr"/>
-          <a:lstStyle/>
-          <a:p>
-            <a:pPr algn="ctr"/>
-          </a:p>
-        </p:txBody>
-      </p:sp>
-      <p:sp>
-        <p:nvSpPr>
-          <p:cNvPr id="7" name="Rectangle 6"/>
-          <p:cNvSpPr/>
-          <p:nvPr/>
-        </p:nvSpPr>
-        <p:spPr>
-          <a:xfrm>
-            <a:off x="9144000" y="438912"/>
-            <a:ext cx="45720" cy="6419088"/>
-          </a:xfrm>
-          <a:prstGeom prst="rect">
-            <a:avLst/>
-          </a:prstGeom>
-          <a:solidFill>
-            <a:srgbClr val="0091DA"/>
-          </a:solidFill>
-          <a:ln>
-            <a:noFill/>
-          </a:ln>
-        </p:spPr>
-        <p:style>
-          <a:lnRef idx="1">
-            <a:schemeClr val="accent1"/>
-          </a:lnRef>
-          <a:fillRef idx="3">
-            <a:schemeClr val="accent1"/>
-          </a:fillRef>
-          <a:effectRef idx="2">
-            <a:schemeClr val="accent1"/>
-          </a:effectRef>
-          <a:fontRef idx="minor">
-            <a:schemeClr val="lt1"/>
-          </a:fontRef>
-        </p:style>
-        <p:txBody>
-          <a:bodyPr rtlCol="0" anchor="ctr"/>
-          <a:lstStyle/>
-          <a:p>
-            <a:pPr algn="ctr"/>
-          </a:p>
-        </p:txBody>
-      </p:sp>
-      <p:sp>
-        <p:nvSpPr>
-          <p:cNvPr id="8" name="TextBox 7"/>
+      <p:sp>
+        <p:nvSpPr>
+          <p:cNvPr id="9" name="TextBox 8"/>
           <p:cNvSpPr txBox="1"/>
           <p:nvPr/>
         </p:nvSpPr>
         <p:spPr>
           <a:xfrm>
-            <a:off x="9326880" y="640080"/>
-            <a:ext cx="2816352" cy="594360"/>
+            <a:off x="9363456" y="713232"/>
+            <a:ext cx="2606040" cy="713232"/>
           </a:xfrm>
           <a:prstGeom prst="rect">
             <a:avLst/>
@@ -3975,22 +4018,33 @@
                 </a:solidFill>
                 <a:latin typeface="Calibri"/>
               </a:rPr>
-              <a:t>P2P Lifecycle
-Tracker</a:t>
-            </a:r>
-          </a:p>
-        </p:txBody>
-      </p:sp>
-      <p:sp>
-        <p:nvSpPr>
-          <p:cNvPr id="9" name="Rectangle 8"/>
+              <a:t>P2P Lifecycle</a:t>
+            </a:r>
+          </a:p>
+          <a:p>
+            <a:pPr algn="l"/>
+            <a:r>
+              <a:rPr sz="1500" b="1" i="0">
+                <a:solidFill>
+                  <a:srgbClr val="FFFFFF"/>
+                </a:solidFill>
+                <a:latin typeface="Calibri"/>
+              </a:rPr>
+              <a:t>Tracker</a:t>
+            </a:r>
+          </a:p>
+        </p:txBody>
+      </p:sp>
+      <p:sp>
+        <p:nvSpPr>
+          <p:cNvPr id="10" name="Rectangle 9"/>
           <p:cNvSpPr/>
           <p:nvPr/>
         </p:nvSpPr>
         <p:spPr>
           <a:xfrm>
-            <a:off x="9345168" y="1472184"/>
-            <a:ext cx="54864" cy="54864"/>
+            <a:off x="9363456" y="1463040"/>
+            <a:ext cx="2606040" cy="32004"/>
           </a:xfrm>
           <a:prstGeom prst="rect">
             <a:avLst/>
@@ -4026,14 +4080,57 @@
       </p:sp>
       <p:sp>
         <p:nvSpPr>
-          <p:cNvPr id="10" name="TextBox 9"/>
+          <p:cNvPr id="11" name="Rectangle 10"/>
+          <p:cNvSpPr/>
+          <p:nvPr/>
+        </p:nvSpPr>
+        <p:spPr>
+          <a:xfrm>
+            <a:off x="9363456" y="1856232"/>
+            <a:ext cx="45720" cy="45720"/>
+          </a:xfrm>
+          <a:prstGeom prst="rect">
+            <a:avLst/>
+          </a:prstGeom>
+          <a:solidFill>
+            <a:srgbClr val="0091DA"/>
+          </a:solidFill>
+          <a:ln>
+            <a:noFill/>
+          </a:ln>
+        </p:spPr>
+        <p:style>
+          <a:lnRef idx="1">
+            <a:schemeClr val="accent1"/>
+          </a:lnRef>
+          <a:fillRef idx="3">
+            <a:schemeClr val="accent1"/>
+          </a:fillRef>
+          <a:effectRef idx="2">
+            <a:schemeClr val="accent1"/>
+          </a:effectRef>
+          <a:fontRef idx="minor">
+            <a:schemeClr val="lt1"/>
+          </a:fontRef>
+        </p:style>
+        <p:txBody>
+          <a:bodyPr rtlCol="0" anchor="ctr"/>
+          <a:lstStyle/>
+          <a:p>
+            <a:pPr algn="ctr"/>
+          </a:p>
+        </p:txBody>
+      </p:sp>
+      <p:sp>
+        <p:nvSpPr>
+          <p:cNvPr id="12" name="TextBox 11"/>
           <p:cNvSpPr txBox="1"/>
           <p:nvPr/>
         </p:nvSpPr>
         <p:spPr>
           <a:xfrm>
-            <a:off x="9491472" y="1399032"/>
-            <a:ext cx="2587752" cy="685800"/>
+            <a:off x="9546336" y="1755648"/>
+            <a:ext cx="2423160" cy="713232"/>
           </a:xfrm>
           <a:prstGeom prst="rect">
             <a:avLst/>
@@ -4048,7 +4145,7 @@
           <a:p>
             <a:pPr algn="l"/>
             <a:r>
-              <a:rPr sz="1000" b="0" i="0">
+              <a:rPr sz="950" b="0" i="0">
                 <a:solidFill>
                   <a:srgbClr val="BBD4FF"/>
                 </a:solidFill>
@@ -4061,14 +4158,14 @@
       </p:sp>
       <p:sp>
         <p:nvSpPr>
-          <p:cNvPr id="11" name="Rectangle 10"/>
+          <p:cNvPr id="13" name="Rectangle 12"/>
           <p:cNvSpPr/>
           <p:nvPr/>
         </p:nvSpPr>
         <p:spPr>
           <a:xfrm>
-            <a:off x="9345168" y="2276856"/>
-            <a:ext cx="54864" cy="54864"/>
+            <a:off x="9363456" y="2633472"/>
+            <a:ext cx="45720" cy="45720"/>
           </a:xfrm>
           <a:prstGeom prst="rect">
             <a:avLst/>
@@ -4104,14 +4201,14 @@
       </p:sp>
       <p:sp>
         <p:nvSpPr>
-          <p:cNvPr id="12" name="TextBox 11"/>
+          <p:cNvPr id="14" name="TextBox 13"/>
           <p:cNvSpPr txBox="1"/>
           <p:nvPr/>
         </p:nvSpPr>
         <p:spPr>
           <a:xfrm>
-            <a:off x="9491472" y="2203704"/>
-            <a:ext cx="2587752" cy="685800"/>
+            <a:off x="9546336" y="2532888"/>
+            <a:ext cx="2423160" cy="713232"/>
           </a:xfrm>
           <a:prstGeom prst="rect">
             <a:avLst/>
@@ -4126,7 +4223,7 @@
           <a:p>
             <a:pPr algn="l"/>
             <a:r>
-              <a:rPr sz="1000" b="0" i="0">
+              <a:rPr sz="950" b="0" i="0">
                 <a:solidFill>
                   <a:srgbClr val="BBD4FF"/>
                 </a:solidFill>
@@ -4139,14 +4236,14 @@
       </p:sp>
       <p:sp>
         <p:nvSpPr>
-          <p:cNvPr id="13" name="Rectangle 12"/>
+          <p:cNvPr id="15" name="Rectangle 14"/>
           <p:cNvSpPr/>
           <p:nvPr/>
         </p:nvSpPr>
         <p:spPr>
           <a:xfrm>
-            <a:off x="9345168" y="3081528"/>
-            <a:ext cx="54864" cy="54864"/>
+            <a:off x="9363456" y="3410712"/>
+            <a:ext cx="45720" cy="45720"/>
           </a:xfrm>
           <a:prstGeom prst="rect">
             <a:avLst/>
@@ -4182,14 +4279,14 @@
       </p:sp>
       <p:sp>
         <p:nvSpPr>
-          <p:cNvPr id="14" name="TextBox 13"/>
+          <p:cNvPr id="16" name="TextBox 15"/>
           <p:cNvSpPr txBox="1"/>
           <p:nvPr/>
         </p:nvSpPr>
         <p:spPr>
           <a:xfrm>
-            <a:off x="9491472" y="3008376"/>
-            <a:ext cx="2587752" cy="685800"/>
+            <a:off x="9546336" y="3310128"/>
+            <a:ext cx="2423160" cy="713232"/>
           </a:xfrm>
           <a:prstGeom prst="rect">
             <a:avLst/>
@@ -4204,7 +4301,7 @@
           <a:p>
             <a:pPr algn="l"/>
             <a:r>
-              <a:rPr sz="1000" b="0" i="0">
+              <a:rPr sz="950" b="0" i="0">
                 <a:solidFill>
                   <a:srgbClr val="BBD4FF"/>
                 </a:solidFill>
@@ -4217,14 +4314,14 @@
       </p:sp>
       <p:sp>
         <p:nvSpPr>
-          <p:cNvPr id="15" name="Rectangle 14"/>
+          <p:cNvPr id="17" name="Rectangle 16"/>
           <p:cNvSpPr/>
           <p:nvPr/>
         </p:nvSpPr>
         <p:spPr>
           <a:xfrm>
-            <a:off x="9345168" y="3886200"/>
-            <a:ext cx="54864" cy="54864"/>
+            <a:off x="9363456" y="4187952"/>
+            <a:ext cx="45720" cy="45720"/>
           </a:xfrm>
           <a:prstGeom prst="rect">
             <a:avLst/>
@@ -4260,14 +4357,14 @@
       </p:sp>
       <p:sp>
         <p:nvSpPr>
-          <p:cNvPr id="16" name="TextBox 15"/>
+          <p:cNvPr id="18" name="TextBox 17"/>
           <p:cNvSpPr txBox="1"/>
           <p:nvPr/>
         </p:nvSpPr>
         <p:spPr>
           <a:xfrm>
-            <a:off x="9491472" y="3813048"/>
-            <a:ext cx="2587752" cy="685800"/>
+            <a:off x="9546336" y="4087368"/>
+            <a:ext cx="2423160" cy="713232"/>
           </a:xfrm>
           <a:prstGeom prst="rect">
             <a:avLst/>
@@ -4282,27 +4379,27 @@
           <a:p>
             <a:pPr algn="l"/>
             <a:r>
-              <a:rPr sz="1000" b="0" i="0">
+              <a:rPr sz="950" b="0" i="0">
                 <a:solidFill>
                   <a:srgbClr val="BBD4FF"/>
                 </a:solidFill>
                 <a:latin typeface="Calibri"/>
               </a:rPr>
-              <a:t>Identifies where documents are delayed in the pipeline</a:t>
-            </a:r>
-          </a:p>
-        </p:txBody>
-      </p:sp>
-      <p:sp>
-        <p:nvSpPr>
-          <p:cNvPr id="17" name="Rectangle 16"/>
+              <a:t>Identifies where documents stall in the pipeline</a:t>
+            </a:r>
+          </a:p>
+        </p:txBody>
+      </p:sp>
+      <p:sp>
+        <p:nvSpPr>
+          <p:cNvPr id="19" name="Rectangle 18"/>
           <p:cNvSpPr/>
           <p:nvPr/>
         </p:nvSpPr>
         <p:spPr>
           <a:xfrm>
-            <a:off x="9345168" y="4690872"/>
-            <a:ext cx="54864" cy="54864"/>
+            <a:off x="9363456" y="4965192"/>
+            <a:ext cx="45720" cy="45720"/>
           </a:xfrm>
           <a:prstGeom prst="rect">
             <a:avLst/>
@@ -4338,14 +4435,14 @@
       </p:sp>
       <p:sp>
         <p:nvSpPr>
-          <p:cNvPr id="18" name="TextBox 17"/>
+          <p:cNvPr id="20" name="TextBox 19"/>
           <p:cNvSpPr txBox="1"/>
           <p:nvPr/>
         </p:nvSpPr>
         <p:spPr>
           <a:xfrm>
-            <a:off x="9491472" y="4617720"/>
-            <a:ext cx="2587752" cy="685800"/>
+            <a:off x="9546336" y="4864608"/>
+            <a:ext cx="2423160" cy="713232"/>
           </a:xfrm>
           <a:prstGeom prst="rect">
             <a:avLst/>
@@ -4360,13 +4457,13 @@
           <a:p>
             <a:pPr algn="l"/>
             <a:r>
-              <a:rPr sz="1000" b="0" i="0">
+              <a:rPr sz="950" b="0" i="0">
                 <a:solidFill>
                   <a:srgbClr val="BBD4FF"/>
                 </a:solidFill>
                 <a:latin typeface="Calibri"/>
               </a:rPr>
-              <a:t>Tracks maverick orders and returns at each stage</a:t>
+              <a:t>Tracks unauthorised orders and returns at each stage</a:t>
             </a:r>
           </a:p>
         </p:txBody>
@@ -4398,13 +4495,13 @@
         <p:spPr>
           <a:xfrm>
             <a:off x="0" y="0"/>
-            <a:ext cx="12188952" cy="438912"/>
-          </a:xfrm>
-          <a:prstGeom prst="rect">
-            <a:avLst/>
-          </a:prstGeom>
-          <a:solidFill>
-            <a:srgbClr val="00338D"/>
+            <a:ext cx="12188952" cy="6858000"/>
+          </a:xfrm>
+          <a:prstGeom prst="rect">
+            <a:avLst/>
+          </a:prstGeom>
+          <a:solidFill>
+            <a:srgbClr val="051835"/>
           </a:solidFill>
           <a:ln>
             <a:noFill/>
@@ -4440,14 +4537,14 @@
         </p:nvSpPr>
         <p:spPr>
           <a:xfrm>
-            <a:off x="0" y="0"/>
-            <a:ext cx="64008" cy="438912"/>
-          </a:xfrm>
-          <a:prstGeom prst="rect">
-            <a:avLst/>
-          </a:prstGeom>
-          <a:solidFill>
-            <a:srgbClr val="0091DA"/>
+            <a:off x="0" y="438912"/>
+            <a:ext cx="3044952" cy="6419088"/>
+          </a:xfrm>
+          <a:prstGeom prst="rect">
+            <a:avLst/>
+          </a:prstGeom>
+          <a:solidFill>
+            <a:srgbClr val="00338D"/>
           </a:solidFill>
           <a:ln>
             <a:noFill/>
@@ -4477,36 +4574,44 @@
       </p:sp>
       <p:sp>
         <p:nvSpPr>
-          <p:cNvPr id="4" name="TextBox 3"/>
-          <p:cNvSpPr txBox="1"/>
-          <p:nvPr/>
-        </p:nvSpPr>
-        <p:spPr>
-          <a:xfrm>
-            <a:off x="137160" y="64008"/>
-            <a:ext cx="2926080" cy="384048"/>
-          </a:xfrm>
-          <a:prstGeom prst="rect">
-            <a:avLst/>
-          </a:prstGeom>
-          <a:noFill/>
-        </p:spPr>
-        <p:txBody>
-          <a:bodyPr wrap="square">
-            <a:spAutoFit/>
-          </a:bodyPr>
-          <a:lstStyle/>
-          <a:p>
-            <a:pPr algn="l"/>
-            <a:r>
-              <a:rPr sz="1100" b="1" i="0">
-                <a:solidFill>
-                  <a:srgbClr val="0091DA"/>
-                </a:solidFill>
-                <a:latin typeface="Calibri"/>
-              </a:rPr>
-              <a:t>KPMG  IntelliSource</a:t>
-            </a:r>
+          <p:cNvPr id="4" name="Rectangle 3"/>
+          <p:cNvSpPr/>
+          <p:nvPr/>
+        </p:nvSpPr>
+        <p:spPr>
+          <a:xfrm>
+            <a:off x="2990088" y="438912"/>
+            <a:ext cx="54864" cy="6419088"/>
+          </a:xfrm>
+          <a:prstGeom prst="rect">
+            <a:avLst/>
+          </a:prstGeom>
+          <a:solidFill>
+            <a:srgbClr val="8F7326"/>
+          </a:solidFill>
+          <a:ln>
+            <a:noFill/>
+          </a:ln>
+        </p:spPr>
+        <p:style>
+          <a:lnRef idx="1">
+            <a:schemeClr val="accent1"/>
+          </a:lnRef>
+          <a:fillRef idx="3">
+            <a:schemeClr val="accent1"/>
+          </a:fillRef>
+          <a:effectRef idx="2">
+            <a:schemeClr val="accent1"/>
+          </a:effectRef>
+          <a:fontRef idx="minor">
+            <a:schemeClr val="lt1"/>
+          </a:fontRef>
+        </p:style>
+        <p:txBody>
+          <a:bodyPr rtlCol="0" anchor="ctr"/>
+          <a:lstStyle/>
+          <a:p>
+            <a:pPr algn="ctr"/>
           </a:p>
         </p:txBody>
       </p:sp>
@@ -4526,7 +4631,7 @@
         </p:blipFill>
         <p:spPr>
           <a:xfrm>
-            <a:off x="0" y="438912"/>
+            <a:off x="3044952" y="438912"/>
             <a:ext cx="9144000" cy="6419088"/>
           </a:xfrm>
           <a:prstGeom prst="rect">
@@ -4542,14 +4647,14 @@
         </p:nvSpPr>
         <p:spPr>
           <a:xfrm>
-            <a:off x="9144000" y="438912"/>
-            <a:ext cx="3044952" cy="6419088"/>
-          </a:xfrm>
-          <a:prstGeom prst="rect">
-            <a:avLst/>
-          </a:prstGeom>
-          <a:solidFill>
-            <a:srgbClr val="051835"/>
+            <a:off x="0" y="0"/>
+            <a:ext cx="12188952" cy="438912"/>
+          </a:xfrm>
+          <a:prstGeom prst="rect">
+            <a:avLst/>
+          </a:prstGeom>
+          <a:solidFill>
+            <a:srgbClr val="021028"/>
           </a:solidFill>
           <a:ln>
             <a:noFill/>
@@ -4585,14 +4690,14 @@
         </p:nvSpPr>
         <p:spPr>
           <a:xfrm>
-            <a:off x="9144000" y="438912"/>
-            <a:ext cx="45720" cy="6419088"/>
-          </a:xfrm>
-          <a:prstGeom prst="rect">
-            <a:avLst/>
-          </a:prstGeom>
-          <a:solidFill>
-            <a:srgbClr val="0091DA"/>
+            <a:off x="0" y="0"/>
+            <a:ext cx="64008" cy="438912"/>
+          </a:xfrm>
+          <a:prstGeom prst="rect">
+            <a:avLst/>
+          </a:prstGeom>
+          <a:solidFill>
+            <a:srgbClr val="8F7326"/>
           </a:solidFill>
           <a:ln>
             <a:noFill/>
@@ -4628,8 +4733,43 @@
         </p:nvSpPr>
         <p:spPr>
           <a:xfrm>
-            <a:off x="9326880" y="640080"/>
-            <a:ext cx="2816352" cy="594360"/>
+            <a:off x="146304" y="73152"/>
+            <a:ext cx="3200400" cy="365760"/>
+          </a:xfrm>
+          <a:prstGeom prst="rect">
+            <a:avLst/>
+          </a:prstGeom>
+          <a:noFill/>
+        </p:spPr>
+        <p:txBody>
+          <a:bodyPr wrap="square">
+            <a:spAutoFit/>
+          </a:bodyPr>
+          <a:lstStyle/>
+          <a:p>
+            <a:pPr algn="l"/>
+            <a:r>
+              <a:rPr sz="1100" b="1" i="0">
+                <a:solidFill>
+                  <a:srgbClr val="8F7326"/>
+                </a:solidFill>
+                <a:latin typeface="Calibri"/>
+              </a:rPr>
+              <a:t>KPMG  IntelliSource</a:t>
+            </a:r>
+          </a:p>
+        </p:txBody>
+      </p:sp>
+      <p:sp>
+        <p:nvSpPr>
+          <p:cNvPr id="9" name="TextBox 8"/>
+          <p:cNvSpPr txBox="1"/>
+          <p:nvPr/>
+        </p:nvSpPr>
+        <p:spPr>
+          <a:xfrm>
+            <a:off x="219456" y="713232"/>
+            <a:ext cx="2606040" cy="713232"/>
           </a:xfrm>
           <a:prstGeom prst="rect">
             <a:avLst/>
@@ -4657,20 +4797,20 @@
       </p:sp>
       <p:sp>
         <p:nvSpPr>
-          <p:cNvPr id="9" name="Rectangle 8"/>
+          <p:cNvPr id="10" name="Rectangle 9"/>
           <p:cNvSpPr/>
           <p:nvPr/>
         </p:nvSpPr>
         <p:spPr>
           <a:xfrm>
-            <a:off x="9345168" y="1472184"/>
-            <a:ext cx="54864" cy="54864"/>
-          </a:xfrm>
-          <a:prstGeom prst="rect">
-            <a:avLst/>
-          </a:prstGeom>
-          <a:solidFill>
-            <a:srgbClr val="0091DA"/>
+            <a:off x="219456" y="1463040"/>
+            <a:ext cx="2606040" cy="32004"/>
+          </a:xfrm>
+          <a:prstGeom prst="rect">
+            <a:avLst/>
+          </a:prstGeom>
+          <a:solidFill>
+            <a:srgbClr val="8F7326"/>
           </a:solidFill>
           <a:ln>
             <a:noFill/>
@@ -4700,14 +4840,57 @@
       </p:sp>
       <p:sp>
         <p:nvSpPr>
-          <p:cNvPr id="10" name="TextBox 9"/>
+          <p:cNvPr id="11" name="Rectangle 10"/>
+          <p:cNvSpPr/>
+          <p:nvPr/>
+        </p:nvSpPr>
+        <p:spPr>
+          <a:xfrm>
+            <a:off x="219456" y="1856232"/>
+            <a:ext cx="45720" cy="45720"/>
+          </a:xfrm>
+          <a:prstGeom prst="rect">
+            <a:avLst/>
+          </a:prstGeom>
+          <a:solidFill>
+            <a:srgbClr val="8F7326"/>
+          </a:solidFill>
+          <a:ln>
+            <a:noFill/>
+          </a:ln>
+        </p:spPr>
+        <p:style>
+          <a:lnRef idx="1">
+            <a:schemeClr val="accent1"/>
+          </a:lnRef>
+          <a:fillRef idx="3">
+            <a:schemeClr val="accent1"/>
+          </a:fillRef>
+          <a:effectRef idx="2">
+            <a:schemeClr val="accent1"/>
+          </a:effectRef>
+          <a:fontRef idx="minor">
+            <a:schemeClr val="lt1"/>
+          </a:fontRef>
+        </p:style>
+        <p:txBody>
+          <a:bodyPr rtlCol="0" anchor="ctr"/>
+          <a:lstStyle/>
+          <a:p>
+            <a:pPr algn="ctr"/>
+          </a:p>
+        </p:txBody>
+      </p:sp>
+      <p:sp>
+        <p:nvSpPr>
+          <p:cNvPr id="12" name="TextBox 11"/>
           <p:cNvSpPr txBox="1"/>
           <p:nvPr/>
         </p:nvSpPr>
         <p:spPr>
           <a:xfrm>
-            <a:off x="9491472" y="1399032"/>
-            <a:ext cx="2587752" cy="685800"/>
+            <a:off x="402336" y="1755648"/>
+            <a:ext cx="2423160" cy="713232"/>
           </a:xfrm>
           <a:prstGeom prst="rect">
             <a:avLst/>
@@ -4722,7 +4905,7 @@
           <a:p>
             <a:pPr algn="l"/>
             <a:r>
-              <a:rPr sz="1000" b="0" i="0">
+              <a:rPr sz="950" b="0" i="0">
                 <a:solidFill>
                   <a:srgbClr val="BBD4FF"/>
                 </a:solidFill>
@@ -4735,20 +4918,20 @@
       </p:sp>
       <p:sp>
         <p:nvSpPr>
-          <p:cNvPr id="11" name="Rectangle 10"/>
+          <p:cNvPr id="13" name="Rectangle 12"/>
           <p:cNvSpPr/>
           <p:nvPr/>
         </p:nvSpPr>
         <p:spPr>
           <a:xfrm>
-            <a:off x="9345168" y="2276856"/>
-            <a:ext cx="54864" cy="54864"/>
-          </a:xfrm>
-          <a:prstGeom prst="rect">
-            <a:avLst/>
-          </a:prstGeom>
-          <a:solidFill>
-            <a:srgbClr val="0091DA"/>
+            <a:off x="219456" y="2633472"/>
+            <a:ext cx="45720" cy="45720"/>
+          </a:xfrm>
+          <a:prstGeom prst="rect">
+            <a:avLst/>
+          </a:prstGeom>
+          <a:solidFill>
+            <a:srgbClr val="8F7326"/>
           </a:solidFill>
           <a:ln>
             <a:noFill/>
@@ -4778,14 +4961,14 @@
       </p:sp>
       <p:sp>
         <p:nvSpPr>
-          <p:cNvPr id="12" name="TextBox 11"/>
+          <p:cNvPr id="14" name="TextBox 13"/>
           <p:cNvSpPr txBox="1"/>
           <p:nvPr/>
         </p:nvSpPr>
         <p:spPr>
           <a:xfrm>
-            <a:off x="9491472" y="2203704"/>
-            <a:ext cx="2587752" cy="685800"/>
+            <a:off x="402336" y="2532888"/>
+            <a:ext cx="2423160" cy="713232"/>
           </a:xfrm>
           <a:prstGeom prst="rect">
             <a:avLst/>
@@ -4800,7 +4983,7 @@
           <a:p>
             <a:pPr algn="l"/>
             <a:r>
-              <a:rPr sz="1000" b="0" i="0">
+              <a:rPr sz="950" b="0" i="0">
                 <a:solidFill>
                   <a:srgbClr val="BBD4FF"/>
                 </a:solidFill>
@@ -4813,20 +4996,20 @@
       </p:sp>
       <p:sp>
         <p:nvSpPr>
-          <p:cNvPr id="13" name="Rectangle 12"/>
+          <p:cNvPr id="15" name="Rectangle 14"/>
           <p:cNvSpPr/>
           <p:nvPr/>
         </p:nvSpPr>
         <p:spPr>
           <a:xfrm>
-            <a:off x="9345168" y="3081528"/>
-            <a:ext cx="54864" cy="54864"/>
-          </a:xfrm>
-          <a:prstGeom prst="rect">
-            <a:avLst/>
-          </a:prstGeom>
-          <a:solidFill>
-            <a:srgbClr val="0091DA"/>
+            <a:off x="219456" y="3410712"/>
+            <a:ext cx="45720" cy="45720"/>
+          </a:xfrm>
+          <a:prstGeom prst="rect">
+            <a:avLst/>
+          </a:prstGeom>
+          <a:solidFill>
+            <a:srgbClr val="8F7326"/>
           </a:solidFill>
           <a:ln>
             <a:noFill/>
@@ -4856,14 +5039,14 @@
       </p:sp>
       <p:sp>
         <p:nvSpPr>
-          <p:cNvPr id="14" name="TextBox 13"/>
+          <p:cNvPr id="16" name="TextBox 15"/>
           <p:cNvSpPr txBox="1"/>
           <p:nvPr/>
         </p:nvSpPr>
         <p:spPr>
           <a:xfrm>
-            <a:off x="9491472" y="3008376"/>
-            <a:ext cx="2587752" cy="685800"/>
+            <a:off x="402336" y="3310128"/>
+            <a:ext cx="2423160" cy="713232"/>
           </a:xfrm>
           <a:prstGeom prst="rect">
             <a:avLst/>
@@ -4878,7 +5061,7 @@
           <a:p>
             <a:pPr algn="l"/>
             <a:r>
-              <a:rPr sz="1000" b="0" i="0">
+              <a:rPr sz="950" b="0" i="0">
                 <a:solidFill>
                   <a:srgbClr val="BBD4FF"/>
                 </a:solidFill>
@@ -4891,20 +5074,20 @@
       </p:sp>
       <p:sp>
         <p:nvSpPr>
-          <p:cNvPr id="15" name="Rectangle 14"/>
+          <p:cNvPr id="17" name="Rectangle 16"/>
           <p:cNvSpPr/>
           <p:nvPr/>
         </p:nvSpPr>
         <p:spPr>
           <a:xfrm>
-            <a:off x="9345168" y="3886200"/>
-            <a:ext cx="54864" cy="54864"/>
-          </a:xfrm>
-          <a:prstGeom prst="rect">
-            <a:avLst/>
-          </a:prstGeom>
-          <a:solidFill>
-            <a:srgbClr val="0091DA"/>
+            <a:off x="219456" y="4187952"/>
+            <a:ext cx="45720" cy="45720"/>
+          </a:xfrm>
+          <a:prstGeom prst="rect">
+            <a:avLst/>
+          </a:prstGeom>
+          <a:solidFill>
+            <a:srgbClr val="8F7326"/>
           </a:solidFill>
           <a:ln>
             <a:noFill/>
@@ -4934,14 +5117,14 @@
       </p:sp>
       <p:sp>
         <p:nvSpPr>
-          <p:cNvPr id="16" name="TextBox 15"/>
+          <p:cNvPr id="18" name="TextBox 17"/>
           <p:cNvSpPr txBox="1"/>
           <p:nvPr/>
         </p:nvSpPr>
         <p:spPr>
           <a:xfrm>
-            <a:off x="9491472" y="3813048"/>
-            <a:ext cx="2587752" cy="685800"/>
+            <a:off x="402336" y="4087368"/>
+            <a:ext cx="2423160" cy="713232"/>
           </a:xfrm>
           <a:prstGeom prst="rect">
             <a:avLst/>
@@ -4956,7 +5139,7 @@
           <a:p>
             <a:pPr algn="l"/>
             <a:r>
-              <a:rPr sz="1000" b="0" i="0">
+              <a:rPr sz="950" b="0" i="0">
                 <a:solidFill>
                   <a:srgbClr val="BBD4FF"/>
                 </a:solidFill>
@@ -5146,7 +5329,7 @@
         </p:nvSpPr>
         <p:spPr>
           <a:xfrm>
-            <a:off x="274320" y="548640"/>
+            <a:off x="256032" y="502920"/>
             <a:ext cx="4572000" cy="777240"/>
           </a:xfrm>
           <a:prstGeom prst="rect">
@@ -5181,8 +5364,8 @@
         </p:nvSpPr>
         <p:spPr>
           <a:xfrm>
-            <a:off x="274320" y="1298448"/>
-            <a:ext cx="5486400" cy="320040"/>
+            <a:off x="256032" y="1280160"/>
+            <a:ext cx="5943600" cy="320040"/>
           </a:xfrm>
           <a:prstGeom prst="rect">
             <a:avLst/>
@@ -5216,8 +5399,8 @@
         </p:nvSpPr>
         <p:spPr>
           <a:xfrm>
-            <a:off x="274320" y="1783080"/>
-            <a:ext cx="5120640" cy="36576"/>
+            <a:off x="256032" y="1755648"/>
+            <a:ext cx="5029200" cy="36576"/>
           </a:xfrm>
           <a:prstGeom prst="rect">
             <a:avLst/>
@@ -5259,8 +5442,8 @@
         </p:nvSpPr>
         <p:spPr>
           <a:xfrm>
-            <a:off x="274320" y="1920240"/>
-            <a:ext cx="8229600" cy="1005840"/>
+            <a:off x="256032" y="1920240"/>
+            <a:ext cx="8321040" cy="960120"/>
           </a:xfrm>
           <a:prstGeom prst="rect">
             <a:avLst/>
@@ -5294,8 +5477,8 @@
         </p:nvSpPr>
         <p:spPr>
           <a:xfrm>
-            <a:off x="274320" y="2926080"/>
-            <a:ext cx="8229600" cy="438912"/>
+            <a:off x="256032" y="2907792"/>
+            <a:ext cx="8321040" cy="438912"/>
           </a:xfrm>
           <a:prstGeom prst="rect">
             <a:avLst/>
@@ -5310,13 +5493,13 @@
           <a:p>
             <a:pPr algn="l"/>
             <a:r>
-              <a:rPr sz="1500" b="0" i="0">
+              <a:rPr sz="1600" b="0" i="0">
                 <a:solidFill>
                   <a:srgbClr val="0091DA"/>
                 </a:solidFill>
                 <a:latin typeface="Calibri"/>
               </a:rPr>
-              <a:t>IntelliSource  —  Procurement Intelligence, Powered by KPMG</a:t>
+              <a:t>Procurement Intelligence, Powered by KPMG</a:t>
             </a:r>
           </a:p>
         </p:txBody>
@@ -5329,8 +5512,8 @@
         </p:nvSpPr>
         <p:spPr>
           <a:xfrm>
-            <a:off x="274320" y="3520440"/>
-            <a:ext cx="5120640" cy="36576"/>
+            <a:off x="256032" y="3493008"/>
+            <a:ext cx="5029200" cy="36576"/>
           </a:xfrm>
           <a:prstGeom prst="rect">
             <a:avLst/>
@@ -5372,7 +5555,7 @@
         </p:nvSpPr>
         <p:spPr>
           <a:xfrm>
-            <a:off x="274320" y="3703320"/>
+            <a:off x="256032" y="3675887"/>
             <a:ext cx="914400" cy="365760"/>
           </a:xfrm>
           <a:prstGeom prst="rect">
@@ -5415,7 +5598,7 @@
         </p:nvSpPr>
         <p:spPr>
           <a:xfrm>
-            <a:off x="274320" y="3776472"/>
+            <a:off x="256032" y="3749039"/>
             <a:ext cx="914400" cy="256032"/>
           </a:xfrm>
           <a:prstGeom prst="rect">
@@ -5450,8 +5633,8 @@
         </p:nvSpPr>
         <p:spPr>
           <a:xfrm>
-            <a:off x="1353312" y="3776472"/>
-            <a:ext cx="7132320" cy="256032"/>
+            <a:off x="1325880" y="3749039"/>
+            <a:ext cx="7223760" cy="256032"/>
           </a:xfrm>
           <a:prstGeom prst="rect">
             <a:avLst/>
@@ -5485,7 +5668,7 @@
         </p:nvSpPr>
         <p:spPr>
           <a:xfrm>
-            <a:off x="274320" y="4197096"/>
+            <a:off x="256032" y="4178807"/>
             <a:ext cx="914400" cy="365760"/>
           </a:xfrm>
           <a:prstGeom prst="rect">
@@ -5528,7 +5711,7 @@
         </p:nvSpPr>
         <p:spPr>
           <a:xfrm>
-            <a:off x="274320" y="4270248"/>
+            <a:off x="256032" y="4251959"/>
             <a:ext cx="914400" cy="256032"/>
           </a:xfrm>
           <a:prstGeom prst="rect">
@@ -5563,8 +5746,8 @@
         </p:nvSpPr>
         <p:spPr>
           <a:xfrm>
-            <a:off x="1353312" y="4270248"/>
-            <a:ext cx="7132320" cy="256032"/>
+            <a:off x="1325880" y="4251959"/>
+            <a:ext cx="7223760" cy="256032"/>
           </a:xfrm>
           <a:prstGeom prst="rect">
             <a:avLst/>
@@ -5598,7 +5781,7 @@
         </p:nvSpPr>
         <p:spPr>
           <a:xfrm>
-            <a:off x="274320" y="4690872"/>
+            <a:off x="256032" y="4681727"/>
             <a:ext cx="914400" cy="365760"/>
           </a:xfrm>
           <a:prstGeom prst="rect">
@@ -5641,7 +5824,7 @@
         </p:nvSpPr>
         <p:spPr>
           <a:xfrm>
-            <a:off x="274320" y="4764024"/>
+            <a:off x="256032" y="4754879"/>
             <a:ext cx="914400" cy="256032"/>
           </a:xfrm>
           <a:prstGeom prst="rect">
@@ -5676,8 +5859,8 @@
         </p:nvSpPr>
         <p:spPr>
           <a:xfrm>
-            <a:off x="1353312" y="4764024"/>
-            <a:ext cx="7132320" cy="256032"/>
+            <a:off x="1325880" y="4754879"/>
+            <a:ext cx="7223760" cy="256032"/>
           </a:xfrm>
           <a:prstGeom prst="rect">
             <a:avLst/>
@@ -5698,7 +5881,7 @@
                 </a:solidFill>
                 <a:latin typeface="Calibri"/>
               </a:rPr>
-              <a:t>Stakeholder walkthrough</a:t>
+              <a:t>Stakeholder walkthrough — live demo</a:t>
             </a:r>
           </a:p>
         </p:txBody>
@@ -5711,7 +5894,7 @@
         </p:nvSpPr>
         <p:spPr>
           <a:xfrm>
-            <a:off x="274320" y="5184648"/>
+            <a:off x="256032" y="5184648"/>
             <a:ext cx="914400" cy="365760"/>
           </a:xfrm>
           <a:prstGeom prst="rect">
@@ -5754,7 +5937,7 @@
         </p:nvSpPr>
         <p:spPr>
           <a:xfrm>
-            <a:off x="274320" y="5257800"/>
+            <a:off x="256032" y="5257800"/>
             <a:ext cx="914400" cy="256032"/>
           </a:xfrm>
           <a:prstGeom prst="rect">
@@ -5789,8 +5972,8 @@
         </p:nvSpPr>
         <p:spPr>
           <a:xfrm>
-            <a:off x="1353312" y="5257800"/>
-            <a:ext cx="7132320" cy="256032"/>
+            <a:off x="1325880" y="5257800"/>
+            <a:ext cx="7223760" cy="256032"/>
           </a:xfrm>
           <a:prstGeom prst="rect">
             <a:avLst/>
@@ -5824,7 +6007,7 @@
         </p:nvSpPr>
         <p:spPr>
           <a:xfrm>
-            <a:off x="274320" y="5760720"/>
+            <a:off x="256032" y="5760720"/>
             <a:ext cx="5486400" cy="320040"/>
           </a:xfrm>
           <a:prstGeom prst="rect">
@@ -5859,8 +6042,8 @@
         </p:nvSpPr>
         <p:spPr>
           <a:xfrm>
-            <a:off x="0" y="6400800"/>
-            <a:ext cx="12188952" cy="457200"/>
+            <a:off x="0" y="6419088"/>
+            <a:ext cx="12188952" cy="438912"/>
           </a:xfrm>
           <a:prstGeom prst="rect">
             <a:avLst/>
@@ -5902,8 +6085,8 @@
         </p:nvSpPr>
         <p:spPr>
           <a:xfrm>
-            <a:off x="274320" y="6464808"/>
-            <a:ext cx="11430000" cy="347472"/>
+            <a:off x="274320" y="6492240"/>
+            <a:ext cx="11731752" cy="320040"/>
           </a:xfrm>
           <a:prstGeom prst="rect">
             <a:avLst/>
@@ -5956,13 +6139,13 @@
         <p:spPr>
           <a:xfrm>
             <a:off x="0" y="0"/>
-            <a:ext cx="12188952" cy="438912"/>
-          </a:xfrm>
-          <a:prstGeom prst="rect">
-            <a:avLst/>
-          </a:prstGeom>
-          <a:solidFill>
-            <a:srgbClr val="00338D"/>
+            <a:ext cx="12188952" cy="6858000"/>
+          </a:xfrm>
+          <a:prstGeom prst="rect">
+            <a:avLst/>
+          </a:prstGeom>
+          <a:solidFill>
+            <a:srgbClr val="F4F6FA"/>
           </a:solidFill>
           <a:ln>
             <a:noFill/>
@@ -5998,14 +6181,14 @@
         </p:nvSpPr>
         <p:spPr>
           <a:xfrm>
-            <a:off x="0" y="0"/>
-            <a:ext cx="64008" cy="438912"/>
-          </a:xfrm>
-          <a:prstGeom prst="rect">
-            <a:avLst/>
-          </a:prstGeom>
-          <a:solidFill>
-            <a:srgbClr val="0091DA"/>
+            <a:off x="9144000" y="438912"/>
+            <a:ext cx="3044952" cy="6419088"/>
+          </a:xfrm>
+          <a:prstGeom prst="rect">
+            <a:avLst/>
+          </a:prstGeom>
+          <a:solidFill>
+            <a:srgbClr val="00338D"/>
           </a:solidFill>
           <a:ln>
             <a:noFill/>
@@ -6035,14 +6218,167 @@
       </p:sp>
       <p:sp>
         <p:nvSpPr>
-          <p:cNvPr id="4" name="TextBox 3"/>
+          <p:cNvPr id="4" name="Rectangle 3"/>
+          <p:cNvSpPr/>
+          <p:nvPr/>
+        </p:nvSpPr>
+        <p:spPr>
+          <a:xfrm>
+            <a:off x="9144000" y="438912"/>
+            <a:ext cx="54864" cy="6419088"/>
+          </a:xfrm>
+          <a:prstGeom prst="rect">
+            <a:avLst/>
+          </a:prstGeom>
+          <a:solidFill>
+            <a:srgbClr val="0091DA"/>
+          </a:solidFill>
+          <a:ln>
+            <a:noFill/>
+          </a:ln>
+        </p:spPr>
+        <p:style>
+          <a:lnRef idx="1">
+            <a:schemeClr val="accent1"/>
+          </a:lnRef>
+          <a:fillRef idx="3">
+            <a:schemeClr val="accent1"/>
+          </a:fillRef>
+          <a:effectRef idx="2">
+            <a:schemeClr val="accent1"/>
+          </a:effectRef>
+          <a:fontRef idx="minor">
+            <a:schemeClr val="lt1"/>
+          </a:fontRef>
+        </p:style>
+        <p:txBody>
+          <a:bodyPr rtlCol="0" anchor="ctr"/>
+          <a:lstStyle/>
+          <a:p>
+            <a:pPr algn="ctr"/>
+          </a:p>
+        </p:txBody>
+      </p:sp>
+      <p:pic>
+        <p:nvPicPr>
+          <p:cNvPr id="5" name="Picture 4" descr="Screenshot 2026-07-08 at 2.20.51 PM.png"/>
+          <p:cNvPicPr>
+            <a:picLocks noChangeAspect="1"/>
+          </p:cNvPicPr>
+          <p:nvPr/>
+        </p:nvPicPr>
+        <p:blipFill>
+          <a:blip r:embed="rId2"/>
+          <a:stretch>
+            <a:fillRect/>
+          </a:stretch>
+        </p:blipFill>
+        <p:spPr>
+          <a:xfrm>
+            <a:off x="0" y="438912"/>
+            <a:ext cx="9144000" cy="6419088"/>
+          </a:xfrm>
+          <a:prstGeom prst="rect">
+            <a:avLst/>
+          </a:prstGeom>
+        </p:spPr>
+      </p:pic>
+      <p:sp>
+        <p:nvSpPr>
+          <p:cNvPr id="6" name="Rectangle 5"/>
+          <p:cNvSpPr/>
+          <p:nvPr/>
+        </p:nvSpPr>
+        <p:spPr>
+          <a:xfrm>
+            <a:off x="0" y="0"/>
+            <a:ext cx="12188952" cy="438912"/>
+          </a:xfrm>
+          <a:prstGeom prst="rect">
+            <a:avLst/>
+          </a:prstGeom>
+          <a:solidFill>
+            <a:srgbClr val="00338D"/>
+          </a:solidFill>
+          <a:ln>
+            <a:noFill/>
+          </a:ln>
+        </p:spPr>
+        <p:style>
+          <a:lnRef idx="1">
+            <a:schemeClr val="accent1"/>
+          </a:lnRef>
+          <a:fillRef idx="3">
+            <a:schemeClr val="accent1"/>
+          </a:fillRef>
+          <a:effectRef idx="2">
+            <a:schemeClr val="accent1"/>
+          </a:effectRef>
+          <a:fontRef idx="minor">
+            <a:schemeClr val="lt1"/>
+          </a:fontRef>
+        </p:style>
+        <p:txBody>
+          <a:bodyPr rtlCol="0" anchor="ctr"/>
+          <a:lstStyle/>
+          <a:p>
+            <a:pPr algn="ctr"/>
+          </a:p>
+        </p:txBody>
+      </p:sp>
+      <p:sp>
+        <p:nvSpPr>
+          <p:cNvPr id="7" name="Rectangle 6"/>
+          <p:cNvSpPr/>
+          <p:nvPr/>
+        </p:nvSpPr>
+        <p:spPr>
+          <a:xfrm>
+            <a:off x="0" y="0"/>
+            <a:ext cx="64008" cy="438912"/>
+          </a:xfrm>
+          <a:prstGeom prst="rect">
+            <a:avLst/>
+          </a:prstGeom>
+          <a:solidFill>
+            <a:srgbClr val="0091DA"/>
+          </a:solidFill>
+          <a:ln>
+            <a:noFill/>
+          </a:ln>
+        </p:spPr>
+        <p:style>
+          <a:lnRef idx="1">
+            <a:schemeClr val="accent1"/>
+          </a:lnRef>
+          <a:fillRef idx="3">
+            <a:schemeClr val="accent1"/>
+          </a:fillRef>
+          <a:effectRef idx="2">
+            <a:schemeClr val="accent1"/>
+          </a:effectRef>
+          <a:fontRef idx="minor">
+            <a:schemeClr val="lt1"/>
+          </a:fontRef>
+        </p:style>
+        <p:txBody>
+          <a:bodyPr rtlCol="0" anchor="ctr"/>
+          <a:lstStyle/>
+          <a:p>
+            <a:pPr algn="ctr"/>
+          </a:p>
+        </p:txBody>
+      </p:sp>
+      <p:sp>
+        <p:nvSpPr>
+          <p:cNvPr id="8" name="TextBox 7"/>
           <p:cNvSpPr txBox="1"/>
           <p:nvPr/>
         </p:nvSpPr>
         <p:spPr>
           <a:xfrm>
-            <a:off x="137160" y="64008"/>
-            <a:ext cx="2926080" cy="384048"/>
+            <a:off x="146304" y="73152"/>
+            <a:ext cx="3200400" cy="365760"/>
           </a:xfrm>
           <a:prstGeom prst="rect">
             <a:avLst/>
@@ -6068,126 +6404,16 @@
           </a:p>
         </p:txBody>
       </p:sp>
-      <p:pic>
-        <p:nvPicPr>
-          <p:cNvPr id="5" name="Picture 4" descr="Screenshot 2026-07-08 at 2.20.51 PM.png"/>
-          <p:cNvPicPr>
-            <a:picLocks noChangeAspect="1"/>
-          </p:cNvPicPr>
-          <p:nvPr/>
-        </p:nvPicPr>
-        <p:blipFill>
-          <a:blip r:embed="rId2"/>
-          <a:stretch>
-            <a:fillRect/>
-          </a:stretch>
-        </p:blipFill>
-        <p:spPr>
-          <a:xfrm>
-            <a:off x="0" y="438912"/>
-            <a:ext cx="9144000" cy="6419088"/>
-          </a:xfrm>
-          <a:prstGeom prst="rect">
-            <a:avLst/>
-          </a:prstGeom>
-        </p:spPr>
-      </p:pic>
-      <p:sp>
-        <p:nvSpPr>
-          <p:cNvPr id="6" name="Rectangle 5"/>
-          <p:cNvSpPr/>
-          <p:nvPr/>
-        </p:nvSpPr>
-        <p:spPr>
-          <a:xfrm>
-            <a:off x="9144000" y="438912"/>
-            <a:ext cx="3044952" cy="6419088"/>
-          </a:xfrm>
-          <a:prstGeom prst="rect">
-            <a:avLst/>
-          </a:prstGeom>
-          <a:solidFill>
-            <a:srgbClr val="051835"/>
-          </a:solidFill>
-          <a:ln>
-            <a:noFill/>
-          </a:ln>
-        </p:spPr>
-        <p:style>
-          <a:lnRef idx="1">
-            <a:schemeClr val="accent1"/>
-          </a:lnRef>
-          <a:fillRef idx="3">
-            <a:schemeClr val="accent1"/>
-          </a:fillRef>
-          <a:effectRef idx="2">
-            <a:schemeClr val="accent1"/>
-          </a:effectRef>
-          <a:fontRef idx="minor">
-            <a:schemeClr val="lt1"/>
-          </a:fontRef>
-        </p:style>
-        <p:txBody>
-          <a:bodyPr rtlCol="0" anchor="ctr"/>
-          <a:lstStyle/>
-          <a:p>
-            <a:pPr algn="ctr"/>
-          </a:p>
-        </p:txBody>
-      </p:sp>
-      <p:sp>
-        <p:nvSpPr>
-          <p:cNvPr id="7" name="Rectangle 6"/>
-          <p:cNvSpPr/>
-          <p:nvPr/>
-        </p:nvSpPr>
-        <p:spPr>
-          <a:xfrm>
-            <a:off x="9144000" y="438912"/>
-            <a:ext cx="45720" cy="6419088"/>
-          </a:xfrm>
-          <a:prstGeom prst="rect">
-            <a:avLst/>
-          </a:prstGeom>
-          <a:solidFill>
-            <a:srgbClr val="0091DA"/>
-          </a:solidFill>
-          <a:ln>
-            <a:noFill/>
-          </a:ln>
-        </p:spPr>
-        <p:style>
-          <a:lnRef idx="1">
-            <a:schemeClr val="accent1"/>
-          </a:lnRef>
-          <a:fillRef idx="3">
-            <a:schemeClr val="accent1"/>
-          </a:fillRef>
-          <a:effectRef idx="2">
-            <a:schemeClr val="accent1"/>
-          </a:effectRef>
-          <a:fontRef idx="minor">
-            <a:schemeClr val="lt1"/>
-          </a:fontRef>
-        </p:style>
-        <p:txBody>
-          <a:bodyPr rtlCol="0" anchor="ctr"/>
-          <a:lstStyle/>
-          <a:p>
-            <a:pPr algn="ctr"/>
-          </a:p>
-        </p:txBody>
-      </p:sp>
-      <p:sp>
-        <p:nvSpPr>
-          <p:cNvPr id="8" name="TextBox 7"/>
+      <p:sp>
+        <p:nvSpPr>
+          <p:cNvPr id="9" name="TextBox 8"/>
           <p:cNvSpPr txBox="1"/>
           <p:nvPr/>
         </p:nvSpPr>
         <p:spPr>
           <a:xfrm>
-            <a:off x="9326880" y="640080"/>
-            <a:ext cx="2816352" cy="594360"/>
+            <a:off x="9363456" y="713232"/>
+            <a:ext cx="2606040" cy="713232"/>
           </a:xfrm>
           <a:prstGeom prst="rect">
             <a:avLst/>
@@ -6208,22 +6434,33 @@
                 </a:solidFill>
                 <a:latin typeface="Calibri"/>
               </a:rPr>
-              <a:t>Procurement
-Dashboard</a:t>
-            </a:r>
-          </a:p>
-        </p:txBody>
-      </p:sp>
-      <p:sp>
-        <p:nvSpPr>
-          <p:cNvPr id="9" name="Rectangle 8"/>
+              <a:t>Procurement</a:t>
+            </a:r>
+          </a:p>
+          <a:p>
+            <a:pPr algn="l"/>
+            <a:r>
+              <a:rPr sz="1500" b="1" i="0">
+                <a:solidFill>
+                  <a:srgbClr val="FFFFFF"/>
+                </a:solidFill>
+                <a:latin typeface="Calibri"/>
+              </a:rPr>
+              <a:t>Dashboard</a:t>
+            </a:r>
+          </a:p>
+        </p:txBody>
+      </p:sp>
+      <p:sp>
+        <p:nvSpPr>
+          <p:cNvPr id="10" name="Rectangle 9"/>
           <p:cNvSpPr/>
           <p:nvPr/>
         </p:nvSpPr>
         <p:spPr>
           <a:xfrm>
-            <a:off x="9345168" y="1472184"/>
-            <a:ext cx="54864" cy="54864"/>
+            <a:off x="9363456" y="1463040"/>
+            <a:ext cx="2606040" cy="32004"/>
           </a:xfrm>
           <a:prstGeom prst="rect">
             <a:avLst/>
@@ -6259,14 +6496,57 @@
       </p:sp>
       <p:sp>
         <p:nvSpPr>
-          <p:cNvPr id="10" name="TextBox 9"/>
+          <p:cNvPr id="11" name="Rectangle 10"/>
+          <p:cNvSpPr/>
+          <p:nvPr/>
+        </p:nvSpPr>
+        <p:spPr>
+          <a:xfrm>
+            <a:off x="9363456" y="1856232"/>
+            <a:ext cx="45720" cy="45720"/>
+          </a:xfrm>
+          <a:prstGeom prst="rect">
+            <a:avLst/>
+          </a:prstGeom>
+          <a:solidFill>
+            <a:srgbClr val="0091DA"/>
+          </a:solidFill>
+          <a:ln>
+            <a:noFill/>
+          </a:ln>
+        </p:spPr>
+        <p:style>
+          <a:lnRef idx="1">
+            <a:schemeClr val="accent1"/>
+          </a:lnRef>
+          <a:fillRef idx="3">
+            <a:schemeClr val="accent1"/>
+          </a:fillRef>
+          <a:effectRef idx="2">
+            <a:schemeClr val="accent1"/>
+          </a:effectRef>
+          <a:fontRef idx="minor">
+            <a:schemeClr val="lt1"/>
+          </a:fontRef>
+        </p:style>
+        <p:txBody>
+          <a:bodyPr rtlCol="0" anchor="ctr"/>
+          <a:lstStyle/>
+          <a:p>
+            <a:pPr algn="ctr"/>
+          </a:p>
+        </p:txBody>
+      </p:sp>
+      <p:sp>
+        <p:nvSpPr>
+          <p:cNvPr id="12" name="TextBox 11"/>
           <p:cNvSpPr txBox="1"/>
           <p:nvPr/>
         </p:nvSpPr>
         <p:spPr>
           <a:xfrm>
-            <a:off x="9491472" y="1399032"/>
-            <a:ext cx="2587752" cy="685800"/>
+            <a:off x="9546336" y="1755648"/>
+            <a:ext cx="2423160" cy="713232"/>
           </a:xfrm>
           <a:prstGeom prst="rect">
             <a:avLst/>
@@ -6281,7 +6561,7 @@
           <a:p>
             <a:pPr algn="l"/>
             <a:r>
-              <a:rPr sz="1000" b="0" i="0">
+              <a:rPr sz="950" b="0" i="0">
                 <a:solidFill>
                   <a:srgbClr val="BBD4FF"/>
                 </a:solidFill>
@@ -6294,14 +6574,14 @@
       </p:sp>
       <p:sp>
         <p:nvSpPr>
-          <p:cNvPr id="11" name="Rectangle 10"/>
+          <p:cNvPr id="13" name="Rectangle 12"/>
           <p:cNvSpPr/>
           <p:nvPr/>
         </p:nvSpPr>
         <p:spPr>
           <a:xfrm>
-            <a:off x="9345168" y="2276856"/>
-            <a:ext cx="54864" cy="54864"/>
+            <a:off x="9363456" y="2633472"/>
+            <a:ext cx="45720" cy="45720"/>
           </a:xfrm>
           <a:prstGeom prst="rect">
             <a:avLst/>
@@ -6337,14 +6617,14 @@
       </p:sp>
       <p:sp>
         <p:nvSpPr>
-          <p:cNvPr id="12" name="TextBox 11"/>
+          <p:cNvPr id="14" name="TextBox 13"/>
           <p:cNvSpPr txBox="1"/>
           <p:nvPr/>
         </p:nvSpPr>
         <p:spPr>
           <a:xfrm>
-            <a:off x="9491472" y="2203704"/>
-            <a:ext cx="2587752" cy="685800"/>
+            <a:off x="9546336" y="2532888"/>
+            <a:ext cx="2423160" cy="713232"/>
           </a:xfrm>
           <a:prstGeom prst="rect">
             <a:avLst/>
@@ -6359,7 +6639,7 @@
           <a:p>
             <a:pPr algn="l"/>
             <a:r>
-              <a:rPr sz="1000" b="0" i="0">
+              <a:rPr sz="950" b="0" i="0">
                 <a:solidFill>
                   <a:srgbClr val="BBD4FF"/>
                 </a:solidFill>
@@ -6372,14 +6652,14 @@
       </p:sp>
       <p:sp>
         <p:nvSpPr>
-          <p:cNvPr id="13" name="Rectangle 12"/>
+          <p:cNvPr id="15" name="Rectangle 14"/>
           <p:cNvSpPr/>
           <p:nvPr/>
         </p:nvSpPr>
         <p:spPr>
           <a:xfrm>
-            <a:off x="9345168" y="3081528"/>
-            <a:ext cx="54864" cy="54864"/>
+            <a:off x="9363456" y="3410712"/>
+            <a:ext cx="45720" cy="45720"/>
           </a:xfrm>
           <a:prstGeom prst="rect">
             <a:avLst/>
@@ -6415,14 +6695,14 @@
       </p:sp>
       <p:sp>
         <p:nvSpPr>
-          <p:cNvPr id="14" name="TextBox 13"/>
+          <p:cNvPr id="16" name="TextBox 15"/>
           <p:cNvSpPr txBox="1"/>
           <p:nvPr/>
         </p:nvSpPr>
         <p:spPr>
           <a:xfrm>
-            <a:off x="9491472" y="3008376"/>
-            <a:ext cx="2587752" cy="685800"/>
+            <a:off x="9546336" y="3310128"/>
+            <a:ext cx="2423160" cy="713232"/>
           </a:xfrm>
           <a:prstGeom prst="rect">
             <a:avLst/>
@@ -6437,27 +6717,27 @@
           <a:p>
             <a:pPr algn="l"/>
             <a:r>
-              <a:rPr sz="1000" b="0" i="0">
+              <a:rPr sz="950" b="0" i="0">
                 <a:solidFill>
                   <a:srgbClr val="BBD4FF"/>
                 </a:solidFill>
                 <a:latin typeface="Calibri"/>
               </a:rPr>
-              <a:t>Highlights high-value orders needing additional approval</a:t>
-            </a:r>
-          </a:p>
-        </p:txBody>
-      </p:sp>
-      <p:sp>
-        <p:nvSpPr>
-          <p:cNvPr id="15" name="Rectangle 14"/>
+              <a:t>Highlights high-value orders needing extra approval</a:t>
+            </a:r>
+          </a:p>
+        </p:txBody>
+      </p:sp>
+      <p:sp>
+        <p:nvSpPr>
+          <p:cNvPr id="17" name="Rectangle 16"/>
           <p:cNvSpPr/>
           <p:nvPr/>
         </p:nvSpPr>
         <p:spPr>
           <a:xfrm>
-            <a:off x="9345168" y="3886200"/>
-            <a:ext cx="54864" cy="54864"/>
+            <a:off x="9363456" y="4187952"/>
+            <a:ext cx="45720" cy="45720"/>
           </a:xfrm>
           <a:prstGeom prst="rect">
             <a:avLst/>
@@ -6493,14 +6773,14 @@
       </p:sp>
       <p:sp>
         <p:nvSpPr>
-          <p:cNvPr id="16" name="TextBox 15"/>
+          <p:cNvPr id="18" name="TextBox 17"/>
           <p:cNvSpPr txBox="1"/>
           <p:nvPr/>
         </p:nvSpPr>
         <p:spPr>
           <a:xfrm>
-            <a:off x="9491472" y="3813048"/>
-            <a:ext cx="2587752" cy="685800"/>
+            <a:off x="9546336" y="4087368"/>
+            <a:ext cx="2423160" cy="713232"/>
           </a:xfrm>
           <a:prstGeom prst="rect">
             <a:avLst/>
@@ -6515,7 +6795,7 @@
           <a:p>
             <a:pPr algn="l"/>
             <a:r>
-              <a:rPr sz="1000" b="0" i="0">
+              <a:rPr sz="950" b="0" i="0">
                 <a:solidFill>
                   <a:srgbClr val="BBD4FF"/>
                 </a:solidFill>
@@ -6528,14 +6808,14 @@
       </p:sp>
       <p:sp>
         <p:nvSpPr>
-          <p:cNvPr id="17" name="Rectangle 16"/>
+          <p:cNvPr id="19" name="Rectangle 18"/>
           <p:cNvSpPr/>
           <p:nvPr/>
         </p:nvSpPr>
         <p:spPr>
           <a:xfrm>
-            <a:off x="9345168" y="4690872"/>
-            <a:ext cx="54864" cy="54864"/>
+            <a:off x="9363456" y="4965192"/>
+            <a:ext cx="45720" cy="45720"/>
           </a:xfrm>
           <a:prstGeom prst="rect">
             <a:avLst/>
@@ -6571,14 +6851,14 @@
       </p:sp>
       <p:sp>
         <p:nvSpPr>
-          <p:cNvPr id="18" name="TextBox 17"/>
+          <p:cNvPr id="20" name="TextBox 19"/>
           <p:cNvSpPr txBox="1"/>
           <p:nvPr/>
         </p:nvSpPr>
         <p:spPr>
           <a:xfrm>
-            <a:off x="9491472" y="4617720"/>
-            <a:ext cx="2587752" cy="685800"/>
+            <a:off x="9546336" y="4864608"/>
+            <a:ext cx="2423160" cy="713232"/>
           </a:xfrm>
           <a:prstGeom prst="rect">
             <a:avLst/>
@@ -6593,7 +6873,7 @@
           <a:p>
             <a:pPr algn="l"/>
             <a:r>
-              <a:rPr sz="1000" b="0" i="0">
+              <a:rPr sz="950" b="0" i="0">
                 <a:solidFill>
                   <a:srgbClr val="BBD4FF"/>
                 </a:solidFill>
@@ -6631,13 +6911,13 @@
         <p:spPr>
           <a:xfrm>
             <a:off x="0" y="0"/>
-            <a:ext cx="12188952" cy="438912"/>
-          </a:xfrm>
-          <a:prstGeom prst="rect">
-            <a:avLst/>
-          </a:prstGeom>
-          <a:solidFill>
-            <a:srgbClr val="00338D"/>
+            <a:ext cx="12188952" cy="6858000"/>
+          </a:xfrm>
+          <a:prstGeom prst="rect">
+            <a:avLst/>
+          </a:prstGeom>
+          <a:solidFill>
+            <a:srgbClr val="051835"/>
           </a:solidFill>
           <a:ln>
             <a:noFill/>
@@ -6673,14 +6953,14 @@
         </p:nvSpPr>
         <p:spPr>
           <a:xfrm>
-            <a:off x="0" y="0"/>
-            <a:ext cx="64008" cy="438912"/>
-          </a:xfrm>
-          <a:prstGeom prst="rect">
-            <a:avLst/>
-          </a:prstGeom>
-          <a:solidFill>
-            <a:srgbClr val="0091DA"/>
+            <a:off x="0" y="438912"/>
+            <a:ext cx="3044952" cy="6419088"/>
+          </a:xfrm>
+          <a:prstGeom prst="rect">
+            <a:avLst/>
+          </a:prstGeom>
+          <a:solidFill>
+            <a:srgbClr val="00338D"/>
           </a:solidFill>
           <a:ln>
             <a:noFill/>
@@ -6710,36 +6990,44 @@
       </p:sp>
       <p:sp>
         <p:nvSpPr>
-          <p:cNvPr id="4" name="TextBox 3"/>
-          <p:cNvSpPr txBox="1"/>
-          <p:nvPr/>
-        </p:nvSpPr>
-        <p:spPr>
-          <a:xfrm>
-            <a:off x="137160" y="64008"/>
-            <a:ext cx="2926080" cy="384048"/>
-          </a:xfrm>
-          <a:prstGeom prst="rect">
-            <a:avLst/>
-          </a:prstGeom>
-          <a:noFill/>
-        </p:spPr>
-        <p:txBody>
-          <a:bodyPr wrap="square">
-            <a:spAutoFit/>
-          </a:bodyPr>
-          <a:lstStyle/>
-          <a:p>
-            <a:pPr algn="l"/>
-            <a:r>
-              <a:rPr sz="1100" b="1" i="0">
-                <a:solidFill>
-                  <a:srgbClr val="0091DA"/>
-                </a:solidFill>
-                <a:latin typeface="Calibri"/>
-              </a:rPr>
-              <a:t>KPMG  IntelliSource</a:t>
-            </a:r>
+          <p:cNvPr id="4" name="Rectangle 3"/>
+          <p:cNvSpPr/>
+          <p:nvPr/>
+        </p:nvSpPr>
+        <p:spPr>
+          <a:xfrm>
+            <a:off x="2990088" y="438912"/>
+            <a:ext cx="54864" cy="6419088"/>
+          </a:xfrm>
+          <a:prstGeom prst="rect">
+            <a:avLst/>
+          </a:prstGeom>
+          <a:solidFill>
+            <a:srgbClr val="8F7326"/>
+          </a:solidFill>
+          <a:ln>
+            <a:noFill/>
+          </a:ln>
+        </p:spPr>
+        <p:style>
+          <a:lnRef idx="1">
+            <a:schemeClr val="accent1"/>
+          </a:lnRef>
+          <a:fillRef idx="3">
+            <a:schemeClr val="accent1"/>
+          </a:fillRef>
+          <a:effectRef idx="2">
+            <a:schemeClr val="accent1"/>
+          </a:effectRef>
+          <a:fontRef idx="minor">
+            <a:schemeClr val="lt1"/>
+          </a:fontRef>
+        </p:style>
+        <p:txBody>
+          <a:bodyPr rtlCol="0" anchor="ctr"/>
+          <a:lstStyle/>
+          <a:p>
+            <a:pPr algn="ctr"/>
           </a:p>
         </p:txBody>
       </p:sp>
@@ -6759,7 +7047,7 @@
         </p:blipFill>
         <p:spPr>
           <a:xfrm>
-            <a:off x="0" y="438912"/>
+            <a:off x="3044952" y="438912"/>
             <a:ext cx="9144000" cy="6419088"/>
           </a:xfrm>
           <a:prstGeom prst="rect">
@@ -6775,14 +7063,14 @@
         </p:nvSpPr>
         <p:spPr>
           <a:xfrm>
-            <a:off x="9144000" y="438912"/>
-            <a:ext cx="3044952" cy="6419088"/>
-          </a:xfrm>
-          <a:prstGeom prst="rect">
-            <a:avLst/>
-          </a:prstGeom>
-          <a:solidFill>
-            <a:srgbClr val="051835"/>
+            <a:off x="0" y="0"/>
+            <a:ext cx="12188952" cy="438912"/>
+          </a:xfrm>
+          <a:prstGeom prst="rect">
+            <a:avLst/>
+          </a:prstGeom>
+          <a:solidFill>
+            <a:srgbClr val="021028"/>
           </a:solidFill>
           <a:ln>
             <a:noFill/>
@@ -6818,14 +7106,14 @@
         </p:nvSpPr>
         <p:spPr>
           <a:xfrm>
-            <a:off x="9144000" y="438912"/>
-            <a:ext cx="45720" cy="6419088"/>
-          </a:xfrm>
-          <a:prstGeom prst="rect">
-            <a:avLst/>
-          </a:prstGeom>
-          <a:solidFill>
-            <a:srgbClr val="0091DA"/>
+            <a:off x="0" y="0"/>
+            <a:ext cx="64008" cy="438912"/>
+          </a:xfrm>
+          <a:prstGeom prst="rect">
+            <a:avLst/>
+          </a:prstGeom>
+          <a:solidFill>
+            <a:srgbClr val="8F7326"/>
           </a:solidFill>
           <a:ln>
             <a:noFill/>
@@ -6861,8 +7149,43 @@
         </p:nvSpPr>
         <p:spPr>
           <a:xfrm>
-            <a:off x="9326880" y="640080"/>
-            <a:ext cx="2816352" cy="594360"/>
+            <a:off x="146304" y="73152"/>
+            <a:ext cx="3200400" cy="365760"/>
+          </a:xfrm>
+          <a:prstGeom prst="rect">
+            <a:avLst/>
+          </a:prstGeom>
+          <a:noFill/>
+        </p:spPr>
+        <p:txBody>
+          <a:bodyPr wrap="square">
+            <a:spAutoFit/>
+          </a:bodyPr>
+          <a:lstStyle/>
+          <a:p>
+            <a:pPr algn="l"/>
+            <a:r>
+              <a:rPr sz="1100" b="1" i="0">
+                <a:solidFill>
+                  <a:srgbClr val="8F7326"/>
+                </a:solidFill>
+                <a:latin typeface="Calibri"/>
+              </a:rPr>
+              <a:t>KPMG  IntelliSource</a:t>
+            </a:r>
+          </a:p>
+        </p:txBody>
+      </p:sp>
+      <p:sp>
+        <p:nvSpPr>
+          <p:cNvPr id="9" name="TextBox 8"/>
+          <p:cNvSpPr txBox="1"/>
+          <p:nvPr/>
+        </p:nvSpPr>
+        <p:spPr>
+          <a:xfrm>
+            <a:off x="219456" y="713232"/>
+            <a:ext cx="2606040" cy="713232"/>
           </a:xfrm>
           <a:prstGeom prst="rect">
             <a:avLst/>
@@ -6883,28 +7206,39 @@
                 </a:solidFill>
                 <a:latin typeface="Calibri"/>
               </a:rPr>
-              <a:t>Financial
-Dashboard</a:t>
-            </a:r>
-          </a:p>
-        </p:txBody>
-      </p:sp>
-      <p:sp>
-        <p:nvSpPr>
-          <p:cNvPr id="9" name="Rectangle 8"/>
+              <a:t>Financial</a:t>
+            </a:r>
+          </a:p>
+          <a:p>
+            <a:pPr algn="l"/>
+            <a:r>
+              <a:rPr sz="1500" b="1" i="0">
+                <a:solidFill>
+                  <a:srgbClr val="FFFFFF"/>
+                </a:solidFill>
+                <a:latin typeface="Calibri"/>
+              </a:rPr>
+              <a:t>Dashboard</a:t>
+            </a:r>
+          </a:p>
+        </p:txBody>
+      </p:sp>
+      <p:sp>
+        <p:nvSpPr>
+          <p:cNvPr id="10" name="Rectangle 9"/>
           <p:cNvSpPr/>
           <p:nvPr/>
         </p:nvSpPr>
         <p:spPr>
           <a:xfrm>
-            <a:off x="9345168" y="1472184"/>
-            <a:ext cx="54864" cy="54864"/>
-          </a:xfrm>
-          <a:prstGeom prst="rect">
-            <a:avLst/>
-          </a:prstGeom>
-          <a:solidFill>
-            <a:srgbClr val="0091DA"/>
+            <a:off x="219456" y="1463040"/>
+            <a:ext cx="2606040" cy="32004"/>
+          </a:xfrm>
+          <a:prstGeom prst="rect">
+            <a:avLst/>
+          </a:prstGeom>
+          <a:solidFill>
+            <a:srgbClr val="8F7326"/>
           </a:solidFill>
           <a:ln>
             <a:noFill/>
@@ -6934,14 +7268,57 @@
       </p:sp>
       <p:sp>
         <p:nvSpPr>
-          <p:cNvPr id="10" name="TextBox 9"/>
+          <p:cNvPr id="11" name="Rectangle 10"/>
+          <p:cNvSpPr/>
+          <p:nvPr/>
+        </p:nvSpPr>
+        <p:spPr>
+          <a:xfrm>
+            <a:off x="219456" y="1856232"/>
+            <a:ext cx="45720" cy="45720"/>
+          </a:xfrm>
+          <a:prstGeom prst="rect">
+            <a:avLst/>
+          </a:prstGeom>
+          <a:solidFill>
+            <a:srgbClr val="8F7326"/>
+          </a:solidFill>
+          <a:ln>
+            <a:noFill/>
+          </a:ln>
+        </p:spPr>
+        <p:style>
+          <a:lnRef idx="1">
+            <a:schemeClr val="accent1"/>
+          </a:lnRef>
+          <a:fillRef idx="3">
+            <a:schemeClr val="accent1"/>
+          </a:fillRef>
+          <a:effectRef idx="2">
+            <a:schemeClr val="accent1"/>
+          </a:effectRef>
+          <a:fontRef idx="minor">
+            <a:schemeClr val="lt1"/>
+          </a:fontRef>
+        </p:style>
+        <p:txBody>
+          <a:bodyPr rtlCol="0" anchor="ctr"/>
+          <a:lstStyle/>
+          <a:p>
+            <a:pPr algn="ctr"/>
+          </a:p>
+        </p:txBody>
+      </p:sp>
+      <p:sp>
+        <p:nvSpPr>
+          <p:cNvPr id="12" name="TextBox 11"/>
           <p:cNvSpPr txBox="1"/>
           <p:nvPr/>
         </p:nvSpPr>
         <p:spPr>
           <a:xfrm>
-            <a:off x="9491472" y="1399032"/>
-            <a:ext cx="2587752" cy="685800"/>
+            <a:off x="402336" y="1755648"/>
+            <a:ext cx="2423160" cy="713232"/>
           </a:xfrm>
           <a:prstGeom prst="rect">
             <a:avLst/>
@@ -6956,7 +7333,7 @@
           <a:p>
             <a:pPr algn="l"/>
             <a:r>
-              <a:rPr sz="1000" b="0" i="0">
+              <a:rPr sz="950" b="0" i="0">
                 <a:solidFill>
                   <a:srgbClr val="BBD4FF"/>
                 </a:solidFill>
@@ -6969,20 +7346,20 @@
       </p:sp>
       <p:sp>
         <p:nvSpPr>
-          <p:cNvPr id="11" name="Rectangle 10"/>
+          <p:cNvPr id="13" name="Rectangle 12"/>
           <p:cNvSpPr/>
           <p:nvPr/>
         </p:nvSpPr>
         <p:spPr>
           <a:xfrm>
-            <a:off x="9345168" y="2276856"/>
-            <a:ext cx="54864" cy="54864"/>
-          </a:xfrm>
-          <a:prstGeom prst="rect">
-            <a:avLst/>
-          </a:prstGeom>
-          <a:solidFill>
-            <a:srgbClr val="0091DA"/>
+            <a:off x="219456" y="2633472"/>
+            <a:ext cx="45720" cy="45720"/>
+          </a:xfrm>
+          <a:prstGeom prst="rect">
+            <a:avLst/>
+          </a:prstGeom>
+          <a:solidFill>
+            <a:srgbClr val="8F7326"/>
           </a:solidFill>
           <a:ln>
             <a:noFill/>
@@ -7012,14 +7389,14 @@
       </p:sp>
       <p:sp>
         <p:nvSpPr>
-          <p:cNvPr id="12" name="TextBox 11"/>
+          <p:cNvPr id="14" name="TextBox 13"/>
           <p:cNvSpPr txBox="1"/>
           <p:nvPr/>
         </p:nvSpPr>
         <p:spPr>
           <a:xfrm>
-            <a:off x="9491472" y="2203704"/>
-            <a:ext cx="2587752" cy="685800"/>
+            <a:off x="402336" y="2532888"/>
+            <a:ext cx="2423160" cy="713232"/>
           </a:xfrm>
           <a:prstGeom prst="rect">
             <a:avLst/>
@@ -7034,7 +7411,7 @@
           <a:p>
             <a:pPr algn="l"/>
             <a:r>
-              <a:rPr sz="1000" b="0" i="0">
+              <a:rPr sz="950" b="0" i="0">
                 <a:solidFill>
                   <a:srgbClr val="BBD4FF"/>
                 </a:solidFill>
@@ -7047,20 +7424,20 @@
       </p:sp>
       <p:sp>
         <p:nvSpPr>
-          <p:cNvPr id="13" name="Rectangle 12"/>
+          <p:cNvPr id="15" name="Rectangle 14"/>
           <p:cNvSpPr/>
           <p:nvPr/>
         </p:nvSpPr>
         <p:spPr>
           <a:xfrm>
-            <a:off x="9345168" y="3081528"/>
-            <a:ext cx="54864" cy="54864"/>
-          </a:xfrm>
-          <a:prstGeom prst="rect">
-            <a:avLst/>
-          </a:prstGeom>
-          <a:solidFill>
-            <a:srgbClr val="0091DA"/>
+            <a:off x="219456" y="3410712"/>
+            <a:ext cx="45720" cy="45720"/>
+          </a:xfrm>
+          <a:prstGeom prst="rect">
+            <a:avLst/>
+          </a:prstGeom>
+          <a:solidFill>
+            <a:srgbClr val="8F7326"/>
           </a:solidFill>
           <a:ln>
             <a:noFill/>
@@ -7090,14 +7467,14 @@
       </p:sp>
       <p:sp>
         <p:nvSpPr>
-          <p:cNvPr id="14" name="TextBox 13"/>
+          <p:cNvPr id="16" name="TextBox 15"/>
           <p:cNvSpPr txBox="1"/>
           <p:nvPr/>
         </p:nvSpPr>
         <p:spPr>
           <a:xfrm>
-            <a:off x="9491472" y="3008376"/>
-            <a:ext cx="2587752" cy="685800"/>
+            <a:off x="402336" y="3310128"/>
+            <a:ext cx="2423160" cy="713232"/>
           </a:xfrm>
           <a:prstGeom prst="rect">
             <a:avLst/>
@@ -7112,7 +7489,7 @@
           <a:p>
             <a:pPr algn="l"/>
             <a:r>
-              <a:rPr sz="1000" b="0" i="0">
+              <a:rPr sz="950" b="0" i="0">
                 <a:solidFill>
                   <a:srgbClr val="BBD4FF"/>
                 </a:solidFill>
@@ -7125,20 +7502,20 @@
       </p:sp>
       <p:sp>
         <p:nvSpPr>
-          <p:cNvPr id="15" name="Rectangle 14"/>
+          <p:cNvPr id="17" name="Rectangle 16"/>
           <p:cNvSpPr/>
           <p:nvPr/>
         </p:nvSpPr>
         <p:spPr>
           <a:xfrm>
-            <a:off x="9345168" y="3886200"/>
-            <a:ext cx="54864" cy="54864"/>
-          </a:xfrm>
-          <a:prstGeom prst="rect">
-            <a:avLst/>
-          </a:prstGeom>
-          <a:solidFill>
-            <a:srgbClr val="0091DA"/>
+            <a:off x="219456" y="4187952"/>
+            <a:ext cx="45720" cy="45720"/>
+          </a:xfrm>
+          <a:prstGeom prst="rect">
+            <a:avLst/>
+          </a:prstGeom>
+          <a:solidFill>
+            <a:srgbClr val="8F7326"/>
           </a:solidFill>
           <a:ln>
             <a:noFill/>
@@ -7168,14 +7545,14 @@
       </p:sp>
       <p:sp>
         <p:nvSpPr>
-          <p:cNvPr id="16" name="TextBox 15"/>
+          <p:cNvPr id="18" name="TextBox 17"/>
           <p:cNvSpPr txBox="1"/>
           <p:nvPr/>
         </p:nvSpPr>
         <p:spPr>
           <a:xfrm>
-            <a:off x="9491472" y="3813048"/>
-            <a:ext cx="2587752" cy="685800"/>
+            <a:off x="402336" y="4087368"/>
+            <a:ext cx="2423160" cy="713232"/>
           </a:xfrm>
           <a:prstGeom prst="rect">
             <a:avLst/>
@@ -7190,7 +7567,7 @@
           <a:p>
             <a:pPr algn="l"/>
             <a:r>
-              <a:rPr sz="1000" b="0" i="0">
+              <a:rPr sz="950" b="0" i="0">
                 <a:solidFill>
                   <a:srgbClr val="BBD4FF"/>
                 </a:solidFill>
@@ -7203,20 +7580,20 @@
       </p:sp>
       <p:sp>
         <p:nvSpPr>
-          <p:cNvPr id="17" name="Rectangle 16"/>
+          <p:cNvPr id="19" name="Rectangle 18"/>
           <p:cNvSpPr/>
           <p:nvPr/>
         </p:nvSpPr>
         <p:spPr>
           <a:xfrm>
-            <a:off x="9345168" y="4690872"/>
-            <a:ext cx="54864" cy="54864"/>
-          </a:xfrm>
-          <a:prstGeom prst="rect">
-            <a:avLst/>
-          </a:prstGeom>
-          <a:solidFill>
-            <a:srgbClr val="0091DA"/>
+            <a:off x="219456" y="4965192"/>
+            <a:ext cx="45720" cy="45720"/>
+          </a:xfrm>
+          <a:prstGeom prst="rect">
+            <a:avLst/>
+          </a:prstGeom>
+          <a:solidFill>
+            <a:srgbClr val="8F7326"/>
           </a:solidFill>
           <a:ln>
             <a:noFill/>
@@ -7246,14 +7623,14 @@
       </p:sp>
       <p:sp>
         <p:nvSpPr>
-          <p:cNvPr id="18" name="TextBox 17"/>
+          <p:cNvPr id="20" name="TextBox 19"/>
           <p:cNvSpPr txBox="1"/>
           <p:nvPr/>
         </p:nvSpPr>
         <p:spPr>
           <a:xfrm>
-            <a:off x="9491472" y="4617720"/>
-            <a:ext cx="2587752" cy="685800"/>
+            <a:off x="402336" y="4864608"/>
+            <a:ext cx="2423160" cy="713232"/>
           </a:xfrm>
           <a:prstGeom prst="rect">
             <a:avLst/>
@@ -7268,7 +7645,7 @@
           <a:p>
             <a:pPr algn="l"/>
             <a:r>
-              <a:rPr sz="1000" b="0" i="0">
+              <a:rPr sz="950" b="0" i="0">
                 <a:solidFill>
                   <a:srgbClr val="BBD4FF"/>
                 </a:solidFill>
@@ -7306,13 +7683,13 @@
         <p:spPr>
           <a:xfrm>
             <a:off x="0" y="0"/>
-            <a:ext cx="12188952" cy="438912"/>
-          </a:xfrm>
-          <a:prstGeom prst="rect">
-            <a:avLst/>
-          </a:prstGeom>
-          <a:solidFill>
-            <a:srgbClr val="00338D"/>
+            <a:ext cx="12188952" cy="6858000"/>
+          </a:xfrm>
+          <a:prstGeom prst="rect">
+            <a:avLst/>
+          </a:prstGeom>
+          <a:solidFill>
+            <a:srgbClr val="F4F6FA"/>
           </a:solidFill>
           <a:ln>
             <a:noFill/>
@@ -7348,14 +7725,14 @@
         </p:nvSpPr>
         <p:spPr>
           <a:xfrm>
-            <a:off x="0" y="0"/>
-            <a:ext cx="64008" cy="438912"/>
-          </a:xfrm>
-          <a:prstGeom prst="rect">
-            <a:avLst/>
-          </a:prstGeom>
-          <a:solidFill>
-            <a:srgbClr val="0091DA"/>
+            <a:off x="9144000" y="438912"/>
+            <a:ext cx="3044952" cy="6419088"/>
+          </a:xfrm>
+          <a:prstGeom prst="rect">
+            <a:avLst/>
+          </a:prstGeom>
+          <a:solidFill>
+            <a:srgbClr val="00338D"/>
           </a:solidFill>
           <a:ln>
             <a:noFill/>
@@ -7385,14 +7762,167 @@
       </p:sp>
       <p:sp>
         <p:nvSpPr>
-          <p:cNvPr id="4" name="TextBox 3"/>
+          <p:cNvPr id="4" name="Rectangle 3"/>
+          <p:cNvSpPr/>
+          <p:nvPr/>
+        </p:nvSpPr>
+        <p:spPr>
+          <a:xfrm>
+            <a:off x="9144000" y="438912"/>
+            <a:ext cx="54864" cy="6419088"/>
+          </a:xfrm>
+          <a:prstGeom prst="rect">
+            <a:avLst/>
+          </a:prstGeom>
+          <a:solidFill>
+            <a:srgbClr val="0091DA"/>
+          </a:solidFill>
+          <a:ln>
+            <a:noFill/>
+          </a:ln>
+        </p:spPr>
+        <p:style>
+          <a:lnRef idx="1">
+            <a:schemeClr val="accent1"/>
+          </a:lnRef>
+          <a:fillRef idx="3">
+            <a:schemeClr val="accent1"/>
+          </a:fillRef>
+          <a:effectRef idx="2">
+            <a:schemeClr val="accent1"/>
+          </a:effectRef>
+          <a:fontRef idx="minor">
+            <a:schemeClr val="lt1"/>
+          </a:fontRef>
+        </p:style>
+        <p:txBody>
+          <a:bodyPr rtlCol="0" anchor="ctr"/>
+          <a:lstStyle/>
+          <a:p>
+            <a:pPr algn="ctr"/>
+          </a:p>
+        </p:txBody>
+      </p:sp>
+      <p:pic>
+        <p:nvPicPr>
+          <p:cNvPr id="5" name="Picture 4" descr="Screenshot 2026-07-08 at 2.21.34 PM.png"/>
+          <p:cNvPicPr>
+            <a:picLocks noChangeAspect="1"/>
+          </p:cNvPicPr>
+          <p:nvPr/>
+        </p:nvPicPr>
+        <p:blipFill>
+          <a:blip r:embed="rId2"/>
+          <a:stretch>
+            <a:fillRect/>
+          </a:stretch>
+        </p:blipFill>
+        <p:spPr>
+          <a:xfrm>
+            <a:off x="0" y="438912"/>
+            <a:ext cx="9144000" cy="6419088"/>
+          </a:xfrm>
+          <a:prstGeom prst="rect">
+            <a:avLst/>
+          </a:prstGeom>
+        </p:spPr>
+      </p:pic>
+      <p:sp>
+        <p:nvSpPr>
+          <p:cNvPr id="6" name="Rectangle 5"/>
+          <p:cNvSpPr/>
+          <p:nvPr/>
+        </p:nvSpPr>
+        <p:spPr>
+          <a:xfrm>
+            <a:off x="0" y="0"/>
+            <a:ext cx="12188952" cy="438912"/>
+          </a:xfrm>
+          <a:prstGeom prst="rect">
+            <a:avLst/>
+          </a:prstGeom>
+          <a:solidFill>
+            <a:srgbClr val="00338D"/>
+          </a:solidFill>
+          <a:ln>
+            <a:noFill/>
+          </a:ln>
+        </p:spPr>
+        <p:style>
+          <a:lnRef idx="1">
+            <a:schemeClr val="accent1"/>
+          </a:lnRef>
+          <a:fillRef idx="3">
+            <a:schemeClr val="accent1"/>
+          </a:fillRef>
+          <a:effectRef idx="2">
+            <a:schemeClr val="accent1"/>
+          </a:effectRef>
+          <a:fontRef idx="minor">
+            <a:schemeClr val="lt1"/>
+          </a:fontRef>
+        </p:style>
+        <p:txBody>
+          <a:bodyPr rtlCol="0" anchor="ctr"/>
+          <a:lstStyle/>
+          <a:p>
+            <a:pPr algn="ctr"/>
+          </a:p>
+        </p:txBody>
+      </p:sp>
+      <p:sp>
+        <p:nvSpPr>
+          <p:cNvPr id="7" name="Rectangle 6"/>
+          <p:cNvSpPr/>
+          <p:nvPr/>
+        </p:nvSpPr>
+        <p:spPr>
+          <a:xfrm>
+            <a:off x="0" y="0"/>
+            <a:ext cx="64008" cy="438912"/>
+          </a:xfrm>
+          <a:prstGeom prst="rect">
+            <a:avLst/>
+          </a:prstGeom>
+          <a:solidFill>
+            <a:srgbClr val="0091DA"/>
+          </a:solidFill>
+          <a:ln>
+            <a:noFill/>
+          </a:ln>
+        </p:spPr>
+        <p:style>
+          <a:lnRef idx="1">
+            <a:schemeClr val="accent1"/>
+          </a:lnRef>
+          <a:fillRef idx="3">
+            <a:schemeClr val="accent1"/>
+          </a:fillRef>
+          <a:effectRef idx="2">
+            <a:schemeClr val="accent1"/>
+          </a:effectRef>
+          <a:fontRef idx="minor">
+            <a:schemeClr val="lt1"/>
+          </a:fontRef>
+        </p:style>
+        <p:txBody>
+          <a:bodyPr rtlCol="0" anchor="ctr"/>
+          <a:lstStyle/>
+          <a:p>
+            <a:pPr algn="ctr"/>
+          </a:p>
+        </p:txBody>
+      </p:sp>
+      <p:sp>
+        <p:nvSpPr>
+          <p:cNvPr id="8" name="TextBox 7"/>
           <p:cNvSpPr txBox="1"/>
           <p:nvPr/>
         </p:nvSpPr>
         <p:spPr>
           <a:xfrm>
-            <a:off x="137160" y="64008"/>
-            <a:ext cx="2926080" cy="384048"/>
+            <a:off x="146304" y="73152"/>
+            <a:ext cx="3200400" cy="365760"/>
           </a:xfrm>
           <a:prstGeom prst="rect">
             <a:avLst/>
@@ -7418,126 +7948,16 @@
           </a:p>
         </p:txBody>
       </p:sp>
-      <p:pic>
-        <p:nvPicPr>
-          <p:cNvPr id="5" name="Picture 4" descr="Screenshot 2026-07-08 at 2.21.34 PM.png"/>
-          <p:cNvPicPr>
-            <a:picLocks noChangeAspect="1"/>
-          </p:cNvPicPr>
-          <p:nvPr/>
-        </p:nvPicPr>
-        <p:blipFill>
-          <a:blip r:embed="rId2"/>
-          <a:stretch>
-            <a:fillRect/>
-          </a:stretch>
-        </p:blipFill>
-        <p:spPr>
-          <a:xfrm>
-            <a:off x="0" y="438912"/>
-            <a:ext cx="9144000" cy="6419088"/>
-          </a:xfrm>
-          <a:prstGeom prst="rect">
-            <a:avLst/>
-          </a:prstGeom>
-        </p:spPr>
-      </p:pic>
-      <p:sp>
-        <p:nvSpPr>
-          <p:cNvPr id="6" name="Rectangle 5"/>
-          <p:cNvSpPr/>
-          <p:nvPr/>
-        </p:nvSpPr>
-        <p:spPr>
-          <a:xfrm>
-            <a:off x="9144000" y="438912"/>
-            <a:ext cx="3044952" cy="6419088"/>
-          </a:xfrm>
-          <a:prstGeom prst="rect">
-            <a:avLst/>
-          </a:prstGeom>
-          <a:solidFill>
-            <a:srgbClr val="051835"/>
-          </a:solidFill>
-          <a:ln>
-            <a:noFill/>
-          </a:ln>
-        </p:spPr>
-        <p:style>
-          <a:lnRef idx="1">
-            <a:schemeClr val="accent1"/>
-          </a:lnRef>
-          <a:fillRef idx="3">
-            <a:schemeClr val="accent1"/>
-          </a:fillRef>
-          <a:effectRef idx="2">
-            <a:schemeClr val="accent1"/>
-          </a:effectRef>
-          <a:fontRef idx="minor">
-            <a:schemeClr val="lt1"/>
-          </a:fontRef>
-        </p:style>
-        <p:txBody>
-          <a:bodyPr rtlCol="0" anchor="ctr"/>
-          <a:lstStyle/>
-          <a:p>
-            <a:pPr algn="ctr"/>
-          </a:p>
-        </p:txBody>
-      </p:sp>
-      <p:sp>
-        <p:nvSpPr>
-          <p:cNvPr id="7" name="Rectangle 6"/>
-          <p:cNvSpPr/>
-          <p:nvPr/>
-        </p:nvSpPr>
-        <p:spPr>
-          <a:xfrm>
-            <a:off x="9144000" y="438912"/>
-            <a:ext cx="45720" cy="6419088"/>
-          </a:xfrm>
-          <a:prstGeom prst="rect">
-            <a:avLst/>
-          </a:prstGeom>
-          <a:solidFill>
-            <a:srgbClr val="0091DA"/>
-          </a:solidFill>
-          <a:ln>
-            <a:noFill/>
-          </a:ln>
-        </p:spPr>
-        <p:style>
-          <a:lnRef idx="1">
-            <a:schemeClr val="accent1"/>
-          </a:lnRef>
-          <a:fillRef idx="3">
-            <a:schemeClr val="accent1"/>
-          </a:fillRef>
-          <a:effectRef idx="2">
-            <a:schemeClr val="accent1"/>
-          </a:effectRef>
-          <a:fontRef idx="minor">
-            <a:schemeClr val="lt1"/>
-          </a:fontRef>
-        </p:style>
-        <p:txBody>
-          <a:bodyPr rtlCol="0" anchor="ctr"/>
-          <a:lstStyle/>
-          <a:p>
-            <a:pPr algn="ctr"/>
-          </a:p>
-        </p:txBody>
-      </p:sp>
-      <p:sp>
-        <p:nvSpPr>
-          <p:cNvPr id="8" name="TextBox 7"/>
+      <p:sp>
+        <p:nvSpPr>
+          <p:cNvPr id="9" name="TextBox 8"/>
           <p:cNvSpPr txBox="1"/>
           <p:nvPr/>
         </p:nvSpPr>
         <p:spPr>
           <a:xfrm>
-            <a:off x="9326880" y="640080"/>
-            <a:ext cx="2816352" cy="594360"/>
+            <a:off x="9363456" y="713232"/>
+            <a:ext cx="2606040" cy="713232"/>
           </a:xfrm>
           <a:prstGeom prst="rect">
             <a:avLst/>
@@ -7558,28 +7978,39 @@
                 </a:solidFill>
                 <a:latin typeface="Calibri"/>
               </a:rPr>
-              <a:t>Financial
-Dashboard</a:t>
-            </a:r>
-          </a:p>
-        </p:txBody>
-      </p:sp>
-      <p:sp>
-        <p:nvSpPr>
-          <p:cNvPr id="9" name="Rectangle 8"/>
+              <a:t>Financial</a:t>
+            </a:r>
+          </a:p>
+          <a:p>
+            <a:pPr algn="l"/>
+            <a:r>
+              <a:rPr sz="1500" b="1" i="0">
+                <a:solidFill>
+                  <a:srgbClr val="FFFFFF"/>
+                </a:solidFill>
+                <a:latin typeface="Calibri"/>
+              </a:rPr>
+              <a:t>Dashboard</a:t>
+            </a:r>
+          </a:p>
+        </p:txBody>
+      </p:sp>
+      <p:sp>
+        <p:nvSpPr>
+          <p:cNvPr id="10" name="Rectangle 9"/>
           <p:cNvSpPr/>
           <p:nvPr/>
         </p:nvSpPr>
         <p:spPr>
           <a:xfrm>
-            <a:off x="9326880" y="1307592"/>
-            <a:ext cx="2679192" cy="237744"/>
-          </a:xfrm>
-          <a:prstGeom prst="rect">
-            <a:avLst/>
-          </a:prstGeom>
-          <a:solidFill>
-            <a:srgbClr val="005EB8"/>
+            <a:off x="9363456" y="1463040"/>
+            <a:ext cx="2606040" cy="32004"/>
+          </a:xfrm>
+          <a:prstGeom prst="rect">
+            <a:avLst/>
+          </a:prstGeom>
+          <a:solidFill>
+            <a:srgbClr val="0091DA"/>
           </a:solidFill>
           <a:ln>
             <a:noFill/>
@@ -7609,14 +8040,14 @@
       </p:sp>
       <p:sp>
         <p:nvSpPr>
-          <p:cNvPr id="10" name="TextBox 9"/>
+          <p:cNvPr id="11" name="TextBox 10"/>
           <p:cNvSpPr txBox="1"/>
           <p:nvPr/>
         </p:nvSpPr>
         <p:spPr>
           <a:xfrm>
-            <a:off x="9326880" y="1325880"/>
-            <a:ext cx="2679192" cy="219456"/>
+            <a:off x="9363456" y="1591056"/>
+            <a:ext cx="2606040" cy="256032"/>
           </a:xfrm>
           <a:prstGeom prst="rect">
             <a:avLst/>
@@ -7631,27 +8062,27 @@
           <a:p>
             <a:pPr algn="l"/>
             <a:r>
-              <a:rPr sz="800" b="1" i="0">
+              <a:rPr sz="850" b="0" i="1">
                 <a:solidFill>
-                  <a:srgbClr val="FFFFFF"/>
+                  <a:srgbClr val="0091DA"/>
                 </a:solidFill>
                 <a:latin typeface="Calibri"/>
               </a:rPr>
-              <a:t>  continued — Payment Trends</a:t>
-            </a:r>
-          </a:p>
-        </p:txBody>
-      </p:sp>
-      <p:sp>
-        <p:nvSpPr>
-          <p:cNvPr id="11" name="Rectangle 10"/>
+              <a:t>continued — Payment Trends</a:t>
+            </a:r>
+          </a:p>
+        </p:txBody>
+      </p:sp>
+      <p:sp>
+        <p:nvSpPr>
+          <p:cNvPr id="12" name="Rectangle 11"/>
           <p:cNvSpPr/>
           <p:nvPr/>
         </p:nvSpPr>
         <p:spPr>
           <a:xfrm>
-            <a:off x="9345168" y="1746504"/>
-            <a:ext cx="54864" cy="54864"/>
+            <a:off x="9363456" y="2075688"/>
+            <a:ext cx="45720" cy="45720"/>
           </a:xfrm>
           <a:prstGeom prst="rect">
             <a:avLst/>
@@ -7687,14 +8118,14 @@
       </p:sp>
       <p:sp>
         <p:nvSpPr>
-          <p:cNvPr id="12" name="TextBox 11"/>
+          <p:cNvPr id="13" name="TextBox 12"/>
           <p:cNvSpPr txBox="1"/>
           <p:nvPr/>
         </p:nvSpPr>
         <p:spPr>
           <a:xfrm>
-            <a:off x="9491472" y="1673352"/>
-            <a:ext cx="2587752" cy="685800"/>
+            <a:off x="9546336" y="1975104"/>
+            <a:ext cx="2423160" cy="713232"/>
           </a:xfrm>
           <a:prstGeom prst="rect">
             <a:avLst/>
@@ -7709,7 +8140,7 @@
           <a:p>
             <a:pPr algn="l"/>
             <a:r>
-              <a:rPr sz="1000" b="0" i="0">
+              <a:rPr sz="950" b="0" i="0">
                 <a:solidFill>
                   <a:srgbClr val="BBD4FF"/>
                 </a:solidFill>
@@ -7722,14 +8153,14 @@
       </p:sp>
       <p:sp>
         <p:nvSpPr>
-          <p:cNvPr id="13" name="Rectangle 12"/>
+          <p:cNvPr id="14" name="Rectangle 13"/>
           <p:cNvSpPr/>
           <p:nvPr/>
         </p:nvSpPr>
         <p:spPr>
           <a:xfrm>
-            <a:off x="9345168" y="2551176"/>
-            <a:ext cx="54864" cy="54864"/>
+            <a:off x="9363456" y="2852928"/>
+            <a:ext cx="45720" cy="45720"/>
           </a:xfrm>
           <a:prstGeom prst="rect">
             <a:avLst/>
@@ -7765,14 +8196,14 @@
       </p:sp>
       <p:sp>
         <p:nvSpPr>
-          <p:cNvPr id="14" name="TextBox 13"/>
+          <p:cNvPr id="15" name="TextBox 14"/>
           <p:cNvSpPr txBox="1"/>
           <p:nvPr/>
         </p:nvSpPr>
         <p:spPr>
           <a:xfrm>
-            <a:off x="9491472" y="2478024"/>
-            <a:ext cx="2587752" cy="685800"/>
+            <a:off x="9546336" y="2752344"/>
+            <a:ext cx="2423160" cy="713232"/>
           </a:xfrm>
           <a:prstGeom prst="rect">
             <a:avLst/>
@@ -7787,7 +8218,7 @@
           <a:p>
             <a:pPr algn="l"/>
             <a:r>
-              <a:rPr sz="1000" b="0" i="0">
+              <a:rPr sz="950" b="0" i="0">
                 <a:solidFill>
                   <a:srgbClr val="BBD4FF"/>
                 </a:solidFill>
@@ -7800,14 +8231,14 @@
       </p:sp>
       <p:sp>
         <p:nvSpPr>
-          <p:cNvPr id="15" name="Rectangle 14"/>
+          <p:cNvPr id="16" name="Rectangle 15"/>
           <p:cNvSpPr/>
           <p:nvPr/>
         </p:nvSpPr>
         <p:spPr>
           <a:xfrm>
-            <a:off x="9345168" y="3355848"/>
-            <a:ext cx="54864" cy="54864"/>
+            <a:off x="9363456" y="3630168"/>
+            <a:ext cx="45720" cy="45720"/>
           </a:xfrm>
           <a:prstGeom prst="rect">
             <a:avLst/>
@@ -7843,14 +8274,14 @@
       </p:sp>
       <p:sp>
         <p:nvSpPr>
-          <p:cNvPr id="16" name="TextBox 15"/>
+          <p:cNvPr id="17" name="TextBox 16"/>
           <p:cNvSpPr txBox="1"/>
           <p:nvPr/>
         </p:nvSpPr>
         <p:spPr>
           <a:xfrm>
-            <a:off x="9491472" y="3282696"/>
-            <a:ext cx="2587752" cy="685800"/>
+            <a:off x="9546336" y="3529584"/>
+            <a:ext cx="2423160" cy="713232"/>
           </a:xfrm>
           <a:prstGeom prst="rect">
             <a:avLst/>
@@ -7865,13 +8296,13 @@
           <a:p>
             <a:pPr algn="l"/>
             <a:r>
-              <a:rPr sz="1000" b="0" i="0">
+              <a:rPr sz="950" b="0" i="0">
                 <a:solidFill>
                   <a:srgbClr val="BBD4FF"/>
                 </a:solidFill>
                 <a:latin typeface="Calibri"/>
               </a:rPr>
-              <a:t>Identifies periods of concentrated or irregular payment activity</a:t>
+              <a:t>Highlights irregular patterns in vendor payment activity</a:t>
             </a:r>
           </a:p>
         </p:txBody>
@@ -7903,13 +8334,13 @@
         <p:spPr>
           <a:xfrm>
             <a:off x="0" y="0"/>
-            <a:ext cx="12188952" cy="438912"/>
-          </a:xfrm>
-          <a:prstGeom prst="rect">
-            <a:avLst/>
-          </a:prstGeom>
-          <a:solidFill>
-            <a:srgbClr val="00338D"/>
+            <a:ext cx="12188952" cy="6858000"/>
+          </a:xfrm>
+          <a:prstGeom prst="rect">
+            <a:avLst/>
+          </a:prstGeom>
+          <a:solidFill>
+            <a:srgbClr val="051835"/>
           </a:solidFill>
           <a:ln>
             <a:noFill/>
@@ -7945,14 +8376,14 @@
         </p:nvSpPr>
         <p:spPr>
           <a:xfrm>
-            <a:off x="0" y="0"/>
-            <a:ext cx="64008" cy="438912"/>
-          </a:xfrm>
-          <a:prstGeom prst="rect">
-            <a:avLst/>
-          </a:prstGeom>
-          <a:solidFill>
-            <a:srgbClr val="0091DA"/>
+            <a:off x="0" y="438912"/>
+            <a:ext cx="3044952" cy="6419088"/>
+          </a:xfrm>
+          <a:prstGeom prst="rect">
+            <a:avLst/>
+          </a:prstGeom>
+          <a:solidFill>
+            <a:srgbClr val="00338D"/>
           </a:solidFill>
           <a:ln>
             <a:noFill/>
@@ -7982,36 +8413,44 @@
       </p:sp>
       <p:sp>
         <p:nvSpPr>
-          <p:cNvPr id="4" name="TextBox 3"/>
-          <p:cNvSpPr txBox="1"/>
-          <p:nvPr/>
-        </p:nvSpPr>
-        <p:spPr>
-          <a:xfrm>
-            <a:off x="137160" y="64008"/>
-            <a:ext cx="2926080" cy="384048"/>
-          </a:xfrm>
-          <a:prstGeom prst="rect">
-            <a:avLst/>
-          </a:prstGeom>
-          <a:noFill/>
-        </p:spPr>
-        <p:txBody>
-          <a:bodyPr wrap="square">
-            <a:spAutoFit/>
-          </a:bodyPr>
-          <a:lstStyle/>
-          <a:p>
-            <a:pPr algn="l"/>
-            <a:r>
-              <a:rPr sz="1100" b="1" i="0">
-                <a:solidFill>
-                  <a:srgbClr val="0091DA"/>
-                </a:solidFill>
-                <a:latin typeface="Calibri"/>
-              </a:rPr>
-              <a:t>KPMG  IntelliSource</a:t>
-            </a:r>
+          <p:cNvPr id="4" name="Rectangle 3"/>
+          <p:cNvSpPr/>
+          <p:nvPr/>
+        </p:nvSpPr>
+        <p:spPr>
+          <a:xfrm>
+            <a:off x="2990088" y="438912"/>
+            <a:ext cx="54864" cy="6419088"/>
+          </a:xfrm>
+          <a:prstGeom prst="rect">
+            <a:avLst/>
+          </a:prstGeom>
+          <a:solidFill>
+            <a:srgbClr val="8F7326"/>
+          </a:solidFill>
+          <a:ln>
+            <a:noFill/>
+          </a:ln>
+        </p:spPr>
+        <p:style>
+          <a:lnRef idx="1">
+            <a:schemeClr val="accent1"/>
+          </a:lnRef>
+          <a:fillRef idx="3">
+            <a:schemeClr val="accent1"/>
+          </a:fillRef>
+          <a:effectRef idx="2">
+            <a:schemeClr val="accent1"/>
+          </a:effectRef>
+          <a:fontRef idx="minor">
+            <a:schemeClr val="lt1"/>
+          </a:fontRef>
+        </p:style>
+        <p:txBody>
+          <a:bodyPr rtlCol="0" anchor="ctr"/>
+          <a:lstStyle/>
+          <a:p>
+            <a:pPr algn="ctr"/>
           </a:p>
         </p:txBody>
       </p:sp>
@@ -8031,7 +8470,7 @@
         </p:blipFill>
         <p:spPr>
           <a:xfrm>
-            <a:off x="0" y="438912"/>
+            <a:off x="3044952" y="438912"/>
             <a:ext cx="9144000" cy="6419088"/>
           </a:xfrm>
           <a:prstGeom prst="rect">
@@ -8047,14 +8486,14 @@
         </p:nvSpPr>
         <p:spPr>
           <a:xfrm>
-            <a:off x="9144000" y="438912"/>
-            <a:ext cx="3044952" cy="6419088"/>
-          </a:xfrm>
-          <a:prstGeom prst="rect">
-            <a:avLst/>
-          </a:prstGeom>
-          <a:solidFill>
-            <a:srgbClr val="051835"/>
+            <a:off x="0" y="0"/>
+            <a:ext cx="12188952" cy="438912"/>
+          </a:xfrm>
+          <a:prstGeom prst="rect">
+            <a:avLst/>
+          </a:prstGeom>
+          <a:solidFill>
+            <a:srgbClr val="021028"/>
           </a:solidFill>
           <a:ln>
             <a:noFill/>
@@ -8090,14 +8529,14 @@
         </p:nvSpPr>
         <p:spPr>
           <a:xfrm>
-            <a:off x="9144000" y="438912"/>
-            <a:ext cx="45720" cy="6419088"/>
-          </a:xfrm>
-          <a:prstGeom prst="rect">
-            <a:avLst/>
-          </a:prstGeom>
-          <a:solidFill>
-            <a:srgbClr val="0091DA"/>
+            <a:off x="0" y="0"/>
+            <a:ext cx="64008" cy="438912"/>
+          </a:xfrm>
+          <a:prstGeom prst="rect">
+            <a:avLst/>
+          </a:prstGeom>
+          <a:solidFill>
+            <a:srgbClr val="8F7326"/>
           </a:solidFill>
           <a:ln>
             <a:noFill/>
@@ -8133,8 +8572,43 @@
         </p:nvSpPr>
         <p:spPr>
           <a:xfrm>
-            <a:off x="9326880" y="640080"/>
-            <a:ext cx="2816352" cy="594360"/>
+            <a:off x="146304" y="73152"/>
+            <a:ext cx="3200400" cy="365760"/>
+          </a:xfrm>
+          <a:prstGeom prst="rect">
+            <a:avLst/>
+          </a:prstGeom>
+          <a:noFill/>
+        </p:spPr>
+        <p:txBody>
+          <a:bodyPr wrap="square">
+            <a:spAutoFit/>
+          </a:bodyPr>
+          <a:lstStyle/>
+          <a:p>
+            <a:pPr algn="l"/>
+            <a:r>
+              <a:rPr sz="1100" b="1" i="0">
+                <a:solidFill>
+                  <a:srgbClr val="8F7326"/>
+                </a:solidFill>
+                <a:latin typeface="Calibri"/>
+              </a:rPr>
+              <a:t>KPMG  IntelliSource</a:t>
+            </a:r>
+          </a:p>
+        </p:txBody>
+      </p:sp>
+      <p:sp>
+        <p:nvSpPr>
+          <p:cNvPr id="9" name="TextBox 8"/>
+          <p:cNvSpPr txBox="1"/>
+          <p:nvPr/>
+        </p:nvSpPr>
+        <p:spPr>
+          <a:xfrm>
+            <a:off x="219456" y="713232"/>
+            <a:ext cx="2606040" cy="713232"/>
           </a:xfrm>
           <a:prstGeom prst="rect">
             <a:avLst/>
@@ -8155,28 +8629,39 @@
                 </a:solidFill>
                 <a:latin typeface="Calibri"/>
               </a:rPr>
-              <a:t>Leadership
-Dashboard</a:t>
-            </a:r>
-          </a:p>
-        </p:txBody>
-      </p:sp>
-      <p:sp>
-        <p:nvSpPr>
-          <p:cNvPr id="9" name="Rectangle 8"/>
+              <a:t>Leadership</a:t>
+            </a:r>
+          </a:p>
+          <a:p>
+            <a:pPr algn="l"/>
+            <a:r>
+              <a:rPr sz="1500" b="1" i="0">
+                <a:solidFill>
+                  <a:srgbClr val="FFFFFF"/>
+                </a:solidFill>
+                <a:latin typeface="Calibri"/>
+              </a:rPr>
+              <a:t>Dashboard</a:t>
+            </a:r>
+          </a:p>
+        </p:txBody>
+      </p:sp>
+      <p:sp>
+        <p:nvSpPr>
+          <p:cNvPr id="10" name="Rectangle 9"/>
           <p:cNvSpPr/>
           <p:nvPr/>
         </p:nvSpPr>
         <p:spPr>
           <a:xfrm>
-            <a:off x="9345168" y="1472184"/>
-            <a:ext cx="54864" cy="54864"/>
-          </a:xfrm>
-          <a:prstGeom prst="rect">
-            <a:avLst/>
-          </a:prstGeom>
-          <a:solidFill>
-            <a:srgbClr val="0091DA"/>
+            <a:off x="219456" y="1463040"/>
+            <a:ext cx="2606040" cy="32004"/>
+          </a:xfrm>
+          <a:prstGeom prst="rect">
+            <a:avLst/>
+          </a:prstGeom>
+          <a:solidFill>
+            <a:srgbClr val="8F7326"/>
           </a:solidFill>
           <a:ln>
             <a:noFill/>
@@ -8206,14 +8691,57 @@
       </p:sp>
       <p:sp>
         <p:nvSpPr>
-          <p:cNvPr id="10" name="TextBox 9"/>
+          <p:cNvPr id="11" name="Rectangle 10"/>
+          <p:cNvSpPr/>
+          <p:nvPr/>
+        </p:nvSpPr>
+        <p:spPr>
+          <a:xfrm>
+            <a:off x="219456" y="1856232"/>
+            <a:ext cx="45720" cy="45720"/>
+          </a:xfrm>
+          <a:prstGeom prst="rect">
+            <a:avLst/>
+          </a:prstGeom>
+          <a:solidFill>
+            <a:srgbClr val="8F7326"/>
+          </a:solidFill>
+          <a:ln>
+            <a:noFill/>
+          </a:ln>
+        </p:spPr>
+        <p:style>
+          <a:lnRef idx="1">
+            <a:schemeClr val="accent1"/>
+          </a:lnRef>
+          <a:fillRef idx="3">
+            <a:schemeClr val="accent1"/>
+          </a:fillRef>
+          <a:effectRef idx="2">
+            <a:schemeClr val="accent1"/>
+          </a:effectRef>
+          <a:fontRef idx="minor">
+            <a:schemeClr val="lt1"/>
+          </a:fontRef>
+        </p:style>
+        <p:txBody>
+          <a:bodyPr rtlCol="0" anchor="ctr"/>
+          <a:lstStyle/>
+          <a:p>
+            <a:pPr algn="ctr"/>
+          </a:p>
+        </p:txBody>
+      </p:sp>
+      <p:sp>
+        <p:nvSpPr>
+          <p:cNvPr id="12" name="TextBox 11"/>
           <p:cNvSpPr txBox="1"/>
           <p:nvPr/>
         </p:nvSpPr>
         <p:spPr>
           <a:xfrm>
-            <a:off x="9491472" y="1399032"/>
-            <a:ext cx="2587752" cy="685800"/>
+            <a:off x="402336" y="1755648"/>
+            <a:ext cx="2423160" cy="713232"/>
           </a:xfrm>
           <a:prstGeom prst="rect">
             <a:avLst/>
@@ -8228,7 +8756,7 @@
           <a:p>
             <a:pPr algn="l"/>
             <a:r>
-              <a:rPr sz="1000" b="0" i="0">
+              <a:rPr sz="950" b="0" i="0">
                 <a:solidFill>
                   <a:srgbClr val="BBD4FF"/>
                 </a:solidFill>
@@ -8241,20 +8769,20 @@
       </p:sp>
       <p:sp>
         <p:nvSpPr>
-          <p:cNvPr id="11" name="Rectangle 10"/>
+          <p:cNvPr id="13" name="Rectangle 12"/>
           <p:cNvSpPr/>
           <p:nvPr/>
         </p:nvSpPr>
         <p:spPr>
           <a:xfrm>
-            <a:off x="9345168" y="2276856"/>
-            <a:ext cx="54864" cy="54864"/>
-          </a:xfrm>
-          <a:prstGeom prst="rect">
-            <a:avLst/>
-          </a:prstGeom>
-          <a:solidFill>
-            <a:srgbClr val="0091DA"/>
+            <a:off x="219456" y="2633472"/>
+            <a:ext cx="45720" cy="45720"/>
+          </a:xfrm>
+          <a:prstGeom prst="rect">
+            <a:avLst/>
+          </a:prstGeom>
+          <a:solidFill>
+            <a:srgbClr val="8F7326"/>
           </a:solidFill>
           <a:ln>
             <a:noFill/>
@@ -8284,14 +8812,14 @@
       </p:sp>
       <p:sp>
         <p:nvSpPr>
-          <p:cNvPr id="12" name="TextBox 11"/>
+          <p:cNvPr id="14" name="TextBox 13"/>
           <p:cNvSpPr txBox="1"/>
           <p:nvPr/>
         </p:nvSpPr>
         <p:spPr>
           <a:xfrm>
-            <a:off x="9491472" y="2203704"/>
-            <a:ext cx="2587752" cy="685800"/>
+            <a:off x="402336" y="2532888"/>
+            <a:ext cx="2423160" cy="713232"/>
           </a:xfrm>
           <a:prstGeom prst="rect">
             <a:avLst/>
@@ -8306,7 +8834,7 @@
           <a:p>
             <a:pPr algn="l"/>
             <a:r>
-              <a:rPr sz="1000" b="0" i="0">
+              <a:rPr sz="950" b="0" i="0">
                 <a:solidFill>
                   <a:srgbClr val="BBD4FF"/>
                 </a:solidFill>
@@ -8319,20 +8847,20 @@
       </p:sp>
       <p:sp>
         <p:nvSpPr>
-          <p:cNvPr id="13" name="Rectangle 12"/>
+          <p:cNvPr id="15" name="Rectangle 14"/>
           <p:cNvSpPr/>
           <p:nvPr/>
         </p:nvSpPr>
         <p:spPr>
           <a:xfrm>
-            <a:off x="9345168" y="3081528"/>
-            <a:ext cx="54864" cy="54864"/>
-          </a:xfrm>
-          <a:prstGeom prst="rect">
-            <a:avLst/>
-          </a:prstGeom>
-          <a:solidFill>
-            <a:srgbClr val="0091DA"/>
+            <a:off x="219456" y="3410712"/>
+            <a:ext cx="45720" cy="45720"/>
+          </a:xfrm>
+          <a:prstGeom prst="rect">
+            <a:avLst/>
+          </a:prstGeom>
+          <a:solidFill>
+            <a:srgbClr val="8F7326"/>
           </a:solidFill>
           <a:ln>
             <a:noFill/>
@@ -8362,14 +8890,14 @@
       </p:sp>
       <p:sp>
         <p:nvSpPr>
-          <p:cNvPr id="14" name="TextBox 13"/>
+          <p:cNvPr id="16" name="TextBox 15"/>
           <p:cNvSpPr txBox="1"/>
           <p:nvPr/>
         </p:nvSpPr>
         <p:spPr>
           <a:xfrm>
-            <a:off x="9491472" y="3008376"/>
-            <a:ext cx="2587752" cy="685800"/>
+            <a:off x="402336" y="3310128"/>
+            <a:ext cx="2423160" cy="713232"/>
           </a:xfrm>
           <a:prstGeom prst="rect">
             <a:avLst/>
@@ -8384,33 +8912,33 @@
           <a:p>
             <a:pPr algn="l"/>
             <a:r>
-              <a:rPr sz="1000" b="0" i="0">
+              <a:rPr sz="950" b="0" i="0">
                 <a:solidFill>
                   <a:srgbClr val="BBD4FF"/>
                 </a:solidFill>
                 <a:latin typeface="Calibri"/>
               </a:rPr>
-              <a:t>Total committed spend across all departments and entities</a:t>
-            </a:r>
-          </a:p>
-        </p:txBody>
-      </p:sp>
-      <p:sp>
-        <p:nvSpPr>
-          <p:cNvPr id="15" name="Rectangle 14"/>
+              <a:t>Committed spend visible across all departments and entities</a:t>
+            </a:r>
+          </a:p>
+        </p:txBody>
+      </p:sp>
+      <p:sp>
+        <p:nvSpPr>
+          <p:cNvPr id="17" name="Rectangle 16"/>
           <p:cNvSpPr/>
           <p:nvPr/>
         </p:nvSpPr>
         <p:spPr>
           <a:xfrm>
-            <a:off x="9345168" y="3886200"/>
-            <a:ext cx="54864" cy="54864"/>
-          </a:xfrm>
-          <a:prstGeom prst="rect">
-            <a:avLst/>
-          </a:prstGeom>
-          <a:solidFill>
-            <a:srgbClr val="0091DA"/>
+            <a:off x="219456" y="4187952"/>
+            <a:ext cx="45720" cy="45720"/>
+          </a:xfrm>
+          <a:prstGeom prst="rect">
+            <a:avLst/>
+          </a:prstGeom>
+          <a:solidFill>
+            <a:srgbClr val="8F7326"/>
           </a:solidFill>
           <a:ln>
             <a:noFill/>
@@ -8440,14 +8968,14 @@
       </p:sp>
       <p:sp>
         <p:nvSpPr>
-          <p:cNvPr id="16" name="TextBox 15"/>
+          <p:cNvPr id="18" name="TextBox 17"/>
           <p:cNvSpPr txBox="1"/>
           <p:nvPr/>
         </p:nvSpPr>
         <p:spPr>
           <a:xfrm>
-            <a:off x="9491472" y="3813048"/>
-            <a:ext cx="2587752" cy="685800"/>
+            <a:off x="402336" y="4087368"/>
+            <a:ext cx="2423160" cy="713232"/>
           </a:xfrm>
           <a:prstGeom prst="rect">
             <a:avLst/>
@@ -8462,7 +8990,7 @@
           <a:p>
             <a:pPr algn="l"/>
             <a:r>
-              <a:rPr sz="1000" b="0" i="0">
+              <a:rPr sz="950" b="0" i="0">
                 <a:solidFill>
                   <a:srgbClr val="BBD4FF"/>
                 </a:solidFill>
@@ -8475,20 +9003,20 @@
       </p:sp>
       <p:sp>
         <p:nvSpPr>
-          <p:cNvPr id="17" name="Rectangle 16"/>
+          <p:cNvPr id="19" name="Rectangle 18"/>
           <p:cNvSpPr/>
           <p:nvPr/>
         </p:nvSpPr>
         <p:spPr>
           <a:xfrm>
-            <a:off x="9345168" y="4690872"/>
-            <a:ext cx="54864" cy="54864"/>
-          </a:xfrm>
-          <a:prstGeom prst="rect">
-            <a:avLst/>
-          </a:prstGeom>
-          <a:solidFill>
-            <a:srgbClr val="0091DA"/>
+            <a:off x="219456" y="4965192"/>
+            <a:ext cx="45720" cy="45720"/>
+          </a:xfrm>
+          <a:prstGeom prst="rect">
+            <a:avLst/>
+          </a:prstGeom>
+          <a:solidFill>
+            <a:srgbClr val="8F7326"/>
           </a:solidFill>
           <a:ln>
             <a:noFill/>
@@ -8518,14 +9046,14 @@
       </p:sp>
       <p:sp>
         <p:nvSpPr>
-          <p:cNvPr id="18" name="TextBox 17"/>
+          <p:cNvPr id="20" name="TextBox 19"/>
           <p:cNvSpPr txBox="1"/>
           <p:nvPr/>
         </p:nvSpPr>
         <p:spPr>
           <a:xfrm>
-            <a:off x="9491472" y="4617720"/>
-            <a:ext cx="2587752" cy="685800"/>
+            <a:off x="402336" y="4864608"/>
+            <a:ext cx="2423160" cy="713232"/>
           </a:xfrm>
           <a:prstGeom prst="rect">
             <a:avLst/>
@@ -8540,7 +9068,7 @@
           <a:p>
             <a:pPr algn="l"/>
             <a:r>
-              <a:rPr sz="1000" b="0" i="0">
+              <a:rPr sz="950" b="0" i="0">
                 <a:solidFill>
                   <a:srgbClr val="BBD4FF"/>
                 </a:solidFill>
@@ -8578,13 +9106,13 @@
         <p:spPr>
           <a:xfrm>
             <a:off x="0" y="0"/>
-            <a:ext cx="12188952" cy="438912"/>
-          </a:xfrm>
-          <a:prstGeom prst="rect">
-            <a:avLst/>
-          </a:prstGeom>
-          <a:solidFill>
-            <a:srgbClr val="00338D"/>
+            <a:ext cx="12188952" cy="6858000"/>
+          </a:xfrm>
+          <a:prstGeom prst="rect">
+            <a:avLst/>
+          </a:prstGeom>
+          <a:solidFill>
+            <a:srgbClr val="F4F6FA"/>
           </a:solidFill>
           <a:ln>
             <a:noFill/>
@@ -8620,14 +9148,14 @@
         </p:nvSpPr>
         <p:spPr>
           <a:xfrm>
-            <a:off x="0" y="0"/>
-            <a:ext cx="64008" cy="438912"/>
-          </a:xfrm>
-          <a:prstGeom prst="rect">
-            <a:avLst/>
-          </a:prstGeom>
-          <a:solidFill>
-            <a:srgbClr val="0091DA"/>
+            <a:off x="9144000" y="438912"/>
+            <a:ext cx="3044952" cy="6419088"/>
+          </a:xfrm>
+          <a:prstGeom prst="rect">
+            <a:avLst/>
+          </a:prstGeom>
+          <a:solidFill>
+            <a:srgbClr val="00338D"/>
           </a:solidFill>
           <a:ln>
             <a:noFill/>
@@ -8657,14 +9185,167 @@
       </p:sp>
       <p:sp>
         <p:nvSpPr>
-          <p:cNvPr id="4" name="TextBox 3"/>
+          <p:cNvPr id="4" name="Rectangle 3"/>
+          <p:cNvSpPr/>
+          <p:nvPr/>
+        </p:nvSpPr>
+        <p:spPr>
+          <a:xfrm>
+            <a:off x="9144000" y="438912"/>
+            <a:ext cx="54864" cy="6419088"/>
+          </a:xfrm>
+          <a:prstGeom prst="rect">
+            <a:avLst/>
+          </a:prstGeom>
+          <a:solidFill>
+            <a:srgbClr val="0091DA"/>
+          </a:solidFill>
+          <a:ln>
+            <a:noFill/>
+          </a:ln>
+        </p:spPr>
+        <p:style>
+          <a:lnRef idx="1">
+            <a:schemeClr val="accent1"/>
+          </a:lnRef>
+          <a:fillRef idx="3">
+            <a:schemeClr val="accent1"/>
+          </a:fillRef>
+          <a:effectRef idx="2">
+            <a:schemeClr val="accent1"/>
+          </a:effectRef>
+          <a:fontRef idx="minor">
+            <a:schemeClr val="lt1"/>
+          </a:fontRef>
+        </p:style>
+        <p:txBody>
+          <a:bodyPr rtlCol="0" anchor="ctr"/>
+          <a:lstStyle/>
+          <a:p>
+            <a:pPr algn="ctr"/>
+          </a:p>
+        </p:txBody>
+      </p:sp>
+      <p:pic>
+        <p:nvPicPr>
+          <p:cNvPr id="5" name="Picture 4" descr="Screenshot 2026-07-08 at 2.22.42 PM.png"/>
+          <p:cNvPicPr>
+            <a:picLocks noChangeAspect="1"/>
+          </p:cNvPicPr>
+          <p:nvPr/>
+        </p:nvPicPr>
+        <p:blipFill>
+          <a:blip r:embed="rId2"/>
+          <a:stretch>
+            <a:fillRect/>
+          </a:stretch>
+        </p:blipFill>
+        <p:spPr>
+          <a:xfrm>
+            <a:off x="0" y="438912"/>
+            <a:ext cx="9144000" cy="6419088"/>
+          </a:xfrm>
+          <a:prstGeom prst="rect">
+            <a:avLst/>
+          </a:prstGeom>
+        </p:spPr>
+      </p:pic>
+      <p:sp>
+        <p:nvSpPr>
+          <p:cNvPr id="6" name="Rectangle 5"/>
+          <p:cNvSpPr/>
+          <p:nvPr/>
+        </p:nvSpPr>
+        <p:spPr>
+          <a:xfrm>
+            <a:off x="0" y="0"/>
+            <a:ext cx="12188952" cy="438912"/>
+          </a:xfrm>
+          <a:prstGeom prst="rect">
+            <a:avLst/>
+          </a:prstGeom>
+          <a:solidFill>
+            <a:srgbClr val="00338D"/>
+          </a:solidFill>
+          <a:ln>
+            <a:noFill/>
+          </a:ln>
+        </p:spPr>
+        <p:style>
+          <a:lnRef idx="1">
+            <a:schemeClr val="accent1"/>
+          </a:lnRef>
+          <a:fillRef idx="3">
+            <a:schemeClr val="accent1"/>
+          </a:fillRef>
+          <a:effectRef idx="2">
+            <a:schemeClr val="accent1"/>
+          </a:effectRef>
+          <a:fontRef idx="minor">
+            <a:schemeClr val="lt1"/>
+          </a:fontRef>
+        </p:style>
+        <p:txBody>
+          <a:bodyPr rtlCol="0" anchor="ctr"/>
+          <a:lstStyle/>
+          <a:p>
+            <a:pPr algn="ctr"/>
+          </a:p>
+        </p:txBody>
+      </p:sp>
+      <p:sp>
+        <p:nvSpPr>
+          <p:cNvPr id="7" name="Rectangle 6"/>
+          <p:cNvSpPr/>
+          <p:nvPr/>
+        </p:nvSpPr>
+        <p:spPr>
+          <a:xfrm>
+            <a:off x="0" y="0"/>
+            <a:ext cx="64008" cy="438912"/>
+          </a:xfrm>
+          <a:prstGeom prst="rect">
+            <a:avLst/>
+          </a:prstGeom>
+          <a:solidFill>
+            <a:srgbClr val="0091DA"/>
+          </a:solidFill>
+          <a:ln>
+            <a:noFill/>
+          </a:ln>
+        </p:spPr>
+        <p:style>
+          <a:lnRef idx="1">
+            <a:schemeClr val="accent1"/>
+          </a:lnRef>
+          <a:fillRef idx="3">
+            <a:schemeClr val="accent1"/>
+          </a:fillRef>
+          <a:effectRef idx="2">
+            <a:schemeClr val="accent1"/>
+          </a:effectRef>
+          <a:fontRef idx="minor">
+            <a:schemeClr val="lt1"/>
+          </a:fontRef>
+        </p:style>
+        <p:txBody>
+          <a:bodyPr rtlCol="0" anchor="ctr"/>
+          <a:lstStyle/>
+          <a:p>
+            <a:pPr algn="ctr"/>
+          </a:p>
+        </p:txBody>
+      </p:sp>
+      <p:sp>
+        <p:nvSpPr>
+          <p:cNvPr id="8" name="TextBox 7"/>
           <p:cNvSpPr txBox="1"/>
           <p:nvPr/>
         </p:nvSpPr>
         <p:spPr>
           <a:xfrm>
-            <a:off x="137160" y="64008"/>
-            <a:ext cx="2926080" cy="384048"/>
+            <a:off x="146304" y="73152"/>
+            <a:ext cx="3200400" cy="365760"/>
           </a:xfrm>
           <a:prstGeom prst="rect">
             <a:avLst/>
@@ -8690,126 +9371,16 @@
           </a:p>
         </p:txBody>
       </p:sp>
-      <p:pic>
-        <p:nvPicPr>
-          <p:cNvPr id="5" name="Picture 4" descr="Screenshot 2026-07-08 at 2.22.42 PM.png"/>
-          <p:cNvPicPr>
-            <a:picLocks noChangeAspect="1"/>
-          </p:cNvPicPr>
-          <p:nvPr/>
-        </p:nvPicPr>
-        <p:blipFill>
-          <a:blip r:embed="rId2"/>
-          <a:stretch>
-            <a:fillRect/>
-          </a:stretch>
-        </p:blipFill>
-        <p:spPr>
-          <a:xfrm>
-            <a:off x="0" y="438912"/>
-            <a:ext cx="9144000" cy="6419088"/>
-          </a:xfrm>
-          <a:prstGeom prst="rect">
-            <a:avLst/>
-          </a:prstGeom>
-        </p:spPr>
-      </p:pic>
-      <p:sp>
-        <p:nvSpPr>
-          <p:cNvPr id="6" name="Rectangle 5"/>
-          <p:cNvSpPr/>
-          <p:nvPr/>
-        </p:nvSpPr>
-        <p:spPr>
-          <a:xfrm>
-            <a:off x="9144000" y="438912"/>
-            <a:ext cx="3044952" cy="6419088"/>
-          </a:xfrm>
-          <a:prstGeom prst="rect">
-            <a:avLst/>
-          </a:prstGeom>
-          <a:solidFill>
-            <a:srgbClr val="051835"/>
-          </a:solidFill>
-          <a:ln>
-            <a:noFill/>
-          </a:ln>
-        </p:spPr>
-        <p:style>
-          <a:lnRef idx="1">
-            <a:schemeClr val="accent1"/>
-          </a:lnRef>
-          <a:fillRef idx="3">
-            <a:schemeClr val="accent1"/>
-          </a:fillRef>
-          <a:effectRef idx="2">
-            <a:schemeClr val="accent1"/>
-          </a:effectRef>
-          <a:fontRef idx="minor">
-            <a:schemeClr val="lt1"/>
-          </a:fontRef>
-        </p:style>
-        <p:txBody>
-          <a:bodyPr rtlCol="0" anchor="ctr"/>
-          <a:lstStyle/>
-          <a:p>
-            <a:pPr algn="ctr"/>
-          </a:p>
-        </p:txBody>
-      </p:sp>
-      <p:sp>
-        <p:nvSpPr>
-          <p:cNvPr id="7" name="Rectangle 6"/>
-          <p:cNvSpPr/>
-          <p:nvPr/>
-        </p:nvSpPr>
-        <p:spPr>
-          <a:xfrm>
-            <a:off x="9144000" y="438912"/>
-            <a:ext cx="45720" cy="6419088"/>
-          </a:xfrm>
-          <a:prstGeom prst="rect">
-            <a:avLst/>
-          </a:prstGeom>
-          <a:solidFill>
-            <a:srgbClr val="0091DA"/>
-          </a:solidFill>
-          <a:ln>
-            <a:noFill/>
-          </a:ln>
-        </p:spPr>
-        <p:style>
-          <a:lnRef idx="1">
-            <a:schemeClr val="accent1"/>
-          </a:lnRef>
-          <a:fillRef idx="3">
-            <a:schemeClr val="accent1"/>
-          </a:fillRef>
-          <a:effectRef idx="2">
-            <a:schemeClr val="accent1"/>
-          </a:effectRef>
-          <a:fontRef idx="minor">
-            <a:schemeClr val="lt1"/>
-          </a:fontRef>
-        </p:style>
-        <p:txBody>
-          <a:bodyPr rtlCol="0" anchor="ctr"/>
-          <a:lstStyle/>
-          <a:p>
-            <a:pPr algn="ctr"/>
-          </a:p>
-        </p:txBody>
-      </p:sp>
-      <p:sp>
-        <p:nvSpPr>
-          <p:cNvPr id="8" name="TextBox 7"/>
+      <p:sp>
+        <p:nvSpPr>
+          <p:cNvPr id="9" name="TextBox 8"/>
           <p:cNvSpPr txBox="1"/>
           <p:nvPr/>
         </p:nvSpPr>
         <p:spPr>
           <a:xfrm>
-            <a:off x="9326880" y="640080"/>
-            <a:ext cx="2816352" cy="594360"/>
+            <a:off x="9363456" y="713232"/>
+            <a:ext cx="2606040" cy="713232"/>
           </a:xfrm>
           <a:prstGeom prst="rect">
             <a:avLst/>
@@ -8830,28 +9401,39 @@
                 </a:solidFill>
                 <a:latin typeface="Calibri"/>
               </a:rPr>
-              <a:t>Leadership
-Dashboard</a:t>
-            </a:r>
-          </a:p>
-        </p:txBody>
-      </p:sp>
-      <p:sp>
-        <p:nvSpPr>
-          <p:cNvPr id="9" name="Rectangle 8"/>
+              <a:t>Leadership</a:t>
+            </a:r>
+          </a:p>
+          <a:p>
+            <a:pPr algn="l"/>
+            <a:r>
+              <a:rPr sz="1500" b="1" i="0">
+                <a:solidFill>
+                  <a:srgbClr val="FFFFFF"/>
+                </a:solidFill>
+                <a:latin typeface="Calibri"/>
+              </a:rPr>
+              <a:t>Dashboard</a:t>
+            </a:r>
+          </a:p>
+        </p:txBody>
+      </p:sp>
+      <p:sp>
+        <p:nvSpPr>
+          <p:cNvPr id="10" name="Rectangle 9"/>
           <p:cNvSpPr/>
           <p:nvPr/>
         </p:nvSpPr>
         <p:spPr>
           <a:xfrm>
-            <a:off x="9326880" y="1307592"/>
-            <a:ext cx="2679192" cy="237744"/>
-          </a:xfrm>
-          <a:prstGeom prst="rect">
-            <a:avLst/>
-          </a:prstGeom>
-          <a:solidFill>
-            <a:srgbClr val="005EB8"/>
+            <a:off x="9363456" y="1463040"/>
+            <a:ext cx="2606040" cy="32004"/>
+          </a:xfrm>
+          <a:prstGeom prst="rect">
+            <a:avLst/>
+          </a:prstGeom>
+          <a:solidFill>
+            <a:srgbClr val="0091DA"/>
           </a:solidFill>
           <a:ln>
             <a:noFill/>
@@ -8881,14 +9463,14 @@
       </p:sp>
       <p:sp>
         <p:nvSpPr>
-          <p:cNvPr id="10" name="TextBox 9"/>
+          <p:cNvPr id="11" name="TextBox 10"/>
           <p:cNvSpPr txBox="1"/>
           <p:nvPr/>
         </p:nvSpPr>
         <p:spPr>
           <a:xfrm>
-            <a:off x="9326880" y="1325880"/>
-            <a:ext cx="2679192" cy="219456"/>
+            <a:off x="9363456" y="1591056"/>
+            <a:ext cx="2606040" cy="256032"/>
           </a:xfrm>
           <a:prstGeom prst="rect">
             <a:avLst/>
@@ -8903,27 +9485,27 @@
           <a:p>
             <a:pPr algn="l"/>
             <a:r>
-              <a:rPr sz="800" b="1" i="0">
+              <a:rPr sz="850" b="0" i="1">
                 <a:solidFill>
-                  <a:srgbClr val="FFFFFF"/>
+                  <a:srgbClr val="0091DA"/>
                 </a:solidFill>
                 <a:latin typeface="Calibri"/>
               </a:rPr>
-              <a:t>  continued — Risk Analytics</a:t>
-            </a:r>
-          </a:p>
-        </p:txBody>
-      </p:sp>
-      <p:sp>
-        <p:nvSpPr>
-          <p:cNvPr id="11" name="Rectangle 10"/>
+              <a:t>continued — Risk Analytics</a:t>
+            </a:r>
+          </a:p>
+        </p:txBody>
+      </p:sp>
+      <p:sp>
+        <p:nvSpPr>
+          <p:cNvPr id="12" name="Rectangle 11"/>
           <p:cNvSpPr/>
           <p:nvPr/>
         </p:nvSpPr>
         <p:spPr>
           <a:xfrm>
-            <a:off x="9345168" y="1746504"/>
-            <a:ext cx="54864" cy="54864"/>
+            <a:off x="9363456" y="2075688"/>
+            <a:ext cx="45720" cy="45720"/>
           </a:xfrm>
           <a:prstGeom prst="rect">
             <a:avLst/>
@@ -8959,14 +9541,14 @@
       </p:sp>
       <p:sp>
         <p:nvSpPr>
-          <p:cNvPr id="12" name="TextBox 11"/>
+          <p:cNvPr id="13" name="TextBox 12"/>
           <p:cNvSpPr txBox="1"/>
           <p:nvPr/>
         </p:nvSpPr>
         <p:spPr>
           <a:xfrm>
-            <a:off x="9491472" y="1673352"/>
-            <a:ext cx="2587752" cy="685800"/>
+            <a:off x="9546336" y="1975104"/>
+            <a:ext cx="2423160" cy="713232"/>
           </a:xfrm>
           <a:prstGeom prst="rect">
             <a:avLst/>
@@ -8981,7 +9563,7 @@
           <a:p>
             <a:pPr algn="l"/>
             <a:r>
-              <a:rPr sz="1000" b="0" i="0">
+              <a:rPr sz="950" b="0" i="0">
                 <a:solidFill>
                   <a:srgbClr val="BBD4FF"/>
                 </a:solidFill>
@@ -8994,14 +9576,14 @@
       </p:sp>
       <p:sp>
         <p:nvSpPr>
-          <p:cNvPr id="13" name="Rectangle 12"/>
+          <p:cNvPr id="14" name="Rectangle 13"/>
           <p:cNvSpPr/>
           <p:nvPr/>
         </p:nvSpPr>
         <p:spPr>
           <a:xfrm>
-            <a:off x="9345168" y="2551176"/>
-            <a:ext cx="54864" cy="54864"/>
+            <a:off x="9363456" y="2852928"/>
+            <a:ext cx="45720" cy="45720"/>
           </a:xfrm>
           <a:prstGeom prst="rect">
             <a:avLst/>
@@ -9037,14 +9619,14 @@
       </p:sp>
       <p:sp>
         <p:nvSpPr>
-          <p:cNvPr id="14" name="TextBox 13"/>
+          <p:cNvPr id="15" name="TextBox 14"/>
           <p:cNvSpPr txBox="1"/>
           <p:nvPr/>
         </p:nvSpPr>
         <p:spPr>
           <a:xfrm>
-            <a:off x="9491472" y="2478024"/>
-            <a:ext cx="2587752" cy="685800"/>
+            <a:off x="9546336" y="2752344"/>
+            <a:ext cx="2423160" cy="713232"/>
           </a:xfrm>
           <a:prstGeom prst="rect">
             <a:avLst/>
@@ -9059,7 +9641,7 @@
           <a:p>
             <a:pPr algn="l"/>
             <a:r>
-              <a:rPr sz="1000" b="0" i="0">
+              <a:rPr sz="950" b="0" i="0">
                 <a:solidFill>
                   <a:srgbClr val="BBD4FF"/>
                 </a:solidFill>
@@ -9072,14 +9654,14 @@
       </p:sp>
       <p:sp>
         <p:nvSpPr>
-          <p:cNvPr id="15" name="Rectangle 14"/>
+          <p:cNvPr id="16" name="Rectangle 15"/>
           <p:cNvSpPr/>
           <p:nvPr/>
         </p:nvSpPr>
         <p:spPr>
           <a:xfrm>
-            <a:off x="9345168" y="3355848"/>
-            <a:ext cx="54864" cy="54864"/>
+            <a:off x="9363456" y="3630168"/>
+            <a:ext cx="45720" cy="45720"/>
           </a:xfrm>
           <a:prstGeom prst="rect">
             <a:avLst/>
@@ -9115,14 +9697,14 @@
       </p:sp>
       <p:sp>
         <p:nvSpPr>
-          <p:cNvPr id="16" name="TextBox 15"/>
+          <p:cNvPr id="17" name="TextBox 16"/>
           <p:cNvSpPr txBox="1"/>
           <p:nvPr/>
         </p:nvSpPr>
         <p:spPr>
           <a:xfrm>
-            <a:off x="9491472" y="3282696"/>
-            <a:ext cx="2587752" cy="685800"/>
+            <a:off x="9546336" y="3529584"/>
+            <a:ext cx="2423160" cy="713232"/>
           </a:xfrm>
           <a:prstGeom prst="rect">
             <a:avLst/>
@@ -9137,7 +9719,7 @@
           <a:p>
             <a:pPr algn="l"/>
             <a:r>
-              <a:rPr sz="1000" b="0" i="0">
+              <a:rPr sz="950" b="0" i="0">
                 <a:solidFill>
                   <a:srgbClr val="BBD4FF"/>
                 </a:solidFill>
@@ -9175,13 +9757,13 @@
         <p:spPr>
           <a:xfrm>
             <a:off x="0" y="0"/>
-            <a:ext cx="12188952" cy="438912"/>
-          </a:xfrm>
-          <a:prstGeom prst="rect">
-            <a:avLst/>
-          </a:prstGeom>
-          <a:solidFill>
-            <a:srgbClr val="00338D"/>
+            <a:ext cx="12188952" cy="6858000"/>
+          </a:xfrm>
+          <a:prstGeom prst="rect">
+            <a:avLst/>
+          </a:prstGeom>
+          <a:solidFill>
+            <a:srgbClr val="051835"/>
           </a:solidFill>
           <a:ln>
             <a:noFill/>
@@ -9217,14 +9799,14 @@
         </p:nvSpPr>
         <p:spPr>
           <a:xfrm>
-            <a:off x="0" y="0"/>
-            <a:ext cx="64008" cy="438912"/>
-          </a:xfrm>
-          <a:prstGeom prst="rect">
-            <a:avLst/>
-          </a:prstGeom>
-          <a:solidFill>
-            <a:srgbClr val="0091DA"/>
+            <a:off x="0" y="438912"/>
+            <a:ext cx="3044952" cy="6419088"/>
+          </a:xfrm>
+          <a:prstGeom prst="rect">
+            <a:avLst/>
+          </a:prstGeom>
+          <a:solidFill>
+            <a:srgbClr val="00338D"/>
           </a:solidFill>
           <a:ln>
             <a:noFill/>
@@ -9254,36 +9836,44 @@
       </p:sp>
       <p:sp>
         <p:nvSpPr>
-          <p:cNvPr id="4" name="TextBox 3"/>
-          <p:cNvSpPr txBox="1"/>
-          <p:nvPr/>
-        </p:nvSpPr>
-        <p:spPr>
-          <a:xfrm>
-            <a:off x="137160" y="64008"/>
-            <a:ext cx="2926080" cy="384048"/>
-          </a:xfrm>
-          <a:prstGeom prst="rect">
-            <a:avLst/>
-          </a:prstGeom>
-          <a:noFill/>
-        </p:spPr>
-        <p:txBody>
-          <a:bodyPr wrap="square">
-            <a:spAutoFit/>
-          </a:bodyPr>
-          <a:lstStyle/>
-          <a:p>
-            <a:pPr algn="l"/>
-            <a:r>
-              <a:rPr sz="1100" b="1" i="0">
-                <a:solidFill>
-                  <a:srgbClr val="0091DA"/>
-                </a:solidFill>
-                <a:latin typeface="Calibri"/>
-              </a:rPr>
-              <a:t>KPMG  IntelliSource</a:t>
-            </a:r>
+          <p:cNvPr id="4" name="Rectangle 3"/>
+          <p:cNvSpPr/>
+          <p:nvPr/>
+        </p:nvSpPr>
+        <p:spPr>
+          <a:xfrm>
+            <a:off x="2990088" y="438912"/>
+            <a:ext cx="54864" cy="6419088"/>
+          </a:xfrm>
+          <a:prstGeom prst="rect">
+            <a:avLst/>
+          </a:prstGeom>
+          <a:solidFill>
+            <a:srgbClr val="8F7326"/>
+          </a:solidFill>
+          <a:ln>
+            <a:noFill/>
+          </a:ln>
+        </p:spPr>
+        <p:style>
+          <a:lnRef idx="1">
+            <a:schemeClr val="accent1"/>
+          </a:lnRef>
+          <a:fillRef idx="3">
+            <a:schemeClr val="accent1"/>
+          </a:fillRef>
+          <a:effectRef idx="2">
+            <a:schemeClr val="accent1"/>
+          </a:effectRef>
+          <a:fontRef idx="minor">
+            <a:schemeClr val="lt1"/>
+          </a:fontRef>
+        </p:style>
+        <p:txBody>
+          <a:bodyPr rtlCol="0" anchor="ctr"/>
+          <a:lstStyle/>
+          <a:p>
+            <a:pPr algn="ctr"/>
           </a:p>
         </p:txBody>
       </p:sp>
@@ -9303,7 +9893,7 @@
         </p:blipFill>
         <p:spPr>
           <a:xfrm>
-            <a:off x="0" y="438912"/>
+            <a:off x="3044952" y="438912"/>
             <a:ext cx="9144000" cy="6419088"/>
           </a:xfrm>
           <a:prstGeom prst="rect">
@@ -9319,14 +9909,14 @@
         </p:nvSpPr>
         <p:spPr>
           <a:xfrm>
-            <a:off x="9144000" y="438912"/>
-            <a:ext cx="3044952" cy="6419088"/>
-          </a:xfrm>
-          <a:prstGeom prst="rect">
-            <a:avLst/>
-          </a:prstGeom>
-          <a:solidFill>
-            <a:srgbClr val="051835"/>
+            <a:off x="0" y="0"/>
+            <a:ext cx="12188952" cy="438912"/>
+          </a:xfrm>
+          <a:prstGeom prst="rect">
+            <a:avLst/>
+          </a:prstGeom>
+          <a:solidFill>
+            <a:srgbClr val="021028"/>
           </a:solidFill>
           <a:ln>
             <a:noFill/>
@@ -9362,14 +9952,14 @@
         </p:nvSpPr>
         <p:spPr>
           <a:xfrm>
-            <a:off x="9144000" y="438912"/>
-            <a:ext cx="45720" cy="6419088"/>
-          </a:xfrm>
-          <a:prstGeom prst="rect">
-            <a:avLst/>
-          </a:prstGeom>
-          <a:solidFill>
-            <a:srgbClr val="0091DA"/>
+            <a:off x="0" y="0"/>
+            <a:ext cx="64008" cy="438912"/>
+          </a:xfrm>
+          <a:prstGeom prst="rect">
+            <a:avLst/>
+          </a:prstGeom>
+          <a:solidFill>
+            <a:srgbClr val="8F7326"/>
           </a:solidFill>
           <a:ln>
             <a:noFill/>
@@ -9405,8 +9995,43 @@
         </p:nvSpPr>
         <p:spPr>
           <a:xfrm>
-            <a:off x="9326880" y="640080"/>
-            <a:ext cx="2816352" cy="594360"/>
+            <a:off x="146304" y="73152"/>
+            <a:ext cx="3200400" cy="365760"/>
+          </a:xfrm>
+          <a:prstGeom prst="rect">
+            <a:avLst/>
+          </a:prstGeom>
+          <a:noFill/>
+        </p:spPr>
+        <p:txBody>
+          <a:bodyPr wrap="square">
+            <a:spAutoFit/>
+          </a:bodyPr>
+          <a:lstStyle/>
+          <a:p>
+            <a:pPr algn="l"/>
+            <a:r>
+              <a:rPr sz="1100" b="1" i="0">
+                <a:solidFill>
+                  <a:srgbClr val="8F7326"/>
+                </a:solidFill>
+                <a:latin typeface="Calibri"/>
+              </a:rPr>
+              <a:t>KPMG  IntelliSource</a:t>
+            </a:r>
+          </a:p>
+        </p:txBody>
+      </p:sp>
+      <p:sp>
+        <p:nvSpPr>
+          <p:cNvPr id="9" name="TextBox 8"/>
+          <p:cNvSpPr txBox="1"/>
+          <p:nvPr/>
+        </p:nvSpPr>
+        <p:spPr>
+          <a:xfrm>
+            <a:off x="219456" y="713232"/>
+            <a:ext cx="2606040" cy="713232"/>
           </a:xfrm>
           <a:prstGeom prst="rect">
             <a:avLst/>
@@ -9427,28 +10052,39 @@
                 </a:solidFill>
                 <a:latin typeface="Calibri"/>
               </a:rPr>
-              <a:t>Vendor
-Performance</a:t>
-            </a:r>
-          </a:p>
-        </p:txBody>
-      </p:sp>
-      <p:sp>
-        <p:nvSpPr>
-          <p:cNvPr id="9" name="Rectangle 8"/>
+              <a:t>Vendor</a:t>
+            </a:r>
+          </a:p>
+          <a:p>
+            <a:pPr algn="l"/>
+            <a:r>
+              <a:rPr sz="1500" b="1" i="0">
+                <a:solidFill>
+                  <a:srgbClr val="FFFFFF"/>
+                </a:solidFill>
+                <a:latin typeface="Calibri"/>
+              </a:rPr>
+              <a:t>Performance</a:t>
+            </a:r>
+          </a:p>
+        </p:txBody>
+      </p:sp>
+      <p:sp>
+        <p:nvSpPr>
+          <p:cNvPr id="10" name="Rectangle 9"/>
           <p:cNvSpPr/>
           <p:nvPr/>
         </p:nvSpPr>
         <p:spPr>
           <a:xfrm>
-            <a:off x="9345168" y="1472184"/>
-            <a:ext cx="54864" cy="54864"/>
-          </a:xfrm>
-          <a:prstGeom prst="rect">
-            <a:avLst/>
-          </a:prstGeom>
-          <a:solidFill>
-            <a:srgbClr val="0091DA"/>
+            <a:off x="219456" y="1463040"/>
+            <a:ext cx="2606040" cy="32004"/>
+          </a:xfrm>
+          <a:prstGeom prst="rect">
+            <a:avLst/>
+          </a:prstGeom>
+          <a:solidFill>
+            <a:srgbClr val="8F7326"/>
           </a:solidFill>
           <a:ln>
             <a:noFill/>
@@ -9478,14 +10114,57 @@
       </p:sp>
       <p:sp>
         <p:nvSpPr>
-          <p:cNvPr id="10" name="TextBox 9"/>
+          <p:cNvPr id="11" name="Rectangle 10"/>
+          <p:cNvSpPr/>
+          <p:nvPr/>
+        </p:nvSpPr>
+        <p:spPr>
+          <a:xfrm>
+            <a:off x="219456" y="1856232"/>
+            <a:ext cx="45720" cy="45720"/>
+          </a:xfrm>
+          <a:prstGeom prst="rect">
+            <a:avLst/>
+          </a:prstGeom>
+          <a:solidFill>
+            <a:srgbClr val="8F7326"/>
+          </a:solidFill>
+          <a:ln>
+            <a:noFill/>
+          </a:ln>
+        </p:spPr>
+        <p:style>
+          <a:lnRef idx="1">
+            <a:schemeClr val="accent1"/>
+          </a:lnRef>
+          <a:fillRef idx="3">
+            <a:schemeClr val="accent1"/>
+          </a:fillRef>
+          <a:effectRef idx="2">
+            <a:schemeClr val="accent1"/>
+          </a:effectRef>
+          <a:fontRef idx="minor">
+            <a:schemeClr val="lt1"/>
+          </a:fontRef>
+        </p:style>
+        <p:txBody>
+          <a:bodyPr rtlCol="0" anchor="ctr"/>
+          <a:lstStyle/>
+          <a:p>
+            <a:pPr algn="ctr"/>
+          </a:p>
+        </p:txBody>
+      </p:sp>
+      <p:sp>
+        <p:nvSpPr>
+          <p:cNvPr id="12" name="TextBox 11"/>
           <p:cNvSpPr txBox="1"/>
           <p:nvPr/>
         </p:nvSpPr>
         <p:spPr>
           <a:xfrm>
-            <a:off x="9491472" y="1399032"/>
-            <a:ext cx="2587752" cy="685800"/>
+            <a:off x="402336" y="1755648"/>
+            <a:ext cx="2423160" cy="713232"/>
           </a:xfrm>
           <a:prstGeom prst="rect">
             <a:avLst/>
@@ -9500,7 +10179,7 @@
           <a:p>
             <a:pPr algn="l"/>
             <a:r>
-              <a:rPr sz="1000" b="0" i="0">
+              <a:rPr sz="950" b="0" i="0">
                 <a:solidFill>
                   <a:srgbClr val="BBD4FF"/>
                 </a:solidFill>
@@ -9513,20 +10192,20 @@
       </p:sp>
       <p:sp>
         <p:nvSpPr>
-          <p:cNvPr id="11" name="Rectangle 10"/>
+          <p:cNvPr id="13" name="Rectangle 12"/>
           <p:cNvSpPr/>
           <p:nvPr/>
         </p:nvSpPr>
         <p:spPr>
           <a:xfrm>
-            <a:off x="9345168" y="2276856"/>
-            <a:ext cx="54864" cy="54864"/>
-          </a:xfrm>
-          <a:prstGeom prst="rect">
-            <a:avLst/>
-          </a:prstGeom>
-          <a:solidFill>
-            <a:srgbClr val="0091DA"/>
+            <a:off x="219456" y="2633472"/>
+            <a:ext cx="45720" cy="45720"/>
+          </a:xfrm>
+          <a:prstGeom prst="rect">
+            <a:avLst/>
+          </a:prstGeom>
+          <a:solidFill>
+            <a:srgbClr val="8F7326"/>
           </a:solidFill>
           <a:ln>
             <a:noFill/>
@@ -9556,14 +10235,14 @@
       </p:sp>
       <p:sp>
         <p:nvSpPr>
-          <p:cNvPr id="12" name="TextBox 11"/>
+          <p:cNvPr id="14" name="TextBox 13"/>
           <p:cNvSpPr txBox="1"/>
           <p:nvPr/>
         </p:nvSpPr>
         <p:spPr>
           <a:xfrm>
-            <a:off x="9491472" y="2203704"/>
-            <a:ext cx="2587752" cy="685800"/>
+            <a:off x="402336" y="2532888"/>
+            <a:ext cx="2423160" cy="713232"/>
           </a:xfrm>
           <a:prstGeom prst="rect">
             <a:avLst/>
@@ -9578,7 +10257,7 @@
           <a:p>
             <a:pPr algn="l"/>
             <a:r>
-              <a:rPr sz="1000" b="0" i="0">
+              <a:rPr sz="950" b="0" i="0">
                 <a:solidFill>
                   <a:srgbClr val="BBD4FF"/>
                 </a:solidFill>
@@ -9591,20 +10270,20 @@
       </p:sp>
       <p:sp>
         <p:nvSpPr>
-          <p:cNvPr id="13" name="Rectangle 12"/>
+          <p:cNvPr id="15" name="Rectangle 14"/>
           <p:cNvSpPr/>
           <p:nvPr/>
         </p:nvSpPr>
         <p:spPr>
           <a:xfrm>
-            <a:off x="9345168" y="3081528"/>
-            <a:ext cx="54864" cy="54864"/>
-          </a:xfrm>
-          <a:prstGeom prst="rect">
-            <a:avLst/>
-          </a:prstGeom>
-          <a:solidFill>
-            <a:srgbClr val="0091DA"/>
+            <a:off x="219456" y="3410712"/>
+            <a:ext cx="45720" cy="45720"/>
+          </a:xfrm>
+          <a:prstGeom prst="rect">
+            <a:avLst/>
+          </a:prstGeom>
+          <a:solidFill>
+            <a:srgbClr val="8F7326"/>
           </a:solidFill>
           <a:ln>
             <a:noFill/>
@@ -9634,14 +10313,14 @@
       </p:sp>
       <p:sp>
         <p:nvSpPr>
-          <p:cNvPr id="14" name="TextBox 13"/>
+          <p:cNvPr id="16" name="TextBox 15"/>
           <p:cNvSpPr txBox="1"/>
           <p:nvPr/>
         </p:nvSpPr>
         <p:spPr>
           <a:xfrm>
-            <a:off x="9491472" y="3008376"/>
-            <a:ext cx="2587752" cy="685800"/>
+            <a:off x="402336" y="3310128"/>
+            <a:ext cx="2423160" cy="713232"/>
           </a:xfrm>
           <a:prstGeom prst="rect">
             <a:avLst/>
@@ -9656,7 +10335,7 @@
           <a:p>
             <a:pPr algn="l"/>
             <a:r>
-              <a:rPr sz="1000" b="0" i="0">
+              <a:rPr sz="950" b="0" i="0">
                 <a:solidFill>
                   <a:srgbClr val="BBD4FF"/>
                 </a:solidFill>
@@ -9669,20 +10348,20 @@
       </p:sp>
       <p:sp>
         <p:nvSpPr>
-          <p:cNvPr id="15" name="Rectangle 14"/>
+          <p:cNvPr id="17" name="Rectangle 16"/>
           <p:cNvSpPr/>
           <p:nvPr/>
         </p:nvSpPr>
         <p:spPr>
           <a:xfrm>
-            <a:off x="9345168" y="3886200"/>
-            <a:ext cx="54864" cy="54864"/>
-          </a:xfrm>
-          <a:prstGeom prst="rect">
-            <a:avLst/>
-          </a:prstGeom>
-          <a:solidFill>
-            <a:srgbClr val="0091DA"/>
+            <a:off x="219456" y="4187952"/>
+            <a:ext cx="45720" cy="45720"/>
+          </a:xfrm>
+          <a:prstGeom prst="rect">
+            <a:avLst/>
+          </a:prstGeom>
+          <a:solidFill>
+            <a:srgbClr val="8F7326"/>
           </a:solidFill>
           <a:ln>
             <a:noFill/>
@@ -9712,14 +10391,14 @@
       </p:sp>
       <p:sp>
         <p:nvSpPr>
-          <p:cNvPr id="16" name="TextBox 15"/>
+          <p:cNvPr id="18" name="TextBox 17"/>
           <p:cNvSpPr txBox="1"/>
           <p:nvPr/>
         </p:nvSpPr>
         <p:spPr>
           <a:xfrm>
-            <a:off x="9491472" y="3813048"/>
-            <a:ext cx="2587752" cy="685800"/>
+            <a:off x="402336" y="4087368"/>
+            <a:ext cx="2423160" cy="713232"/>
           </a:xfrm>
           <a:prstGeom prst="rect">
             <a:avLst/>
@@ -9734,7 +10413,7 @@
           <a:p>
             <a:pPr algn="l"/>
             <a:r>
-              <a:rPr sz="1000" b="0" i="0">
+              <a:rPr sz="950" b="0" i="0">
                 <a:solidFill>
                   <a:srgbClr val="BBD4FF"/>
                 </a:solidFill>
@@ -9747,20 +10426,20 @@
       </p:sp>
       <p:sp>
         <p:nvSpPr>
-          <p:cNvPr id="17" name="Rectangle 16"/>
+          <p:cNvPr id="19" name="Rectangle 18"/>
           <p:cNvSpPr/>
           <p:nvPr/>
         </p:nvSpPr>
         <p:spPr>
           <a:xfrm>
-            <a:off x="9345168" y="4690872"/>
-            <a:ext cx="54864" cy="54864"/>
-          </a:xfrm>
-          <a:prstGeom prst="rect">
-            <a:avLst/>
-          </a:prstGeom>
-          <a:solidFill>
-            <a:srgbClr val="0091DA"/>
+            <a:off x="219456" y="4965192"/>
+            <a:ext cx="45720" cy="45720"/>
+          </a:xfrm>
+          <a:prstGeom prst="rect">
+            <a:avLst/>
+          </a:prstGeom>
+          <a:solidFill>
+            <a:srgbClr val="8F7326"/>
           </a:solidFill>
           <a:ln>
             <a:noFill/>
@@ -9790,14 +10469,14 @@
       </p:sp>
       <p:sp>
         <p:nvSpPr>
-          <p:cNvPr id="18" name="TextBox 17"/>
+          <p:cNvPr id="20" name="TextBox 19"/>
           <p:cNvSpPr txBox="1"/>
           <p:nvPr/>
         </p:nvSpPr>
         <p:spPr>
           <a:xfrm>
-            <a:off x="9491472" y="4617720"/>
-            <a:ext cx="2587752" cy="685800"/>
+            <a:off x="402336" y="4864608"/>
+            <a:ext cx="2423160" cy="713232"/>
           </a:xfrm>
           <a:prstGeom prst="rect">
             <a:avLst/>
@@ -9812,7 +10491,7 @@
           <a:p>
             <a:pPr algn="l"/>
             <a:r>
-              <a:rPr sz="1000" b="0" i="0">
+              <a:rPr sz="950" b="0" i="0">
                 <a:solidFill>
                   <a:srgbClr val="BBD4FF"/>
                 </a:solidFill>
@@ -9850,13 +10529,13 @@
         <p:spPr>
           <a:xfrm>
             <a:off x="0" y="0"/>
-            <a:ext cx="12188952" cy="438912"/>
-          </a:xfrm>
-          <a:prstGeom prst="rect">
-            <a:avLst/>
-          </a:prstGeom>
-          <a:solidFill>
-            <a:srgbClr val="00338D"/>
+            <a:ext cx="12188952" cy="6858000"/>
+          </a:xfrm>
+          <a:prstGeom prst="rect">
+            <a:avLst/>
+          </a:prstGeom>
+          <a:solidFill>
+            <a:srgbClr val="F4F6FA"/>
           </a:solidFill>
           <a:ln>
             <a:noFill/>
@@ -9892,14 +10571,14 @@
         </p:nvSpPr>
         <p:spPr>
           <a:xfrm>
-            <a:off x="0" y="0"/>
-            <a:ext cx="64008" cy="438912"/>
-          </a:xfrm>
-          <a:prstGeom prst="rect">
-            <a:avLst/>
-          </a:prstGeom>
-          <a:solidFill>
-            <a:srgbClr val="0091DA"/>
+            <a:off x="9144000" y="438912"/>
+            <a:ext cx="3044952" cy="6419088"/>
+          </a:xfrm>
+          <a:prstGeom prst="rect">
+            <a:avLst/>
+          </a:prstGeom>
+          <a:solidFill>
+            <a:srgbClr val="00338D"/>
           </a:solidFill>
           <a:ln>
             <a:noFill/>
@@ -9929,14 +10608,167 @@
       </p:sp>
       <p:sp>
         <p:nvSpPr>
-          <p:cNvPr id="4" name="TextBox 3"/>
+          <p:cNvPr id="4" name="Rectangle 3"/>
+          <p:cNvSpPr/>
+          <p:nvPr/>
+        </p:nvSpPr>
+        <p:spPr>
+          <a:xfrm>
+            <a:off x="9144000" y="438912"/>
+            <a:ext cx="54864" cy="6419088"/>
+          </a:xfrm>
+          <a:prstGeom prst="rect">
+            <a:avLst/>
+          </a:prstGeom>
+          <a:solidFill>
+            <a:srgbClr val="0091DA"/>
+          </a:solidFill>
+          <a:ln>
+            <a:noFill/>
+          </a:ln>
+        </p:spPr>
+        <p:style>
+          <a:lnRef idx="1">
+            <a:schemeClr val="accent1"/>
+          </a:lnRef>
+          <a:fillRef idx="3">
+            <a:schemeClr val="accent1"/>
+          </a:fillRef>
+          <a:effectRef idx="2">
+            <a:schemeClr val="accent1"/>
+          </a:effectRef>
+          <a:fontRef idx="minor">
+            <a:schemeClr val="lt1"/>
+          </a:fontRef>
+        </p:style>
+        <p:txBody>
+          <a:bodyPr rtlCol="0" anchor="ctr"/>
+          <a:lstStyle/>
+          <a:p>
+            <a:pPr algn="ctr"/>
+          </a:p>
+        </p:txBody>
+      </p:sp>
+      <p:pic>
+        <p:nvPicPr>
+          <p:cNvPr id="5" name="Picture 4" descr="Screenshot 2026-07-08 at 2.24.14 PM.png"/>
+          <p:cNvPicPr>
+            <a:picLocks noChangeAspect="1"/>
+          </p:cNvPicPr>
+          <p:nvPr/>
+        </p:nvPicPr>
+        <p:blipFill>
+          <a:blip r:embed="rId2"/>
+          <a:stretch>
+            <a:fillRect/>
+          </a:stretch>
+        </p:blipFill>
+        <p:spPr>
+          <a:xfrm>
+            <a:off x="0" y="438912"/>
+            <a:ext cx="9144000" cy="6419088"/>
+          </a:xfrm>
+          <a:prstGeom prst="rect">
+            <a:avLst/>
+          </a:prstGeom>
+        </p:spPr>
+      </p:pic>
+      <p:sp>
+        <p:nvSpPr>
+          <p:cNvPr id="6" name="Rectangle 5"/>
+          <p:cNvSpPr/>
+          <p:nvPr/>
+        </p:nvSpPr>
+        <p:spPr>
+          <a:xfrm>
+            <a:off x="0" y="0"/>
+            <a:ext cx="12188952" cy="438912"/>
+          </a:xfrm>
+          <a:prstGeom prst="rect">
+            <a:avLst/>
+          </a:prstGeom>
+          <a:solidFill>
+            <a:srgbClr val="00338D"/>
+          </a:solidFill>
+          <a:ln>
+            <a:noFill/>
+          </a:ln>
+        </p:spPr>
+        <p:style>
+          <a:lnRef idx="1">
+            <a:schemeClr val="accent1"/>
+          </a:lnRef>
+          <a:fillRef idx="3">
+            <a:schemeClr val="accent1"/>
+          </a:fillRef>
+          <a:effectRef idx="2">
+            <a:schemeClr val="accent1"/>
+          </a:effectRef>
+          <a:fontRef idx="minor">
+            <a:schemeClr val="lt1"/>
+          </a:fontRef>
+        </p:style>
+        <p:txBody>
+          <a:bodyPr rtlCol="0" anchor="ctr"/>
+          <a:lstStyle/>
+          <a:p>
+            <a:pPr algn="ctr"/>
+          </a:p>
+        </p:txBody>
+      </p:sp>
+      <p:sp>
+        <p:nvSpPr>
+          <p:cNvPr id="7" name="Rectangle 6"/>
+          <p:cNvSpPr/>
+          <p:nvPr/>
+        </p:nvSpPr>
+        <p:spPr>
+          <a:xfrm>
+            <a:off x="0" y="0"/>
+            <a:ext cx="64008" cy="438912"/>
+          </a:xfrm>
+          <a:prstGeom prst="rect">
+            <a:avLst/>
+          </a:prstGeom>
+          <a:solidFill>
+            <a:srgbClr val="0091DA"/>
+          </a:solidFill>
+          <a:ln>
+            <a:noFill/>
+          </a:ln>
+        </p:spPr>
+        <p:style>
+          <a:lnRef idx="1">
+            <a:schemeClr val="accent1"/>
+          </a:lnRef>
+          <a:fillRef idx="3">
+            <a:schemeClr val="accent1"/>
+          </a:fillRef>
+          <a:effectRef idx="2">
+            <a:schemeClr val="accent1"/>
+          </a:effectRef>
+          <a:fontRef idx="minor">
+            <a:schemeClr val="lt1"/>
+          </a:fontRef>
+        </p:style>
+        <p:txBody>
+          <a:bodyPr rtlCol="0" anchor="ctr"/>
+          <a:lstStyle/>
+          <a:p>
+            <a:pPr algn="ctr"/>
+          </a:p>
+        </p:txBody>
+      </p:sp>
+      <p:sp>
+        <p:nvSpPr>
+          <p:cNvPr id="8" name="TextBox 7"/>
           <p:cNvSpPr txBox="1"/>
           <p:nvPr/>
         </p:nvSpPr>
         <p:spPr>
           <a:xfrm>
-            <a:off x="137160" y="64008"/>
-            <a:ext cx="2926080" cy="384048"/>
+            <a:off x="146304" y="73152"/>
+            <a:ext cx="3200400" cy="365760"/>
           </a:xfrm>
           <a:prstGeom prst="rect">
             <a:avLst/>
@@ -9962,126 +10794,16 @@
           </a:p>
         </p:txBody>
       </p:sp>
-      <p:pic>
-        <p:nvPicPr>
-          <p:cNvPr id="5" name="Picture 4" descr="Screenshot 2026-07-08 at 2.24.14 PM.png"/>
-          <p:cNvPicPr>
-            <a:picLocks noChangeAspect="1"/>
-          </p:cNvPicPr>
-          <p:nvPr/>
-        </p:nvPicPr>
-        <p:blipFill>
-          <a:blip r:embed="rId2"/>
-          <a:stretch>
-            <a:fillRect/>
-          </a:stretch>
-        </p:blipFill>
-        <p:spPr>
-          <a:xfrm>
-            <a:off x="0" y="438912"/>
-            <a:ext cx="9144000" cy="6419088"/>
-          </a:xfrm>
-          <a:prstGeom prst="rect">
-            <a:avLst/>
-          </a:prstGeom>
-        </p:spPr>
-      </p:pic>
-      <p:sp>
-        <p:nvSpPr>
-          <p:cNvPr id="6" name="Rectangle 5"/>
-          <p:cNvSpPr/>
-          <p:nvPr/>
-        </p:nvSpPr>
-        <p:spPr>
-          <a:xfrm>
-            <a:off x="9144000" y="438912"/>
-            <a:ext cx="3044952" cy="6419088"/>
-          </a:xfrm>
-          <a:prstGeom prst="rect">
-            <a:avLst/>
-          </a:prstGeom>
-          <a:solidFill>
-            <a:srgbClr val="051835"/>
-          </a:solidFill>
-          <a:ln>
-            <a:noFill/>
-          </a:ln>
-        </p:spPr>
-        <p:style>
-          <a:lnRef idx="1">
-            <a:schemeClr val="accent1"/>
-          </a:lnRef>
-          <a:fillRef idx="3">
-            <a:schemeClr val="accent1"/>
-          </a:fillRef>
-          <a:effectRef idx="2">
-            <a:schemeClr val="accent1"/>
-          </a:effectRef>
-          <a:fontRef idx="minor">
-            <a:schemeClr val="lt1"/>
-          </a:fontRef>
-        </p:style>
-        <p:txBody>
-          <a:bodyPr rtlCol="0" anchor="ctr"/>
-          <a:lstStyle/>
-          <a:p>
-            <a:pPr algn="ctr"/>
-          </a:p>
-        </p:txBody>
-      </p:sp>
-      <p:sp>
-        <p:nvSpPr>
-          <p:cNvPr id="7" name="Rectangle 6"/>
-          <p:cNvSpPr/>
-          <p:nvPr/>
-        </p:nvSpPr>
-        <p:spPr>
-          <a:xfrm>
-            <a:off x="9144000" y="438912"/>
-            <a:ext cx="45720" cy="6419088"/>
-          </a:xfrm>
-          <a:prstGeom prst="rect">
-            <a:avLst/>
-          </a:prstGeom>
-          <a:solidFill>
-            <a:srgbClr val="0091DA"/>
-          </a:solidFill>
-          <a:ln>
-            <a:noFill/>
-          </a:ln>
-        </p:spPr>
-        <p:style>
-          <a:lnRef idx="1">
-            <a:schemeClr val="accent1"/>
-          </a:lnRef>
-          <a:fillRef idx="3">
-            <a:schemeClr val="accent1"/>
-          </a:fillRef>
-          <a:effectRef idx="2">
-            <a:schemeClr val="accent1"/>
-          </a:effectRef>
-          <a:fontRef idx="minor">
-            <a:schemeClr val="lt1"/>
-          </a:fontRef>
-        </p:style>
-        <p:txBody>
-          <a:bodyPr rtlCol="0" anchor="ctr"/>
-          <a:lstStyle/>
-          <a:p>
-            <a:pPr algn="ctr"/>
-          </a:p>
-        </p:txBody>
-      </p:sp>
-      <p:sp>
-        <p:nvSpPr>
-          <p:cNvPr id="8" name="TextBox 7"/>
+      <p:sp>
+        <p:nvSpPr>
+          <p:cNvPr id="9" name="TextBox 8"/>
           <p:cNvSpPr txBox="1"/>
           <p:nvPr/>
         </p:nvSpPr>
         <p:spPr>
           <a:xfrm>
-            <a:off x="9326880" y="640080"/>
-            <a:ext cx="2816352" cy="594360"/>
+            <a:off x="9363456" y="713232"/>
+            <a:ext cx="2606040" cy="713232"/>
           </a:xfrm>
           <a:prstGeom prst="rect">
             <a:avLst/>
@@ -10102,28 +10824,39 @@
                 </a:solidFill>
                 <a:latin typeface="Calibri"/>
               </a:rPr>
-              <a:t>Vendor
-Performance</a:t>
-            </a:r>
-          </a:p>
-        </p:txBody>
-      </p:sp>
-      <p:sp>
-        <p:nvSpPr>
-          <p:cNvPr id="9" name="Rectangle 8"/>
+              <a:t>Vendor</a:t>
+            </a:r>
+          </a:p>
+          <a:p>
+            <a:pPr algn="l"/>
+            <a:r>
+              <a:rPr sz="1500" b="1" i="0">
+                <a:solidFill>
+                  <a:srgbClr val="FFFFFF"/>
+                </a:solidFill>
+                <a:latin typeface="Calibri"/>
+              </a:rPr>
+              <a:t>Performance</a:t>
+            </a:r>
+          </a:p>
+        </p:txBody>
+      </p:sp>
+      <p:sp>
+        <p:nvSpPr>
+          <p:cNvPr id="10" name="Rectangle 9"/>
           <p:cNvSpPr/>
           <p:nvPr/>
         </p:nvSpPr>
         <p:spPr>
           <a:xfrm>
-            <a:off x="9326880" y="1307592"/>
-            <a:ext cx="2679192" cy="237744"/>
-          </a:xfrm>
-          <a:prstGeom prst="rect">
-            <a:avLst/>
-          </a:prstGeom>
-          <a:solidFill>
-            <a:srgbClr val="005EB8"/>
+            <a:off x="9363456" y="1463040"/>
+            <a:ext cx="2606040" cy="32004"/>
+          </a:xfrm>
+          <a:prstGeom prst="rect">
+            <a:avLst/>
+          </a:prstGeom>
+          <a:solidFill>
+            <a:srgbClr val="0091DA"/>
           </a:solidFill>
           <a:ln>
             <a:noFill/>
@@ -10153,14 +10886,14 @@
       </p:sp>
       <p:sp>
         <p:nvSpPr>
-          <p:cNvPr id="10" name="TextBox 9"/>
+          <p:cNvPr id="11" name="TextBox 10"/>
           <p:cNvSpPr txBox="1"/>
           <p:nvPr/>
         </p:nvSpPr>
         <p:spPr>
           <a:xfrm>
-            <a:off x="9326880" y="1325880"/>
-            <a:ext cx="2679192" cy="219456"/>
+            <a:off x="9363456" y="1591056"/>
+            <a:ext cx="2606040" cy="256032"/>
           </a:xfrm>
           <a:prstGeom prst="rect">
             <a:avLst/>
@@ -10175,27 +10908,27 @@
           <a:p>
             <a:pPr algn="l"/>
             <a:r>
-              <a:rPr sz="800" b="1" i="0">
+              <a:rPr sz="850" b="0" i="1">
                 <a:solidFill>
-                  <a:srgbClr val="FFFFFF"/>
+                  <a:srgbClr val="0091DA"/>
                 </a:solidFill>
                 <a:latin typeface="Calibri"/>
               </a:rPr>
-              <a:t>  continued — Spend &amp; Segmentation</a:t>
-            </a:r>
-          </a:p>
-        </p:txBody>
-      </p:sp>
-      <p:sp>
-        <p:nvSpPr>
-          <p:cNvPr id="11" name="Rectangle 10"/>
+              <a:t>continued — Spend &amp; Segmentation</a:t>
+            </a:r>
+          </a:p>
+        </p:txBody>
+      </p:sp>
+      <p:sp>
+        <p:nvSpPr>
+          <p:cNvPr id="12" name="Rectangle 11"/>
           <p:cNvSpPr/>
           <p:nvPr/>
         </p:nvSpPr>
         <p:spPr>
           <a:xfrm>
-            <a:off x="9345168" y="1746504"/>
-            <a:ext cx="54864" cy="54864"/>
+            <a:off x="9363456" y="2075688"/>
+            <a:ext cx="45720" cy="45720"/>
           </a:xfrm>
           <a:prstGeom prst="rect">
             <a:avLst/>
@@ -10231,14 +10964,14 @@
       </p:sp>
       <p:sp>
         <p:nvSpPr>
-          <p:cNvPr id="12" name="TextBox 11"/>
+          <p:cNvPr id="13" name="TextBox 12"/>
           <p:cNvSpPr txBox="1"/>
           <p:nvPr/>
         </p:nvSpPr>
         <p:spPr>
           <a:xfrm>
-            <a:off x="9491472" y="1673352"/>
-            <a:ext cx="2587752" cy="685800"/>
+            <a:off x="9546336" y="1975104"/>
+            <a:ext cx="2423160" cy="713232"/>
           </a:xfrm>
           <a:prstGeom prst="rect">
             <a:avLst/>
@@ -10253,7 +10986,7 @@
           <a:p>
             <a:pPr algn="l"/>
             <a:r>
-              <a:rPr sz="1000" b="0" i="0">
+              <a:rPr sz="950" b="0" i="0">
                 <a:solidFill>
                   <a:srgbClr val="BBD4FF"/>
                 </a:solidFill>
@@ -10266,14 +10999,14 @@
       </p:sp>
       <p:sp>
         <p:nvSpPr>
-          <p:cNvPr id="13" name="Rectangle 12"/>
+          <p:cNvPr id="14" name="Rectangle 13"/>
           <p:cNvSpPr/>
           <p:nvPr/>
         </p:nvSpPr>
         <p:spPr>
           <a:xfrm>
-            <a:off x="9345168" y="2551176"/>
-            <a:ext cx="54864" cy="54864"/>
+            <a:off x="9363456" y="2852928"/>
+            <a:ext cx="45720" cy="45720"/>
           </a:xfrm>
           <a:prstGeom prst="rect">
             <a:avLst/>
@@ -10309,14 +11042,14 @@
       </p:sp>
       <p:sp>
         <p:nvSpPr>
-          <p:cNvPr id="14" name="TextBox 13"/>
+          <p:cNvPr id="15" name="TextBox 14"/>
           <p:cNvSpPr txBox="1"/>
           <p:nvPr/>
         </p:nvSpPr>
         <p:spPr>
           <a:xfrm>
-            <a:off x="9491472" y="2478024"/>
-            <a:ext cx="2587752" cy="685800"/>
+            <a:off x="9546336" y="2752344"/>
+            <a:ext cx="2423160" cy="713232"/>
           </a:xfrm>
           <a:prstGeom prst="rect">
             <a:avLst/>
@@ -10331,7 +11064,7 @@
           <a:p>
             <a:pPr algn="l"/>
             <a:r>
-              <a:rPr sz="1000" b="0" i="0">
+              <a:rPr sz="950" b="0" i="0">
                 <a:solidFill>
                   <a:srgbClr val="BBD4FF"/>
                 </a:solidFill>
@@ -10344,14 +11077,14 @@
       </p:sp>
       <p:sp>
         <p:nvSpPr>
-          <p:cNvPr id="15" name="Rectangle 14"/>
+          <p:cNvPr id="16" name="Rectangle 15"/>
           <p:cNvSpPr/>
           <p:nvPr/>
         </p:nvSpPr>
         <p:spPr>
           <a:xfrm>
-            <a:off x="9345168" y="3355848"/>
-            <a:ext cx="54864" cy="54864"/>
+            <a:off x="9363456" y="3630168"/>
+            <a:ext cx="45720" cy="45720"/>
           </a:xfrm>
           <a:prstGeom prst="rect">
             <a:avLst/>
@@ -10387,14 +11120,14 @@
       </p:sp>
       <p:sp>
         <p:nvSpPr>
-          <p:cNvPr id="16" name="TextBox 15"/>
+          <p:cNvPr id="17" name="TextBox 16"/>
           <p:cNvSpPr txBox="1"/>
           <p:nvPr/>
         </p:nvSpPr>
         <p:spPr>
           <a:xfrm>
-            <a:off x="9491472" y="3282696"/>
-            <a:ext cx="2587752" cy="685800"/>
+            <a:off x="9546336" y="3529584"/>
+            <a:ext cx="2423160" cy="713232"/>
           </a:xfrm>
           <a:prstGeom prst="rect">
             <a:avLst/>
@@ -10409,7 +11142,7 @@
           <a:p>
             <a:pPr algn="l"/>
             <a:r>
-              <a:rPr sz="1000" b="0" i="0">
+              <a:rPr sz="950" b="0" i="0">
                 <a:solidFill>
                   <a:srgbClr val="BBD4FF"/>
                 </a:solidFill>
@@ -10447,13 +11180,13 @@
         <p:spPr>
           <a:xfrm>
             <a:off x="0" y="0"/>
-            <a:ext cx="12188952" cy="438912"/>
-          </a:xfrm>
-          <a:prstGeom prst="rect">
-            <a:avLst/>
-          </a:prstGeom>
-          <a:solidFill>
-            <a:srgbClr val="00338D"/>
+            <a:ext cx="12188952" cy="6858000"/>
+          </a:xfrm>
+          <a:prstGeom prst="rect">
+            <a:avLst/>
+          </a:prstGeom>
+          <a:solidFill>
+            <a:srgbClr val="051835"/>
           </a:solidFill>
           <a:ln>
             <a:noFill/>
@@ -10489,14 +11222,14 @@
         </p:nvSpPr>
         <p:spPr>
           <a:xfrm>
-            <a:off x="0" y="0"/>
-            <a:ext cx="64008" cy="438912"/>
-          </a:xfrm>
-          <a:prstGeom prst="rect">
-            <a:avLst/>
-          </a:prstGeom>
-          <a:solidFill>
-            <a:srgbClr val="0091DA"/>
+            <a:off x="0" y="438912"/>
+            <a:ext cx="3044952" cy="6419088"/>
+          </a:xfrm>
+          <a:prstGeom prst="rect">
+            <a:avLst/>
+          </a:prstGeom>
+          <a:solidFill>
+            <a:srgbClr val="00338D"/>
           </a:solidFill>
           <a:ln>
             <a:noFill/>
@@ -10526,36 +11259,44 @@
       </p:sp>
       <p:sp>
         <p:nvSpPr>
-          <p:cNvPr id="4" name="TextBox 3"/>
-          <p:cNvSpPr txBox="1"/>
-          <p:nvPr/>
-        </p:nvSpPr>
-        <p:spPr>
-          <a:xfrm>
-            <a:off x="137160" y="64008"/>
-            <a:ext cx="2926080" cy="384048"/>
-          </a:xfrm>
-          <a:prstGeom prst="rect">
-            <a:avLst/>
-          </a:prstGeom>
-          <a:noFill/>
-        </p:spPr>
-        <p:txBody>
-          <a:bodyPr wrap="square">
-            <a:spAutoFit/>
-          </a:bodyPr>
-          <a:lstStyle/>
-          <a:p>
-            <a:pPr algn="l"/>
-            <a:r>
-              <a:rPr sz="1100" b="1" i="0">
-                <a:solidFill>
-                  <a:srgbClr val="0091DA"/>
-                </a:solidFill>
-                <a:latin typeface="Calibri"/>
-              </a:rPr>
-              <a:t>KPMG  IntelliSource</a:t>
-            </a:r>
+          <p:cNvPr id="4" name="Rectangle 3"/>
+          <p:cNvSpPr/>
+          <p:nvPr/>
+        </p:nvSpPr>
+        <p:spPr>
+          <a:xfrm>
+            <a:off x="2990088" y="438912"/>
+            <a:ext cx="54864" cy="6419088"/>
+          </a:xfrm>
+          <a:prstGeom prst="rect">
+            <a:avLst/>
+          </a:prstGeom>
+          <a:solidFill>
+            <a:srgbClr val="8F7326"/>
+          </a:solidFill>
+          <a:ln>
+            <a:noFill/>
+          </a:ln>
+        </p:spPr>
+        <p:style>
+          <a:lnRef idx="1">
+            <a:schemeClr val="accent1"/>
+          </a:lnRef>
+          <a:fillRef idx="3">
+            <a:schemeClr val="accent1"/>
+          </a:fillRef>
+          <a:effectRef idx="2">
+            <a:schemeClr val="accent1"/>
+          </a:effectRef>
+          <a:fontRef idx="minor">
+            <a:schemeClr val="lt1"/>
+          </a:fontRef>
+        </p:style>
+        <p:txBody>
+          <a:bodyPr rtlCol="0" anchor="ctr"/>
+          <a:lstStyle/>
+          <a:p>
+            <a:pPr algn="ctr"/>
           </a:p>
         </p:txBody>
       </p:sp>
@@ -10575,7 +11316,7 @@
         </p:blipFill>
         <p:spPr>
           <a:xfrm>
-            <a:off x="0" y="438912"/>
+            <a:off x="3044952" y="438912"/>
             <a:ext cx="9144000" cy="6419088"/>
           </a:xfrm>
           <a:prstGeom prst="rect">
@@ -10591,14 +11332,14 @@
         </p:nvSpPr>
         <p:spPr>
           <a:xfrm>
-            <a:off x="9144000" y="438912"/>
-            <a:ext cx="3044952" cy="6419088"/>
-          </a:xfrm>
-          <a:prstGeom prst="rect">
-            <a:avLst/>
-          </a:prstGeom>
-          <a:solidFill>
-            <a:srgbClr val="051835"/>
+            <a:off x="0" y="0"/>
+            <a:ext cx="12188952" cy="438912"/>
+          </a:xfrm>
+          <a:prstGeom prst="rect">
+            <a:avLst/>
+          </a:prstGeom>
+          <a:solidFill>
+            <a:srgbClr val="021028"/>
           </a:solidFill>
           <a:ln>
             <a:noFill/>
@@ -10634,14 +11375,14 @@
         </p:nvSpPr>
         <p:spPr>
           <a:xfrm>
-            <a:off x="9144000" y="438912"/>
-            <a:ext cx="45720" cy="6419088"/>
-          </a:xfrm>
-          <a:prstGeom prst="rect">
-            <a:avLst/>
-          </a:prstGeom>
-          <a:solidFill>
-            <a:srgbClr val="0091DA"/>
+            <a:off x="0" y="0"/>
+            <a:ext cx="64008" cy="438912"/>
+          </a:xfrm>
+          <a:prstGeom prst="rect">
+            <a:avLst/>
+          </a:prstGeom>
+          <a:solidFill>
+            <a:srgbClr val="8F7326"/>
           </a:solidFill>
           <a:ln>
             <a:noFill/>
@@ -10677,8 +11418,43 @@
         </p:nvSpPr>
         <p:spPr>
           <a:xfrm>
-            <a:off x="9326880" y="640080"/>
-            <a:ext cx="2816352" cy="594360"/>
+            <a:off x="146304" y="73152"/>
+            <a:ext cx="3200400" cy="365760"/>
+          </a:xfrm>
+          <a:prstGeom prst="rect">
+            <a:avLst/>
+          </a:prstGeom>
+          <a:noFill/>
+        </p:spPr>
+        <p:txBody>
+          <a:bodyPr wrap="square">
+            <a:spAutoFit/>
+          </a:bodyPr>
+          <a:lstStyle/>
+          <a:p>
+            <a:pPr algn="l"/>
+            <a:r>
+              <a:rPr sz="1100" b="1" i="0">
+                <a:solidFill>
+                  <a:srgbClr val="8F7326"/>
+                </a:solidFill>
+                <a:latin typeface="Calibri"/>
+              </a:rPr>
+              <a:t>KPMG  IntelliSource</a:t>
+            </a:r>
+          </a:p>
+        </p:txBody>
+      </p:sp>
+      <p:sp>
+        <p:nvSpPr>
+          <p:cNvPr id="9" name="TextBox 8"/>
+          <p:cNvSpPr txBox="1"/>
+          <p:nvPr/>
+        </p:nvSpPr>
+        <p:spPr>
+          <a:xfrm>
+            <a:off x="219456" y="713232"/>
+            <a:ext cx="2606040" cy="713232"/>
           </a:xfrm>
           <a:prstGeom prst="rect">
             <a:avLst/>
@@ -10699,28 +11475,39 @@
                 </a:solidFill>
                 <a:latin typeface="Calibri"/>
               </a:rPr>
-              <a:t>CAPEX / OPEX
-Dashboard</a:t>
-            </a:r>
-          </a:p>
-        </p:txBody>
-      </p:sp>
-      <p:sp>
-        <p:nvSpPr>
-          <p:cNvPr id="9" name="Rectangle 8"/>
+              <a:t>CAPEX / OPEX</a:t>
+            </a:r>
+          </a:p>
+          <a:p>
+            <a:pPr algn="l"/>
+            <a:r>
+              <a:rPr sz="1500" b="1" i="0">
+                <a:solidFill>
+                  <a:srgbClr val="FFFFFF"/>
+                </a:solidFill>
+                <a:latin typeface="Calibri"/>
+              </a:rPr>
+              <a:t>Dashboard</a:t>
+            </a:r>
+          </a:p>
+        </p:txBody>
+      </p:sp>
+      <p:sp>
+        <p:nvSpPr>
+          <p:cNvPr id="10" name="Rectangle 9"/>
           <p:cNvSpPr/>
           <p:nvPr/>
         </p:nvSpPr>
         <p:spPr>
           <a:xfrm>
-            <a:off x="9345168" y="1472184"/>
-            <a:ext cx="54864" cy="54864"/>
-          </a:xfrm>
-          <a:prstGeom prst="rect">
-            <a:avLst/>
-          </a:prstGeom>
-          <a:solidFill>
-            <a:srgbClr val="0091DA"/>
+            <a:off x="219456" y="1463040"/>
+            <a:ext cx="2606040" cy="32004"/>
+          </a:xfrm>
+          <a:prstGeom prst="rect">
+            <a:avLst/>
+          </a:prstGeom>
+          <a:solidFill>
+            <a:srgbClr val="8F7326"/>
           </a:solidFill>
           <a:ln>
             <a:noFill/>
@@ -10750,14 +11537,57 @@
       </p:sp>
       <p:sp>
         <p:nvSpPr>
-          <p:cNvPr id="10" name="TextBox 9"/>
+          <p:cNvPr id="11" name="Rectangle 10"/>
+          <p:cNvSpPr/>
+          <p:nvPr/>
+        </p:nvSpPr>
+        <p:spPr>
+          <a:xfrm>
+            <a:off x="219456" y="1856232"/>
+            <a:ext cx="45720" cy="45720"/>
+          </a:xfrm>
+          <a:prstGeom prst="rect">
+            <a:avLst/>
+          </a:prstGeom>
+          <a:solidFill>
+            <a:srgbClr val="8F7326"/>
+          </a:solidFill>
+          <a:ln>
+            <a:noFill/>
+          </a:ln>
+        </p:spPr>
+        <p:style>
+          <a:lnRef idx="1">
+            <a:schemeClr val="accent1"/>
+          </a:lnRef>
+          <a:fillRef idx="3">
+            <a:schemeClr val="accent1"/>
+          </a:fillRef>
+          <a:effectRef idx="2">
+            <a:schemeClr val="accent1"/>
+          </a:effectRef>
+          <a:fontRef idx="minor">
+            <a:schemeClr val="lt1"/>
+          </a:fontRef>
+        </p:style>
+        <p:txBody>
+          <a:bodyPr rtlCol="0" anchor="ctr"/>
+          <a:lstStyle/>
+          <a:p>
+            <a:pPr algn="ctr"/>
+          </a:p>
+        </p:txBody>
+      </p:sp>
+      <p:sp>
+        <p:nvSpPr>
+          <p:cNvPr id="12" name="TextBox 11"/>
           <p:cNvSpPr txBox="1"/>
           <p:nvPr/>
         </p:nvSpPr>
         <p:spPr>
           <a:xfrm>
-            <a:off x="9491472" y="1399032"/>
-            <a:ext cx="2587752" cy="685800"/>
+            <a:off x="402336" y="1755648"/>
+            <a:ext cx="2423160" cy="713232"/>
           </a:xfrm>
           <a:prstGeom prst="rect">
             <a:avLst/>
@@ -10772,7 +11602,7 @@
           <a:p>
             <a:pPr algn="l"/>
             <a:r>
-              <a:rPr sz="1000" b="0" i="0">
+              <a:rPr sz="950" b="0" i="0">
                 <a:solidFill>
                   <a:srgbClr val="BBD4FF"/>
                 </a:solidFill>
@@ -10785,20 +11615,20 @@
       </p:sp>
       <p:sp>
         <p:nvSpPr>
-          <p:cNvPr id="11" name="Rectangle 10"/>
+          <p:cNvPr id="13" name="Rectangle 12"/>
           <p:cNvSpPr/>
           <p:nvPr/>
         </p:nvSpPr>
         <p:spPr>
           <a:xfrm>
-            <a:off x="9345168" y="2276856"/>
-            <a:ext cx="54864" cy="54864"/>
-          </a:xfrm>
-          <a:prstGeom prst="rect">
-            <a:avLst/>
-          </a:prstGeom>
-          <a:solidFill>
-            <a:srgbClr val="0091DA"/>
+            <a:off x="219456" y="2633472"/>
+            <a:ext cx="45720" cy="45720"/>
+          </a:xfrm>
+          <a:prstGeom prst="rect">
+            <a:avLst/>
+          </a:prstGeom>
+          <a:solidFill>
+            <a:srgbClr val="8F7326"/>
           </a:solidFill>
           <a:ln>
             <a:noFill/>
@@ -10828,14 +11658,14 @@
       </p:sp>
       <p:sp>
         <p:nvSpPr>
-          <p:cNvPr id="12" name="TextBox 11"/>
+          <p:cNvPr id="14" name="TextBox 13"/>
           <p:cNvSpPr txBox="1"/>
           <p:nvPr/>
         </p:nvSpPr>
         <p:spPr>
           <a:xfrm>
-            <a:off x="9491472" y="2203704"/>
-            <a:ext cx="2587752" cy="685800"/>
+            <a:off x="402336" y="2532888"/>
+            <a:ext cx="2423160" cy="713232"/>
           </a:xfrm>
           <a:prstGeom prst="rect">
             <a:avLst/>
@@ -10850,7 +11680,7 @@
           <a:p>
             <a:pPr algn="l"/>
             <a:r>
-              <a:rPr sz="1000" b="0" i="0">
+              <a:rPr sz="950" b="0" i="0">
                 <a:solidFill>
                   <a:srgbClr val="BBD4FF"/>
                 </a:solidFill>
@@ -10863,20 +11693,20 @@
       </p:sp>
       <p:sp>
         <p:nvSpPr>
-          <p:cNvPr id="13" name="Rectangle 12"/>
+          <p:cNvPr id="15" name="Rectangle 14"/>
           <p:cNvSpPr/>
           <p:nvPr/>
         </p:nvSpPr>
         <p:spPr>
           <a:xfrm>
-            <a:off x="9345168" y="3081528"/>
-            <a:ext cx="54864" cy="54864"/>
-          </a:xfrm>
-          <a:prstGeom prst="rect">
-            <a:avLst/>
-          </a:prstGeom>
-          <a:solidFill>
-            <a:srgbClr val="0091DA"/>
+            <a:off x="219456" y="3410712"/>
+            <a:ext cx="45720" cy="45720"/>
+          </a:xfrm>
+          <a:prstGeom prst="rect">
+            <a:avLst/>
+          </a:prstGeom>
+          <a:solidFill>
+            <a:srgbClr val="8F7326"/>
           </a:solidFill>
           <a:ln>
             <a:noFill/>
@@ -10906,14 +11736,14 @@
       </p:sp>
       <p:sp>
         <p:nvSpPr>
-          <p:cNvPr id="14" name="TextBox 13"/>
+          <p:cNvPr id="16" name="TextBox 15"/>
           <p:cNvSpPr txBox="1"/>
           <p:nvPr/>
         </p:nvSpPr>
         <p:spPr>
           <a:xfrm>
-            <a:off x="9491472" y="3008376"/>
-            <a:ext cx="2587752" cy="685800"/>
+            <a:off x="402336" y="3310128"/>
+            <a:ext cx="2423160" cy="713232"/>
           </a:xfrm>
           <a:prstGeom prst="rect">
             <a:avLst/>
@@ -10928,33 +11758,33 @@
           <a:p>
             <a:pPr algn="l"/>
             <a:r>
-              <a:rPr sz="1000" b="0" i="0">
+              <a:rPr sz="950" b="0" i="0">
                 <a:solidFill>
                   <a:srgbClr val="BBD4FF"/>
                 </a:solidFill>
                 <a:latin typeface="Calibri"/>
               </a:rPr>
-              <a:t>Tracks pending deliveries for both capital and operational orders</a:t>
-            </a:r>
-          </a:p>
-        </p:txBody>
-      </p:sp>
-      <p:sp>
-        <p:nvSpPr>
-          <p:cNvPr id="15" name="Rectangle 14"/>
+              <a:t>Tracks pending deliveries across both budget types</a:t>
+            </a:r>
+          </a:p>
+        </p:txBody>
+      </p:sp>
+      <p:sp>
+        <p:nvSpPr>
+          <p:cNvPr id="17" name="Rectangle 16"/>
           <p:cNvSpPr/>
           <p:nvPr/>
         </p:nvSpPr>
         <p:spPr>
           <a:xfrm>
-            <a:off x="9345168" y="3886200"/>
-            <a:ext cx="54864" cy="54864"/>
-          </a:xfrm>
-          <a:prstGeom prst="rect">
-            <a:avLst/>
-          </a:prstGeom>
-          <a:solidFill>
-            <a:srgbClr val="0091DA"/>
+            <a:off x="219456" y="4187952"/>
+            <a:ext cx="45720" cy="45720"/>
+          </a:xfrm>
+          <a:prstGeom prst="rect">
+            <a:avLst/>
+          </a:prstGeom>
+          <a:solidFill>
+            <a:srgbClr val="8F7326"/>
           </a:solidFill>
           <a:ln>
             <a:noFill/>
@@ -10984,14 +11814,14 @@
       </p:sp>
       <p:sp>
         <p:nvSpPr>
-          <p:cNvPr id="16" name="TextBox 15"/>
+          <p:cNvPr id="18" name="TextBox 17"/>
           <p:cNvSpPr txBox="1"/>
           <p:nvPr/>
         </p:nvSpPr>
         <p:spPr>
           <a:xfrm>
-            <a:off x="9491472" y="3813048"/>
-            <a:ext cx="2587752" cy="685800"/>
+            <a:off x="402336" y="4087368"/>
+            <a:ext cx="2423160" cy="713232"/>
           </a:xfrm>
           <a:prstGeom prst="rect">
             <a:avLst/>
@@ -11006,13 +11836,13 @@
           <a:p>
             <a:pPr algn="l"/>
             <a:r>
-              <a:rPr sz="1000" b="0" i="0">
+              <a:rPr sz="950" b="0" i="0">
                 <a:solidFill>
                   <a:srgbClr val="BBD4FF"/>
                 </a:solidFill>
                 <a:latin typeface="Calibri"/>
               </a:rPr>
-              <a:t>Drill down by department to see where budget is concentrated</a:t>
+              <a:t>Drill down by department to see where budget concentrates</a:t>
             </a:r>
           </a:p>
         </p:txBody>
